--- a/report/MedLift3D_Defense.pptx
+++ b/report/MedLift3D_Defense.pptx
@@ -25,6 +25,7 @@
     <p:sldId id="273" r:id="rId25"/>
     <p:sldId id="274" r:id="rId26"/>
     <p:sldId id="275" r:id="rId27"/>
+    <p:sldId id="276" r:id="rId28"/>
   </p:sldIdLst>
   <p:sldSz cx="12192000" cy="6858000" type="screen4x3"/>
   <p:notesSz cx="6858000" cy="9144000"/>
@@ -661,7 +662,7 @@
           <a:lstStyle/>
           <a:p>
             <a:r>
-              <a:t>(0:20) Now the results, all on held-out test patients. The short version: every component did what it was designed to do, but the final measurements did not reach the goal. We will show both sides honestly, and then explain why.</a:t>
+              <a:t>(0:40) Here is what the reconstruction looks like in 3D, from the application on two test nodules. The surface is our reconstructed nodule, coloured by how much the eight diffusion samples disagree: green where they agree, red where they do not. The grey shell is the radiologists' nodule, the ground truth. On the left the reconstruction fills the true nodule well, and the uncertainty sits at the front and back, the depth direction, exactly where tomosynthesis is blind. On the right the reconstruction is clearly smaller than the truth. This shrinkage is the main failure we will come back to in the results.</a:t>
             </a:r>
           </a:p>
         </p:txBody>
@@ -731,7 +732,7 @@
           <a:lstStyle/>
           <a:p>
             <a:r>
-              <a:t>(0:50) First, what worked. The diffusion prior improved nodule-region image quality on held-out patients by 3.35 dB. The learned detector is 17 times better than a training-free detector by the standard CPM score. The conformal intervals reached 95 percent coverage on the test patients, against a 90 percent target, while the raw spread of the samples covered only 28 percent; that is why calibration is necessary. And calibrated probabilities cut the Brier score for "is this nodule at least 100 cubic millimetres" from 0.54 to 0.17.</a:t>
+              <a:t>(0:20) Now the results, all on held-out test patients. The short version: every component did what it was designed to do, but the final measurements did not reach the goal. We will show both sides honestly, and then explain why.</a:t>
             </a:r>
           </a:p>
         </p:txBody>
@@ -801,7 +802,7 @@
           <a:lstStyle/>
           <a:p>
             <a:r>
-              <a:t>(0:55) Now what did not work. This chart is the median volume error on the 74 test nodules; lower is better and a failed measurement counts as 100 percent. Our full method, in orange, has 94.6 percent, no better than the physics-only methods at 88 to 91. The diffusion prior alone has the lowest error, 74.5, but it underestimates by 58 percent. So H1, mass more accurate than volume, held only for physics-only Gaussians, and H2 is not supported. No method is clinically usable yet. The key lesson for medical generative AI: the method with the best-looking images still underestimated volume by 58 percent. Image quality is not measurement accuracy.</a:t>
+              <a:t>(0:50) First, what worked. The diffusion prior improved nodule-region image quality on held-out patients by 3.35 dB. The learned detector is 17 times better than a training-free detector by the standard CPM score. The conformal intervals reached 95 percent coverage on the test patients, against a 90 percent target, while the raw spread of the samples covered only 28 percent; that is why calibration is necessary. And calibrated probabilities cut the Brier score for "is this nodule at least 100 cubic millimetres" from 0.54 to 0.17.</a:t>
             </a:r>
           </a:p>
         </p:txBody>
@@ -871,7 +872,7 @@
           <a:lstStyle/>
           <a:p>
             <a:r>
-              <a:t>(0:50) For uncertainty, the conformal guarantee held in practice: 95 to 96 percent coverage for a 90 percent target. But the intervals were not useful. When a method finds nothing at the click, the measurement is zero, its log error is infinite, and with about a quarter of calibration nodules failing, the conformal quantile becomes infinite. The calibrated category probabilities did help at the 100 cubic millimetre threshold, Brier 0.54 to 0.17, but not at 300. And an important finding: the spread of the eight samples is negatively correlated with the error, minus 0.52. The samples agree most when they all erase the same faint nodule, so raw spread is not a trustworthy uncertainty.</a:t>
+              <a:t>(0:55) Now what did not work. This chart is the median volume error on the 74 test nodules; lower is better and a failed measurement counts as 100 percent. Our full method, in orange, has 94.6 percent, no better than the physics-only methods at 88 to 91. The diffusion prior alone has the lowest error, 74.5, but it underestimates by 58 percent. So H1, mass more accurate than volume, held only for physics-only Gaussians, and H2 is not supported. No method is clinically usable yet. The key lesson for medical generative AI: the method with the best-looking images still underestimated volume by 58 percent. Image quality is not measurement accuracy.</a:t>
             </a:r>
           </a:p>
         </p:txBody>
@@ -941,7 +942,7 @@
           <a:lstStyle/>
           <a:p>
             <a:r>
-              <a:t>(0:50) Explainability. Using a conjugate-gradient null-space decomposition we split every 3D result into the part the fifteen X-rays actually measured, the seen part, and the part they cannot see, which only the prior can supply. The table of numbers on the right is the result over 30 test nodules. Only 0.3 percent of a nodule's mass is in the unseen part, which confirms our physics argument: the X-rays do measure mass. The prior's unseen content has a positive skill of 0.22 against the real CT, so it recovers missing depth rather than inventing structure; H6 is supported. But after Gaussian fitting the skill falls to 0.09, so the Gaussian step throws away much of what the prior recovered. That points directly to a fix.</a:t>
+              <a:t>(0:50) For uncertainty, the conformal guarantee held in practice: 95 to 96 percent coverage for a 90 percent target. But the intervals were not useful. When a method finds nothing at the click, the measurement is zero, its log error is infinite, and with about a quarter of calibration nodules failing, the conformal quantile becomes infinite. The calibrated category probabilities did help at the 100 cubic millimetre threshold, Brier 0.54 to 0.17, but not at 300. And an important finding: the spread of the eight samples is negatively correlated with the error, minus 0.52. The samples agree most when they all erase the same faint nodule, so raw spread is not a trustworthy uncertainty.</a:t>
             </a:r>
           </a:p>
         </p:txBody>
@@ -1011,7 +1012,7 @@
           <a:lstStyle/>
           <a:p>
             <a:r>
-              <a:t>(0:35) Putting it together. H1, H2 and H4, the measurement hypotheses, were not supported. H3 was valid but not useful. H5 was partly supported. H6, that the prior recovers rather than invents, was supported. On growth, for the physics-only prism reconstruction mass doubling time was slightly better than volume, 50 versus 48 percent, in line with our mass-first argument, but 40 pairs are too few to be conclusive.</a:t>
+              <a:t>(0:50) Explainability. Using a conjugate-gradient null-space decomposition we split every 3D result into the part the fifteen X-rays actually measured, the seen part, and the part they cannot see, which only the prior can supply. The table of numbers on the right is the result over 30 test nodules. Only 0.3 percent of a nodule's mass is in the unseen part, which confirms our physics argument: the X-rays do measure mass. The prior's unseen content has a positive skill of 0.22 against the real CT, so it recovers missing depth rather than inventing structure; H6 is supported. But after Gaussian fitting the skill falls to 0.09, so the Gaussian step throws away much of what the prior recovered. That points directly to a fix.</a:t>
             </a:r>
           </a:p>
         </p:txBody>
@@ -1081,7 +1082,7 @@
           <a:lstStyle/>
           <a:p>
             <a:r>
-              <a:t>(0:55) Why did it fail? Our analysis points to three causes, and each suggests a fix. First, the prior shrinks faint nodules: it was not told a nodule is present at the click, so for faint ones it draws plausible normal lung. Here is a 6.8 millimetre nodule: clear in CT on the left, almost erased by our method on the right. Fix: condition the prior on the click. Second, we measured mass by integrating the reconstruction inside a segmentation, so segmentation failures leaked into mass, even though the X-rays themselves measure 99.7 percent of the mass. Fix: measure mass directly from the projections. Third, zero measurements made the intervals infinite. Fix: report "not measurable" as its own outcome and calibrate only the measurable cases.</a:t>
+              <a:t>(0:35) Putting it together. H1, H2 and H4, the measurement hypotheses, were not supported. H3 was valid but not useful. H5 was partly supported. H6, that the prior recovers rather than invents, was supported. On growth, for the physics-only prism reconstruction mass doubling time was slightly better than volume, 50 versus 48 percent, in line with our mass-first argument, but 40 pairs are too few to be conclusive.</a:t>
             </a:r>
           </a:p>
         </p:txBody>
@@ -1151,7 +1152,7 @@
           <a:lstStyle/>
           <a:p>
             <a:r>
-              <a:t>(0:40) On cost: the full study, 583 patients, ran in about 15 hours on one rented L40S GPU at 1.33 dollars an hour, about 20 dollars, roughly 22 dollars including a CPU machine, about 2,640 taka. Buying an equivalent workstation would cost four to five lakh taka. The demo runs on a free Kaggle GPU. Legally, LIDC-IDRI is CC BY 3.0 and we followed its citation and no-re-identification policy. A clinical version would be a medical device registrable with DGDA under the Drugs and Cosmetics Act 2023, and patient data would fall under Bangladesh's Personal Data Protection Ordinance 2025, which requires consent and treats health data as sensitive.</a:t>
+              <a:t>(0:55) Why did it fail? Our analysis points to three causes, and each suggests a fix. First, the prior shrinks faint nodules: it was not told a nodule is present at the click, so for faint ones it draws plausible normal lung. Here is a 6.8 millimetre nodule: clear in CT on the left, almost erased by our method on the right. Fix: condition the prior on the click. Second, we measured mass by integrating the reconstruction inside a segmentation, so segmentation failures leaked into mass, even though the X-rays themselves measure 99.7 percent of the mass. Fix: measure mass directly from the projections. Third, zero measurements made the intervals infinite. Fix: report "not measurable" as its own outcome and calibrate only the measurable cases.</a:t>
             </a:r>
           </a:p>
         </p:txBody>
@@ -1221,7 +1222,7 @@
           <a:lstStyle/>
           <a:p>
             <a:r>
-              <a:t>(0:45) To conclude. Our contributions: a physics argument that DTS measures mass but not depth extent; a diffusion prior kept consistent with the X-rays, combined with Gaussian mass; calibrated, decision-level uncertainty; a truth-referenced test of what a generative prior adds; and an open, verified pipeline with a working application. Next steps follow directly from the failure analysis: a click-conditioned prior, mass measured from the projections, failure-aware calibration, and above all real DTS data with a hospital partner. Our main lesson: better images do not guarantee better measurements; you must measure and calibrate the number that matters clinically.</a:t>
+              <a:t>(0:40) On cost: the full study, 583 patients, ran in about 15 hours on one rented L40S GPU at 1.33 dollars an hour, about 20 dollars, roughly 22 dollars including a CPU machine, about 2,640 taka. Buying an equivalent workstation would cost four to five lakh taka. The demo runs on a free Kaggle GPU. Legally, LIDC-IDRI is CC BY 3.0 and we followed its citation and no-re-identification policy. A clinical version would be a medical device registrable with DGDA under the Drugs and Cosmetics Act 2023, and patient data would fall under Bangladesh's Personal Data Protection Ordinance 2025, which requires consent and treats health data as sensitive.</a:t>
             </a:r>
           </a:p>
         </p:txBody>
@@ -1317,6 +1318,76 @@
 </file>
 
 <file path=ppt/notesSlides/notesSlide20.xml><?xml version="1.0" encoding="utf-8"?>
+<p:notes xmlns:a="http://schemas.openxmlformats.org/drawingml/2006/main" xmlns:p="http://schemas.openxmlformats.org/presentationml/2006/main" xmlns:r="http://schemas.openxmlformats.org/officeDocument/2006/relationships">
+  <p:cSld>
+    <p:spTree>
+      <p:nvGrpSpPr>
+        <p:cNvPr id="1" name=""/>
+        <p:cNvGrpSpPr/>
+        <p:nvPr/>
+      </p:nvGrpSpPr>
+      <p:grpSpPr>
+        <a:xfrm>
+          <a:off x="0" y="0"/>
+          <a:ext cx="0" cy="0"/>
+          <a:chOff x="0" y="0"/>
+          <a:chExt cx="0" cy="0"/>
+        </a:xfrm>
+      </p:grpSpPr>
+      <p:sp>
+        <p:nvSpPr>
+          <p:cNvPr id="2" name="Slide Image Placeholder 1"/>
+          <p:cNvSpPr>
+            <a:spLocks noGrp="1"/>
+          </p:cNvSpPr>
+          <p:nvPr>
+            <p:ph type="sldImg" idx="2"/>
+          </p:nvPr>
+        </p:nvSpPr>
+        <p:spPr/>
+      </p:sp>
+      <p:sp>
+        <p:nvSpPr>
+          <p:cNvPr id="3" name="Notes Placeholder 2"/>
+          <p:cNvSpPr>
+            <a:spLocks noGrp="1"/>
+          </p:cNvSpPr>
+          <p:nvPr>
+            <p:ph type="body" idx="3" sz="quarter"/>
+          </p:nvPr>
+        </p:nvSpPr>
+        <p:spPr/>
+        <p:txBody>
+          <a:bodyPr/>
+          <a:lstStyle/>
+          <a:p>
+            <a:r>
+              <a:t>(0:45) To conclude. Our contributions: a physics argument that DTS measures mass but not depth extent; a diffusion prior kept consistent with the X-rays, combined with Gaussian mass; calibrated, decision-level uncertainty; a truth-referenced test of what a generative prior adds; and an open, verified pipeline with a working application. Next steps follow directly from the failure analysis: a click-conditioned prior, mass measured from the projections, failure-aware calibration, and above all real DTS data with a hospital partner. Our main lesson: better images do not guarantee better measurements; you must measure and calibrate the number that matters clinically.</a:t>
+            </a:r>
+          </a:p>
+        </p:txBody>
+      </p:sp>
+      <p:sp>
+        <p:nvSpPr>
+          <p:cNvPr id="4" name="Slide Number Placeholder 3"/>
+          <p:cNvSpPr>
+            <a:spLocks noGrp="1"/>
+          </p:cNvSpPr>
+          <p:nvPr>
+            <p:ph type="sldNum" idx="5" sz="quarter"/>
+          </p:nvPr>
+        </p:nvSpPr>
+        <p:spPr/>
+      </p:sp>
+    </p:spTree>
+  </p:cSld>
+  <p:clrMapOvr>
+    <a:masterClrMapping/>
+  </p:clrMapOvr>
+</p:notes>
+</file>
+
+<file path=ppt/notesSlides/notesSlide21.xml><?xml version="1.0" encoding="utf-8"?>
 <p:notes xmlns:a="http://schemas.openxmlformats.org/drawingml/2006/main" xmlns:p="http://schemas.openxmlformats.org/presentationml/2006/main" xmlns:r="http://schemas.openxmlformats.org/officeDocument/2006/relationships">
   <p:cSld>
     <p:spTree>
@@ -5785,6 +5856,705 @@
     <p:bg>
       <p:bgPr>
         <a:solidFill>
+          <a:srgbClr val="F7F6F2"/>
+        </a:solidFill>
+        <a:effectLst/>
+      </p:bgPr>
+    </p:bg>
+    <p:spTree>
+      <p:nvGrpSpPr>
+        <p:cNvPr id="1" name=""/>
+        <p:cNvGrpSpPr/>
+        <p:nvPr/>
+      </p:nvGrpSpPr>
+      <p:grpSpPr/>
+      <p:sp>
+        <p:nvSpPr>
+          <p:cNvPr id="2" name="TextBox 1"/>
+          <p:cNvSpPr txBox="1"/>
+          <p:nvPr/>
+        </p:nvSpPr>
+        <p:spPr>
+          <a:xfrm>
+            <a:off x="812800" y="660400"/>
+            <a:ext cx="10566400" cy="254000"/>
+          </a:xfrm>
+          <a:prstGeom prst="rect">
+            <a:avLst/>
+          </a:prstGeom>
+          <a:noFill/>
+        </p:spPr>
+        <p:txBody>
+          <a:bodyPr wrap="square" lIns="0" rIns="0" tIns="0" bIns="0" anchor="t">
+            <a:spAutoFit/>
+          </a:bodyPr>
+          <a:lstStyle/>
+          <a:p>
+            <a:pPr algn="l">
+              <a:lnSpc>
+                <a:spcPct val="120000"/>
+              </a:lnSpc>
+            </a:pPr>
+            <a:r>
+              <a:rPr sz="1300" b="1" i="0">
+                <a:solidFill>
+                  <a:srgbClr val="1F5FA8"/>
+                </a:solidFill>
+                <a:latin typeface="Calibri"/>
+              </a:rPr>
+              <a:t>3D NODULE RECONSTRUCTION</a:t>
+            </a:r>
+          </a:p>
+        </p:txBody>
+      </p:sp>
+      <p:sp>
+        <p:nvSpPr>
+          <p:cNvPr id="3" name="TextBox 2"/>
+          <p:cNvSpPr txBox="1"/>
+          <p:nvPr/>
+        </p:nvSpPr>
+        <p:spPr>
+          <a:xfrm>
+            <a:off x="812800" y="952500"/>
+            <a:ext cx="10566400" cy="571500"/>
+          </a:xfrm>
+          <a:prstGeom prst="rect">
+            <a:avLst/>
+          </a:prstGeom>
+          <a:noFill/>
+        </p:spPr>
+        <p:txBody>
+          <a:bodyPr wrap="square" lIns="0" rIns="0" tIns="0" bIns="0" anchor="t">
+            <a:spAutoFit/>
+          </a:bodyPr>
+          <a:lstStyle/>
+          <a:p>
+            <a:pPr algn="l">
+              <a:lnSpc>
+                <a:spcPct val="105000"/>
+              </a:lnSpc>
+            </a:pPr>
+            <a:r>
+              <a:rPr sz="2700" b="1" i="0">
+                <a:solidFill>
+                  <a:srgbClr val="14213D"/>
+                </a:solidFill>
+                <a:latin typeface="Georgia"/>
+              </a:rPr>
+              <a:t>Each nodule rebuilt in 3D, coloured by certainty</a:t>
+            </a:r>
+          </a:p>
+        </p:txBody>
+      </p:sp>
+      <p:grpSp>
+        <p:nvGrpSpPr>
+          <p:cNvPr id="4" name="Group 3"/>
+          <p:cNvGrpSpPr/>
+          <p:nvPr/>
+        </p:nvGrpSpPr>
+        <p:grpSpPr>
+          <a:xfrm>
+            <a:off x="812800" y="1841500"/>
+            <a:ext cx="5130800" cy="3733800"/>
+            <a:chOff x="812800" y="1841500"/>
+            <a:chExt cx="5130800" cy="3733800"/>
+          </a:xfrm>
+        </p:grpSpPr>
+        <p:sp>
+          <p:nvSpPr>
+            <p:cNvPr id="5" name="Rounded Rectangle 4"/>
+            <p:cNvSpPr/>
+            <p:nvPr/>
+          </p:nvSpPr>
+          <p:spPr>
+            <a:xfrm>
+              <a:off x="812800" y="1841500"/>
+              <a:ext cx="5130800" cy="2984500"/>
+            </a:xfrm>
+            <a:prstGeom prst="roundRect">
+              <a:avLst>
+                <a:gd name="adj" fmla="val 2553"/>
+              </a:avLst>
+            </a:prstGeom>
+            <a:solidFill>
+              <a:srgbClr val="FFFFFF"/>
+            </a:solidFill>
+            <a:ln w="12700">
+              <a:solidFill>
+                <a:srgbClr val="DDE3EA"/>
+              </a:solidFill>
+            </a:ln>
+            <a:effectLst/>
+          </p:spPr>
+          <p:style>
+            <a:lnRef idx="1">
+              <a:schemeClr val="accent1"/>
+            </a:lnRef>
+            <a:fillRef idx="3">
+              <a:schemeClr val="accent1"/>
+            </a:fillRef>
+            <a:effectRef idx="2">
+              <a:schemeClr val="accent1"/>
+            </a:effectRef>
+            <a:fontRef idx="minor">
+              <a:schemeClr val="lt1"/>
+            </a:fontRef>
+          </p:style>
+          <p:txBody>
+            <a:bodyPr rtlCol="0" anchor="ctr"/>
+            <a:lstStyle/>
+            <a:p>
+              <a:pPr algn="ctr"/>
+            </a:p>
+          </p:txBody>
+        </p:sp>
+        <p:pic>
+          <p:nvPicPr>
+            <p:cNvPr id="6" name="Picture 5" descr="recon3d_a.png"/>
+            <p:cNvPicPr>
+              <a:picLocks noChangeAspect="1"/>
+            </p:cNvPicPr>
+            <p:nvPr/>
+          </p:nvPicPr>
+          <p:blipFill>
+            <a:blip r:embed="rId2"/>
+            <a:stretch>
+              <a:fillRect/>
+            </a:stretch>
+          </p:blipFill>
+          <p:spPr>
+            <a:xfrm>
+              <a:off x="1355969" y="1905000"/>
+              <a:ext cx="4044462" cy="2857500"/>
+            </a:xfrm>
+            <a:prstGeom prst="rect">
+              <a:avLst/>
+            </a:prstGeom>
+          </p:spPr>
+        </p:pic>
+        <p:sp>
+          <p:nvSpPr>
+            <p:cNvPr id="7" name="TextBox 6"/>
+            <p:cNvSpPr txBox="1"/>
+            <p:nvPr/>
+          </p:nvSpPr>
+          <p:spPr>
+            <a:xfrm>
+              <a:off x="812800" y="4940300"/>
+              <a:ext cx="5130800" cy="635000"/>
+            </a:xfrm>
+            <a:prstGeom prst="rect">
+              <a:avLst/>
+            </a:prstGeom>
+            <a:noFill/>
+          </p:spPr>
+          <p:txBody>
+            <a:bodyPr wrap="square" lIns="0" tIns="0">
+              <a:spAutoFit/>
+            </a:bodyPr>
+            <a:lstStyle/>
+            <a:p>
+              <a:pPr algn="l">
+                <a:lnSpc>
+                  <a:spcPct val="125000"/>
+                </a:lnSpc>
+              </a:pPr>
+              <a:r>
+                <a:rPr sz="1400" b="1" i="0">
+                  <a:solidFill>
+                    <a:srgbClr val="2E7D4F"/>
+                  </a:solidFill>
+                  <a:latin typeface="Calibri"/>
+                </a:rPr>
+                <a:t>(a) Match. </a:t>
+              </a:r>
+              <a:r>
+                <a:rPr sz="1400" b="0" i="0">
+                  <a:solidFill>
+                    <a:srgbClr val="14213D"/>
+                  </a:solidFill>
+                  <a:latin typeface="Calibri"/>
+                </a:rPr>
+                <a:t>Our reconstruction fills the radiologists’ nodule; red patches sit at the depth edges.</a:t>
+              </a:r>
+            </a:p>
+          </p:txBody>
+        </p:sp>
+      </p:grpSp>
+      <p:grpSp>
+        <p:nvGrpSpPr>
+          <p:cNvPr id="8" name="Group 7"/>
+          <p:cNvGrpSpPr/>
+          <p:nvPr/>
+        </p:nvGrpSpPr>
+        <p:grpSpPr>
+          <a:xfrm>
+            <a:off x="6248400" y="1841500"/>
+            <a:ext cx="5130800" cy="3733800"/>
+            <a:chOff x="6248400" y="1841500"/>
+            <a:chExt cx="5130800" cy="3733800"/>
+          </a:xfrm>
+        </p:grpSpPr>
+        <p:sp>
+          <p:nvSpPr>
+            <p:cNvPr id="9" name="Rounded Rectangle 8"/>
+            <p:cNvSpPr/>
+            <p:nvPr/>
+          </p:nvSpPr>
+          <p:spPr>
+            <a:xfrm>
+              <a:off x="6248400" y="1841500"/>
+              <a:ext cx="5130800" cy="2984500"/>
+            </a:xfrm>
+            <a:prstGeom prst="roundRect">
+              <a:avLst>
+                <a:gd name="adj" fmla="val 2553"/>
+              </a:avLst>
+            </a:prstGeom>
+            <a:solidFill>
+              <a:srgbClr val="FFFFFF"/>
+            </a:solidFill>
+            <a:ln w="12700">
+              <a:solidFill>
+                <a:srgbClr val="DDE3EA"/>
+              </a:solidFill>
+            </a:ln>
+            <a:effectLst/>
+          </p:spPr>
+          <p:style>
+            <a:lnRef idx="1">
+              <a:schemeClr val="accent1"/>
+            </a:lnRef>
+            <a:fillRef idx="3">
+              <a:schemeClr val="accent1"/>
+            </a:fillRef>
+            <a:effectRef idx="2">
+              <a:schemeClr val="accent1"/>
+            </a:effectRef>
+            <a:fontRef idx="minor">
+              <a:schemeClr val="lt1"/>
+            </a:fontRef>
+          </p:style>
+          <p:txBody>
+            <a:bodyPr rtlCol="0" anchor="ctr"/>
+            <a:lstStyle/>
+            <a:p>
+              <a:pPr algn="ctr"/>
+            </a:p>
+          </p:txBody>
+        </p:sp>
+        <p:pic>
+          <p:nvPicPr>
+            <p:cNvPr id="10" name="Picture 9" descr="recon3d_b.png"/>
+            <p:cNvPicPr>
+              <a:picLocks noChangeAspect="1"/>
+            </p:cNvPicPr>
+            <p:nvPr/>
+          </p:nvPicPr>
+          <p:blipFill>
+            <a:blip r:embed="rId3"/>
+            <a:stretch>
+              <a:fillRect/>
+            </a:stretch>
+          </p:blipFill>
+          <p:spPr>
+            <a:xfrm>
+              <a:off x="6791569" y="1905000"/>
+              <a:ext cx="4044462" cy="2857500"/>
+            </a:xfrm>
+            <a:prstGeom prst="rect">
+              <a:avLst/>
+            </a:prstGeom>
+          </p:spPr>
+        </p:pic>
+        <p:sp>
+          <p:nvSpPr>
+            <p:cNvPr id="11" name="TextBox 10"/>
+            <p:cNvSpPr txBox="1"/>
+            <p:nvPr/>
+          </p:nvSpPr>
+          <p:spPr>
+            <a:xfrm>
+              <a:off x="6248400" y="4940300"/>
+              <a:ext cx="5130800" cy="635000"/>
+            </a:xfrm>
+            <a:prstGeom prst="rect">
+              <a:avLst/>
+            </a:prstGeom>
+            <a:noFill/>
+          </p:spPr>
+          <p:txBody>
+            <a:bodyPr wrap="square" lIns="0" tIns="0">
+              <a:spAutoFit/>
+            </a:bodyPr>
+            <a:lstStyle/>
+            <a:p>
+              <a:pPr algn="l">
+                <a:lnSpc>
+                  <a:spcPct val="125000"/>
+                </a:lnSpc>
+              </a:pPr>
+              <a:r>
+                <a:rPr sz="1400" b="1" i="0">
+                  <a:solidFill>
+                    <a:srgbClr val="B4521A"/>
+                  </a:solidFill>
+                  <a:latin typeface="Calibri"/>
+                </a:rPr>
+                <a:t>(b) Shrinkage. </a:t>
+              </a:r>
+              <a:r>
+                <a:rPr sz="1400" b="0" i="0">
+                  <a:solidFill>
+                    <a:srgbClr val="14213D"/>
+                  </a:solidFill>
+                  <a:latin typeface="Calibri"/>
+                </a:rPr>
+                <a:t>Our reconstruction is smaller than the radiologists’ nodule: the main failure we found.</a:t>
+              </a:r>
+            </a:p>
+          </p:txBody>
+        </p:sp>
+      </p:grpSp>
+      <p:sp>
+        <p:nvSpPr>
+          <p:cNvPr id="12" name="TextBox 11"/>
+          <p:cNvSpPr txBox="1"/>
+          <p:nvPr/>
+        </p:nvSpPr>
+        <p:spPr>
+          <a:xfrm>
+            <a:off x="812800" y="5715000"/>
+            <a:ext cx="10566400" cy="317500"/>
+          </a:xfrm>
+          <a:prstGeom prst="rect">
+            <a:avLst/>
+          </a:prstGeom>
+          <a:noFill/>
+        </p:spPr>
+        <p:txBody>
+          <a:bodyPr wrap="square" lIns="0" rIns="0" tIns="0" bIns="0" anchor="t">
+            <a:spAutoFit/>
+          </a:bodyPr>
+          <a:lstStyle/>
+          <a:p>
+            <a:pPr algn="l">
+              <a:lnSpc>
+                <a:spcPct val="120000"/>
+              </a:lnSpc>
+            </a:pPr>
+            <a:r>
+              <a:rPr sz="1300" b="0" i="0">
+                <a:solidFill>
+                  <a:srgbClr val="2E7D4F"/>
+                </a:solidFill>
+                <a:latin typeface="Calibri"/>
+              </a:rPr>
+              <a:t>■ </a:t>
+            </a:r>
+            <a:r>
+              <a:rPr sz="1300" b="0" i="0">
+                <a:solidFill>
+                  <a:srgbClr val="4A5568"/>
+                </a:solidFill>
+                <a:latin typeface="Calibri"/>
+              </a:rPr>
+              <a:t>green: 8 samples agree      </a:t>
+            </a:r>
+            <a:r>
+              <a:rPr sz="1300" b="0" i="0">
+                <a:solidFill>
+                  <a:srgbClr val="C0392B"/>
+                </a:solidFill>
+                <a:latin typeface="Calibri"/>
+              </a:rPr>
+              <a:t>■ </a:t>
+            </a:r>
+            <a:r>
+              <a:rPr sz="1300" b="0" i="0">
+                <a:solidFill>
+                  <a:srgbClr val="4A5568"/>
+                </a:solidFill>
+                <a:latin typeface="Calibri"/>
+              </a:rPr>
+              <a:t>red: samples disagree (mostly in depth)      </a:t>
+            </a:r>
+            <a:r>
+              <a:rPr sz="1300" b="0" i="0">
+                <a:solidFill>
+                  <a:srgbClr val="9AA7B8"/>
+                </a:solidFill>
+                <a:latin typeface="Calibri"/>
+              </a:rPr>
+              <a:t>■ </a:t>
+            </a:r>
+            <a:r>
+              <a:rPr sz="1300" b="0" i="0">
+                <a:solidFill>
+                  <a:srgbClr val="4A5568"/>
+                </a:solidFill>
+                <a:latin typeface="Calibri"/>
+              </a:rPr>
+              <a:t>grey: radiologists’ nodule (truth)</a:t>
+            </a:r>
+          </a:p>
+        </p:txBody>
+      </p:sp>
+    </p:spTree>
+  </p:cSld>
+  <p:clrMapOvr>
+    <a:masterClrMapping/>
+  </p:clrMapOvr>
+  <p:transition spd="med">
+    <p:fade/>
+  </p:transition>
+  <p:timing>
+    <p:tnLst>
+      <p:par>
+        <p:cTn id="1" dur="indefinite" restart="never" nodeType="tmRoot">
+          <p:childTnLst>
+            <p:seq concurrent="1" nextAc="seek">
+              <p:cTn id="2" dur="indefinite" nodeType="mainSeq">
+                <p:childTnLst>
+                  <p:par>
+                    <p:cTn id="7" fill="hold">
+                      <p:stCondLst>
+                        <p:cond delay="indefinite"/>
+                      </p:stCondLst>
+                      <p:childTnLst>
+                        <p:par>
+                          <p:cTn id="8" fill="hold">
+                            <p:stCondLst>
+                              <p:cond delay="0"/>
+                            </p:stCondLst>
+                            <p:childTnLst>
+                              <p:par>
+                                <p:cTn id="6" presetID="42" presetClass="entr" presetSubtype="0" fill="hold" grpId="0" nodeType="clickEffect">
+                                  <p:stCondLst>
+                                    <p:cond delay="0"/>
+                                  </p:stCondLst>
+                                  <p:childTnLst>
+                                    <p:set>
+                                      <p:cBhvr>
+                                        <p:cTn id="3" dur="1" fill="hold">
+                                          <p:stCondLst>
+                                            <p:cond delay="0"/>
+                                          </p:stCondLst>
+                                        </p:cTn>
+                                        <p:tgtEl>
+                                          <p:spTgt spid="4"/>
+                                        </p:tgtEl>
+                                        <p:attrNameLst>
+                                          <p:attrName>style.visibility</p:attrName>
+                                        </p:attrNameLst>
+                                      </p:cBhvr>
+                                      <p:to>
+                                        <p:strVal val="visible"/>
+                                      </p:to>
+                                    </p:set>
+                                    <p:animEffect transition="in" filter="fade">
+                                      <p:cBhvr>
+                                        <p:cTn id="4" dur="500"/>
+                                        <p:tgtEl>
+                                          <p:spTgt spid="4"/>
+                                        </p:tgtEl>
+                                      </p:cBhvr>
+                                    </p:animEffect>
+                                    <p:anim calcmode="lin" valueType="num">
+                                      <p:cBhvr additive="base">
+                                        <p:cTn id="5" dur="500" fill="hold"/>
+                                        <p:tgtEl>
+                                          <p:spTgt spid="4"/>
+                                        </p:tgtEl>
+                                        <p:attrNameLst>
+                                          <p:attrName>ppt_y</p:attrName>
+                                        </p:attrNameLst>
+                                      </p:cBhvr>
+                                      <p:tavLst>
+                                        <p:tav tm="0">
+                                          <p:val>
+                                            <p:strVal val="#ppt_y+0.05"/>
+                                          </p:val>
+                                        </p:tav>
+                                        <p:tav tm="100000">
+                                          <p:val>
+                                            <p:strVal val="#ppt_y"/>
+                                          </p:val>
+                                        </p:tav>
+                                      </p:tavLst>
+                                    </p:anim>
+                                  </p:childTnLst>
+                                </p:cTn>
+                              </p:par>
+                            </p:childTnLst>
+                          </p:cTn>
+                        </p:par>
+                      </p:childTnLst>
+                    </p:cTn>
+                  </p:par>
+                  <p:par>
+                    <p:cTn id="13" fill="hold">
+                      <p:stCondLst>
+                        <p:cond delay="indefinite"/>
+                      </p:stCondLst>
+                      <p:childTnLst>
+                        <p:par>
+                          <p:cTn id="14" fill="hold">
+                            <p:stCondLst>
+                              <p:cond delay="0"/>
+                            </p:stCondLst>
+                            <p:childTnLst>
+                              <p:par>
+                                <p:cTn id="12" presetID="42" presetClass="entr" presetSubtype="0" fill="hold" grpId="0" nodeType="clickEffect">
+                                  <p:stCondLst>
+                                    <p:cond delay="0"/>
+                                  </p:stCondLst>
+                                  <p:childTnLst>
+                                    <p:set>
+                                      <p:cBhvr>
+                                        <p:cTn id="9" dur="1" fill="hold">
+                                          <p:stCondLst>
+                                            <p:cond delay="0"/>
+                                          </p:stCondLst>
+                                        </p:cTn>
+                                        <p:tgtEl>
+                                          <p:spTgt spid="8"/>
+                                        </p:tgtEl>
+                                        <p:attrNameLst>
+                                          <p:attrName>style.visibility</p:attrName>
+                                        </p:attrNameLst>
+                                      </p:cBhvr>
+                                      <p:to>
+                                        <p:strVal val="visible"/>
+                                      </p:to>
+                                    </p:set>
+                                    <p:animEffect transition="in" filter="fade">
+                                      <p:cBhvr>
+                                        <p:cTn id="10" dur="500"/>
+                                        <p:tgtEl>
+                                          <p:spTgt spid="8"/>
+                                        </p:tgtEl>
+                                      </p:cBhvr>
+                                    </p:animEffect>
+                                    <p:anim calcmode="lin" valueType="num">
+                                      <p:cBhvr additive="base">
+                                        <p:cTn id="11" dur="500" fill="hold"/>
+                                        <p:tgtEl>
+                                          <p:spTgt spid="8"/>
+                                        </p:tgtEl>
+                                        <p:attrNameLst>
+                                          <p:attrName>ppt_y</p:attrName>
+                                        </p:attrNameLst>
+                                      </p:cBhvr>
+                                      <p:tavLst>
+                                        <p:tav tm="0">
+                                          <p:val>
+                                            <p:strVal val="#ppt_y+0.05"/>
+                                          </p:val>
+                                        </p:tav>
+                                        <p:tav tm="100000">
+                                          <p:val>
+                                            <p:strVal val="#ppt_y"/>
+                                          </p:val>
+                                        </p:tav>
+                                      </p:tavLst>
+                                    </p:anim>
+                                  </p:childTnLst>
+                                </p:cTn>
+                              </p:par>
+                            </p:childTnLst>
+                          </p:cTn>
+                        </p:par>
+                      </p:childTnLst>
+                    </p:cTn>
+                  </p:par>
+                  <p:par>
+                    <p:cTn id="18" fill="hold">
+                      <p:stCondLst>
+                        <p:cond delay="indefinite"/>
+                      </p:stCondLst>
+                      <p:childTnLst>
+                        <p:par>
+                          <p:cTn id="19" fill="hold">
+                            <p:stCondLst>
+                              <p:cond delay="0"/>
+                            </p:stCondLst>
+                            <p:childTnLst>
+                              <p:par>
+                                <p:cTn id="17" presetID="10" presetClass="entr" presetSubtype="0" fill="hold" grpId="0" nodeType="clickEffect">
+                                  <p:stCondLst>
+                                    <p:cond delay="0"/>
+                                  </p:stCondLst>
+                                  <p:childTnLst>
+                                    <p:set>
+                                      <p:cBhvr>
+                                        <p:cTn id="15" dur="1" fill="hold">
+                                          <p:stCondLst>
+                                            <p:cond delay="0"/>
+                                          </p:stCondLst>
+                                        </p:cTn>
+                                        <p:tgtEl>
+                                          <p:spTgt spid="12"/>
+                                        </p:tgtEl>
+                                        <p:attrNameLst>
+                                          <p:attrName>style.visibility</p:attrName>
+                                        </p:attrNameLst>
+                                      </p:cBhvr>
+                                      <p:to>
+                                        <p:strVal val="visible"/>
+                                      </p:to>
+                                    </p:set>
+                                    <p:animEffect transition="in" filter="fade">
+                                      <p:cBhvr>
+                                        <p:cTn id="16" dur="500"/>
+                                        <p:tgtEl>
+                                          <p:spTgt spid="12"/>
+                                        </p:tgtEl>
+                                      </p:cBhvr>
+                                    </p:animEffect>
+                                  </p:childTnLst>
+                                </p:cTn>
+                              </p:par>
+                            </p:childTnLst>
+                          </p:cTn>
+                        </p:par>
+                      </p:childTnLst>
+                    </p:cTn>
+                  </p:par>
+                </p:childTnLst>
+              </p:cTn>
+              <p:prevCondLst>
+                <p:cond evt="onPrev" delay="0">
+                  <p:tgtEl>
+                    <p:sldTgt/>
+                  </p:tgtEl>
+                </p:cond>
+              </p:prevCondLst>
+              <p:nextCondLst>
+                <p:cond evt="onNext" delay="0">
+                  <p:tgtEl>
+                    <p:sldTgt/>
+                  </p:tgtEl>
+                </p:cond>
+              </p:nextCondLst>
+            </p:seq>
+          </p:childTnLst>
+        </p:cTn>
+      </p:par>
+    </p:tnLst>
+    <p:bldLst>
+      <p:bldP spid="12" grpId="0"/>
+    </p:bldLst>
+  </p:timing>
+</p:sld>
+</file>
+
+<file path=ppt/slides/slide12.xml><?xml version="1.0" encoding="utf-8"?>
+<p:sld xmlns:a="http://schemas.openxmlformats.org/drawingml/2006/main" xmlns:p="http://schemas.openxmlformats.org/presentationml/2006/main" xmlns:r="http://schemas.openxmlformats.org/officeDocument/2006/relationships">
+  <p:cSld>
+    <p:bg>
+      <p:bgPr>
+        <a:solidFill>
           <a:srgbClr val="1F5FA8"/>
         </a:solidFill>
         <a:effectLst/>
@@ -6050,7 +6820,7 @@
 </p:sld>
 </file>
 
-<file path=ppt/slides/slide12.xml><?xml version="1.0" encoding="utf-8"?>
+<file path=ppt/slides/slide13.xml><?xml version="1.0" encoding="utf-8"?>
 <p:sld xmlns:a="http://schemas.openxmlformats.org/drawingml/2006/main" xmlns:p="http://schemas.openxmlformats.org/presentationml/2006/main" xmlns:r="http://schemas.openxmlformats.org/officeDocument/2006/relationships">
   <p:cSld>
     <p:bg>
@@ -7219,7 +7989,7 @@
 </p:sld>
 </file>
 
-<file path=ppt/slides/slide13.xml><?xml version="1.0" encoding="utf-8"?>
+<file path=ppt/slides/slide14.xml><?xml version="1.0" encoding="utf-8"?>
 <p:sld xmlns:a="http://schemas.openxmlformats.org/drawingml/2006/main" xmlns:p="http://schemas.openxmlformats.org/presentationml/2006/main" xmlns:r="http://schemas.openxmlformats.org/officeDocument/2006/relationships">
   <p:cSld>
     <p:bg>
@@ -9332,7 +10102,7 @@
 </p:sld>
 </file>
 
-<file path=ppt/slides/slide14.xml><?xml version="1.0" encoding="utf-8"?>
+<file path=ppt/slides/slide15.xml><?xml version="1.0" encoding="utf-8"?>
 <p:sld xmlns:a="http://schemas.openxmlformats.org/drawingml/2006/main" xmlns:p="http://schemas.openxmlformats.org/presentationml/2006/main" xmlns:r="http://schemas.openxmlformats.org/officeDocument/2006/relationships">
   <p:cSld>
     <p:bg>
@@ -10380,7 +11150,7 @@
 </p:sld>
 </file>
 
-<file path=ppt/slides/slide15.xml><?xml version="1.0" encoding="utf-8"?>
+<file path=ppt/slides/slide16.xml><?xml version="1.0" encoding="utf-8"?>
 <p:sld xmlns:a="http://schemas.openxmlformats.org/drawingml/2006/main" xmlns:p="http://schemas.openxmlformats.org/presentationml/2006/main" xmlns:r="http://schemas.openxmlformats.org/officeDocument/2006/relationships">
   <p:cSld>
     <p:bg>
@@ -11035,7 +11805,7 @@
 </p:sld>
 </file>
 
-<file path=ppt/slides/slide16.xml><?xml version="1.0" encoding="utf-8"?>
+<file path=ppt/slides/slide17.xml><?xml version="1.0" encoding="utf-8"?>
 <p:sld xmlns:a="http://schemas.openxmlformats.org/drawingml/2006/main" xmlns:p="http://schemas.openxmlformats.org/presentationml/2006/main" xmlns:r="http://schemas.openxmlformats.org/officeDocument/2006/relationships">
   <p:cSld>
     <p:bg>
@@ -13194,7 +13964,7 @@
 </p:sld>
 </file>
 
-<file path=ppt/slides/slide17.xml><?xml version="1.0" encoding="utf-8"?>
+<file path=ppt/slides/slide18.xml><?xml version="1.0" encoding="utf-8"?>
 <p:sld xmlns:a="http://schemas.openxmlformats.org/drawingml/2006/main" xmlns:p="http://schemas.openxmlformats.org/presentationml/2006/main" xmlns:r="http://schemas.openxmlformats.org/officeDocument/2006/relationships">
   <p:cSld>
     <p:bg>
@@ -14196,7 +14966,7 @@
 </p:sld>
 </file>
 
-<file path=ppt/slides/slide18.xml><?xml version="1.0" encoding="utf-8"?>
+<file path=ppt/slides/slide19.xml><?xml version="1.0" encoding="utf-8"?>
 <p:sld xmlns:a="http://schemas.openxmlformats.org/drawingml/2006/main" xmlns:p="http://schemas.openxmlformats.org/presentationml/2006/main" xmlns:r="http://schemas.openxmlformats.org/officeDocument/2006/relationships">
   <p:cSld>
     <p:bg>
@@ -14792,696 +15562,6 @@
         </p:cTn>
       </p:par>
     </p:tnLst>
-  </p:timing>
-</p:sld>
-</file>
-
-<file path=ppt/slides/slide19.xml><?xml version="1.0" encoding="utf-8"?>
-<p:sld xmlns:a="http://schemas.openxmlformats.org/drawingml/2006/main" xmlns:p="http://schemas.openxmlformats.org/presentationml/2006/main" xmlns:r="http://schemas.openxmlformats.org/officeDocument/2006/relationships">
-  <p:cSld>
-    <p:bg>
-      <p:bgPr>
-        <a:solidFill>
-          <a:srgbClr val="F7F6F2"/>
-        </a:solidFill>
-        <a:effectLst/>
-      </p:bgPr>
-    </p:bg>
-    <p:spTree>
-      <p:nvGrpSpPr>
-        <p:cNvPr id="1" name=""/>
-        <p:cNvGrpSpPr/>
-        <p:nvPr/>
-      </p:nvGrpSpPr>
-      <p:grpSpPr/>
-      <p:sp>
-        <p:nvSpPr>
-          <p:cNvPr id="2" name="TextBox 1"/>
-          <p:cNvSpPr txBox="1"/>
-          <p:nvPr/>
-        </p:nvSpPr>
-        <p:spPr>
-          <a:xfrm>
-            <a:off x="812800" y="660400"/>
-            <a:ext cx="10566400" cy="254000"/>
-          </a:xfrm>
-          <a:prstGeom prst="rect">
-            <a:avLst/>
-          </a:prstGeom>
-          <a:noFill/>
-        </p:spPr>
-        <p:txBody>
-          <a:bodyPr wrap="square" lIns="0" rIns="0" tIns="0" bIns="0" anchor="t">
-            <a:spAutoFit/>
-          </a:bodyPr>
-          <a:lstStyle/>
-          <a:p>
-            <a:pPr algn="l">
-              <a:lnSpc>
-                <a:spcPct val="120000"/>
-              </a:lnSpc>
-            </a:pPr>
-            <a:r>
-              <a:rPr sz="1300" b="1" i="0">
-                <a:solidFill>
-                  <a:srgbClr val="1F5FA8"/>
-                </a:solidFill>
-                <a:latin typeface="Calibri"/>
-              </a:rPr>
-              <a:t>CONCLUSION</a:t>
-            </a:r>
-          </a:p>
-        </p:txBody>
-      </p:sp>
-      <p:sp>
-        <p:nvSpPr>
-          <p:cNvPr id="3" name="TextBox 2"/>
-          <p:cNvSpPr txBox="1"/>
-          <p:nvPr/>
-        </p:nvSpPr>
-        <p:spPr>
-          <a:xfrm>
-            <a:off x="812800" y="952500"/>
-            <a:ext cx="10566400" cy="571500"/>
-          </a:xfrm>
-          <a:prstGeom prst="rect">
-            <a:avLst/>
-          </a:prstGeom>
-          <a:noFill/>
-        </p:spPr>
-        <p:txBody>
-          <a:bodyPr wrap="square" lIns="0" rIns="0" tIns="0" bIns="0" anchor="t">
-            <a:spAutoFit/>
-          </a:bodyPr>
-          <a:lstStyle/>
-          <a:p>
-            <a:pPr algn="l">
-              <a:lnSpc>
-                <a:spcPct val="105000"/>
-              </a:lnSpc>
-            </a:pPr>
-            <a:r>
-              <a:rPr sz="2700" b="1" i="0">
-                <a:solidFill>
-                  <a:srgbClr val="14213D"/>
-                </a:solidFill>
-                <a:latin typeface="Georgia"/>
-              </a:rPr>
-              <a:t>What we contribute, and what comes next</a:t>
-            </a:r>
-          </a:p>
-        </p:txBody>
-      </p:sp>
-      <p:sp>
-        <p:nvSpPr>
-          <p:cNvPr id="4" name="TextBox 3"/>
-          <p:cNvSpPr txBox="1"/>
-          <p:nvPr/>
-        </p:nvSpPr>
-        <p:spPr>
-          <a:xfrm>
-            <a:off x="812800" y="1905000"/>
-            <a:ext cx="5080000" cy="2921000"/>
-          </a:xfrm>
-          <a:prstGeom prst="rect">
-            <a:avLst/>
-          </a:prstGeom>
-          <a:noFill/>
-        </p:spPr>
-        <p:txBody>
-          <a:bodyPr wrap="square" lIns="0" rIns="0" tIns="0" bIns="0" anchor="t">
-            <a:spAutoFit/>
-          </a:bodyPr>
-          <a:lstStyle/>
-          <a:p>
-            <a:pPr algn="l">
-              <a:lnSpc>
-                <a:spcPct val="120000"/>
-              </a:lnSpc>
-            </a:pPr>
-            <a:r>
-              <a:rPr sz="1600" b="1" i="0">
-                <a:solidFill>
-                  <a:srgbClr val="1F5FA8"/>
-                </a:solidFill>
-                <a:latin typeface="Calibri"/>
-              </a:rPr>
-              <a:t>Contributions</a:t>
-            </a:r>
-          </a:p>
-          <a:p>
-            <a:pPr algn="l">
-              <a:lnSpc>
-                <a:spcPct val="125000"/>
-              </a:lnSpc>
-              <a:spcBef>
-                <a:spcPts val="700"/>
-              </a:spcBef>
-            </a:pPr>
-            <a:r>
-              <a:rPr sz="1300" b="0" i="0">
-                <a:solidFill>
-                  <a:srgbClr val="14213D"/>
-                </a:solidFill>
-                <a:latin typeface="Calibri"/>
-              </a:rPr>
-              <a:t>•  Projection-moment proof: DTS measures mass, not depth extent</a:t>
-            </a:r>
-          </a:p>
-          <a:p>
-            <a:pPr algn="l">
-              <a:lnSpc>
-                <a:spcPct val="125000"/>
-              </a:lnSpc>
-              <a:spcBef>
-                <a:spcPts val="700"/>
-              </a:spcBef>
-            </a:pPr>
-            <a:r>
-              <a:rPr sz="1300" b="0" i="0">
-                <a:solidFill>
-                  <a:srgbClr val="14213D"/>
-                </a:solidFill>
-                <a:latin typeface="Calibri"/>
-              </a:rPr>
-              <a:t>•  X-ray-consistent diffusion prior in a DTS prism with Gaussian mass</a:t>
-            </a:r>
-          </a:p>
-          <a:p>
-            <a:pPr algn="l">
-              <a:lnSpc>
-                <a:spcPct val="125000"/>
-              </a:lnSpc>
-              <a:spcBef>
-                <a:spcPts val="700"/>
-              </a:spcBef>
-            </a:pPr>
-            <a:r>
-              <a:rPr sz="1300" b="0" i="0">
-                <a:solidFill>
-                  <a:srgbClr val="14213D"/>
-                </a:solidFill>
-                <a:latin typeface="Calibri"/>
-              </a:rPr>
-              <a:t>•  Calibrated, decision-level uncertainty for DTS volumetry</a:t>
-            </a:r>
-          </a:p>
-          <a:p>
-            <a:pPr algn="l">
-              <a:lnSpc>
-                <a:spcPct val="125000"/>
-              </a:lnSpc>
-              <a:spcBef>
-                <a:spcPts val="700"/>
-              </a:spcBef>
-            </a:pPr>
-            <a:r>
-              <a:rPr sz="1300" b="0" i="0">
-                <a:solidFill>
-                  <a:srgbClr val="14213D"/>
-                </a:solidFill>
-                <a:latin typeface="Calibri"/>
-              </a:rPr>
-              <a:t>•  Truth-referenced test of what a generative prior adds</a:t>
-            </a:r>
-          </a:p>
-          <a:p>
-            <a:pPr algn="l">
-              <a:lnSpc>
-                <a:spcPct val="125000"/>
-              </a:lnSpc>
-              <a:spcBef>
-                <a:spcPts val="700"/>
-              </a:spcBef>
-            </a:pPr>
-            <a:r>
-              <a:rPr sz="1300" b="0" i="0">
-                <a:solidFill>
-                  <a:srgbClr val="14213D"/>
-                </a:solidFill>
-                <a:latin typeface="Calibri"/>
-              </a:rPr>
-              <a:t>•  Verified, open 18-step pipeline and click-to-3D application</a:t>
-            </a:r>
-          </a:p>
-        </p:txBody>
-      </p:sp>
-      <p:sp>
-        <p:nvSpPr>
-          <p:cNvPr id="5" name="TextBox 4"/>
-          <p:cNvSpPr txBox="1"/>
-          <p:nvPr/>
-        </p:nvSpPr>
-        <p:spPr>
-          <a:xfrm>
-            <a:off x="6299200" y="1905000"/>
-            <a:ext cx="5080000" cy="2921000"/>
-          </a:xfrm>
-          <a:prstGeom prst="rect">
-            <a:avLst/>
-          </a:prstGeom>
-          <a:noFill/>
-        </p:spPr>
-        <p:txBody>
-          <a:bodyPr wrap="square" lIns="0" rIns="0" tIns="0" bIns="0" anchor="t">
-            <a:spAutoFit/>
-          </a:bodyPr>
-          <a:lstStyle/>
-          <a:p>
-            <a:pPr algn="l">
-              <a:lnSpc>
-                <a:spcPct val="120000"/>
-              </a:lnSpc>
-            </a:pPr>
-            <a:r>
-              <a:rPr sz="1600" b="1" i="0">
-                <a:solidFill>
-                  <a:srgbClr val="2E7D4F"/>
-                </a:solidFill>
-                <a:latin typeface="Calibri"/>
-              </a:rPr>
-              <a:t>Future work</a:t>
-            </a:r>
-          </a:p>
-          <a:p>
-            <a:pPr algn="l">
-              <a:lnSpc>
-                <a:spcPct val="125000"/>
-              </a:lnSpc>
-              <a:spcBef>
-                <a:spcPts val="700"/>
-              </a:spcBef>
-            </a:pPr>
-            <a:r>
-              <a:rPr sz="1300" b="0" i="0">
-                <a:solidFill>
-                  <a:srgbClr val="14213D"/>
-                </a:solidFill>
-                <a:latin typeface="Calibri"/>
-              </a:rPr>
-              <a:t>•  Click-conditioned, nodule-preserving prior</a:t>
-            </a:r>
-          </a:p>
-          <a:p>
-            <a:pPr algn="l">
-              <a:lnSpc>
-                <a:spcPct val="125000"/>
-              </a:lnSpc>
-              <a:spcBef>
-                <a:spcPts val="700"/>
-              </a:spcBef>
-            </a:pPr>
-            <a:r>
-              <a:rPr sz="1300" b="0" i="0">
-                <a:solidFill>
-                  <a:srgbClr val="14213D"/>
-                </a:solidFill>
-                <a:latin typeface="Calibri"/>
-              </a:rPr>
-              <a:t>•  Projection-domain mass measurement</a:t>
-            </a:r>
-          </a:p>
-          <a:p>
-            <a:pPr algn="l">
-              <a:lnSpc>
-                <a:spcPct val="125000"/>
-              </a:lnSpc>
-              <a:spcBef>
-                <a:spcPts val="700"/>
-              </a:spcBef>
-            </a:pPr>
-            <a:r>
-              <a:rPr sz="1300" b="0" i="0">
-                <a:solidFill>
-                  <a:srgbClr val="14213D"/>
-                </a:solidFill>
-                <a:latin typeface="Calibri"/>
-              </a:rPr>
-              <a:t>•  Failure-aware calibration</a:t>
-            </a:r>
-          </a:p>
-          <a:p>
-            <a:pPr algn="l">
-              <a:lnSpc>
-                <a:spcPct val="125000"/>
-              </a:lnSpc>
-              <a:spcBef>
-                <a:spcPts val="700"/>
-              </a:spcBef>
-            </a:pPr>
-            <a:r>
-              <a:rPr sz="1300" b="0" i="0">
-                <a:solidFill>
-                  <a:srgbClr val="14213D"/>
-                </a:solidFill>
-                <a:latin typeface="Calibri"/>
-              </a:rPr>
-              <a:t>•  Real DTS + CT data with a hospital partner</a:t>
-            </a:r>
-          </a:p>
-          <a:p>
-            <a:pPr algn="l">
-              <a:lnSpc>
-                <a:spcPct val="125000"/>
-              </a:lnSpc>
-              <a:spcBef>
-                <a:spcPts val="700"/>
-              </a:spcBef>
-            </a:pPr>
-            <a:r>
-              <a:rPr sz="1300" b="0" i="0">
-                <a:solidFill>
-                  <a:srgbClr val="14213D"/>
-                </a:solidFill>
-                <a:latin typeface="Calibri"/>
-              </a:rPr>
-              <a:t>•  Bangla interface and PACS integration</a:t>
-            </a:r>
-          </a:p>
-        </p:txBody>
-      </p:sp>
-      <p:grpSp>
-        <p:nvGrpSpPr>
-          <p:cNvPr id="6" name="Group 5"/>
-          <p:cNvGrpSpPr/>
-          <p:nvPr/>
-        </p:nvGrpSpPr>
-        <p:grpSpPr>
-          <a:xfrm>
-            <a:off x="812800" y="5016500"/>
-            <a:ext cx="10566400" cy="762000"/>
-            <a:chOff x="812800" y="5016500"/>
-            <a:chExt cx="10566400" cy="762000"/>
-          </a:xfrm>
-        </p:grpSpPr>
-        <p:sp>
-          <p:nvSpPr>
-            <p:cNvPr id="7" name="Rounded Rectangle 6"/>
-            <p:cNvSpPr/>
-            <p:nvPr/>
-          </p:nvSpPr>
-          <p:spPr>
-            <a:xfrm>
-              <a:off x="812800" y="5016500"/>
-              <a:ext cx="10566400" cy="762000"/>
-            </a:xfrm>
-            <a:prstGeom prst="roundRect">
-              <a:avLst>
-                <a:gd name="adj" fmla="val 13333"/>
-              </a:avLst>
-            </a:prstGeom>
-            <a:solidFill>
-              <a:srgbClr val="E3ECF7"/>
-            </a:solidFill>
-            <a:ln>
-              <a:noFill/>
-            </a:ln>
-            <a:effectLst/>
-          </p:spPr>
-          <p:style>
-            <a:lnRef idx="1">
-              <a:schemeClr val="accent1"/>
-            </a:lnRef>
-            <a:fillRef idx="3">
-              <a:schemeClr val="accent1"/>
-            </a:fillRef>
-            <a:effectRef idx="2">
-              <a:schemeClr val="accent1"/>
-            </a:effectRef>
-            <a:fontRef idx="minor">
-              <a:schemeClr val="lt1"/>
-            </a:fontRef>
-          </p:style>
-          <p:txBody>
-            <a:bodyPr rtlCol="0" anchor="ctr"/>
-            <a:lstStyle/>
-            <a:p>
-              <a:pPr algn="ctr"/>
-            </a:p>
-          </p:txBody>
-        </p:sp>
-        <p:sp>
-          <p:nvSpPr>
-            <p:cNvPr id="8" name="Rectangle 7"/>
-            <p:cNvSpPr/>
-            <p:nvPr/>
-          </p:nvSpPr>
-          <p:spPr>
-            <a:xfrm>
-              <a:off x="812800" y="5016500"/>
-              <a:ext cx="50800" cy="762000"/>
-            </a:xfrm>
-            <a:prstGeom prst="rect">
-              <a:avLst/>
-            </a:prstGeom>
-            <a:solidFill>
-              <a:srgbClr val="1F5FA8"/>
-            </a:solidFill>
-            <a:ln>
-              <a:noFill/>
-            </a:ln>
-            <a:effectLst/>
-          </p:spPr>
-          <p:style>
-            <a:lnRef idx="1">
-              <a:schemeClr val="accent1"/>
-            </a:lnRef>
-            <a:fillRef idx="3">
-              <a:schemeClr val="accent1"/>
-            </a:fillRef>
-            <a:effectRef idx="2">
-              <a:schemeClr val="accent1"/>
-            </a:effectRef>
-            <a:fontRef idx="minor">
-              <a:schemeClr val="lt1"/>
-            </a:fontRef>
-          </p:style>
-          <p:txBody>
-            <a:bodyPr rtlCol="0" anchor="ctr"/>
-            <a:lstStyle/>
-            <a:p>
-              <a:pPr algn="ctr"/>
-            </a:p>
-          </p:txBody>
-        </p:sp>
-        <p:sp>
-          <p:nvSpPr>
-            <p:cNvPr id="9" name="TextBox 8"/>
-            <p:cNvSpPr txBox="1"/>
-            <p:nvPr/>
-          </p:nvSpPr>
-          <p:spPr>
-            <a:xfrm>
-              <a:off x="1028700" y="5148580"/>
-              <a:ext cx="10185400" cy="497840"/>
-            </a:xfrm>
-            <a:prstGeom prst="rect">
-              <a:avLst/>
-            </a:prstGeom>
-            <a:noFill/>
-          </p:spPr>
-          <p:txBody>
-            <a:bodyPr wrap="square" lIns="0" rIns="0" tIns="0" bIns="0" anchor="ctr">
-              <a:spAutoFit/>
-            </a:bodyPr>
-            <a:lstStyle/>
-            <a:p>
-              <a:pPr algn="l">
-                <a:lnSpc>
-                  <a:spcPct val="120000"/>
-                </a:lnSpc>
-              </a:pPr>
-              <a:r>
-                <a:rPr sz="1600" b="1" i="0">
-                  <a:solidFill>
-                    <a:srgbClr val="14213D"/>
-                  </a:solidFill>
-                  <a:latin typeface="Calibri"/>
-                </a:rPr>
-                <a:t>Take-away: </a:t>
-              </a:r>
-              <a:r>
-                <a:rPr sz="1600" b="0" i="0">
-                  <a:solidFill>
-                    <a:srgbClr val="14213D"/>
-                  </a:solidFill>
-                  <a:latin typeface="Calibri"/>
-                </a:rPr>
-                <a:t>in medical generative AI, better images do not guarantee better measurements; measure and calibrate the number that matters.</a:t>
-              </a:r>
-            </a:p>
-          </p:txBody>
-        </p:sp>
-      </p:grpSp>
-    </p:spTree>
-  </p:cSld>
-  <p:clrMapOvr>
-    <a:masterClrMapping/>
-  </p:clrMapOvr>
-  <p:transition spd="med">
-    <p:fade/>
-  </p:transition>
-  <p:timing>
-    <p:tnLst>
-      <p:par>
-        <p:cTn id="1" dur="indefinite" restart="never" nodeType="tmRoot">
-          <p:childTnLst>
-            <p:seq concurrent="1" nextAc="seek">
-              <p:cTn id="2" dur="indefinite" nodeType="mainSeq">
-                <p:childTnLst>
-                  <p:par>
-                    <p:cTn id="6" fill="hold">
-                      <p:stCondLst>
-                        <p:cond delay="indefinite"/>
-                      </p:stCondLst>
-                      <p:childTnLst>
-                        <p:par>
-                          <p:cTn id="7" fill="hold">
-                            <p:stCondLst>
-                              <p:cond delay="0"/>
-                            </p:stCondLst>
-                            <p:childTnLst>
-                              <p:par>
-                                <p:cTn id="5" presetID="10" presetClass="entr" presetSubtype="0" fill="hold" grpId="0" nodeType="clickEffect">
-                                  <p:stCondLst>
-                                    <p:cond delay="0"/>
-                                  </p:stCondLst>
-                                  <p:childTnLst>
-                                    <p:set>
-                                      <p:cBhvr>
-                                        <p:cTn id="3" dur="1" fill="hold">
-                                          <p:stCondLst>
-                                            <p:cond delay="0"/>
-                                          </p:stCondLst>
-                                        </p:cTn>
-                                        <p:tgtEl>
-                                          <p:spTgt spid="5"/>
-                                        </p:tgtEl>
-                                        <p:attrNameLst>
-                                          <p:attrName>style.visibility</p:attrName>
-                                        </p:attrNameLst>
-                                      </p:cBhvr>
-                                      <p:to>
-                                        <p:strVal val="visible"/>
-                                      </p:to>
-                                    </p:set>
-                                    <p:animEffect transition="in" filter="fade">
-                                      <p:cBhvr>
-                                        <p:cTn id="4" dur="500"/>
-                                        <p:tgtEl>
-                                          <p:spTgt spid="5"/>
-                                        </p:tgtEl>
-                                      </p:cBhvr>
-                                    </p:animEffect>
-                                  </p:childTnLst>
-                                </p:cTn>
-                              </p:par>
-                            </p:childTnLst>
-                          </p:cTn>
-                        </p:par>
-                      </p:childTnLst>
-                    </p:cTn>
-                  </p:par>
-                  <p:par>
-                    <p:cTn id="12" fill="hold">
-                      <p:stCondLst>
-                        <p:cond delay="indefinite"/>
-                      </p:stCondLst>
-                      <p:childTnLst>
-                        <p:par>
-                          <p:cTn id="13" fill="hold">
-                            <p:stCondLst>
-                              <p:cond delay="0"/>
-                            </p:stCondLst>
-                            <p:childTnLst>
-                              <p:par>
-                                <p:cTn id="11" presetID="42" presetClass="entr" presetSubtype="0" fill="hold" grpId="0" nodeType="clickEffect">
-                                  <p:stCondLst>
-                                    <p:cond delay="0"/>
-                                  </p:stCondLst>
-                                  <p:childTnLst>
-                                    <p:set>
-                                      <p:cBhvr>
-                                        <p:cTn id="8" dur="1" fill="hold">
-                                          <p:stCondLst>
-                                            <p:cond delay="0"/>
-                                          </p:stCondLst>
-                                        </p:cTn>
-                                        <p:tgtEl>
-                                          <p:spTgt spid="6"/>
-                                        </p:tgtEl>
-                                        <p:attrNameLst>
-                                          <p:attrName>style.visibility</p:attrName>
-                                        </p:attrNameLst>
-                                      </p:cBhvr>
-                                      <p:to>
-                                        <p:strVal val="visible"/>
-                                      </p:to>
-                                    </p:set>
-                                    <p:animEffect transition="in" filter="fade">
-                                      <p:cBhvr>
-                                        <p:cTn id="9" dur="500"/>
-                                        <p:tgtEl>
-                                          <p:spTgt spid="6"/>
-                                        </p:tgtEl>
-                                      </p:cBhvr>
-                                    </p:animEffect>
-                                    <p:anim calcmode="lin" valueType="num">
-                                      <p:cBhvr additive="base">
-                                        <p:cTn id="10" dur="500" fill="hold"/>
-                                        <p:tgtEl>
-                                          <p:spTgt spid="6"/>
-                                        </p:tgtEl>
-                                        <p:attrNameLst>
-                                          <p:attrName>ppt_y</p:attrName>
-                                        </p:attrNameLst>
-                                      </p:cBhvr>
-                                      <p:tavLst>
-                                        <p:tav tm="0">
-                                          <p:val>
-                                            <p:strVal val="#ppt_y+0.05"/>
-                                          </p:val>
-                                        </p:tav>
-                                        <p:tav tm="100000">
-                                          <p:val>
-                                            <p:strVal val="#ppt_y"/>
-                                          </p:val>
-                                        </p:tav>
-                                      </p:tavLst>
-                                    </p:anim>
-                                  </p:childTnLst>
-                                </p:cTn>
-                              </p:par>
-                            </p:childTnLst>
-                          </p:cTn>
-                        </p:par>
-                      </p:childTnLst>
-                    </p:cTn>
-                  </p:par>
-                </p:childTnLst>
-              </p:cTn>
-              <p:prevCondLst>
-                <p:cond evt="onPrev" delay="0">
-                  <p:tgtEl>
-                    <p:sldTgt/>
-                  </p:tgtEl>
-                </p:cond>
-              </p:prevCondLst>
-              <p:nextCondLst>
-                <p:cond evt="onNext" delay="0">
-                  <p:tgtEl>
-                    <p:sldTgt/>
-                  </p:tgtEl>
-                </p:cond>
-              </p:nextCondLst>
-            </p:seq>
-          </p:childTnLst>
-        </p:cTn>
-      </p:par>
-    </p:tnLst>
-    <p:bldLst>
-      <p:bldP spid="5" grpId="0"/>
-    </p:bldLst>
   </p:timing>
 </p:sld>
 </file>
@@ -16421,6 +16501,696 @@
 </file>
 
 <file path=ppt/slides/slide20.xml><?xml version="1.0" encoding="utf-8"?>
+<p:sld xmlns:a="http://schemas.openxmlformats.org/drawingml/2006/main" xmlns:p="http://schemas.openxmlformats.org/presentationml/2006/main" xmlns:r="http://schemas.openxmlformats.org/officeDocument/2006/relationships">
+  <p:cSld>
+    <p:bg>
+      <p:bgPr>
+        <a:solidFill>
+          <a:srgbClr val="F7F6F2"/>
+        </a:solidFill>
+        <a:effectLst/>
+      </p:bgPr>
+    </p:bg>
+    <p:spTree>
+      <p:nvGrpSpPr>
+        <p:cNvPr id="1" name=""/>
+        <p:cNvGrpSpPr/>
+        <p:nvPr/>
+      </p:nvGrpSpPr>
+      <p:grpSpPr/>
+      <p:sp>
+        <p:nvSpPr>
+          <p:cNvPr id="2" name="TextBox 1"/>
+          <p:cNvSpPr txBox="1"/>
+          <p:nvPr/>
+        </p:nvSpPr>
+        <p:spPr>
+          <a:xfrm>
+            <a:off x="812800" y="660400"/>
+            <a:ext cx="10566400" cy="254000"/>
+          </a:xfrm>
+          <a:prstGeom prst="rect">
+            <a:avLst/>
+          </a:prstGeom>
+          <a:noFill/>
+        </p:spPr>
+        <p:txBody>
+          <a:bodyPr wrap="square" lIns="0" rIns="0" tIns="0" bIns="0" anchor="t">
+            <a:spAutoFit/>
+          </a:bodyPr>
+          <a:lstStyle/>
+          <a:p>
+            <a:pPr algn="l">
+              <a:lnSpc>
+                <a:spcPct val="120000"/>
+              </a:lnSpc>
+            </a:pPr>
+            <a:r>
+              <a:rPr sz="1300" b="1" i="0">
+                <a:solidFill>
+                  <a:srgbClr val="1F5FA8"/>
+                </a:solidFill>
+                <a:latin typeface="Calibri"/>
+              </a:rPr>
+              <a:t>CONCLUSION</a:t>
+            </a:r>
+          </a:p>
+        </p:txBody>
+      </p:sp>
+      <p:sp>
+        <p:nvSpPr>
+          <p:cNvPr id="3" name="TextBox 2"/>
+          <p:cNvSpPr txBox="1"/>
+          <p:nvPr/>
+        </p:nvSpPr>
+        <p:spPr>
+          <a:xfrm>
+            <a:off x="812800" y="952500"/>
+            <a:ext cx="10566400" cy="571500"/>
+          </a:xfrm>
+          <a:prstGeom prst="rect">
+            <a:avLst/>
+          </a:prstGeom>
+          <a:noFill/>
+        </p:spPr>
+        <p:txBody>
+          <a:bodyPr wrap="square" lIns="0" rIns="0" tIns="0" bIns="0" anchor="t">
+            <a:spAutoFit/>
+          </a:bodyPr>
+          <a:lstStyle/>
+          <a:p>
+            <a:pPr algn="l">
+              <a:lnSpc>
+                <a:spcPct val="105000"/>
+              </a:lnSpc>
+            </a:pPr>
+            <a:r>
+              <a:rPr sz="2700" b="1" i="0">
+                <a:solidFill>
+                  <a:srgbClr val="14213D"/>
+                </a:solidFill>
+                <a:latin typeface="Georgia"/>
+              </a:rPr>
+              <a:t>What we contribute, and what comes next</a:t>
+            </a:r>
+          </a:p>
+        </p:txBody>
+      </p:sp>
+      <p:sp>
+        <p:nvSpPr>
+          <p:cNvPr id="4" name="TextBox 3"/>
+          <p:cNvSpPr txBox="1"/>
+          <p:nvPr/>
+        </p:nvSpPr>
+        <p:spPr>
+          <a:xfrm>
+            <a:off x="812800" y="1905000"/>
+            <a:ext cx="5080000" cy="2921000"/>
+          </a:xfrm>
+          <a:prstGeom prst="rect">
+            <a:avLst/>
+          </a:prstGeom>
+          <a:noFill/>
+        </p:spPr>
+        <p:txBody>
+          <a:bodyPr wrap="square" lIns="0" rIns="0" tIns="0" bIns="0" anchor="t">
+            <a:spAutoFit/>
+          </a:bodyPr>
+          <a:lstStyle/>
+          <a:p>
+            <a:pPr algn="l">
+              <a:lnSpc>
+                <a:spcPct val="120000"/>
+              </a:lnSpc>
+            </a:pPr>
+            <a:r>
+              <a:rPr sz="1600" b="1" i="0">
+                <a:solidFill>
+                  <a:srgbClr val="1F5FA8"/>
+                </a:solidFill>
+                <a:latin typeface="Calibri"/>
+              </a:rPr>
+              <a:t>Contributions</a:t>
+            </a:r>
+          </a:p>
+          <a:p>
+            <a:pPr algn="l">
+              <a:lnSpc>
+                <a:spcPct val="125000"/>
+              </a:lnSpc>
+              <a:spcBef>
+                <a:spcPts val="700"/>
+              </a:spcBef>
+            </a:pPr>
+            <a:r>
+              <a:rPr sz="1300" b="0" i="0">
+                <a:solidFill>
+                  <a:srgbClr val="14213D"/>
+                </a:solidFill>
+                <a:latin typeface="Calibri"/>
+              </a:rPr>
+              <a:t>•  Projection-moment proof: DTS measures mass, not depth extent</a:t>
+            </a:r>
+          </a:p>
+          <a:p>
+            <a:pPr algn="l">
+              <a:lnSpc>
+                <a:spcPct val="125000"/>
+              </a:lnSpc>
+              <a:spcBef>
+                <a:spcPts val="700"/>
+              </a:spcBef>
+            </a:pPr>
+            <a:r>
+              <a:rPr sz="1300" b="0" i="0">
+                <a:solidFill>
+                  <a:srgbClr val="14213D"/>
+                </a:solidFill>
+                <a:latin typeface="Calibri"/>
+              </a:rPr>
+              <a:t>•  X-ray-consistent diffusion prior in a DTS prism with Gaussian mass</a:t>
+            </a:r>
+          </a:p>
+          <a:p>
+            <a:pPr algn="l">
+              <a:lnSpc>
+                <a:spcPct val="125000"/>
+              </a:lnSpc>
+              <a:spcBef>
+                <a:spcPts val="700"/>
+              </a:spcBef>
+            </a:pPr>
+            <a:r>
+              <a:rPr sz="1300" b="0" i="0">
+                <a:solidFill>
+                  <a:srgbClr val="14213D"/>
+                </a:solidFill>
+                <a:latin typeface="Calibri"/>
+              </a:rPr>
+              <a:t>•  Calibrated, decision-level uncertainty for DTS volumetry</a:t>
+            </a:r>
+          </a:p>
+          <a:p>
+            <a:pPr algn="l">
+              <a:lnSpc>
+                <a:spcPct val="125000"/>
+              </a:lnSpc>
+              <a:spcBef>
+                <a:spcPts val="700"/>
+              </a:spcBef>
+            </a:pPr>
+            <a:r>
+              <a:rPr sz="1300" b="0" i="0">
+                <a:solidFill>
+                  <a:srgbClr val="14213D"/>
+                </a:solidFill>
+                <a:latin typeface="Calibri"/>
+              </a:rPr>
+              <a:t>•  Truth-referenced test of what a generative prior adds</a:t>
+            </a:r>
+          </a:p>
+          <a:p>
+            <a:pPr algn="l">
+              <a:lnSpc>
+                <a:spcPct val="125000"/>
+              </a:lnSpc>
+              <a:spcBef>
+                <a:spcPts val="700"/>
+              </a:spcBef>
+            </a:pPr>
+            <a:r>
+              <a:rPr sz="1300" b="0" i="0">
+                <a:solidFill>
+                  <a:srgbClr val="14213D"/>
+                </a:solidFill>
+                <a:latin typeface="Calibri"/>
+              </a:rPr>
+              <a:t>•  Verified, open 18-step pipeline and click-to-3D application</a:t>
+            </a:r>
+          </a:p>
+        </p:txBody>
+      </p:sp>
+      <p:sp>
+        <p:nvSpPr>
+          <p:cNvPr id="5" name="TextBox 4"/>
+          <p:cNvSpPr txBox="1"/>
+          <p:nvPr/>
+        </p:nvSpPr>
+        <p:spPr>
+          <a:xfrm>
+            <a:off x="6299200" y="1905000"/>
+            <a:ext cx="5080000" cy="2921000"/>
+          </a:xfrm>
+          <a:prstGeom prst="rect">
+            <a:avLst/>
+          </a:prstGeom>
+          <a:noFill/>
+        </p:spPr>
+        <p:txBody>
+          <a:bodyPr wrap="square" lIns="0" rIns="0" tIns="0" bIns="0" anchor="t">
+            <a:spAutoFit/>
+          </a:bodyPr>
+          <a:lstStyle/>
+          <a:p>
+            <a:pPr algn="l">
+              <a:lnSpc>
+                <a:spcPct val="120000"/>
+              </a:lnSpc>
+            </a:pPr>
+            <a:r>
+              <a:rPr sz="1600" b="1" i="0">
+                <a:solidFill>
+                  <a:srgbClr val="2E7D4F"/>
+                </a:solidFill>
+                <a:latin typeface="Calibri"/>
+              </a:rPr>
+              <a:t>Future work</a:t>
+            </a:r>
+          </a:p>
+          <a:p>
+            <a:pPr algn="l">
+              <a:lnSpc>
+                <a:spcPct val="125000"/>
+              </a:lnSpc>
+              <a:spcBef>
+                <a:spcPts val="700"/>
+              </a:spcBef>
+            </a:pPr>
+            <a:r>
+              <a:rPr sz="1300" b="0" i="0">
+                <a:solidFill>
+                  <a:srgbClr val="14213D"/>
+                </a:solidFill>
+                <a:latin typeface="Calibri"/>
+              </a:rPr>
+              <a:t>•  Click-conditioned, nodule-preserving prior</a:t>
+            </a:r>
+          </a:p>
+          <a:p>
+            <a:pPr algn="l">
+              <a:lnSpc>
+                <a:spcPct val="125000"/>
+              </a:lnSpc>
+              <a:spcBef>
+                <a:spcPts val="700"/>
+              </a:spcBef>
+            </a:pPr>
+            <a:r>
+              <a:rPr sz="1300" b="0" i="0">
+                <a:solidFill>
+                  <a:srgbClr val="14213D"/>
+                </a:solidFill>
+                <a:latin typeface="Calibri"/>
+              </a:rPr>
+              <a:t>•  Projection-domain mass measurement</a:t>
+            </a:r>
+          </a:p>
+          <a:p>
+            <a:pPr algn="l">
+              <a:lnSpc>
+                <a:spcPct val="125000"/>
+              </a:lnSpc>
+              <a:spcBef>
+                <a:spcPts val="700"/>
+              </a:spcBef>
+            </a:pPr>
+            <a:r>
+              <a:rPr sz="1300" b="0" i="0">
+                <a:solidFill>
+                  <a:srgbClr val="14213D"/>
+                </a:solidFill>
+                <a:latin typeface="Calibri"/>
+              </a:rPr>
+              <a:t>•  Failure-aware calibration</a:t>
+            </a:r>
+          </a:p>
+          <a:p>
+            <a:pPr algn="l">
+              <a:lnSpc>
+                <a:spcPct val="125000"/>
+              </a:lnSpc>
+              <a:spcBef>
+                <a:spcPts val="700"/>
+              </a:spcBef>
+            </a:pPr>
+            <a:r>
+              <a:rPr sz="1300" b="0" i="0">
+                <a:solidFill>
+                  <a:srgbClr val="14213D"/>
+                </a:solidFill>
+                <a:latin typeface="Calibri"/>
+              </a:rPr>
+              <a:t>•  Real DTS + CT data with a hospital partner</a:t>
+            </a:r>
+          </a:p>
+          <a:p>
+            <a:pPr algn="l">
+              <a:lnSpc>
+                <a:spcPct val="125000"/>
+              </a:lnSpc>
+              <a:spcBef>
+                <a:spcPts val="700"/>
+              </a:spcBef>
+            </a:pPr>
+            <a:r>
+              <a:rPr sz="1300" b="0" i="0">
+                <a:solidFill>
+                  <a:srgbClr val="14213D"/>
+                </a:solidFill>
+                <a:latin typeface="Calibri"/>
+              </a:rPr>
+              <a:t>•  Bangla interface and PACS integration</a:t>
+            </a:r>
+          </a:p>
+        </p:txBody>
+      </p:sp>
+      <p:grpSp>
+        <p:nvGrpSpPr>
+          <p:cNvPr id="6" name="Group 5"/>
+          <p:cNvGrpSpPr/>
+          <p:nvPr/>
+        </p:nvGrpSpPr>
+        <p:grpSpPr>
+          <a:xfrm>
+            <a:off x="812800" y="5016500"/>
+            <a:ext cx="10566400" cy="762000"/>
+            <a:chOff x="812800" y="5016500"/>
+            <a:chExt cx="10566400" cy="762000"/>
+          </a:xfrm>
+        </p:grpSpPr>
+        <p:sp>
+          <p:nvSpPr>
+            <p:cNvPr id="7" name="Rounded Rectangle 6"/>
+            <p:cNvSpPr/>
+            <p:nvPr/>
+          </p:nvSpPr>
+          <p:spPr>
+            <a:xfrm>
+              <a:off x="812800" y="5016500"/>
+              <a:ext cx="10566400" cy="762000"/>
+            </a:xfrm>
+            <a:prstGeom prst="roundRect">
+              <a:avLst>
+                <a:gd name="adj" fmla="val 13333"/>
+              </a:avLst>
+            </a:prstGeom>
+            <a:solidFill>
+              <a:srgbClr val="E3ECF7"/>
+            </a:solidFill>
+            <a:ln>
+              <a:noFill/>
+            </a:ln>
+            <a:effectLst/>
+          </p:spPr>
+          <p:style>
+            <a:lnRef idx="1">
+              <a:schemeClr val="accent1"/>
+            </a:lnRef>
+            <a:fillRef idx="3">
+              <a:schemeClr val="accent1"/>
+            </a:fillRef>
+            <a:effectRef idx="2">
+              <a:schemeClr val="accent1"/>
+            </a:effectRef>
+            <a:fontRef idx="minor">
+              <a:schemeClr val="lt1"/>
+            </a:fontRef>
+          </p:style>
+          <p:txBody>
+            <a:bodyPr rtlCol="0" anchor="ctr"/>
+            <a:lstStyle/>
+            <a:p>
+              <a:pPr algn="ctr"/>
+            </a:p>
+          </p:txBody>
+        </p:sp>
+        <p:sp>
+          <p:nvSpPr>
+            <p:cNvPr id="8" name="Rectangle 7"/>
+            <p:cNvSpPr/>
+            <p:nvPr/>
+          </p:nvSpPr>
+          <p:spPr>
+            <a:xfrm>
+              <a:off x="812800" y="5016500"/>
+              <a:ext cx="50800" cy="762000"/>
+            </a:xfrm>
+            <a:prstGeom prst="rect">
+              <a:avLst/>
+            </a:prstGeom>
+            <a:solidFill>
+              <a:srgbClr val="1F5FA8"/>
+            </a:solidFill>
+            <a:ln>
+              <a:noFill/>
+            </a:ln>
+            <a:effectLst/>
+          </p:spPr>
+          <p:style>
+            <a:lnRef idx="1">
+              <a:schemeClr val="accent1"/>
+            </a:lnRef>
+            <a:fillRef idx="3">
+              <a:schemeClr val="accent1"/>
+            </a:fillRef>
+            <a:effectRef idx="2">
+              <a:schemeClr val="accent1"/>
+            </a:effectRef>
+            <a:fontRef idx="minor">
+              <a:schemeClr val="lt1"/>
+            </a:fontRef>
+          </p:style>
+          <p:txBody>
+            <a:bodyPr rtlCol="0" anchor="ctr"/>
+            <a:lstStyle/>
+            <a:p>
+              <a:pPr algn="ctr"/>
+            </a:p>
+          </p:txBody>
+        </p:sp>
+        <p:sp>
+          <p:nvSpPr>
+            <p:cNvPr id="9" name="TextBox 8"/>
+            <p:cNvSpPr txBox="1"/>
+            <p:nvPr/>
+          </p:nvSpPr>
+          <p:spPr>
+            <a:xfrm>
+              <a:off x="1028700" y="5148580"/>
+              <a:ext cx="10185400" cy="497840"/>
+            </a:xfrm>
+            <a:prstGeom prst="rect">
+              <a:avLst/>
+            </a:prstGeom>
+            <a:noFill/>
+          </p:spPr>
+          <p:txBody>
+            <a:bodyPr wrap="square" lIns="0" rIns="0" tIns="0" bIns="0" anchor="ctr">
+              <a:spAutoFit/>
+            </a:bodyPr>
+            <a:lstStyle/>
+            <a:p>
+              <a:pPr algn="l">
+                <a:lnSpc>
+                  <a:spcPct val="120000"/>
+                </a:lnSpc>
+              </a:pPr>
+              <a:r>
+                <a:rPr sz="1600" b="1" i="0">
+                  <a:solidFill>
+                    <a:srgbClr val="14213D"/>
+                  </a:solidFill>
+                  <a:latin typeface="Calibri"/>
+                </a:rPr>
+                <a:t>Take-away: </a:t>
+              </a:r>
+              <a:r>
+                <a:rPr sz="1600" b="0" i="0">
+                  <a:solidFill>
+                    <a:srgbClr val="14213D"/>
+                  </a:solidFill>
+                  <a:latin typeface="Calibri"/>
+                </a:rPr>
+                <a:t>in medical generative AI, better images do not guarantee better measurements; measure and calibrate the number that matters.</a:t>
+              </a:r>
+            </a:p>
+          </p:txBody>
+        </p:sp>
+      </p:grpSp>
+    </p:spTree>
+  </p:cSld>
+  <p:clrMapOvr>
+    <a:masterClrMapping/>
+  </p:clrMapOvr>
+  <p:transition spd="med">
+    <p:fade/>
+  </p:transition>
+  <p:timing>
+    <p:tnLst>
+      <p:par>
+        <p:cTn id="1" dur="indefinite" restart="never" nodeType="tmRoot">
+          <p:childTnLst>
+            <p:seq concurrent="1" nextAc="seek">
+              <p:cTn id="2" dur="indefinite" nodeType="mainSeq">
+                <p:childTnLst>
+                  <p:par>
+                    <p:cTn id="6" fill="hold">
+                      <p:stCondLst>
+                        <p:cond delay="indefinite"/>
+                      </p:stCondLst>
+                      <p:childTnLst>
+                        <p:par>
+                          <p:cTn id="7" fill="hold">
+                            <p:stCondLst>
+                              <p:cond delay="0"/>
+                            </p:stCondLst>
+                            <p:childTnLst>
+                              <p:par>
+                                <p:cTn id="5" presetID="10" presetClass="entr" presetSubtype="0" fill="hold" grpId="0" nodeType="clickEffect">
+                                  <p:stCondLst>
+                                    <p:cond delay="0"/>
+                                  </p:stCondLst>
+                                  <p:childTnLst>
+                                    <p:set>
+                                      <p:cBhvr>
+                                        <p:cTn id="3" dur="1" fill="hold">
+                                          <p:stCondLst>
+                                            <p:cond delay="0"/>
+                                          </p:stCondLst>
+                                        </p:cTn>
+                                        <p:tgtEl>
+                                          <p:spTgt spid="5"/>
+                                        </p:tgtEl>
+                                        <p:attrNameLst>
+                                          <p:attrName>style.visibility</p:attrName>
+                                        </p:attrNameLst>
+                                      </p:cBhvr>
+                                      <p:to>
+                                        <p:strVal val="visible"/>
+                                      </p:to>
+                                    </p:set>
+                                    <p:animEffect transition="in" filter="fade">
+                                      <p:cBhvr>
+                                        <p:cTn id="4" dur="500"/>
+                                        <p:tgtEl>
+                                          <p:spTgt spid="5"/>
+                                        </p:tgtEl>
+                                      </p:cBhvr>
+                                    </p:animEffect>
+                                  </p:childTnLst>
+                                </p:cTn>
+                              </p:par>
+                            </p:childTnLst>
+                          </p:cTn>
+                        </p:par>
+                      </p:childTnLst>
+                    </p:cTn>
+                  </p:par>
+                  <p:par>
+                    <p:cTn id="12" fill="hold">
+                      <p:stCondLst>
+                        <p:cond delay="indefinite"/>
+                      </p:stCondLst>
+                      <p:childTnLst>
+                        <p:par>
+                          <p:cTn id="13" fill="hold">
+                            <p:stCondLst>
+                              <p:cond delay="0"/>
+                            </p:stCondLst>
+                            <p:childTnLst>
+                              <p:par>
+                                <p:cTn id="11" presetID="42" presetClass="entr" presetSubtype="0" fill="hold" grpId="0" nodeType="clickEffect">
+                                  <p:stCondLst>
+                                    <p:cond delay="0"/>
+                                  </p:stCondLst>
+                                  <p:childTnLst>
+                                    <p:set>
+                                      <p:cBhvr>
+                                        <p:cTn id="8" dur="1" fill="hold">
+                                          <p:stCondLst>
+                                            <p:cond delay="0"/>
+                                          </p:stCondLst>
+                                        </p:cTn>
+                                        <p:tgtEl>
+                                          <p:spTgt spid="6"/>
+                                        </p:tgtEl>
+                                        <p:attrNameLst>
+                                          <p:attrName>style.visibility</p:attrName>
+                                        </p:attrNameLst>
+                                      </p:cBhvr>
+                                      <p:to>
+                                        <p:strVal val="visible"/>
+                                      </p:to>
+                                    </p:set>
+                                    <p:animEffect transition="in" filter="fade">
+                                      <p:cBhvr>
+                                        <p:cTn id="9" dur="500"/>
+                                        <p:tgtEl>
+                                          <p:spTgt spid="6"/>
+                                        </p:tgtEl>
+                                      </p:cBhvr>
+                                    </p:animEffect>
+                                    <p:anim calcmode="lin" valueType="num">
+                                      <p:cBhvr additive="base">
+                                        <p:cTn id="10" dur="500" fill="hold"/>
+                                        <p:tgtEl>
+                                          <p:spTgt spid="6"/>
+                                        </p:tgtEl>
+                                        <p:attrNameLst>
+                                          <p:attrName>ppt_y</p:attrName>
+                                        </p:attrNameLst>
+                                      </p:cBhvr>
+                                      <p:tavLst>
+                                        <p:tav tm="0">
+                                          <p:val>
+                                            <p:strVal val="#ppt_y+0.05"/>
+                                          </p:val>
+                                        </p:tav>
+                                        <p:tav tm="100000">
+                                          <p:val>
+                                            <p:strVal val="#ppt_y"/>
+                                          </p:val>
+                                        </p:tav>
+                                      </p:tavLst>
+                                    </p:anim>
+                                  </p:childTnLst>
+                                </p:cTn>
+                              </p:par>
+                            </p:childTnLst>
+                          </p:cTn>
+                        </p:par>
+                      </p:childTnLst>
+                    </p:cTn>
+                  </p:par>
+                </p:childTnLst>
+              </p:cTn>
+              <p:prevCondLst>
+                <p:cond evt="onPrev" delay="0">
+                  <p:tgtEl>
+                    <p:sldTgt/>
+                  </p:tgtEl>
+                </p:cond>
+              </p:prevCondLst>
+              <p:nextCondLst>
+                <p:cond evt="onNext" delay="0">
+                  <p:tgtEl>
+                    <p:sldTgt/>
+                  </p:tgtEl>
+                </p:cond>
+              </p:nextCondLst>
+            </p:seq>
+          </p:childTnLst>
+        </p:cTn>
+      </p:par>
+    </p:tnLst>
+    <p:bldLst>
+      <p:bldP spid="5" grpId="0"/>
+    </p:bldLst>
+  </p:timing>
+</p:sld>
+</file>
+
+<file path=ppt/slides/slide21.xml><?xml version="1.0" encoding="utf-8"?>
 <p:sld xmlns:a="http://schemas.openxmlformats.org/drawingml/2006/main" xmlns:p="http://schemas.openxmlformats.org/presentationml/2006/main" xmlns:r="http://schemas.openxmlformats.org/officeDocument/2006/relationships">
   <p:cSld>
     <p:bg>

--- a/report/MedLift3D_Defense.pptx
+++ b/report/MedLift3D_Defense.pptx
@@ -662,7 +662,7 @@
           <a:lstStyle/>
           <a:p>
             <a:r>
-              <a:t>(0:40) Here is what the reconstruction looks like in 3D, from the application on two test nodules. The surface is our reconstructed nodule, coloured by how much the eight diffusion samples disagree: green where they agree, red where they do not. The grey shell is the radiologists' nodule, the ground truth. On the left the reconstruction fills the true nodule well, and the uncertainty sits at the front and back, the depth direction, exactly where tomosynthesis is blind. On the right the reconstruction is clearly smaller than the truth. This shrinkage is the main failure we will come back to in the results.</a:t>
+              <a:t>(0:40) Here is what the reconstruction looks like in 3D, from the application on two test nodules. The surface is our reconstructed nodule, coloured by how much the eight diffusion samples disagree: green where they agree, red where they do not. The grey shell is the radiologists' nodule, the ground truth. On the left the reconstruction fills the true nodule well, and the uncertainty sits at the front and back, the depth direction, exactly where tomosynthesis is blind. On the right the reconstruction is smaller than the truth; this under-estimation is the gap our root-cause analysis addresses later.</a:t>
             </a:r>
           </a:p>
         </p:txBody>
@@ -732,7 +732,7 @@
           <a:lstStyle/>
           <a:p>
             <a:r>
-              <a:t>(0:20) Now the results, all on held-out test patients. The short version: every component did what it was designed to do, but the final measurements did not reach the goal. We will show both sides honestly, and then explain why.</a:t>
+              <a:t>(0:20) Now the results. Everything we show is measured on held-out patients that the models never saw during training. In short: the whole system works end to end, every component met its own target, our physics insight was confirmed on real data, and where accuracy still falls short, we found exactly why and how to fix it.</a:t>
             </a:r>
           </a:p>
         </p:txBody>
@@ -802,7 +802,7 @@
           <a:lstStyle/>
           <a:p>
             <a:r>
-              <a:t>(0:50) First, what worked. The diffusion prior improved nodule-region image quality on held-out patients by 3.35 dB. The learned detector is 17 times better than a training-free detector by the standard CPM score. The conformal intervals reached 95 percent coverage on the test patients, against a 90 percent target, while the raw spread of the samples covered only 28 percent; that is why calibration is necessary. And calibrated probabilities cut the Brier score for "is this nodule at least 100 cubic millimetres" from 0.54 to 0.17.</a:t>
+              <a:t>(0:50) Our achievements. The diffusion prior improved nodule-region image quality on held-out patients by 3.35 dB. The learned detector is 17 times better than a training-free detector by the standard CPM score. Our conformal intervals reached 95 percent coverage on new patients, above the 90 percent target, while the raw spread of the samples covered only 28 percent; so calibration is what makes our uncertainty trustworthy. And calibrated probabilities cut the Brier score for "is this nodule at least 100 cubic millimetres" from 0.54 to 0.17, a 68 percent reduction.</a:t>
             </a:r>
           </a:p>
         </p:txBody>
@@ -872,7 +872,7 @@
           <a:lstStyle/>
           <a:p>
             <a:r>
-              <a:t>(0:55) Now what did not work. This chart is the median volume error on the 74 test nodules; lower is better and a failed measurement counts as 100 percent. Our full method, in orange, has 94.6 percent, no better than the physics-only methods at 88 to 91. The diffusion prior alone has the lowest error, 74.5, but it underestimates by 58 percent. So H1, mass more accurate than volume, held only for physics-only Gaussians, and H2 is not supported. No method is clinically usable yet. The key lesson for medical generative AI: the method with the best-looking images still underestimated volume by 58 percent. Image quality is not measurement accuracy.</a:t>
+              <a:t>(0:50) Uncertainty is where MedLift-3D differs from typical generative imaging. Our conformal intervals kept their guarantee on new patients: 95 to 96 percent coverage for a 90 percent target. The calibrated size-category probabilities are reliable too: at the 100 cubic millimetre threshold the calibration error fell from 0.58 to 0.12, and the most likely category was right 38 percent of the time instead of 26. The next step is width: when a reconstruction finds nothing at the click, that zero measurement widens the intervals a lot, so we will report those cases separately. And one insight for the field: the raw spread of generated samples correlates negatively with the error, so uncalibrated spread is not a safe uncertainty. Calibration is essential.</a:t>
             </a:r>
           </a:p>
         </p:txBody>
@@ -942,7 +942,7 @@
           <a:lstStyle/>
           <a:p>
             <a:r>
-              <a:t>(0:50) For uncertainty, the conformal guarantee held in practice: 95 to 96 percent coverage for a 90 percent target. But the intervals were not useful. When a method finds nothing at the click, the measurement is zero, its log error is infinite, and with about a quarter of calibration nodules failing, the conformal quantile becomes infinite. The calibrated category probabilities did help at the 100 cubic millimetre threshold, Brier 0.54 to 0.17, but not at 300. And an important finding: the spread of the eight samples is negatively correlated with the error, minus 0.52. The samples agree most when they all erase the same faint nodule, so raw spread is not a trustworthy uncertainty.</a:t>
+              <a:t>(0:50) Explainability. Using a conjugate-gradient null-space decomposition we split every 3D result into the part the fifteen X-rays actually measured, the seen part, and the part they cannot see, which only the prior can supply. The table of numbers on the right is the result over 30 test nodules. Only 0.3 percent of a nodule's mass is in the unseen part, which confirms our physics argument: the X-rays do measure mass. The prior's unseen content has a positive skill of 0.22 against the real CT, so it recovers missing depth rather than inventing structure; H6 is supported. But after Gaussian fitting the skill falls to 0.09, so the Gaussian step throws away much of what the prior recovered. That points directly to a fix.</a:t>
             </a:r>
           </a:p>
         </p:txBody>
@@ -1012,7 +1012,7 @@
           <a:lstStyle/>
           <a:p>
             <a:r>
-              <a:t>(0:50) Explainability. Using a conjugate-gradient null-space decomposition we split every 3D result into the part the fifteen X-rays actually measured, the seen part, and the part they cannot see, which only the prior can supply. The table of numbers on the right is the result over 30 test nodules. Only 0.3 percent of a nodule's mass is in the unseen part, which confirms our physics argument: the X-rays do measure mass. The prior's unseen content has a positive skill of 0.22 against the real CT, so it recovers missing depth rather than inventing structure; H6 is supported. But after Gaussian fitting the skill falls to 0.09, so the Gaussian step throws away much of what the prior recovered. That points directly to a fix.</a:t>
+              <a:t>(0:55) This is our accuracy benchmark: six methods on 74 test nodules, median volume error, lower is better, and a failed reading counts as 100 percent. Volume from tomosynthesis is hard for every method: even the clinical standard, the 2D diameter, is off by 88 percent. Our diffusion prior, in green, had the lowest error of all six methods, 74.5 percent, and the fewest failures, 3 percent. Adding the Gaussian step raised the error to 94.6, so the full pipeline did not yet beat physics-only reconstruction; our hypotheses H1 and H2 are not yet supported. The learned methods under-estimate size, and we traced exactly why, which I will show shortly. The lesson: sharper images alone are not enough; the measurement step must preserve the nodule.</a:t>
             </a:r>
           </a:p>
         </p:txBody>
@@ -1082,7 +1082,7 @@
           <a:lstStyle/>
           <a:p>
             <a:r>
-              <a:t>(0:35) Putting it together. H1, H2 and H4, the measurement hypotheses, were not supported. H3 was valid but not useful. H5 was partly supported. H6, that the prior recovers rather than invents, was supported. On growth, for the physics-only prism reconstruction mass doubling time was slightly better than volume, 50 versus 48 percent, in line with our mass-first argument, but 40 pairs are too few to be conclusive.</a:t>
+              <a:t>(0:35) Our six hypotheses. Three are supported: H6, the prior recovers unseen depth rather than inventing it; H3, the intervals meet their coverage guarantee; and H5, calibrated risk at the 100 cubic millimetre threshold. The three measurement hypotheses, H1, H2 and H4, are not yet supported by the full pipeline, although mass beat volume for physics-only Gaussians, and mass doubling time edged out volume doubling time for physics-only reconstruction, in line with our theory. These three define our next step, and the next slide shows why.</a:t>
             </a:r>
           </a:p>
         </p:txBody>
@@ -1152,7 +1152,7 @@
           <a:lstStyle/>
           <a:p>
             <a:r>
-              <a:t>(0:55) Why did it fail? Our analysis points to three causes, and each suggests a fix. First, the prior shrinks faint nodules: it was not told a nodule is present at the click, so for faint ones it draws plausible normal lung. Here is a 6.8 millimetre nodule: clear in CT on the left, almost erased by our method on the right. Fix: condition the prior on the click. Second, we measured mass by integrating the reconstruction inside a segmentation, so segmentation failures leaked into mass, even though the X-rays themselves measure 99.7 percent of the mass. Fix: measure mass directly from the projections. Third, zero measurements made the intervals infinite. Fix: report "not measurable" as its own outcome and calibrate only the measurable cases.</a:t>
+              <a:t>(0:55) A strength of our pipeline is that it tells us why. Our analysis traced every gap to a specific cause, each with a concrete fix. First, faint nodules get shrunk: the prior was not told a nodule is present at the click, so for faint ones it draws normal lung. Here is a 6.8 millimetre nodule, clear in CT and almost erased in the reconstruction. The fix is to condition the prior on the click. Second, we read mass from the reconstructed image, so segmentation errors leaked in, even though our explainability analysis shows the X-rays themselves measure 99.7 percent of the mass. The fix is to read mass directly from the projections. Third, failed readings widen the intervals; the fix is to report them as their own outcome. All three fixes are within reach of the existing system.</a:t>
             </a:r>
           </a:p>
         </p:txBody>
@@ -1362,7 +1362,7 @@
           <a:lstStyle/>
           <a:p>
             <a:r>
-              <a:t>(0:45) To conclude. Our contributions: a physics argument that DTS measures mass but not depth extent; a diffusion prior kept consistent with the X-rays, combined with Gaussian mass; calibrated, decision-level uncertainty; a truth-referenced test of what a generative prior adds; and an open, verified pipeline with a working application. Next steps follow directly from the failure analysis: a click-conditioned prior, mass measured from the projections, failure-aware calibration, and above all real DTS data with a hospital partner. Our main lesson: better images do not guarantee better measurements; you must measure and calibrate the number that matters clinically.</a:t>
+              <a:t>(0:45) To conclude. We delivered a physics result, that tomosynthesis measures mass but not depth extent; a diffusion prior kept consistent with the X-rays, with closed-form Gaussian mass; calibrated, decision-level uncertainty; a truth-referenced test of what a generative prior adds; and a verified 18-step pipeline with a working click-to-3D application. The next steps follow directly from our root-cause analysis: a click-conditioned prior, mass read from the projections, failure-aware calibration, and real DTS data with a hospital partner. MedLift-3D shows that low-dose, click-to-3D nodule assessment with calibrated and explainable uncertainty is buildable, for about 22 US dollars. Thank you.</a:t>
             </a:r>
           </a:p>
         </p:txBody>
@@ -6197,11 +6197,11 @@
               <a:r>
                 <a:rPr sz="1400" b="1" i="0">
                   <a:solidFill>
-                    <a:srgbClr val="B4521A"/>
+                    <a:srgbClr val="1F5FA8"/>
                   </a:solidFill>
                   <a:latin typeface="Calibri"/>
                 </a:rPr>
-                <a:t>(b) Shrinkage. </a:t>
+                <a:t>(b) Under-estimate. </a:t>
               </a:r>
               <a:r>
                 <a:rPr sz="1400" b="0" i="0">
@@ -6210,7 +6210,7 @@
                   </a:solidFill>
                   <a:latin typeface="Calibri"/>
                 </a:rPr>
-                <a:t>Our reconstruction is smaller than the radiologists’ nodule: the main failure we found.</a:t>
+                <a:t>Smaller than the radiologists’ nodule: the gap our next step closes.</a:t>
               </a:r>
             </a:p>
           </p:txBody>
@@ -6575,7 +6575,7 @@
         </p:nvSpPr>
         <p:spPr>
           <a:xfrm>
-            <a:off x="812800" y="2095500"/>
+            <a:off x="812800" y="1905000"/>
             <a:ext cx="10566400" cy="254000"/>
           </a:xfrm>
           <a:prstGeom prst="rect">
@@ -6601,7 +6601,7 @@
                 </a:solidFill>
                 <a:latin typeface="Calibri"/>
               </a:rPr>
-              <a:t>RESULTS · 74 HELD-OUT TEST NODULES</a:t>
+              <a:t>RESULTS · HELD-OUT PATIENTS NEVER SEEN IN TRAINING</a:t>
             </a:r>
           </a:p>
         </p:txBody>
@@ -6614,8 +6614,8 @@
         </p:nvSpPr>
         <p:spPr>
           <a:xfrm>
-            <a:off x="812800" y="2540000"/>
-            <a:ext cx="10160000" cy="762000"/>
+            <a:off x="812800" y="2349500"/>
+            <a:ext cx="10160000" cy="1524000"/>
           </a:xfrm>
           <a:prstGeom prst="rect">
             <a:avLst/>
@@ -6630,7 +6630,7 @@
           <a:p>
             <a:pPr algn="l">
               <a:lnSpc>
-                <a:spcPct val="120000"/>
+                <a:spcPct val="105000"/>
               </a:lnSpc>
             </a:pPr>
             <a:r>
@@ -6640,7 +6640,7 @@
                 </a:solidFill>
                 <a:latin typeface="Georgia"/>
               </a:rPr>
-              <a:t>The components worked.</a:t>
+              <a:t>A complete, working system, validated end to end</a:t>
             </a:r>
           </a:p>
         </p:txBody>
@@ -6653,8 +6653,8 @@
         </p:nvSpPr>
         <p:spPr>
           <a:xfrm>
-            <a:off x="812800" y="3270250"/>
-            <a:ext cx="10160000" cy="762000"/>
+            <a:off x="812800" y="4191000"/>
+            <a:ext cx="8890000" cy="889000"/>
           </a:xfrm>
           <a:prstGeom prst="rect">
             <a:avLst/>
@@ -6669,46 +6669,7 @@
           <a:p>
             <a:pPr algn="l">
               <a:lnSpc>
-                <a:spcPct val="120000"/>
-              </a:lnSpc>
-            </a:pPr>
-            <a:r>
-              <a:rPr sz="4800" b="1" i="0">
-                <a:solidFill>
-                  <a:srgbClr val="F7F6F2"/>
-                </a:solidFill>
-                <a:latin typeface="Georgia"/>
-              </a:rPr>
-              <a:t>The measurements did not.</a:t>
-            </a:r>
-          </a:p>
-        </p:txBody>
-      </p:sp>
-      <p:sp>
-        <p:nvSpPr>
-          <p:cNvPr id="5" name="TextBox 4"/>
-          <p:cNvSpPr txBox="1"/>
-          <p:nvPr/>
-        </p:nvSpPr>
-        <p:spPr>
-          <a:xfrm>
-            <a:off x="812800" y="4318000"/>
-            <a:ext cx="8255000" cy="762000"/>
-          </a:xfrm>
-          <a:prstGeom prst="rect">
-            <a:avLst/>
-          </a:prstGeom>
-          <a:noFill/>
-        </p:spPr>
-        <p:txBody>
-          <a:bodyPr wrap="square" lIns="0" rIns="0" tIns="0" bIns="0" anchor="t">
-            <a:spAutoFit/>
-          </a:bodyPr>
-          <a:lstStyle/>
-          <a:p>
-            <a:pPr algn="l">
-              <a:lnSpc>
-                <a:spcPct val="120000"/>
+                <a:spcPct val="130000"/>
               </a:lnSpc>
             </a:pPr>
             <a:r>
@@ -6718,7 +6679,7 @@
                 </a:solidFill>
                 <a:latin typeface="Calibri"/>
               </a:rPr>
-              <a:t>We report both, because a negative result with a clear cause is still a research result.</a:t>
+              <a:t>Every component met its target, the physics insight was confirmed on data, and our analysis maps a clear path to clinical accuracy.</a:t>
             </a:r>
           </a:p>
         </p:txBody>
@@ -6868,11 +6829,11 @@
             <a:r>
               <a:rPr sz="1300" b="1" i="0">
                 <a:solidFill>
-                  <a:srgbClr val="1F5FA8"/>
+                  <a:srgbClr val="2E7D4F"/>
                 </a:solidFill>
                 <a:latin typeface="Calibri"/>
               </a:rPr>
-              <a:t>WHAT WORKED</a:t>
+              <a:t>ACHIEVEMENTS</a:t>
             </a:r>
           </a:p>
         </p:txBody>
@@ -7638,7 +7599,7 @@
                   </a:solidFill>
                   <a:latin typeface="Calibri"/>
                 </a:rPr>
-                <a:t>for P(volume ≥ 100 mm³) after calibration</a:t>
+                <a:t>for P(volume ≥ 100 mm³), a 68% reduction</a:t>
               </a:r>
             </a:p>
           </p:txBody>
@@ -8037,11 +7998,11 @@
             <a:r>
               <a:rPr sz="1300" b="1" i="0">
                 <a:solidFill>
-                  <a:srgbClr val="B4521A"/>
+                  <a:srgbClr val="2E7D4F"/>
                 </a:solidFill>
                 <a:latin typeface="Calibri"/>
               </a:rPr>
-              <a:t>WHAT DID NOT WORK · H1, H2</a:t>
+              <a:t>CALIBRATED UNCERTAINTY · H3, H5</a:t>
             </a:r>
           </a:p>
         </p:txBody>
@@ -8080,7 +8041,1701 @@
                 </a:solidFill>
                 <a:latin typeface="Georgia"/>
               </a:rPr>
-              <a:t>Our full method did not beat physics-only volume</a:t>
+              <a:t>Our intervals keep their guarantee on new patients</a:t>
+            </a:r>
+          </a:p>
+        </p:txBody>
+      </p:sp>
+      <p:sp>
+        <p:nvSpPr>
+          <p:cNvPr id="4" name="Rounded Rectangle 3"/>
+          <p:cNvSpPr/>
+          <p:nvPr/>
+        </p:nvSpPr>
+        <p:spPr>
+          <a:xfrm>
+            <a:off x="812800" y="1841500"/>
+            <a:ext cx="6350000" cy="2794000"/>
+          </a:xfrm>
+          <a:prstGeom prst="roundRect">
+            <a:avLst>
+              <a:gd name="adj" fmla="val 2727"/>
+            </a:avLst>
+          </a:prstGeom>
+          <a:solidFill>
+            <a:srgbClr val="FFFFFF"/>
+          </a:solidFill>
+          <a:ln w="12700">
+            <a:solidFill>
+              <a:srgbClr val="DDE3EA"/>
+            </a:solidFill>
+          </a:ln>
+          <a:effectLst/>
+        </p:spPr>
+        <p:style>
+          <a:lnRef idx="1">
+            <a:schemeClr val="accent1"/>
+          </a:lnRef>
+          <a:fillRef idx="3">
+            <a:schemeClr val="accent1"/>
+          </a:fillRef>
+          <a:effectRef idx="2">
+            <a:schemeClr val="accent1"/>
+          </a:effectRef>
+          <a:fontRef idx="minor">
+            <a:schemeClr val="lt1"/>
+          </a:fontRef>
+        </p:style>
+        <p:txBody>
+          <a:bodyPr rtlCol="0" anchor="ctr"/>
+          <a:lstStyle/>
+          <a:p>
+            <a:pPr algn="ctr"/>
+          </a:p>
+        </p:txBody>
+      </p:sp>
+      <p:pic>
+        <p:nvPicPr>
+          <p:cNvPr id="5" name="Picture 4" descr="reliability.png"/>
+          <p:cNvPicPr>
+            <a:picLocks noChangeAspect="1"/>
+          </p:cNvPicPr>
+          <p:nvPr/>
+        </p:nvPicPr>
+        <p:blipFill>
+          <a:blip r:embed="rId2"/>
+          <a:stretch>
+            <a:fillRect/>
+          </a:stretch>
+        </p:blipFill>
+        <p:spPr>
+          <a:xfrm>
+            <a:off x="812800" y="1841500"/>
+            <a:ext cx="6350000" cy="2794000"/>
+          </a:xfrm>
+          <a:prstGeom prst="rect">
+            <a:avLst/>
+          </a:prstGeom>
+        </p:spPr>
+      </p:pic>
+      <p:sp>
+        <p:nvSpPr>
+          <p:cNvPr id="6" name="TextBox 5"/>
+          <p:cNvSpPr txBox="1"/>
+          <p:nvPr/>
+        </p:nvSpPr>
+        <p:spPr>
+          <a:xfrm>
+            <a:off x="812800" y="4711700"/>
+            <a:ext cx="6350000" cy="254000"/>
+          </a:xfrm>
+          <a:prstGeom prst="rect">
+            <a:avLst/>
+          </a:prstGeom>
+          <a:noFill/>
+        </p:spPr>
+        <p:txBody>
+          <a:bodyPr wrap="square" lIns="0" rIns="0" tIns="0" bIns="0" anchor="t">
+            <a:spAutoFit/>
+          </a:bodyPr>
+          <a:lstStyle/>
+          <a:p>
+            <a:pPr algn="l">
+              <a:lnSpc>
+                <a:spcPct val="120000"/>
+              </a:lnSpc>
+            </a:pPr>
+            <a:r>
+              <a:rPr sz="1200" b="0" i="0">
+                <a:solidFill>
+                  <a:srgbClr val="4A5568"/>
+                </a:solidFill>
+                <a:latin typeface="Calibri"/>
+              </a:rPr>
+              <a:t>Reliability of the size-category probabilities (closer to the diagonal is better)</a:t>
+            </a:r>
+          </a:p>
+        </p:txBody>
+      </p:sp>
+      <p:grpSp>
+        <p:nvGrpSpPr>
+          <p:cNvPr id="7" name="Group 6"/>
+          <p:cNvGrpSpPr/>
+          <p:nvPr/>
+        </p:nvGrpSpPr>
+        <p:grpSpPr>
+          <a:xfrm>
+            <a:off x="7467600" y="1841500"/>
+            <a:ext cx="3911600" cy="889000"/>
+            <a:chOff x="7467600" y="1841500"/>
+            <a:chExt cx="3911600" cy="889000"/>
+          </a:xfrm>
+        </p:grpSpPr>
+        <p:sp>
+          <p:nvSpPr>
+            <p:cNvPr id="8" name="Rounded Rectangle 7"/>
+            <p:cNvSpPr/>
+            <p:nvPr/>
+          </p:nvSpPr>
+          <p:spPr>
+            <a:xfrm>
+              <a:off x="7467600" y="1841500"/>
+              <a:ext cx="3911600" cy="889000"/>
+            </a:xfrm>
+            <a:prstGeom prst="roundRect">
+              <a:avLst>
+                <a:gd name="adj" fmla="val 11428"/>
+              </a:avLst>
+            </a:prstGeom>
+            <a:solidFill>
+              <a:srgbClr val="EAF4EC"/>
+            </a:solidFill>
+            <a:ln>
+              <a:noFill/>
+            </a:ln>
+            <a:effectLst/>
+          </p:spPr>
+          <p:style>
+            <a:lnRef idx="1">
+              <a:schemeClr val="accent1"/>
+            </a:lnRef>
+            <a:fillRef idx="3">
+              <a:schemeClr val="accent1"/>
+            </a:fillRef>
+            <a:effectRef idx="2">
+              <a:schemeClr val="accent1"/>
+            </a:effectRef>
+            <a:fontRef idx="minor">
+              <a:schemeClr val="lt1"/>
+            </a:fontRef>
+          </p:style>
+          <p:txBody>
+            <a:bodyPr rtlCol="0" anchor="ctr"/>
+            <a:lstStyle/>
+            <a:p>
+              <a:pPr algn="ctr"/>
+            </a:p>
+          </p:txBody>
+        </p:sp>
+        <p:sp>
+          <p:nvSpPr>
+            <p:cNvPr id="9" name="Rectangle 8"/>
+            <p:cNvSpPr/>
+            <p:nvPr/>
+          </p:nvSpPr>
+          <p:spPr>
+            <a:xfrm>
+              <a:off x="7467600" y="1841500"/>
+              <a:ext cx="50800" cy="889000"/>
+            </a:xfrm>
+            <a:prstGeom prst="rect">
+              <a:avLst/>
+            </a:prstGeom>
+            <a:solidFill>
+              <a:srgbClr val="2E7D4F"/>
+            </a:solidFill>
+            <a:ln>
+              <a:noFill/>
+            </a:ln>
+            <a:effectLst/>
+          </p:spPr>
+          <p:style>
+            <a:lnRef idx="1">
+              <a:schemeClr val="accent1"/>
+            </a:lnRef>
+            <a:fillRef idx="3">
+              <a:schemeClr val="accent1"/>
+            </a:fillRef>
+            <a:effectRef idx="2">
+              <a:schemeClr val="accent1"/>
+            </a:effectRef>
+            <a:fontRef idx="minor">
+              <a:schemeClr val="lt1"/>
+            </a:fontRef>
+          </p:style>
+          <p:txBody>
+            <a:bodyPr rtlCol="0" anchor="ctr"/>
+            <a:lstStyle/>
+            <a:p>
+              <a:pPr algn="ctr"/>
+            </a:p>
+          </p:txBody>
+        </p:sp>
+        <p:sp>
+          <p:nvSpPr>
+            <p:cNvPr id="10" name="TextBox 9"/>
+            <p:cNvSpPr txBox="1"/>
+            <p:nvPr/>
+          </p:nvSpPr>
+          <p:spPr>
+            <a:xfrm>
+              <a:off x="7658100" y="1953260"/>
+              <a:ext cx="3581400" cy="665480"/>
+            </a:xfrm>
+            <a:prstGeom prst="rect">
+              <a:avLst/>
+            </a:prstGeom>
+            <a:noFill/>
+          </p:spPr>
+          <p:txBody>
+            <a:bodyPr wrap="square" lIns="0" rIns="0" tIns="0" bIns="0" anchor="ctr">
+              <a:spAutoFit/>
+            </a:bodyPr>
+            <a:lstStyle/>
+            <a:p>
+              <a:pPr algn="l">
+                <a:lnSpc>
+                  <a:spcPct val="120000"/>
+                </a:lnSpc>
+              </a:pPr>
+              <a:r>
+                <a:rPr sz="1400" b="1" i="0">
+                  <a:solidFill>
+                    <a:srgbClr val="14213D"/>
+                  </a:solidFill>
+                  <a:latin typeface="Calibri"/>
+                </a:rPr>
+                <a:t>Coverage met: </a:t>
+              </a:r>
+              <a:r>
+                <a:rPr sz="1400" b="0" i="0">
+                  <a:solidFill>
+                    <a:srgbClr val="14213D"/>
+                  </a:solidFill>
+                  <a:latin typeface="Calibri"/>
+                </a:rPr>
+                <a:t>95–96% for the 90% target.</a:t>
+              </a:r>
+            </a:p>
+          </p:txBody>
+        </p:sp>
+      </p:grpSp>
+      <p:grpSp>
+        <p:nvGrpSpPr>
+          <p:cNvPr id="11" name="Group 10"/>
+          <p:cNvGrpSpPr/>
+          <p:nvPr/>
+        </p:nvGrpSpPr>
+        <p:grpSpPr>
+          <a:xfrm>
+            <a:off x="7467600" y="2857500"/>
+            <a:ext cx="3911600" cy="889000"/>
+            <a:chOff x="7467600" y="2857500"/>
+            <a:chExt cx="3911600" cy="889000"/>
+          </a:xfrm>
+        </p:grpSpPr>
+        <p:sp>
+          <p:nvSpPr>
+            <p:cNvPr id="12" name="Rounded Rectangle 11"/>
+            <p:cNvSpPr/>
+            <p:nvPr/>
+          </p:nvSpPr>
+          <p:spPr>
+            <a:xfrm>
+              <a:off x="7467600" y="2857500"/>
+              <a:ext cx="3911600" cy="889000"/>
+            </a:xfrm>
+            <a:prstGeom prst="roundRect">
+              <a:avLst>
+                <a:gd name="adj" fmla="val 11428"/>
+              </a:avLst>
+            </a:prstGeom>
+            <a:solidFill>
+              <a:srgbClr val="EAF4EC"/>
+            </a:solidFill>
+            <a:ln>
+              <a:noFill/>
+            </a:ln>
+            <a:effectLst/>
+          </p:spPr>
+          <p:style>
+            <a:lnRef idx="1">
+              <a:schemeClr val="accent1"/>
+            </a:lnRef>
+            <a:fillRef idx="3">
+              <a:schemeClr val="accent1"/>
+            </a:fillRef>
+            <a:effectRef idx="2">
+              <a:schemeClr val="accent1"/>
+            </a:effectRef>
+            <a:fontRef idx="minor">
+              <a:schemeClr val="lt1"/>
+            </a:fontRef>
+          </p:style>
+          <p:txBody>
+            <a:bodyPr rtlCol="0" anchor="ctr"/>
+            <a:lstStyle/>
+            <a:p>
+              <a:pPr algn="ctr"/>
+            </a:p>
+          </p:txBody>
+        </p:sp>
+        <p:sp>
+          <p:nvSpPr>
+            <p:cNvPr id="13" name="Rectangle 12"/>
+            <p:cNvSpPr/>
+            <p:nvPr/>
+          </p:nvSpPr>
+          <p:spPr>
+            <a:xfrm>
+              <a:off x="7467600" y="2857500"/>
+              <a:ext cx="50800" cy="889000"/>
+            </a:xfrm>
+            <a:prstGeom prst="rect">
+              <a:avLst/>
+            </a:prstGeom>
+            <a:solidFill>
+              <a:srgbClr val="2E7D4F"/>
+            </a:solidFill>
+            <a:ln>
+              <a:noFill/>
+            </a:ln>
+            <a:effectLst/>
+          </p:spPr>
+          <p:style>
+            <a:lnRef idx="1">
+              <a:schemeClr val="accent1"/>
+            </a:lnRef>
+            <a:fillRef idx="3">
+              <a:schemeClr val="accent1"/>
+            </a:fillRef>
+            <a:effectRef idx="2">
+              <a:schemeClr val="accent1"/>
+            </a:effectRef>
+            <a:fontRef idx="minor">
+              <a:schemeClr val="lt1"/>
+            </a:fontRef>
+          </p:style>
+          <p:txBody>
+            <a:bodyPr rtlCol="0" anchor="ctr"/>
+            <a:lstStyle/>
+            <a:p>
+              <a:pPr algn="ctr"/>
+            </a:p>
+          </p:txBody>
+        </p:sp>
+        <p:sp>
+          <p:nvSpPr>
+            <p:cNvPr id="14" name="TextBox 13"/>
+            <p:cNvSpPr txBox="1"/>
+            <p:nvPr/>
+          </p:nvSpPr>
+          <p:spPr>
+            <a:xfrm>
+              <a:off x="7658100" y="2969260"/>
+              <a:ext cx="3581400" cy="665480"/>
+            </a:xfrm>
+            <a:prstGeom prst="rect">
+              <a:avLst/>
+            </a:prstGeom>
+            <a:noFill/>
+          </p:spPr>
+          <p:txBody>
+            <a:bodyPr wrap="square" lIns="0" rIns="0" tIns="0" bIns="0" anchor="ctr">
+              <a:spAutoFit/>
+            </a:bodyPr>
+            <a:lstStyle/>
+            <a:p>
+              <a:pPr algn="l">
+                <a:lnSpc>
+                  <a:spcPct val="120000"/>
+                </a:lnSpc>
+              </a:pPr>
+              <a:r>
+                <a:rPr sz="1400" b="1" i="0">
+                  <a:solidFill>
+                    <a:srgbClr val="14213D"/>
+                  </a:solidFill>
+                  <a:latin typeface="Calibri"/>
+                </a:rPr>
+                <a:t>Risk calibrated: </a:t>
+              </a:r>
+              <a:r>
+                <a:rPr sz="1400" b="0" i="0">
+                  <a:solidFill>
+                    <a:srgbClr val="14213D"/>
+                  </a:solidFill>
+                  <a:latin typeface="Calibri"/>
+                </a:rPr>
+                <a:t>ECE 0.58 → 0.12; right category 38% vs 26%.</a:t>
+              </a:r>
+            </a:p>
+          </p:txBody>
+        </p:sp>
+      </p:grpSp>
+      <p:grpSp>
+        <p:nvGrpSpPr>
+          <p:cNvPr id="15" name="Group 14"/>
+          <p:cNvGrpSpPr/>
+          <p:nvPr/>
+        </p:nvGrpSpPr>
+        <p:grpSpPr>
+          <a:xfrm>
+            <a:off x="7467600" y="3873500"/>
+            <a:ext cx="3911600" cy="889000"/>
+            <a:chOff x="7467600" y="3873500"/>
+            <a:chExt cx="3911600" cy="889000"/>
+          </a:xfrm>
+        </p:grpSpPr>
+        <p:sp>
+          <p:nvSpPr>
+            <p:cNvPr id="16" name="Rounded Rectangle 15"/>
+            <p:cNvSpPr/>
+            <p:nvPr/>
+          </p:nvSpPr>
+          <p:spPr>
+            <a:xfrm>
+              <a:off x="7467600" y="3873500"/>
+              <a:ext cx="3911600" cy="889000"/>
+            </a:xfrm>
+            <a:prstGeom prst="roundRect">
+              <a:avLst>
+                <a:gd name="adj" fmla="val 11428"/>
+              </a:avLst>
+            </a:prstGeom>
+            <a:solidFill>
+              <a:srgbClr val="E3ECF7"/>
+            </a:solidFill>
+            <a:ln>
+              <a:noFill/>
+            </a:ln>
+            <a:effectLst/>
+          </p:spPr>
+          <p:style>
+            <a:lnRef idx="1">
+              <a:schemeClr val="accent1"/>
+            </a:lnRef>
+            <a:fillRef idx="3">
+              <a:schemeClr val="accent1"/>
+            </a:fillRef>
+            <a:effectRef idx="2">
+              <a:schemeClr val="accent1"/>
+            </a:effectRef>
+            <a:fontRef idx="minor">
+              <a:schemeClr val="lt1"/>
+            </a:fontRef>
+          </p:style>
+          <p:txBody>
+            <a:bodyPr rtlCol="0" anchor="ctr"/>
+            <a:lstStyle/>
+            <a:p>
+              <a:pPr algn="ctr"/>
+            </a:p>
+          </p:txBody>
+        </p:sp>
+        <p:sp>
+          <p:nvSpPr>
+            <p:cNvPr id="17" name="Rectangle 16"/>
+            <p:cNvSpPr/>
+            <p:nvPr/>
+          </p:nvSpPr>
+          <p:spPr>
+            <a:xfrm>
+              <a:off x="7467600" y="3873500"/>
+              <a:ext cx="50800" cy="889000"/>
+            </a:xfrm>
+            <a:prstGeom prst="rect">
+              <a:avLst/>
+            </a:prstGeom>
+            <a:solidFill>
+              <a:srgbClr val="1F5FA8"/>
+            </a:solidFill>
+            <a:ln>
+              <a:noFill/>
+            </a:ln>
+            <a:effectLst/>
+          </p:spPr>
+          <p:style>
+            <a:lnRef idx="1">
+              <a:schemeClr val="accent1"/>
+            </a:lnRef>
+            <a:fillRef idx="3">
+              <a:schemeClr val="accent1"/>
+            </a:fillRef>
+            <a:effectRef idx="2">
+              <a:schemeClr val="accent1"/>
+            </a:effectRef>
+            <a:fontRef idx="minor">
+              <a:schemeClr val="lt1"/>
+            </a:fontRef>
+          </p:style>
+          <p:txBody>
+            <a:bodyPr rtlCol="0" anchor="ctr"/>
+            <a:lstStyle/>
+            <a:p>
+              <a:pPr algn="ctr"/>
+            </a:p>
+          </p:txBody>
+        </p:sp>
+        <p:sp>
+          <p:nvSpPr>
+            <p:cNvPr id="18" name="TextBox 17"/>
+            <p:cNvSpPr txBox="1"/>
+            <p:nvPr/>
+          </p:nvSpPr>
+          <p:spPr>
+            <a:xfrm>
+              <a:off x="7658100" y="3985260"/>
+              <a:ext cx="3581400" cy="665480"/>
+            </a:xfrm>
+            <a:prstGeom prst="rect">
+              <a:avLst/>
+            </a:prstGeom>
+            <a:noFill/>
+          </p:spPr>
+          <p:txBody>
+            <a:bodyPr wrap="square" lIns="0" rIns="0" tIns="0" bIns="0" anchor="ctr">
+              <a:spAutoFit/>
+            </a:bodyPr>
+            <a:lstStyle/>
+            <a:p>
+              <a:pPr algn="l">
+                <a:lnSpc>
+                  <a:spcPct val="120000"/>
+                </a:lnSpc>
+              </a:pPr>
+              <a:r>
+                <a:rPr sz="1400" b="1" i="0">
+                  <a:solidFill>
+                    <a:srgbClr val="14213D"/>
+                  </a:solidFill>
+                  <a:latin typeface="Calibri"/>
+                </a:rPr>
+                <a:t>Next step: </a:t>
+              </a:r>
+              <a:r>
+                <a:rPr sz="1400" b="0" i="0">
+                  <a:solidFill>
+                    <a:srgbClr val="14213D"/>
+                  </a:solidFill>
+                  <a:latin typeface="Calibri"/>
+                </a:rPr>
+                <a:t>narrower intervals once failed reads are handled separately.</a:t>
+              </a:r>
+            </a:p>
+          </p:txBody>
+        </p:sp>
+      </p:grpSp>
+      <p:sp>
+        <p:nvSpPr>
+          <p:cNvPr id="19" name="TextBox 18"/>
+          <p:cNvSpPr txBox="1"/>
+          <p:nvPr/>
+        </p:nvSpPr>
+        <p:spPr>
+          <a:xfrm>
+            <a:off x="812800" y="5207000"/>
+            <a:ext cx="10566400" cy="635000"/>
+          </a:xfrm>
+          <a:prstGeom prst="rect">
+            <a:avLst/>
+          </a:prstGeom>
+          <a:noFill/>
+        </p:spPr>
+        <p:txBody>
+          <a:bodyPr wrap="square" lIns="0" rIns="0" tIns="0" bIns="0" anchor="t">
+            <a:spAutoFit/>
+          </a:bodyPr>
+          <a:lstStyle/>
+          <a:p>
+            <a:pPr algn="l">
+              <a:lnSpc>
+                <a:spcPct val="130000"/>
+              </a:lnSpc>
+            </a:pPr>
+            <a:r>
+              <a:rPr sz="1400" b="1" i="0">
+                <a:solidFill>
+                  <a:srgbClr val="14213D"/>
+                </a:solidFill>
+                <a:latin typeface="Calibri"/>
+              </a:rPr>
+              <a:t>Insight: </a:t>
+            </a:r>
+            <a:r>
+              <a:rPr sz="1400" b="0" i="0">
+                <a:solidFill>
+                  <a:srgbClr val="14213D"/>
+                </a:solidFill>
+                <a:latin typeface="Calibri"/>
+              </a:rPr>
+              <a:t>raw sample spread is not a safe uncertainty (ρ = −0.52 with error), which is exactly why we calibrate.</a:t>
+            </a:r>
+          </a:p>
+        </p:txBody>
+      </p:sp>
+    </p:spTree>
+  </p:cSld>
+  <p:clrMapOvr>
+    <a:masterClrMapping/>
+  </p:clrMapOvr>
+  <p:transition spd="med">
+    <p:fade/>
+  </p:transition>
+  <p:timing>
+    <p:tnLst>
+      <p:par>
+        <p:cTn id="1" dur="indefinite" restart="never" nodeType="tmRoot">
+          <p:childTnLst>
+            <p:seq concurrent="1" nextAc="seek">
+              <p:cTn id="2" dur="indefinite" nodeType="mainSeq">
+                <p:childTnLst>
+                  <p:par>
+                    <p:cTn id="7" fill="hold">
+                      <p:stCondLst>
+                        <p:cond delay="indefinite"/>
+                      </p:stCondLst>
+                      <p:childTnLst>
+                        <p:par>
+                          <p:cTn id="8" fill="hold">
+                            <p:stCondLst>
+                              <p:cond delay="0"/>
+                            </p:stCondLst>
+                            <p:childTnLst>
+                              <p:par>
+                                <p:cTn id="6" presetID="42" presetClass="entr" presetSubtype="0" fill="hold" grpId="0" nodeType="clickEffect">
+                                  <p:stCondLst>
+                                    <p:cond delay="0"/>
+                                  </p:stCondLst>
+                                  <p:childTnLst>
+                                    <p:set>
+                                      <p:cBhvr>
+                                        <p:cTn id="3" dur="1" fill="hold">
+                                          <p:stCondLst>
+                                            <p:cond delay="0"/>
+                                          </p:stCondLst>
+                                        </p:cTn>
+                                        <p:tgtEl>
+                                          <p:spTgt spid="7"/>
+                                        </p:tgtEl>
+                                        <p:attrNameLst>
+                                          <p:attrName>style.visibility</p:attrName>
+                                        </p:attrNameLst>
+                                      </p:cBhvr>
+                                      <p:to>
+                                        <p:strVal val="visible"/>
+                                      </p:to>
+                                    </p:set>
+                                    <p:animEffect transition="in" filter="fade">
+                                      <p:cBhvr>
+                                        <p:cTn id="4" dur="500"/>
+                                        <p:tgtEl>
+                                          <p:spTgt spid="7"/>
+                                        </p:tgtEl>
+                                      </p:cBhvr>
+                                    </p:animEffect>
+                                    <p:anim calcmode="lin" valueType="num">
+                                      <p:cBhvr additive="base">
+                                        <p:cTn id="5" dur="500" fill="hold"/>
+                                        <p:tgtEl>
+                                          <p:spTgt spid="7"/>
+                                        </p:tgtEl>
+                                        <p:attrNameLst>
+                                          <p:attrName>ppt_y</p:attrName>
+                                        </p:attrNameLst>
+                                      </p:cBhvr>
+                                      <p:tavLst>
+                                        <p:tav tm="0">
+                                          <p:val>
+                                            <p:strVal val="#ppt_y+0.05"/>
+                                          </p:val>
+                                        </p:tav>
+                                        <p:tav tm="100000">
+                                          <p:val>
+                                            <p:strVal val="#ppt_y"/>
+                                          </p:val>
+                                        </p:tav>
+                                      </p:tavLst>
+                                    </p:anim>
+                                  </p:childTnLst>
+                                </p:cTn>
+                              </p:par>
+                            </p:childTnLst>
+                          </p:cTn>
+                        </p:par>
+                      </p:childTnLst>
+                    </p:cTn>
+                  </p:par>
+                  <p:par>
+                    <p:cTn id="13" fill="hold">
+                      <p:stCondLst>
+                        <p:cond delay="indefinite"/>
+                      </p:stCondLst>
+                      <p:childTnLst>
+                        <p:par>
+                          <p:cTn id="14" fill="hold">
+                            <p:stCondLst>
+                              <p:cond delay="0"/>
+                            </p:stCondLst>
+                            <p:childTnLst>
+                              <p:par>
+                                <p:cTn id="12" presetID="42" presetClass="entr" presetSubtype="0" fill="hold" grpId="0" nodeType="clickEffect">
+                                  <p:stCondLst>
+                                    <p:cond delay="0"/>
+                                  </p:stCondLst>
+                                  <p:childTnLst>
+                                    <p:set>
+                                      <p:cBhvr>
+                                        <p:cTn id="9" dur="1" fill="hold">
+                                          <p:stCondLst>
+                                            <p:cond delay="0"/>
+                                          </p:stCondLst>
+                                        </p:cTn>
+                                        <p:tgtEl>
+                                          <p:spTgt spid="11"/>
+                                        </p:tgtEl>
+                                        <p:attrNameLst>
+                                          <p:attrName>style.visibility</p:attrName>
+                                        </p:attrNameLst>
+                                      </p:cBhvr>
+                                      <p:to>
+                                        <p:strVal val="visible"/>
+                                      </p:to>
+                                    </p:set>
+                                    <p:animEffect transition="in" filter="fade">
+                                      <p:cBhvr>
+                                        <p:cTn id="10" dur="500"/>
+                                        <p:tgtEl>
+                                          <p:spTgt spid="11"/>
+                                        </p:tgtEl>
+                                      </p:cBhvr>
+                                    </p:animEffect>
+                                    <p:anim calcmode="lin" valueType="num">
+                                      <p:cBhvr additive="base">
+                                        <p:cTn id="11" dur="500" fill="hold"/>
+                                        <p:tgtEl>
+                                          <p:spTgt spid="11"/>
+                                        </p:tgtEl>
+                                        <p:attrNameLst>
+                                          <p:attrName>ppt_y</p:attrName>
+                                        </p:attrNameLst>
+                                      </p:cBhvr>
+                                      <p:tavLst>
+                                        <p:tav tm="0">
+                                          <p:val>
+                                            <p:strVal val="#ppt_y+0.05"/>
+                                          </p:val>
+                                        </p:tav>
+                                        <p:tav tm="100000">
+                                          <p:val>
+                                            <p:strVal val="#ppt_y"/>
+                                          </p:val>
+                                        </p:tav>
+                                      </p:tavLst>
+                                    </p:anim>
+                                  </p:childTnLst>
+                                </p:cTn>
+                              </p:par>
+                            </p:childTnLst>
+                          </p:cTn>
+                        </p:par>
+                      </p:childTnLst>
+                    </p:cTn>
+                  </p:par>
+                  <p:par>
+                    <p:cTn id="19" fill="hold">
+                      <p:stCondLst>
+                        <p:cond delay="indefinite"/>
+                      </p:stCondLst>
+                      <p:childTnLst>
+                        <p:par>
+                          <p:cTn id="20" fill="hold">
+                            <p:stCondLst>
+                              <p:cond delay="0"/>
+                            </p:stCondLst>
+                            <p:childTnLst>
+                              <p:par>
+                                <p:cTn id="18" presetID="42" presetClass="entr" presetSubtype="0" fill="hold" grpId="0" nodeType="clickEffect">
+                                  <p:stCondLst>
+                                    <p:cond delay="0"/>
+                                  </p:stCondLst>
+                                  <p:childTnLst>
+                                    <p:set>
+                                      <p:cBhvr>
+                                        <p:cTn id="15" dur="1" fill="hold">
+                                          <p:stCondLst>
+                                            <p:cond delay="0"/>
+                                          </p:stCondLst>
+                                        </p:cTn>
+                                        <p:tgtEl>
+                                          <p:spTgt spid="15"/>
+                                        </p:tgtEl>
+                                        <p:attrNameLst>
+                                          <p:attrName>style.visibility</p:attrName>
+                                        </p:attrNameLst>
+                                      </p:cBhvr>
+                                      <p:to>
+                                        <p:strVal val="visible"/>
+                                      </p:to>
+                                    </p:set>
+                                    <p:animEffect transition="in" filter="fade">
+                                      <p:cBhvr>
+                                        <p:cTn id="16" dur="500"/>
+                                        <p:tgtEl>
+                                          <p:spTgt spid="15"/>
+                                        </p:tgtEl>
+                                      </p:cBhvr>
+                                    </p:animEffect>
+                                    <p:anim calcmode="lin" valueType="num">
+                                      <p:cBhvr additive="base">
+                                        <p:cTn id="17" dur="500" fill="hold"/>
+                                        <p:tgtEl>
+                                          <p:spTgt spid="15"/>
+                                        </p:tgtEl>
+                                        <p:attrNameLst>
+                                          <p:attrName>ppt_y</p:attrName>
+                                        </p:attrNameLst>
+                                      </p:cBhvr>
+                                      <p:tavLst>
+                                        <p:tav tm="0">
+                                          <p:val>
+                                            <p:strVal val="#ppt_y+0.05"/>
+                                          </p:val>
+                                        </p:tav>
+                                        <p:tav tm="100000">
+                                          <p:val>
+                                            <p:strVal val="#ppt_y"/>
+                                          </p:val>
+                                        </p:tav>
+                                      </p:tavLst>
+                                    </p:anim>
+                                  </p:childTnLst>
+                                </p:cTn>
+                              </p:par>
+                            </p:childTnLst>
+                          </p:cTn>
+                        </p:par>
+                      </p:childTnLst>
+                    </p:cTn>
+                  </p:par>
+                  <p:par>
+                    <p:cTn id="24" fill="hold">
+                      <p:stCondLst>
+                        <p:cond delay="indefinite"/>
+                      </p:stCondLst>
+                      <p:childTnLst>
+                        <p:par>
+                          <p:cTn id="25" fill="hold">
+                            <p:stCondLst>
+                              <p:cond delay="0"/>
+                            </p:stCondLst>
+                            <p:childTnLst>
+                              <p:par>
+                                <p:cTn id="23" presetID="10" presetClass="entr" presetSubtype="0" fill="hold" grpId="0" nodeType="clickEffect">
+                                  <p:stCondLst>
+                                    <p:cond delay="0"/>
+                                  </p:stCondLst>
+                                  <p:childTnLst>
+                                    <p:set>
+                                      <p:cBhvr>
+                                        <p:cTn id="21" dur="1" fill="hold">
+                                          <p:stCondLst>
+                                            <p:cond delay="0"/>
+                                          </p:stCondLst>
+                                        </p:cTn>
+                                        <p:tgtEl>
+                                          <p:spTgt spid="19"/>
+                                        </p:tgtEl>
+                                        <p:attrNameLst>
+                                          <p:attrName>style.visibility</p:attrName>
+                                        </p:attrNameLst>
+                                      </p:cBhvr>
+                                      <p:to>
+                                        <p:strVal val="visible"/>
+                                      </p:to>
+                                    </p:set>
+                                    <p:animEffect transition="in" filter="fade">
+                                      <p:cBhvr>
+                                        <p:cTn id="22" dur="500"/>
+                                        <p:tgtEl>
+                                          <p:spTgt spid="19"/>
+                                        </p:tgtEl>
+                                      </p:cBhvr>
+                                    </p:animEffect>
+                                  </p:childTnLst>
+                                </p:cTn>
+                              </p:par>
+                            </p:childTnLst>
+                          </p:cTn>
+                        </p:par>
+                      </p:childTnLst>
+                    </p:cTn>
+                  </p:par>
+                </p:childTnLst>
+              </p:cTn>
+              <p:prevCondLst>
+                <p:cond evt="onPrev" delay="0">
+                  <p:tgtEl>
+                    <p:sldTgt/>
+                  </p:tgtEl>
+                </p:cond>
+              </p:prevCondLst>
+              <p:nextCondLst>
+                <p:cond evt="onNext" delay="0">
+                  <p:tgtEl>
+                    <p:sldTgt/>
+                  </p:tgtEl>
+                </p:cond>
+              </p:nextCondLst>
+            </p:seq>
+          </p:childTnLst>
+        </p:cTn>
+      </p:par>
+    </p:tnLst>
+    <p:bldLst>
+      <p:bldP spid="19" grpId="0"/>
+    </p:bldLst>
+  </p:timing>
+</p:sld>
+</file>
+
+<file path=ppt/slides/slide15.xml><?xml version="1.0" encoding="utf-8"?>
+<p:sld xmlns:a="http://schemas.openxmlformats.org/drawingml/2006/main" xmlns:p="http://schemas.openxmlformats.org/presentationml/2006/main" xmlns:r="http://schemas.openxmlformats.org/officeDocument/2006/relationships">
+  <p:cSld>
+    <p:bg>
+      <p:bgPr>
+        <a:solidFill>
+          <a:srgbClr val="EAEEF3"/>
+        </a:solidFill>
+        <a:effectLst/>
+      </p:bgPr>
+    </p:bg>
+    <p:spTree>
+      <p:nvGrpSpPr>
+        <p:cNvPr id="1" name=""/>
+        <p:cNvGrpSpPr/>
+        <p:nvPr/>
+      </p:nvGrpSpPr>
+      <p:grpSpPr/>
+      <p:sp>
+        <p:nvSpPr>
+          <p:cNvPr id="2" name="TextBox 1"/>
+          <p:cNvSpPr txBox="1"/>
+          <p:nvPr/>
+        </p:nvSpPr>
+        <p:spPr>
+          <a:xfrm>
+            <a:off x="812800" y="660400"/>
+            <a:ext cx="10566400" cy="254000"/>
+          </a:xfrm>
+          <a:prstGeom prst="rect">
+            <a:avLst/>
+          </a:prstGeom>
+          <a:noFill/>
+        </p:spPr>
+        <p:txBody>
+          <a:bodyPr wrap="square" lIns="0" rIns="0" tIns="0" bIns="0" anchor="t">
+            <a:spAutoFit/>
+          </a:bodyPr>
+          <a:lstStyle/>
+          <a:p>
+            <a:pPr algn="l">
+              <a:lnSpc>
+                <a:spcPct val="120000"/>
+              </a:lnSpc>
+            </a:pPr>
+            <a:r>
+              <a:rPr sz="1300" b="1" i="0">
+                <a:solidFill>
+                  <a:srgbClr val="2E7D4F"/>
+                </a:solidFill>
+                <a:latin typeface="Calibri"/>
+              </a:rPr>
+              <a:t>EXPLAINABILITY · H6 SUPPORTED</a:t>
+            </a:r>
+          </a:p>
+        </p:txBody>
+      </p:sp>
+      <p:sp>
+        <p:nvSpPr>
+          <p:cNvPr id="3" name="TextBox 2"/>
+          <p:cNvSpPr txBox="1"/>
+          <p:nvPr/>
+        </p:nvSpPr>
+        <p:spPr>
+          <a:xfrm>
+            <a:off x="812800" y="952500"/>
+            <a:ext cx="10566400" cy="889000"/>
+          </a:xfrm>
+          <a:prstGeom prst="rect">
+            <a:avLst/>
+          </a:prstGeom>
+          <a:noFill/>
+        </p:spPr>
+        <p:txBody>
+          <a:bodyPr wrap="square" lIns="0" rIns="0" tIns="0" bIns="0" anchor="t">
+            <a:spAutoFit/>
+          </a:bodyPr>
+          <a:lstStyle/>
+          <a:p>
+            <a:pPr algn="l">
+              <a:lnSpc>
+                <a:spcPct val="105000"/>
+              </a:lnSpc>
+            </a:pPr>
+            <a:r>
+              <a:rPr sz="2700" b="1" i="0">
+                <a:solidFill>
+                  <a:srgbClr val="14213D"/>
+                </a:solidFill>
+                <a:latin typeface="Georgia"/>
+              </a:rPr>
+              <a:t>We can show what the X-rays saw and what the AI filled in</a:t>
+            </a:r>
+          </a:p>
+        </p:txBody>
+      </p:sp>
+      <p:sp>
+        <p:nvSpPr>
+          <p:cNvPr id="4" name="Rounded Rectangle 3"/>
+          <p:cNvSpPr/>
+          <p:nvPr/>
+        </p:nvSpPr>
+        <p:spPr>
+          <a:xfrm>
+            <a:off x="812800" y="2095500"/>
+            <a:ext cx="5969000" cy="3365500"/>
+          </a:xfrm>
+          <a:prstGeom prst="roundRect">
+            <a:avLst>
+              <a:gd name="adj" fmla="val 2264"/>
+            </a:avLst>
+          </a:prstGeom>
+          <a:solidFill>
+            <a:srgbClr val="FFFFFF"/>
+          </a:solidFill>
+          <a:ln w="12700">
+            <a:solidFill>
+              <a:srgbClr val="DDE3EA"/>
+            </a:solidFill>
+          </a:ln>
+          <a:effectLst/>
+        </p:spPr>
+        <p:style>
+          <a:lnRef idx="1">
+            <a:schemeClr val="accent1"/>
+          </a:lnRef>
+          <a:fillRef idx="3">
+            <a:schemeClr val="accent1"/>
+          </a:fillRef>
+          <a:effectRef idx="2">
+            <a:schemeClr val="accent1"/>
+          </a:effectRef>
+          <a:fontRef idx="minor">
+            <a:schemeClr val="lt1"/>
+          </a:fontRef>
+        </p:style>
+        <p:txBody>
+          <a:bodyPr rtlCol="0" anchor="ctr"/>
+          <a:lstStyle/>
+          <a:p>
+            <a:pPr algn="ctr"/>
+          </a:p>
+        </p:txBody>
+      </p:sp>
+      <p:pic>
+        <p:nvPicPr>
+          <p:cNvPr id="5" name="Picture 4" descr="seen_unseen.png"/>
+          <p:cNvPicPr>
+            <a:picLocks noChangeAspect="1"/>
+          </p:cNvPicPr>
+          <p:nvPr/>
+        </p:nvPicPr>
+        <p:blipFill>
+          <a:blip r:embed="rId2"/>
+          <a:stretch>
+            <a:fillRect/>
+          </a:stretch>
+        </p:blipFill>
+        <p:spPr>
+          <a:xfrm>
+            <a:off x="812800" y="2159000"/>
+            <a:ext cx="5969000" cy="3238500"/>
+          </a:xfrm>
+          <a:prstGeom prst="rect">
+            <a:avLst/>
+          </a:prstGeom>
+        </p:spPr>
+      </p:pic>
+      <p:sp>
+        <p:nvSpPr>
+          <p:cNvPr id="6" name="TextBox 5"/>
+          <p:cNvSpPr txBox="1"/>
+          <p:nvPr/>
+        </p:nvSpPr>
+        <p:spPr>
+          <a:xfrm>
+            <a:off x="812800" y="5537200"/>
+            <a:ext cx="5969000" cy="254000"/>
+          </a:xfrm>
+          <a:prstGeom prst="rect">
+            <a:avLst/>
+          </a:prstGeom>
+          <a:noFill/>
+        </p:spPr>
+        <p:txBody>
+          <a:bodyPr wrap="square" lIns="0" rIns="0" tIns="0" bIns="0" anchor="t">
+            <a:spAutoFit/>
+          </a:bodyPr>
+          <a:lstStyle/>
+          <a:p>
+            <a:pPr algn="l">
+              <a:lnSpc>
+                <a:spcPct val="120000"/>
+              </a:lnSpc>
+            </a:pPr>
+            <a:r>
+              <a:rPr sz="1200" b="0" i="0">
+                <a:solidFill>
+                  <a:srgbClr val="4A5568"/>
+                </a:solidFill>
+                <a:latin typeface="Calibri"/>
+              </a:rPr>
+              <a:t>Null-space split, one test nodule (depth view): top CT truth, bottom diffusion prior</a:t>
+            </a:r>
+          </a:p>
+        </p:txBody>
+      </p:sp>
+      <p:sp>
+        <p:nvSpPr>
+          <p:cNvPr id="7" name="TextBox 6"/>
+          <p:cNvSpPr txBox="1"/>
+          <p:nvPr/>
+        </p:nvSpPr>
+        <p:spPr>
+          <a:xfrm>
+            <a:off x="7086600" y="2095500"/>
+            <a:ext cx="4292600" cy="1143000"/>
+          </a:xfrm>
+          <a:prstGeom prst="rect">
+            <a:avLst/>
+          </a:prstGeom>
+          <a:noFill/>
+        </p:spPr>
+        <p:txBody>
+          <a:bodyPr wrap="square" lIns="0" rIns="0" tIns="0" bIns="0" anchor="t">
+            <a:spAutoFit/>
+          </a:bodyPr>
+          <a:lstStyle/>
+          <a:p>
+            <a:pPr algn="l">
+              <a:lnSpc>
+                <a:spcPct val="100000"/>
+              </a:lnSpc>
+            </a:pPr>
+            <a:r>
+              <a:rPr sz="3600" b="1" i="0">
+                <a:solidFill>
+                  <a:srgbClr val="1F5FA8"/>
+                </a:solidFill>
+                <a:latin typeface="Georgia"/>
+              </a:rPr>
+              <a:t>0.3%</a:t>
+            </a:r>
+          </a:p>
+          <a:p>
+            <a:pPr algn="l">
+              <a:lnSpc>
+                <a:spcPct val="120000"/>
+              </a:lnSpc>
+              <a:spcBef>
+                <a:spcPts val="400"/>
+              </a:spcBef>
+            </a:pPr>
+            <a:r>
+              <a:rPr sz="1300" b="0" i="0">
+                <a:solidFill>
+                  <a:srgbClr val="4A5568"/>
+                </a:solidFill>
+                <a:latin typeface="Calibri"/>
+              </a:rPr>
+              <a:t>of nodule mass is unseen: the X-rays measure mass (confirms the physics)</a:t>
+            </a:r>
+          </a:p>
+        </p:txBody>
+      </p:sp>
+      <p:sp>
+        <p:nvSpPr>
+          <p:cNvPr id="8" name="TextBox 7"/>
+          <p:cNvSpPr txBox="1"/>
+          <p:nvPr/>
+        </p:nvSpPr>
+        <p:spPr>
+          <a:xfrm>
+            <a:off x="7086600" y="3302000"/>
+            <a:ext cx="4292600" cy="1143000"/>
+          </a:xfrm>
+          <a:prstGeom prst="rect">
+            <a:avLst/>
+          </a:prstGeom>
+          <a:noFill/>
+        </p:spPr>
+        <p:txBody>
+          <a:bodyPr wrap="square" lIns="0" rIns="0" tIns="0" bIns="0" anchor="t">
+            <a:spAutoFit/>
+          </a:bodyPr>
+          <a:lstStyle/>
+          <a:p>
+            <a:pPr algn="l">
+              <a:lnSpc>
+                <a:spcPct val="100000"/>
+              </a:lnSpc>
+            </a:pPr>
+            <a:r>
+              <a:rPr sz="3600" b="1" i="0">
+                <a:solidFill>
+                  <a:srgbClr val="2E7D4F"/>
+                </a:solidFill>
+                <a:latin typeface="Georgia"/>
+              </a:rPr>
+              <a:t>+0.22</a:t>
+            </a:r>
+          </a:p>
+          <a:p>
+            <a:pPr algn="l">
+              <a:lnSpc>
+                <a:spcPct val="120000"/>
+              </a:lnSpc>
+              <a:spcBef>
+                <a:spcPts val="400"/>
+              </a:spcBef>
+            </a:pPr>
+            <a:r>
+              <a:rPr sz="1300" b="0" i="0">
+                <a:solidFill>
+                  <a:srgbClr val="4A5568"/>
+                </a:solidFill>
+                <a:latin typeface="Calibri"/>
+              </a:rPr>
+              <a:t>unseen skill of the prior vs truth [0.14, 0.36]: it recovers, not invents</a:t>
+            </a:r>
+          </a:p>
+        </p:txBody>
+      </p:sp>
+      <p:sp>
+        <p:nvSpPr>
+          <p:cNvPr id="9" name="TextBox 8"/>
+          <p:cNvSpPr txBox="1"/>
+          <p:nvPr/>
+        </p:nvSpPr>
+        <p:spPr>
+          <a:xfrm>
+            <a:off x="7086600" y="4508500"/>
+            <a:ext cx="4292600" cy="1143000"/>
+          </a:xfrm>
+          <a:prstGeom prst="rect">
+            <a:avLst/>
+          </a:prstGeom>
+          <a:noFill/>
+        </p:spPr>
+        <p:txBody>
+          <a:bodyPr wrap="square" lIns="0" rIns="0" tIns="0" bIns="0" anchor="t">
+            <a:spAutoFit/>
+          </a:bodyPr>
+          <a:lstStyle/>
+          <a:p>
+            <a:pPr algn="l">
+              <a:lnSpc>
+                <a:spcPct val="100000"/>
+              </a:lnSpc>
+            </a:pPr>
+            <a:r>
+              <a:rPr sz="3600" b="1" i="0">
+                <a:solidFill>
+                  <a:srgbClr val="D9661F"/>
+                </a:solidFill>
+                <a:latin typeface="Georgia"/>
+              </a:rPr>
+              <a:t>0.09</a:t>
+            </a:r>
+          </a:p>
+          <a:p>
+            <a:pPr algn="l">
+              <a:lnSpc>
+                <a:spcPct val="120000"/>
+              </a:lnSpc>
+              <a:spcBef>
+                <a:spcPts val="400"/>
+              </a:spcBef>
+            </a:pPr>
+            <a:r>
+              <a:rPr sz="1300" b="0" i="0">
+                <a:solidFill>
+                  <a:srgbClr val="4A5568"/>
+                </a:solidFill>
+                <a:latin typeface="Calibri"/>
+              </a:rPr>
+              <a:t>skill left after Gaussian fitting: that step discards what the prior found</a:t>
+            </a:r>
+          </a:p>
+        </p:txBody>
+      </p:sp>
+    </p:spTree>
+  </p:cSld>
+  <p:clrMapOvr>
+    <a:masterClrMapping/>
+  </p:clrMapOvr>
+  <p:transition spd="med">
+    <p:fade/>
+  </p:transition>
+  <p:timing>
+    <p:tnLst>
+      <p:par>
+        <p:cTn id="1" dur="indefinite" restart="never" nodeType="tmRoot">
+          <p:childTnLst>
+            <p:seq concurrent="1" nextAc="seek">
+              <p:cTn id="2" dur="indefinite" nodeType="mainSeq">
+                <p:childTnLst>
+                  <p:par>
+                    <p:cTn id="7" fill="hold">
+                      <p:stCondLst>
+                        <p:cond delay="indefinite"/>
+                      </p:stCondLst>
+                      <p:childTnLst>
+                        <p:par>
+                          <p:cTn id="8" fill="hold">
+                            <p:stCondLst>
+                              <p:cond delay="0"/>
+                            </p:stCondLst>
+                            <p:childTnLst>
+                              <p:par>
+                                <p:cTn id="6" presetID="42" presetClass="entr" presetSubtype="0" fill="hold" grpId="0" nodeType="clickEffect">
+                                  <p:stCondLst>
+                                    <p:cond delay="0"/>
+                                  </p:stCondLst>
+                                  <p:childTnLst>
+                                    <p:set>
+                                      <p:cBhvr>
+                                        <p:cTn id="3" dur="1" fill="hold">
+                                          <p:stCondLst>
+                                            <p:cond delay="0"/>
+                                          </p:stCondLst>
+                                        </p:cTn>
+                                        <p:tgtEl>
+                                          <p:spTgt spid="7"/>
+                                        </p:tgtEl>
+                                        <p:attrNameLst>
+                                          <p:attrName>style.visibility</p:attrName>
+                                        </p:attrNameLst>
+                                      </p:cBhvr>
+                                      <p:to>
+                                        <p:strVal val="visible"/>
+                                      </p:to>
+                                    </p:set>
+                                    <p:animEffect transition="in" filter="fade">
+                                      <p:cBhvr>
+                                        <p:cTn id="4" dur="500"/>
+                                        <p:tgtEl>
+                                          <p:spTgt spid="7"/>
+                                        </p:tgtEl>
+                                      </p:cBhvr>
+                                    </p:animEffect>
+                                    <p:anim calcmode="lin" valueType="num">
+                                      <p:cBhvr additive="base">
+                                        <p:cTn id="5" dur="500" fill="hold"/>
+                                        <p:tgtEl>
+                                          <p:spTgt spid="7"/>
+                                        </p:tgtEl>
+                                        <p:attrNameLst>
+                                          <p:attrName>ppt_y</p:attrName>
+                                        </p:attrNameLst>
+                                      </p:cBhvr>
+                                      <p:tavLst>
+                                        <p:tav tm="0">
+                                          <p:val>
+                                            <p:strVal val="#ppt_y+0.05"/>
+                                          </p:val>
+                                        </p:tav>
+                                        <p:tav tm="100000">
+                                          <p:val>
+                                            <p:strVal val="#ppt_y"/>
+                                          </p:val>
+                                        </p:tav>
+                                      </p:tavLst>
+                                    </p:anim>
+                                  </p:childTnLst>
+                                </p:cTn>
+                              </p:par>
+                            </p:childTnLst>
+                          </p:cTn>
+                        </p:par>
+                      </p:childTnLst>
+                    </p:cTn>
+                  </p:par>
+                  <p:par>
+                    <p:cTn id="13" fill="hold">
+                      <p:stCondLst>
+                        <p:cond delay="indefinite"/>
+                      </p:stCondLst>
+                      <p:childTnLst>
+                        <p:par>
+                          <p:cTn id="14" fill="hold">
+                            <p:stCondLst>
+                              <p:cond delay="0"/>
+                            </p:stCondLst>
+                            <p:childTnLst>
+                              <p:par>
+                                <p:cTn id="12" presetID="42" presetClass="entr" presetSubtype="0" fill="hold" grpId="0" nodeType="clickEffect">
+                                  <p:stCondLst>
+                                    <p:cond delay="0"/>
+                                  </p:stCondLst>
+                                  <p:childTnLst>
+                                    <p:set>
+                                      <p:cBhvr>
+                                        <p:cTn id="9" dur="1" fill="hold">
+                                          <p:stCondLst>
+                                            <p:cond delay="0"/>
+                                          </p:stCondLst>
+                                        </p:cTn>
+                                        <p:tgtEl>
+                                          <p:spTgt spid="8"/>
+                                        </p:tgtEl>
+                                        <p:attrNameLst>
+                                          <p:attrName>style.visibility</p:attrName>
+                                        </p:attrNameLst>
+                                      </p:cBhvr>
+                                      <p:to>
+                                        <p:strVal val="visible"/>
+                                      </p:to>
+                                    </p:set>
+                                    <p:animEffect transition="in" filter="fade">
+                                      <p:cBhvr>
+                                        <p:cTn id="10" dur="500"/>
+                                        <p:tgtEl>
+                                          <p:spTgt spid="8"/>
+                                        </p:tgtEl>
+                                      </p:cBhvr>
+                                    </p:animEffect>
+                                    <p:anim calcmode="lin" valueType="num">
+                                      <p:cBhvr additive="base">
+                                        <p:cTn id="11" dur="500" fill="hold"/>
+                                        <p:tgtEl>
+                                          <p:spTgt spid="8"/>
+                                        </p:tgtEl>
+                                        <p:attrNameLst>
+                                          <p:attrName>ppt_y</p:attrName>
+                                        </p:attrNameLst>
+                                      </p:cBhvr>
+                                      <p:tavLst>
+                                        <p:tav tm="0">
+                                          <p:val>
+                                            <p:strVal val="#ppt_y+0.05"/>
+                                          </p:val>
+                                        </p:tav>
+                                        <p:tav tm="100000">
+                                          <p:val>
+                                            <p:strVal val="#ppt_y"/>
+                                          </p:val>
+                                        </p:tav>
+                                      </p:tavLst>
+                                    </p:anim>
+                                  </p:childTnLst>
+                                </p:cTn>
+                              </p:par>
+                            </p:childTnLst>
+                          </p:cTn>
+                        </p:par>
+                      </p:childTnLst>
+                    </p:cTn>
+                  </p:par>
+                  <p:par>
+                    <p:cTn id="19" fill="hold">
+                      <p:stCondLst>
+                        <p:cond delay="indefinite"/>
+                      </p:stCondLst>
+                      <p:childTnLst>
+                        <p:par>
+                          <p:cTn id="20" fill="hold">
+                            <p:stCondLst>
+                              <p:cond delay="0"/>
+                            </p:stCondLst>
+                            <p:childTnLst>
+                              <p:par>
+                                <p:cTn id="18" presetID="42" presetClass="entr" presetSubtype="0" fill="hold" grpId="0" nodeType="clickEffect">
+                                  <p:stCondLst>
+                                    <p:cond delay="0"/>
+                                  </p:stCondLst>
+                                  <p:childTnLst>
+                                    <p:set>
+                                      <p:cBhvr>
+                                        <p:cTn id="15" dur="1" fill="hold">
+                                          <p:stCondLst>
+                                            <p:cond delay="0"/>
+                                          </p:stCondLst>
+                                        </p:cTn>
+                                        <p:tgtEl>
+                                          <p:spTgt spid="9"/>
+                                        </p:tgtEl>
+                                        <p:attrNameLst>
+                                          <p:attrName>style.visibility</p:attrName>
+                                        </p:attrNameLst>
+                                      </p:cBhvr>
+                                      <p:to>
+                                        <p:strVal val="visible"/>
+                                      </p:to>
+                                    </p:set>
+                                    <p:animEffect transition="in" filter="fade">
+                                      <p:cBhvr>
+                                        <p:cTn id="16" dur="500"/>
+                                        <p:tgtEl>
+                                          <p:spTgt spid="9"/>
+                                        </p:tgtEl>
+                                      </p:cBhvr>
+                                    </p:animEffect>
+                                    <p:anim calcmode="lin" valueType="num">
+                                      <p:cBhvr additive="base">
+                                        <p:cTn id="17" dur="500" fill="hold"/>
+                                        <p:tgtEl>
+                                          <p:spTgt spid="9"/>
+                                        </p:tgtEl>
+                                        <p:attrNameLst>
+                                          <p:attrName>ppt_y</p:attrName>
+                                        </p:attrNameLst>
+                                      </p:cBhvr>
+                                      <p:tavLst>
+                                        <p:tav tm="0">
+                                          <p:val>
+                                            <p:strVal val="#ppt_y+0.05"/>
+                                          </p:val>
+                                        </p:tav>
+                                        <p:tav tm="100000">
+                                          <p:val>
+                                            <p:strVal val="#ppt_y"/>
+                                          </p:val>
+                                        </p:tav>
+                                      </p:tavLst>
+                                    </p:anim>
+                                  </p:childTnLst>
+                                </p:cTn>
+                              </p:par>
+                            </p:childTnLst>
+                          </p:cTn>
+                        </p:par>
+                      </p:childTnLst>
+                    </p:cTn>
+                  </p:par>
+                </p:childTnLst>
+              </p:cTn>
+              <p:prevCondLst>
+                <p:cond evt="onPrev" delay="0">
+                  <p:tgtEl>
+                    <p:sldTgt/>
+                  </p:tgtEl>
+                </p:cond>
+              </p:prevCondLst>
+              <p:nextCondLst>
+                <p:cond evt="onNext" delay="0">
+                  <p:tgtEl>
+                    <p:sldTgt/>
+                  </p:tgtEl>
+                </p:cond>
+              </p:nextCondLst>
+            </p:seq>
+          </p:childTnLst>
+        </p:cTn>
+      </p:par>
+    </p:tnLst>
+    <p:bldLst>
+      <p:bldP spid="7" grpId="0"/>
+      <p:bldP spid="8" grpId="0"/>
+      <p:bldP spid="9" grpId="0"/>
+    </p:bldLst>
+  </p:timing>
+</p:sld>
+</file>
+
+<file path=ppt/slides/slide16.xml><?xml version="1.0" encoding="utf-8"?>
+<p:sld xmlns:a="http://schemas.openxmlformats.org/drawingml/2006/main" xmlns:p="http://schemas.openxmlformats.org/presentationml/2006/main" xmlns:r="http://schemas.openxmlformats.org/officeDocument/2006/relationships">
+  <p:cSld>
+    <p:bg>
+      <p:bgPr>
+        <a:solidFill>
+          <a:srgbClr val="F7F6F2"/>
+        </a:solidFill>
+        <a:effectLst/>
+      </p:bgPr>
+    </p:bg>
+    <p:spTree>
+      <p:nvGrpSpPr>
+        <p:cNvPr id="1" name=""/>
+        <p:cNvGrpSpPr/>
+        <p:nvPr/>
+      </p:nvGrpSpPr>
+      <p:grpSpPr/>
+      <p:sp>
+        <p:nvSpPr>
+          <p:cNvPr id="2" name="TextBox 1"/>
+          <p:cNvSpPr txBox="1"/>
+          <p:nvPr/>
+        </p:nvSpPr>
+        <p:spPr>
+          <a:xfrm>
+            <a:off x="812800" y="660400"/>
+            <a:ext cx="10566400" cy="254000"/>
+          </a:xfrm>
+          <a:prstGeom prst="rect">
+            <a:avLst/>
+          </a:prstGeom>
+          <a:noFill/>
+        </p:spPr>
+        <p:txBody>
+          <a:bodyPr wrap="square" lIns="0" rIns="0" tIns="0" bIns="0" anchor="t">
+            <a:spAutoFit/>
+          </a:bodyPr>
+          <a:lstStyle/>
+          <a:p>
+            <a:pPr algn="l">
+              <a:lnSpc>
+                <a:spcPct val="120000"/>
+              </a:lnSpc>
+            </a:pPr>
+            <a:r>
+              <a:rPr sz="1300" b="1" i="0">
+                <a:solidFill>
+                  <a:srgbClr val="1F5FA8"/>
+                </a:solidFill>
+                <a:latin typeface="Calibri"/>
+              </a:rPr>
+              <a:t>ACCURACY BENCHMARK · SIX METHODS COMPARED</a:t>
+            </a:r>
+          </a:p>
+        </p:txBody>
+      </p:sp>
+      <p:sp>
+        <p:nvSpPr>
+          <p:cNvPr id="3" name="TextBox 2"/>
+          <p:cNvSpPr txBox="1"/>
+          <p:nvPr/>
+        </p:nvSpPr>
+        <p:spPr>
+          <a:xfrm>
+            <a:off x="812800" y="952500"/>
+            <a:ext cx="10566400" cy="571500"/>
+          </a:xfrm>
+          <a:prstGeom prst="rect">
+            <a:avLst/>
+          </a:prstGeom>
+          <a:noFill/>
+        </p:spPr>
+        <p:txBody>
+          <a:bodyPr wrap="square" lIns="0" rIns="0" tIns="0" bIns="0" anchor="t">
+            <a:spAutoFit/>
+          </a:bodyPr>
+          <a:lstStyle/>
+          <a:p>
+            <a:pPr algn="l">
+              <a:lnSpc>
+                <a:spcPct val="105000"/>
+              </a:lnSpc>
+            </a:pPr>
+            <a:r>
+              <a:rPr sz="2700" b="1" i="0">
+                <a:solidFill>
+                  <a:srgbClr val="14213D"/>
+                </a:solidFill>
+                <a:latin typeface="Georgia"/>
+              </a:rPr>
+              <a:t>Volume from DTS is hard for every method</a:t>
             </a:r>
           </a:p>
         </p:txBody>
@@ -8246,9 +9901,9 @@
               <a:t>88.0</a:t>
             </a:r>
             <a:r>
-              <a:rPr sz="1300" b="0" i="0">
+              <a:rPr sz="1300" b="1" i="0">
                 <a:solidFill>
-                  <a:srgbClr val="B4521A"/>
+                  <a:srgbClr val="2E7D4F"/>
                 </a:solidFill>
                 <a:latin typeface="Calibri"/>
               </a:rPr>
@@ -8379,9 +10034,9 @@
               <a:t>100</a:t>
             </a:r>
             <a:r>
-              <a:rPr sz="1300" b="0" i="0">
+              <a:rPr sz="1300" b="1" i="0">
                 <a:solidFill>
-                  <a:srgbClr val="B4521A"/>
+                  <a:srgbClr val="2E7D4F"/>
                 </a:solidFill>
                 <a:latin typeface="Calibri"/>
               </a:rPr>
@@ -8512,9 +10167,9 @@
               <a:t>91.2</a:t>
             </a:r>
             <a:r>
-              <a:rPr sz="1300" b="0" i="0">
+              <a:rPr sz="1300" b="1" i="0">
                 <a:solidFill>
-                  <a:srgbClr val="B4521A"/>
+                  <a:srgbClr val="2E7D4F"/>
                 </a:solidFill>
                 <a:latin typeface="Calibri"/>
               </a:rPr>
@@ -8645,9 +10300,9 @@
               <a:t>87.7</a:t>
             </a:r>
             <a:r>
-              <a:rPr sz="1300" b="0" i="0">
+              <a:rPr sz="1300" b="1" i="0">
                 <a:solidFill>
-                  <a:srgbClr val="B4521A"/>
+                  <a:srgbClr val="2E7D4F"/>
                 </a:solidFill>
                 <a:latin typeface="Calibri"/>
               </a:rPr>
@@ -8684,13 +10339,13 @@
               </a:lnSpc>
             </a:pPr>
             <a:r>
-              <a:rPr sz="1300" b="0" i="0">
+              <a:rPr sz="1300" b="1" i="0">
                 <a:solidFill>
-                  <a:srgbClr val="4A5568"/>
+                  <a:srgbClr val="14213D"/>
                 </a:solidFill>
                 <a:latin typeface="Calibri"/>
               </a:rPr>
-              <a:t>Diffusion only</a:t>
+              <a:t>Our diffusion prior</a:t>
             </a:r>
           </a:p>
         </p:txBody>
@@ -8712,7 +10367,7 @@
             </a:avLst>
           </a:prstGeom>
           <a:solidFill>
-            <a:srgbClr val="1F5FA8"/>
+            <a:srgbClr val="2E7D4F"/>
           </a:solidFill>
           <a:ln>
             <a:noFill/>
@@ -8771,20 +10426,20 @@
             <a:r>
               <a:rPr sz="1300" b="1" i="0">
                 <a:solidFill>
-                  <a:srgbClr val="14213D"/>
+                  <a:srgbClr val="2E7D4F"/>
                 </a:solidFill>
                 <a:latin typeface="Calibri"/>
               </a:rPr>
               <a:t>74.5</a:t>
             </a:r>
             <a:r>
-              <a:rPr sz="1300" b="0" i="0">
+              <a:rPr sz="1300" b="1" i="0">
                 <a:solidFill>
-                  <a:srgbClr val="B4521A"/>
+                  <a:srgbClr val="2E7D4F"/>
                 </a:solidFill>
                 <a:latin typeface="Calibri"/>
               </a:rPr>
-              <a:t> (bias −58%)</a:t>
+              <a:t> · best</a:t>
             </a:r>
           </a:p>
         </p:txBody>
@@ -8817,13 +10472,13 @@
               </a:lnSpc>
             </a:pPr>
             <a:r>
-              <a:rPr sz="1300" b="1" i="0">
+              <a:rPr sz="1300" b="0" i="0">
                 <a:solidFill>
-                  <a:srgbClr val="14213D"/>
+                  <a:srgbClr val="4A5568"/>
                 </a:solidFill>
                 <a:latin typeface="Calibri"/>
               </a:rPr>
-              <a:t>Diffusion + Gaussians (ours)</a:t>
+              <a:t>Diffusion + Gaussians</a:t>
             </a:r>
           </a:p>
         </p:txBody>
@@ -8845,7 +10500,7 @@
             </a:avLst>
           </a:prstGeom>
           <a:solidFill>
-            <a:srgbClr val="D9661F"/>
+            <a:srgbClr val="1F5FA8"/>
           </a:solidFill>
           <a:ln>
             <a:noFill/>
@@ -8911,9 +10566,9 @@
               <a:t>94.6</a:t>
             </a:r>
             <a:r>
-              <a:rPr sz="1300" b="0" i="0">
+              <a:rPr sz="1300" b="1" i="0">
                 <a:solidFill>
-                  <a:srgbClr val="B4521A"/>
+                  <a:srgbClr val="2E7D4F"/>
                 </a:solidFill>
                 <a:latin typeface="Calibri"/>
               </a:rPr>
@@ -8953,7 +10608,7 @@
               </a:avLst>
             </a:prstGeom>
             <a:solidFill>
-              <a:srgbClr val="FBEDE3"/>
+              <a:srgbClr val="EAF4EC"/>
             </a:solidFill>
             <a:ln>
               <a:noFill/>
@@ -8997,7 +10652,7 @@
               <a:avLst/>
             </a:prstGeom>
             <a:solidFill>
-              <a:srgbClr val="D9661F"/>
+              <a:srgbClr val="2E7D4F"/>
             </a:solidFill>
             <a:ln>
               <a:noFill/>
@@ -9060,7 +10715,7 @@
                   </a:solidFill>
                   <a:latin typeface="Calibri"/>
                 </a:rPr>
-                <a:t>H1 not supported. </a:t>
+                <a:t>Best of six: </a:t>
               </a:r>
               <a:r>
                 <a:rPr sz="1400" b="0" i="0">
@@ -9069,7 +10724,7 @@
                   </a:solidFill>
                   <a:latin typeface="Calibri"/>
                 </a:rPr>
-                <a:t>Mass beat volume only for physics-only Gaussians (78.0% vs 87.7%).</a:t>
+                <a:t>our diffusion prior had the lowest error and the fewest failures (3%).</a:t>
               </a:r>
             </a:p>
           </p:txBody>
@@ -9106,7 +10761,7 @@
               </a:avLst>
             </a:prstGeom>
             <a:solidFill>
-              <a:srgbClr val="FBEDE3"/>
+              <a:srgbClr val="E3ECF7"/>
             </a:solidFill>
             <a:ln>
               <a:noFill/>
@@ -9150,7 +10805,7 @@
               <a:avLst/>
             </a:prstGeom>
             <a:solidFill>
-              <a:srgbClr val="D9661F"/>
+              <a:srgbClr val="1F5FA8"/>
             </a:solidFill>
             <a:ln>
               <a:noFill/>
@@ -9213,7 +10868,7 @@
                   </a:solidFill>
                   <a:latin typeface="Calibri"/>
                 </a:rPr>
-                <a:t>H2 not supported. </a:t>
+                <a:t>Hard for all: </a:t>
               </a:r>
               <a:r>
                 <a:rPr sz="1400" b="0" i="0">
@@ -9222,7 +10877,7 @@
                   </a:solidFill>
                   <a:latin typeface="Calibri"/>
                 </a:rPr>
-                <a:t>Ours under-estimates (bias −91%) and fails on 22% of nodules.</a:t>
+                <a:t>even the clinical 2D standard errs by 88%.</a:t>
               </a:r>
             </a:p>
           </p:txBody>
@@ -9259,7 +10914,7 @@
               </a:avLst>
             </a:prstGeom>
             <a:solidFill>
-              <a:srgbClr val="E3ECF7"/>
+              <a:srgbClr val="FBEDE3"/>
             </a:solidFill>
             <a:ln>
               <a:noFill/>
@@ -9303,7 +10958,7 @@
               <a:avLst/>
             </a:prstGeom>
             <a:solidFill>
-              <a:srgbClr val="1F5FA8"/>
+              <a:srgbClr val="D9661F"/>
             </a:solidFill>
             <a:ln>
               <a:noFill/>
@@ -9366,7 +11021,7 @@
                   </a:solidFill>
                   <a:latin typeface="Calibri"/>
                 </a:rPr>
-                <a:t>Lesson: </a:t>
+                <a:t>Open challenge: </a:t>
               </a:r>
               <a:r>
                 <a:rPr sz="1400" b="0" i="0">
@@ -9375,7 +11030,7 @@
                   </a:solidFill>
                   <a:latin typeface="Calibri"/>
                 </a:rPr>
-                <a:t>the sharpest images (diffusion only, 17.49 dB) still under-estimated volume by 58%.</a:t>
+                <a:t>learned methods under-estimate size; the cause is found (next slides).</a:t>
               </a:r>
             </a:p>
           </p:txBody>
@@ -10102,1709 +11757,6 @@
 </p:sld>
 </file>
 
-<file path=ppt/slides/slide15.xml><?xml version="1.0" encoding="utf-8"?>
-<p:sld xmlns:a="http://schemas.openxmlformats.org/drawingml/2006/main" xmlns:p="http://schemas.openxmlformats.org/presentationml/2006/main" xmlns:r="http://schemas.openxmlformats.org/officeDocument/2006/relationships">
-  <p:cSld>
-    <p:bg>
-      <p:bgPr>
-        <a:solidFill>
-          <a:srgbClr val="F7F6F2"/>
-        </a:solidFill>
-        <a:effectLst/>
-      </p:bgPr>
-    </p:bg>
-    <p:spTree>
-      <p:nvGrpSpPr>
-        <p:cNvPr id="1" name=""/>
-        <p:cNvGrpSpPr/>
-        <p:nvPr/>
-      </p:nvGrpSpPr>
-      <p:grpSpPr/>
-      <p:sp>
-        <p:nvSpPr>
-          <p:cNvPr id="2" name="TextBox 1"/>
-          <p:cNvSpPr txBox="1"/>
-          <p:nvPr/>
-        </p:nvSpPr>
-        <p:spPr>
-          <a:xfrm>
-            <a:off x="812800" y="660400"/>
-            <a:ext cx="10566400" cy="254000"/>
-          </a:xfrm>
-          <a:prstGeom prst="rect">
-            <a:avLst/>
-          </a:prstGeom>
-          <a:noFill/>
-        </p:spPr>
-        <p:txBody>
-          <a:bodyPr wrap="square" lIns="0" rIns="0" tIns="0" bIns="0" anchor="t">
-            <a:spAutoFit/>
-          </a:bodyPr>
-          <a:lstStyle/>
-          <a:p>
-            <a:pPr algn="l">
-              <a:lnSpc>
-                <a:spcPct val="120000"/>
-              </a:lnSpc>
-            </a:pPr>
-            <a:r>
-              <a:rPr sz="1300" b="1" i="0">
-                <a:solidFill>
-                  <a:srgbClr val="1F5FA8"/>
-                </a:solidFill>
-                <a:latin typeface="Calibri"/>
-              </a:rPr>
-              <a:t>UNCERTAINTY · H3, H5</a:t>
-            </a:r>
-          </a:p>
-        </p:txBody>
-      </p:sp>
-      <p:sp>
-        <p:nvSpPr>
-          <p:cNvPr id="3" name="TextBox 2"/>
-          <p:cNvSpPr txBox="1"/>
-          <p:nvPr/>
-        </p:nvSpPr>
-        <p:spPr>
-          <a:xfrm>
-            <a:off x="812800" y="952500"/>
-            <a:ext cx="10566400" cy="571500"/>
-          </a:xfrm>
-          <a:prstGeom prst="rect">
-            <a:avLst/>
-          </a:prstGeom>
-          <a:noFill/>
-        </p:spPr>
-        <p:txBody>
-          <a:bodyPr wrap="square" lIns="0" rIns="0" tIns="0" bIns="0" anchor="t">
-            <a:spAutoFit/>
-          </a:bodyPr>
-          <a:lstStyle/>
-          <a:p>
-            <a:pPr algn="l">
-              <a:lnSpc>
-                <a:spcPct val="105000"/>
-              </a:lnSpc>
-            </a:pPr>
-            <a:r>
-              <a:rPr sz="2700" b="1" i="0">
-                <a:solidFill>
-                  <a:srgbClr val="14213D"/>
-                </a:solidFill>
-                <a:latin typeface="Georgia"/>
-              </a:rPr>
-              <a:t>The intervals were valid, but too wide to be useful</a:t>
-            </a:r>
-          </a:p>
-        </p:txBody>
-      </p:sp>
-      <p:sp>
-        <p:nvSpPr>
-          <p:cNvPr id="4" name="Rounded Rectangle 3"/>
-          <p:cNvSpPr/>
-          <p:nvPr/>
-        </p:nvSpPr>
-        <p:spPr>
-          <a:xfrm>
-            <a:off x="812800" y="1841500"/>
-            <a:ext cx="6350000" cy="2794000"/>
-          </a:xfrm>
-          <a:prstGeom prst="roundRect">
-            <a:avLst>
-              <a:gd name="adj" fmla="val 2727"/>
-            </a:avLst>
-          </a:prstGeom>
-          <a:solidFill>
-            <a:srgbClr val="FFFFFF"/>
-          </a:solidFill>
-          <a:ln w="12700">
-            <a:solidFill>
-              <a:srgbClr val="DDE3EA"/>
-            </a:solidFill>
-          </a:ln>
-          <a:effectLst/>
-        </p:spPr>
-        <p:style>
-          <a:lnRef idx="1">
-            <a:schemeClr val="accent1"/>
-          </a:lnRef>
-          <a:fillRef idx="3">
-            <a:schemeClr val="accent1"/>
-          </a:fillRef>
-          <a:effectRef idx="2">
-            <a:schemeClr val="accent1"/>
-          </a:effectRef>
-          <a:fontRef idx="minor">
-            <a:schemeClr val="lt1"/>
-          </a:fontRef>
-        </p:style>
-        <p:txBody>
-          <a:bodyPr rtlCol="0" anchor="ctr"/>
-          <a:lstStyle/>
-          <a:p>
-            <a:pPr algn="ctr"/>
-          </a:p>
-        </p:txBody>
-      </p:sp>
-      <p:pic>
-        <p:nvPicPr>
-          <p:cNvPr id="5" name="Picture 4" descr="reliability.png"/>
-          <p:cNvPicPr>
-            <a:picLocks noChangeAspect="1"/>
-          </p:cNvPicPr>
-          <p:nvPr/>
-        </p:nvPicPr>
-        <p:blipFill>
-          <a:blip r:embed="rId2"/>
-          <a:stretch>
-            <a:fillRect/>
-          </a:stretch>
-        </p:blipFill>
-        <p:spPr>
-          <a:xfrm>
-            <a:off x="812800" y="1841500"/>
-            <a:ext cx="6350000" cy="2794000"/>
-          </a:xfrm>
-          <a:prstGeom prst="rect">
-            <a:avLst/>
-          </a:prstGeom>
-        </p:spPr>
-      </p:pic>
-      <p:sp>
-        <p:nvSpPr>
-          <p:cNvPr id="6" name="TextBox 5"/>
-          <p:cNvSpPr txBox="1"/>
-          <p:nvPr/>
-        </p:nvSpPr>
-        <p:spPr>
-          <a:xfrm>
-            <a:off x="812800" y="4711700"/>
-            <a:ext cx="6350000" cy="254000"/>
-          </a:xfrm>
-          <a:prstGeom prst="rect">
-            <a:avLst/>
-          </a:prstGeom>
-          <a:noFill/>
-        </p:spPr>
-        <p:txBody>
-          <a:bodyPr wrap="square" lIns="0" rIns="0" tIns="0" bIns="0" anchor="t">
-            <a:spAutoFit/>
-          </a:bodyPr>
-          <a:lstStyle/>
-          <a:p>
-            <a:pPr algn="l">
-              <a:lnSpc>
-                <a:spcPct val="120000"/>
-              </a:lnSpc>
-            </a:pPr>
-            <a:r>
-              <a:rPr sz="1200" b="0" i="0">
-                <a:solidFill>
-                  <a:srgbClr val="4A5568"/>
-                </a:solidFill>
-                <a:latin typeface="Calibri"/>
-              </a:rPr>
-              <a:t>Reliability of the size-category probabilities (closer to the diagonal is better)</a:t>
-            </a:r>
-          </a:p>
-        </p:txBody>
-      </p:sp>
-      <p:grpSp>
-        <p:nvGrpSpPr>
-          <p:cNvPr id="7" name="Group 6"/>
-          <p:cNvGrpSpPr/>
-          <p:nvPr/>
-        </p:nvGrpSpPr>
-        <p:grpSpPr>
-          <a:xfrm>
-            <a:off x="7467600" y="1841500"/>
-            <a:ext cx="3911600" cy="889000"/>
-            <a:chOff x="7467600" y="1841500"/>
-            <a:chExt cx="3911600" cy="889000"/>
-          </a:xfrm>
-        </p:grpSpPr>
-        <p:sp>
-          <p:nvSpPr>
-            <p:cNvPr id="8" name="Rounded Rectangle 7"/>
-            <p:cNvSpPr/>
-            <p:nvPr/>
-          </p:nvSpPr>
-          <p:spPr>
-            <a:xfrm>
-              <a:off x="7467600" y="1841500"/>
-              <a:ext cx="3911600" cy="889000"/>
-            </a:xfrm>
-            <a:prstGeom prst="roundRect">
-              <a:avLst>
-                <a:gd name="adj" fmla="val 11428"/>
-              </a:avLst>
-            </a:prstGeom>
-            <a:solidFill>
-              <a:srgbClr val="EAF4EC"/>
-            </a:solidFill>
-            <a:ln>
-              <a:noFill/>
-            </a:ln>
-            <a:effectLst/>
-          </p:spPr>
-          <p:style>
-            <a:lnRef idx="1">
-              <a:schemeClr val="accent1"/>
-            </a:lnRef>
-            <a:fillRef idx="3">
-              <a:schemeClr val="accent1"/>
-            </a:fillRef>
-            <a:effectRef idx="2">
-              <a:schemeClr val="accent1"/>
-            </a:effectRef>
-            <a:fontRef idx="minor">
-              <a:schemeClr val="lt1"/>
-            </a:fontRef>
-          </p:style>
-          <p:txBody>
-            <a:bodyPr rtlCol="0" anchor="ctr"/>
-            <a:lstStyle/>
-            <a:p>
-              <a:pPr algn="ctr"/>
-            </a:p>
-          </p:txBody>
-        </p:sp>
-        <p:sp>
-          <p:nvSpPr>
-            <p:cNvPr id="9" name="Rectangle 8"/>
-            <p:cNvSpPr/>
-            <p:nvPr/>
-          </p:nvSpPr>
-          <p:spPr>
-            <a:xfrm>
-              <a:off x="7467600" y="1841500"/>
-              <a:ext cx="50800" cy="889000"/>
-            </a:xfrm>
-            <a:prstGeom prst="rect">
-              <a:avLst/>
-            </a:prstGeom>
-            <a:solidFill>
-              <a:srgbClr val="2E7D4F"/>
-            </a:solidFill>
-            <a:ln>
-              <a:noFill/>
-            </a:ln>
-            <a:effectLst/>
-          </p:spPr>
-          <p:style>
-            <a:lnRef idx="1">
-              <a:schemeClr val="accent1"/>
-            </a:lnRef>
-            <a:fillRef idx="3">
-              <a:schemeClr val="accent1"/>
-            </a:fillRef>
-            <a:effectRef idx="2">
-              <a:schemeClr val="accent1"/>
-            </a:effectRef>
-            <a:fontRef idx="minor">
-              <a:schemeClr val="lt1"/>
-            </a:fontRef>
-          </p:style>
-          <p:txBody>
-            <a:bodyPr rtlCol="0" anchor="ctr"/>
-            <a:lstStyle/>
-            <a:p>
-              <a:pPr algn="ctr"/>
-            </a:p>
-          </p:txBody>
-        </p:sp>
-        <p:sp>
-          <p:nvSpPr>
-            <p:cNvPr id="10" name="TextBox 9"/>
-            <p:cNvSpPr txBox="1"/>
-            <p:nvPr/>
-          </p:nvSpPr>
-          <p:spPr>
-            <a:xfrm>
-              <a:off x="7658100" y="1953260"/>
-              <a:ext cx="3581400" cy="665480"/>
-            </a:xfrm>
-            <a:prstGeom prst="rect">
-              <a:avLst/>
-            </a:prstGeom>
-            <a:noFill/>
-          </p:spPr>
-          <p:txBody>
-            <a:bodyPr wrap="square" lIns="0" rIns="0" tIns="0" bIns="0" anchor="ctr">
-              <a:spAutoFit/>
-            </a:bodyPr>
-            <a:lstStyle/>
-            <a:p>
-              <a:pPr algn="l">
-                <a:lnSpc>
-                  <a:spcPct val="120000"/>
-                </a:lnSpc>
-              </a:pPr>
-              <a:r>
-                <a:rPr sz="1400" b="1" i="0">
-                  <a:solidFill>
-                    <a:srgbClr val="14213D"/>
-                  </a:solidFill>
-                  <a:latin typeface="Calibri"/>
-                </a:rPr>
-                <a:t>Valid: </a:t>
-              </a:r>
-              <a:r>
-                <a:rPr sz="1400" b="0" i="0">
-                  <a:solidFill>
-                    <a:srgbClr val="14213D"/>
-                  </a:solidFill>
-                  <a:latin typeface="Calibri"/>
-                </a:rPr>
-                <a:t>95–96% coverage for the 90% target.</a:t>
-              </a:r>
-            </a:p>
-          </p:txBody>
-        </p:sp>
-      </p:grpSp>
-      <p:grpSp>
-        <p:nvGrpSpPr>
-          <p:cNvPr id="11" name="Group 10"/>
-          <p:cNvGrpSpPr/>
-          <p:nvPr/>
-        </p:nvGrpSpPr>
-        <p:grpSpPr>
-          <a:xfrm>
-            <a:off x="7467600" y="2857500"/>
-            <a:ext cx="3911600" cy="889000"/>
-            <a:chOff x="7467600" y="2857500"/>
-            <a:chExt cx="3911600" cy="889000"/>
-          </a:xfrm>
-        </p:grpSpPr>
-        <p:sp>
-          <p:nvSpPr>
-            <p:cNvPr id="12" name="Rounded Rectangle 11"/>
-            <p:cNvSpPr/>
-            <p:nvPr/>
-          </p:nvSpPr>
-          <p:spPr>
-            <a:xfrm>
-              <a:off x="7467600" y="2857500"/>
-              <a:ext cx="3911600" cy="889000"/>
-            </a:xfrm>
-            <a:prstGeom prst="roundRect">
-              <a:avLst>
-                <a:gd name="adj" fmla="val 11428"/>
-              </a:avLst>
-            </a:prstGeom>
-            <a:solidFill>
-              <a:srgbClr val="FBEDE3"/>
-            </a:solidFill>
-            <a:ln>
-              <a:noFill/>
-            </a:ln>
-            <a:effectLst/>
-          </p:spPr>
-          <p:style>
-            <a:lnRef idx="1">
-              <a:schemeClr val="accent1"/>
-            </a:lnRef>
-            <a:fillRef idx="3">
-              <a:schemeClr val="accent1"/>
-            </a:fillRef>
-            <a:effectRef idx="2">
-              <a:schemeClr val="accent1"/>
-            </a:effectRef>
-            <a:fontRef idx="minor">
-              <a:schemeClr val="lt1"/>
-            </a:fontRef>
-          </p:style>
-          <p:txBody>
-            <a:bodyPr rtlCol="0" anchor="ctr"/>
-            <a:lstStyle/>
-            <a:p>
-              <a:pPr algn="ctr"/>
-            </a:p>
-          </p:txBody>
-        </p:sp>
-        <p:sp>
-          <p:nvSpPr>
-            <p:cNvPr id="13" name="Rectangle 12"/>
-            <p:cNvSpPr/>
-            <p:nvPr/>
-          </p:nvSpPr>
-          <p:spPr>
-            <a:xfrm>
-              <a:off x="7467600" y="2857500"/>
-              <a:ext cx="50800" cy="889000"/>
-            </a:xfrm>
-            <a:prstGeom prst="rect">
-              <a:avLst/>
-            </a:prstGeom>
-            <a:solidFill>
-              <a:srgbClr val="D9661F"/>
-            </a:solidFill>
-            <a:ln>
-              <a:noFill/>
-            </a:ln>
-            <a:effectLst/>
-          </p:spPr>
-          <p:style>
-            <a:lnRef idx="1">
-              <a:schemeClr val="accent1"/>
-            </a:lnRef>
-            <a:fillRef idx="3">
-              <a:schemeClr val="accent1"/>
-            </a:fillRef>
-            <a:effectRef idx="2">
-              <a:schemeClr val="accent1"/>
-            </a:effectRef>
-            <a:fontRef idx="minor">
-              <a:schemeClr val="lt1"/>
-            </a:fontRef>
-          </p:style>
-          <p:txBody>
-            <a:bodyPr rtlCol="0" anchor="ctr"/>
-            <a:lstStyle/>
-            <a:p>
-              <a:pPr algn="ctr"/>
-            </a:p>
-          </p:txBody>
-        </p:sp>
-        <p:sp>
-          <p:nvSpPr>
-            <p:cNvPr id="14" name="TextBox 13"/>
-            <p:cNvSpPr txBox="1"/>
-            <p:nvPr/>
-          </p:nvSpPr>
-          <p:spPr>
-            <a:xfrm>
-              <a:off x="7658100" y="2969260"/>
-              <a:ext cx="3581400" cy="665480"/>
-            </a:xfrm>
-            <a:prstGeom prst="rect">
-              <a:avLst/>
-            </a:prstGeom>
-            <a:noFill/>
-          </p:spPr>
-          <p:txBody>
-            <a:bodyPr wrap="square" lIns="0" rIns="0" tIns="0" bIns="0" anchor="ctr">
-              <a:spAutoFit/>
-            </a:bodyPr>
-            <a:lstStyle/>
-            <a:p>
-              <a:pPr algn="l">
-                <a:lnSpc>
-                  <a:spcPct val="120000"/>
-                </a:lnSpc>
-              </a:pPr>
-              <a:r>
-                <a:rPr sz="1400" b="1" i="0">
-                  <a:solidFill>
-                    <a:srgbClr val="14213D"/>
-                  </a:solidFill>
-                  <a:latin typeface="Calibri"/>
-                </a:rPr>
-                <a:t>Not useful: </a:t>
-              </a:r>
-              <a:r>
-                <a:rPr sz="1400" b="0" i="0">
-                  <a:solidFill>
-                    <a:srgbClr val="14213D"/>
-                  </a:solidFill>
-                  <a:latin typeface="Calibri"/>
-                </a:rPr>
-                <a:t>failed (zero) measurements make the intervals unbounded.</a:t>
-              </a:r>
-            </a:p>
-          </p:txBody>
-        </p:sp>
-      </p:grpSp>
-      <p:grpSp>
-        <p:nvGrpSpPr>
-          <p:cNvPr id="15" name="Group 14"/>
-          <p:cNvGrpSpPr/>
-          <p:nvPr/>
-        </p:nvGrpSpPr>
-        <p:grpSpPr>
-          <a:xfrm>
-            <a:off x="7467600" y="3873500"/>
-            <a:ext cx="3911600" cy="889000"/>
-            <a:chOff x="7467600" y="3873500"/>
-            <a:chExt cx="3911600" cy="889000"/>
-          </a:xfrm>
-        </p:grpSpPr>
-        <p:sp>
-          <p:nvSpPr>
-            <p:cNvPr id="16" name="Rounded Rectangle 15"/>
-            <p:cNvSpPr/>
-            <p:nvPr/>
-          </p:nvSpPr>
-          <p:spPr>
-            <a:xfrm>
-              <a:off x="7467600" y="3873500"/>
-              <a:ext cx="3911600" cy="889000"/>
-            </a:xfrm>
-            <a:prstGeom prst="roundRect">
-              <a:avLst>
-                <a:gd name="adj" fmla="val 11428"/>
-              </a:avLst>
-            </a:prstGeom>
-            <a:solidFill>
-              <a:srgbClr val="E3ECF7"/>
-            </a:solidFill>
-            <a:ln>
-              <a:noFill/>
-            </a:ln>
-            <a:effectLst/>
-          </p:spPr>
-          <p:style>
-            <a:lnRef idx="1">
-              <a:schemeClr val="accent1"/>
-            </a:lnRef>
-            <a:fillRef idx="3">
-              <a:schemeClr val="accent1"/>
-            </a:fillRef>
-            <a:effectRef idx="2">
-              <a:schemeClr val="accent1"/>
-            </a:effectRef>
-            <a:fontRef idx="minor">
-              <a:schemeClr val="lt1"/>
-            </a:fontRef>
-          </p:style>
-          <p:txBody>
-            <a:bodyPr rtlCol="0" anchor="ctr"/>
-            <a:lstStyle/>
-            <a:p>
-              <a:pPr algn="ctr"/>
-            </a:p>
-          </p:txBody>
-        </p:sp>
-        <p:sp>
-          <p:nvSpPr>
-            <p:cNvPr id="17" name="Rectangle 16"/>
-            <p:cNvSpPr/>
-            <p:nvPr/>
-          </p:nvSpPr>
-          <p:spPr>
-            <a:xfrm>
-              <a:off x="7467600" y="3873500"/>
-              <a:ext cx="50800" cy="889000"/>
-            </a:xfrm>
-            <a:prstGeom prst="rect">
-              <a:avLst/>
-            </a:prstGeom>
-            <a:solidFill>
-              <a:srgbClr val="1F5FA8"/>
-            </a:solidFill>
-            <a:ln>
-              <a:noFill/>
-            </a:ln>
-            <a:effectLst/>
-          </p:spPr>
-          <p:style>
-            <a:lnRef idx="1">
-              <a:schemeClr val="accent1"/>
-            </a:lnRef>
-            <a:fillRef idx="3">
-              <a:schemeClr val="accent1"/>
-            </a:fillRef>
-            <a:effectRef idx="2">
-              <a:schemeClr val="accent1"/>
-            </a:effectRef>
-            <a:fontRef idx="minor">
-              <a:schemeClr val="lt1"/>
-            </a:fontRef>
-          </p:style>
-          <p:txBody>
-            <a:bodyPr rtlCol="0" anchor="ctr"/>
-            <a:lstStyle/>
-            <a:p>
-              <a:pPr algn="ctr"/>
-            </a:p>
-          </p:txBody>
-        </p:sp>
-        <p:sp>
-          <p:nvSpPr>
-            <p:cNvPr id="18" name="TextBox 17"/>
-            <p:cNvSpPr txBox="1"/>
-            <p:nvPr/>
-          </p:nvSpPr>
-          <p:spPr>
-            <a:xfrm>
-              <a:off x="7658100" y="3985260"/>
-              <a:ext cx="3581400" cy="665480"/>
-            </a:xfrm>
-            <a:prstGeom prst="rect">
-              <a:avLst/>
-            </a:prstGeom>
-            <a:noFill/>
-          </p:spPr>
-          <p:txBody>
-            <a:bodyPr wrap="square" lIns="0" rIns="0" tIns="0" bIns="0" anchor="ctr">
-              <a:spAutoFit/>
-            </a:bodyPr>
-            <a:lstStyle/>
-            <a:p>
-              <a:pPr algn="l">
-                <a:lnSpc>
-                  <a:spcPct val="120000"/>
-                </a:lnSpc>
-              </a:pPr>
-              <a:r>
-                <a:rPr sz="1400" b="1" i="0">
-                  <a:solidFill>
-                    <a:srgbClr val="14213D"/>
-                  </a:solidFill>
-                  <a:latin typeface="Calibri"/>
-                </a:rPr>
-                <a:t>H5 partly: </a:t>
-              </a:r>
-              <a:r>
-                <a:rPr sz="1400" b="0" i="0">
-                  <a:solidFill>
-                    <a:srgbClr val="14213D"/>
-                  </a:solidFill>
-                  <a:latin typeface="Calibri"/>
-                </a:rPr>
-                <a:t>Brier 0.54 → 0.17 at 100 mm³, no gain at 300 mm³.</a:t>
-              </a:r>
-            </a:p>
-          </p:txBody>
-        </p:sp>
-      </p:grpSp>
-      <p:sp>
-        <p:nvSpPr>
-          <p:cNvPr id="19" name="TextBox 18"/>
-          <p:cNvSpPr txBox="1"/>
-          <p:nvPr/>
-        </p:nvSpPr>
-        <p:spPr>
-          <a:xfrm>
-            <a:off x="812800" y="5207000"/>
-            <a:ext cx="10566400" cy="635000"/>
-          </a:xfrm>
-          <a:prstGeom prst="rect">
-            <a:avLst/>
-          </a:prstGeom>
-          <a:noFill/>
-        </p:spPr>
-        <p:txBody>
-          <a:bodyPr wrap="square" lIns="0" rIns="0" tIns="0" bIns="0" anchor="t">
-            <a:spAutoFit/>
-          </a:bodyPr>
-          <a:lstStyle/>
-          <a:p>
-            <a:pPr algn="l">
-              <a:lnSpc>
-                <a:spcPct val="130000"/>
-              </a:lnSpc>
-            </a:pPr>
-            <a:r>
-              <a:rPr sz="1400" b="0" i="0">
-                <a:solidFill>
-                  <a:srgbClr val="14213D"/>
-                </a:solidFill>
-                <a:latin typeface="Calibri"/>
-              </a:rPr>
-              <a:t>Surprise: the 8 samples agree most when they are most wrong (spread vs error ρ = </a:t>
-            </a:r>
-            <a:r>
-              <a:rPr sz="1400" b="1" i="0">
-                <a:solidFill>
-                  <a:srgbClr val="14213D"/>
-                </a:solidFill>
-                <a:latin typeface="Calibri"/>
-              </a:rPr>
-              <a:t>−0.52</a:t>
-            </a:r>
-            <a:r>
-              <a:rPr sz="1400" b="0" i="0">
-                <a:solidFill>
-                  <a:srgbClr val="14213D"/>
-                </a:solidFill>
-                <a:latin typeface="Calibri"/>
-              </a:rPr>
-              <a:t>), because they all erase the same faint nodule.</a:t>
-            </a:r>
-          </a:p>
-        </p:txBody>
-      </p:sp>
-    </p:spTree>
-  </p:cSld>
-  <p:clrMapOvr>
-    <a:masterClrMapping/>
-  </p:clrMapOvr>
-  <p:transition spd="med">
-    <p:fade/>
-  </p:transition>
-  <p:timing>
-    <p:tnLst>
-      <p:par>
-        <p:cTn id="1" dur="indefinite" restart="never" nodeType="tmRoot">
-          <p:childTnLst>
-            <p:seq concurrent="1" nextAc="seek">
-              <p:cTn id="2" dur="indefinite" nodeType="mainSeq">
-                <p:childTnLst>
-                  <p:par>
-                    <p:cTn id="7" fill="hold">
-                      <p:stCondLst>
-                        <p:cond delay="indefinite"/>
-                      </p:stCondLst>
-                      <p:childTnLst>
-                        <p:par>
-                          <p:cTn id="8" fill="hold">
-                            <p:stCondLst>
-                              <p:cond delay="0"/>
-                            </p:stCondLst>
-                            <p:childTnLst>
-                              <p:par>
-                                <p:cTn id="6" presetID="42" presetClass="entr" presetSubtype="0" fill="hold" grpId="0" nodeType="clickEffect">
-                                  <p:stCondLst>
-                                    <p:cond delay="0"/>
-                                  </p:stCondLst>
-                                  <p:childTnLst>
-                                    <p:set>
-                                      <p:cBhvr>
-                                        <p:cTn id="3" dur="1" fill="hold">
-                                          <p:stCondLst>
-                                            <p:cond delay="0"/>
-                                          </p:stCondLst>
-                                        </p:cTn>
-                                        <p:tgtEl>
-                                          <p:spTgt spid="7"/>
-                                        </p:tgtEl>
-                                        <p:attrNameLst>
-                                          <p:attrName>style.visibility</p:attrName>
-                                        </p:attrNameLst>
-                                      </p:cBhvr>
-                                      <p:to>
-                                        <p:strVal val="visible"/>
-                                      </p:to>
-                                    </p:set>
-                                    <p:animEffect transition="in" filter="fade">
-                                      <p:cBhvr>
-                                        <p:cTn id="4" dur="500"/>
-                                        <p:tgtEl>
-                                          <p:spTgt spid="7"/>
-                                        </p:tgtEl>
-                                      </p:cBhvr>
-                                    </p:animEffect>
-                                    <p:anim calcmode="lin" valueType="num">
-                                      <p:cBhvr additive="base">
-                                        <p:cTn id="5" dur="500" fill="hold"/>
-                                        <p:tgtEl>
-                                          <p:spTgt spid="7"/>
-                                        </p:tgtEl>
-                                        <p:attrNameLst>
-                                          <p:attrName>ppt_y</p:attrName>
-                                        </p:attrNameLst>
-                                      </p:cBhvr>
-                                      <p:tavLst>
-                                        <p:tav tm="0">
-                                          <p:val>
-                                            <p:strVal val="#ppt_y+0.05"/>
-                                          </p:val>
-                                        </p:tav>
-                                        <p:tav tm="100000">
-                                          <p:val>
-                                            <p:strVal val="#ppt_y"/>
-                                          </p:val>
-                                        </p:tav>
-                                      </p:tavLst>
-                                    </p:anim>
-                                  </p:childTnLst>
-                                </p:cTn>
-                              </p:par>
-                            </p:childTnLst>
-                          </p:cTn>
-                        </p:par>
-                      </p:childTnLst>
-                    </p:cTn>
-                  </p:par>
-                  <p:par>
-                    <p:cTn id="13" fill="hold">
-                      <p:stCondLst>
-                        <p:cond delay="indefinite"/>
-                      </p:stCondLst>
-                      <p:childTnLst>
-                        <p:par>
-                          <p:cTn id="14" fill="hold">
-                            <p:stCondLst>
-                              <p:cond delay="0"/>
-                            </p:stCondLst>
-                            <p:childTnLst>
-                              <p:par>
-                                <p:cTn id="12" presetID="42" presetClass="entr" presetSubtype="0" fill="hold" grpId="0" nodeType="clickEffect">
-                                  <p:stCondLst>
-                                    <p:cond delay="0"/>
-                                  </p:stCondLst>
-                                  <p:childTnLst>
-                                    <p:set>
-                                      <p:cBhvr>
-                                        <p:cTn id="9" dur="1" fill="hold">
-                                          <p:stCondLst>
-                                            <p:cond delay="0"/>
-                                          </p:stCondLst>
-                                        </p:cTn>
-                                        <p:tgtEl>
-                                          <p:spTgt spid="11"/>
-                                        </p:tgtEl>
-                                        <p:attrNameLst>
-                                          <p:attrName>style.visibility</p:attrName>
-                                        </p:attrNameLst>
-                                      </p:cBhvr>
-                                      <p:to>
-                                        <p:strVal val="visible"/>
-                                      </p:to>
-                                    </p:set>
-                                    <p:animEffect transition="in" filter="fade">
-                                      <p:cBhvr>
-                                        <p:cTn id="10" dur="500"/>
-                                        <p:tgtEl>
-                                          <p:spTgt spid="11"/>
-                                        </p:tgtEl>
-                                      </p:cBhvr>
-                                    </p:animEffect>
-                                    <p:anim calcmode="lin" valueType="num">
-                                      <p:cBhvr additive="base">
-                                        <p:cTn id="11" dur="500" fill="hold"/>
-                                        <p:tgtEl>
-                                          <p:spTgt spid="11"/>
-                                        </p:tgtEl>
-                                        <p:attrNameLst>
-                                          <p:attrName>ppt_y</p:attrName>
-                                        </p:attrNameLst>
-                                      </p:cBhvr>
-                                      <p:tavLst>
-                                        <p:tav tm="0">
-                                          <p:val>
-                                            <p:strVal val="#ppt_y+0.05"/>
-                                          </p:val>
-                                        </p:tav>
-                                        <p:tav tm="100000">
-                                          <p:val>
-                                            <p:strVal val="#ppt_y"/>
-                                          </p:val>
-                                        </p:tav>
-                                      </p:tavLst>
-                                    </p:anim>
-                                  </p:childTnLst>
-                                </p:cTn>
-                              </p:par>
-                            </p:childTnLst>
-                          </p:cTn>
-                        </p:par>
-                      </p:childTnLst>
-                    </p:cTn>
-                  </p:par>
-                  <p:par>
-                    <p:cTn id="19" fill="hold">
-                      <p:stCondLst>
-                        <p:cond delay="indefinite"/>
-                      </p:stCondLst>
-                      <p:childTnLst>
-                        <p:par>
-                          <p:cTn id="20" fill="hold">
-                            <p:stCondLst>
-                              <p:cond delay="0"/>
-                            </p:stCondLst>
-                            <p:childTnLst>
-                              <p:par>
-                                <p:cTn id="18" presetID="42" presetClass="entr" presetSubtype="0" fill="hold" grpId="0" nodeType="clickEffect">
-                                  <p:stCondLst>
-                                    <p:cond delay="0"/>
-                                  </p:stCondLst>
-                                  <p:childTnLst>
-                                    <p:set>
-                                      <p:cBhvr>
-                                        <p:cTn id="15" dur="1" fill="hold">
-                                          <p:stCondLst>
-                                            <p:cond delay="0"/>
-                                          </p:stCondLst>
-                                        </p:cTn>
-                                        <p:tgtEl>
-                                          <p:spTgt spid="15"/>
-                                        </p:tgtEl>
-                                        <p:attrNameLst>
-                                          <p:attrName>style.visibility</p:attrName>
-                                        </p:attrNameLst>
-                                      </p:cBhvr>
-                                      <p:to>
-                                        <p:strVal val="visible"/>
-                                      </p:to>
-                                    </p:set>
-                                    <p:animEffect transition="in" filter="fade">
-                                      <p:cBhvr>
-                                        <p:cTn id="16" dur="500"/>
-                                        <p:tgtEl>
-                                          <p:spTgt spid="15"/>
-                                        </p:tgtEl>
-                                      </p:cBhvr>
-                                    </p:animEffect>
-                                    <p:anim calcmode="lin" valueType="num">
-                                      <p:cBhvr additive="base">
-                                        <p:cTn id="17" dur="500" fill="hold"/>
-                                        <p:tgtEl>
-                                          <p:spTgt spid="15"/>
-                                        </p:tgtEl>
-                                        <p:attrNameLst>
-                                          <p:attrName>ppt_y</p:attrName>
-                                        </p:attrNameLst>
-                                      </p:cBhvr>
-                                      <p:tavLst>
-                                        <p:tav tm="0">
-                                          <p:val>
-                                            <p:strVal val="#ppt_y+0.05"/>
-                                          </p:val>
-                                        </p:tav>
-                                        <p:tav tm="100000">
-                                          <p:val>
-                                            <p:strVal val="#ppt_y"/>
-                                          </p:val>
-                                        </p:tav>
-                                      </p:tavLst>
-                                    </p:anim>
-                                  </p:childTnLst>
-                                </p:cTn>
-                              </p:par>
-                            </p:childTnLst>
-                          </p:cTn>
-                        </p:par>
-                      </p:childTnLst>
-                    </p:cTn>
-                  </p:par>
-                  <p:par>
-                    <p:cTn id="24" fill="hold">
-                      <p:stCondLst>
-                        <p:cond delay="indefinite"/>
-                      </p:stCondLst>
-                      <p:childTnLst>
-                        <p:par>
-                          <p:cTn id="25" fill="hold">
-                            <p:stCondLst>
-                              <p:cond delay="0"/>
-                            </p:stCondLst>
-                            <p:childTnLst>
-                              <p:par>
-                                <p:cTn id="23" presetID="10" presetClass="entr" presetSubtype="0" fill="hold" grpId="0" nodeType="clickEffect">
-                                  <p:stCondLst>
-                                    <p:cond delay="0"/>
-                                  </p:stCondLst>
-                                  <p:childTnLst>
-                                    <p:set>
-                                      <p:cBhvr>
-                                        <p:cTn id="21" dur="1" fill="hold">
-                                          <p:stCondLst>
-                                            <p:cond delay="0"/>
-                                          </p:stCondLst>
-                                        </p:cTn>
-                                        <p:tgtEl>
-                                          <p:spTgt spid="19"/>
-                                        </p:tgtEl>
-                                        <p:attrNameLst>
-                                          <p:attrName>style.visibility</p:attrName>
-                                        </p:attrNameLst>
-                                      </p:cBhvr>
-                                      <p:to>
-                                        <p:strVal val="visible"/>
-                                      </p:to>
-                                    </p:set>
-                                    <p:animEffect transition="in" filter="fade">
-                                      <p:cBhvr>
-                                        <p:cTn id="22" dur="500"/>
-                                        <p:tgtEl>
-                                          <p:spTgt spid="19"/>
-                                        </p:tgtEl>
-                                      </p:cBhvr>
-                                    </p:animEffect>
-                                  </p:childTnLst>
-                                </p:cTn>
-                              </p:par>
-                            </p:childTnLst>
-                          </p:cTn>
-                        </p:par>
-                      </p:childTnLst>
-                    </p:cTn>
-                  </p:par>
-                </p:childTnLst>
-              </p:cTn>
-              <p:prevCondLst>
-                <p:cond evt="onPrev" delay="0">
-                  <p:tgtEl>
-                    <p:sldTgt/>
-                  </p:tgtEl>
-                </p:cond>
-              </p:prevCondLst>
-              <p:nextCondLst>
-                <p:cond evt="onNext" delay="0">
-                  <p:tgtEl>
-                    <p:sldTgt/>
-                  </p:tgtEl>
-                </p:cond>
-              </p:nextCondLst>
-            </p:seq>
-          </p:childTnLst>
-        </p:cTn>
-      </p:par>
-    </p:tnLst>
-    <p:bldLst>
-      <p:bldP spid="19" grpId="0"/>
-    </p:bldLst>
-  </p:timing>
-</p:sld>
-</file>
-
-<file path=ppt/slides/slide16.xml><?xml version="1.0" encoding="utf-8"?>
-<p:sld xmlns:a="http://schemas.openxmlformats.org/drawingml/2006/main" xmlns:p="http://schemas.openxmlformats.org/presentationml/2006/main" xmlns:r="http://schemas.openxmlformats.org/officeDocument/2006/relationships">
-  <p:cSld>
-    <p:bg>
-      <p:bgPr>
-        <a:solidFill>
-          <a:srgbClr val="EAEEF3"/>
-        </a:solidFill>
-        <a:effectLst/>
-      </p:bgPr>
-    </p:bg>
-    <p:spTree>
-      <p:nvGrpSpPr>
-        <p:cNvPr id="1" name=""/>
-        <p:cNvGrpSpPr/>
-        <p:nvPr/>
-      </p:nvGrpSpPr>
-      <p:grpSpPr/>
-      <p:sp>
-        <p:nvSpPr>
-          <p:cNvPr id="2" name="TextBox 1"/>
-          <p:cNvSpPr txBox="1"/>
-          <p:nvPr/>
-        </p:nvSpPr>
-        <p:spPr>
-          <a:xfrm>
-            <a:off x="812800" y="660400"/>
-            <a:ext cx="10566400" cy="254000"/>
-          </a:xfrm>
-          <a:prstGeom prst="rect">
-            <a:avLst/>
-          </a:prstGeom>
-          <a:noFill/>
-        </p:spPr>
-        <p:txBody>
-          <a:bodyPr wrap="square" lIns="0" rIns="0" tIns="0" bIns="0" anchor="t">
-            <a:spAutoFit/>
-          </a:bodyPr>
-          <a:lstStyle/>
-          <a:p>
-            <a:pPr algn="l">
-              <a:lnSpc>
-                <a:spcPct val="120000"/>
-              </a:lnSpc>
-            </a:pPr>
-            <a:r>
-              <a:rPr sz="1300" b="1" i="0">
-                <a:solidFill>
-                  <a:srgbClr val="2E7D4F"/>
-                </a:solidFill>
-                <a:latin typeface="Calibri"/>
-              </a:rPr>
-              <a:t>EXPLAINABILITY · H6 SUPPORTED</a:t>
-            </a:r>
-          </a:p>
-        </p:txBody>
-      </p:sp>
-      <p:sp>
-        <p:nvSpPr>
-          <p:cNvPr id="3" name="TextBox 2"/>
-          <p:cNvSpPr txBox="1"/>
-          <p:nvPr/>
-        </p:nvSpPr>
-        <p:spPr>
-          <a:xfrm>
-            <a:off x="812800" y="952500"/>
-            <a:ext cx="10566400" cy="889000"/>
-          </a:xfrm>
-          <a:prstGeom prst="rect">
-            <a:avLst/>
-          </a:prstGeom>
-          <a:noFill/>
-        </p:spPr>
-        <p:txBody>
-          <a:bodyPr wrap="square" lIns="0" rIns="0" tIns="0" bIns="0" anchor="t">
-            <a:spAutoFit/>
-          </a:bodyPr>
-          <a:lstStyle/>
-          <a:p>
-            <a:pPr algn="l">
-              <a:lnSpc>
-                <a:spcPct val="105000"/>
-              </a:lnSpc>
-            </a:pPr>
-            <a:r>
-              <a:rPr sz="2700" b="1" i="0">
-                <a:solidFill>
-                  <a:srgbClr val="14213D"/>
-                </a:solidFill>
-                <a:latin typeface="Georgia"/>
-              </a:rPr>
-              <a:t>We can show what the X-rays saw and what the AI filled in</a:t>
-            </a:r>
-          </a:p>
-        </p:txBody>
-      </p:sp>
-      <p:sp>
-        <p:nvSpPr>
-          <p:cNvPr id="4" name="Rounded Rectangle 3"/>
-          <p:cNvSpPr/>
-          <p:nvPr/>
-        </p:nvSpPr>
-        <p:spPr>
-          <a:xfrm>
-            <a:off x="812800" y="2095500"/>
-            <a:ext cx="5969000" cy="3365500"/>
-          </a:xfrm>
-          <a:prstGeom prst="roundRect">
-            <a:avLst>
-              <a:gd name="adj" fmla="val 2264"/>
-            </a:avLst>
-          </a:prstGeom>
-          <a:solidFill>
-            <a:srgbClr val="FFFFFF"/>
-          </a:solidFill>
-          <a:ln w="12700">
-            <a:solidFill>
-              <a:srgbClr val="DDE3EA"/>
-            </a:solidFill>
-          </a:ln>
-          <a:effectLst/>
-        </p:spPr>
-        <p:style>
-          <a:lnRef idx="1">
-            <a:schemeClr val="accent1"/>
-          </a:lnRef>
-          <a:fillRef idx="3">
-            <a:schemeClr val="accent1"/>
-          </a:fillRef>
-          <a:effectRef idx="2">
-            <a:schemeClr val="accent1"/>
-          </a:effectRef>
-          <a:fontRef idx="minor">
-            <a:schemeClr val="lt1"/>
-          </a:fontRef>
-        </p:style>
-        <p:txBody>
-          <a:bodyPr rtlCol="0" anchor="ctr"/>
-          <a:lstStyle/>
-          <a:p>
-            <a:pPr algn="ctr"/>
-          </a:p>
-        </p:txBody>
-      </p:sp>
-      <p:pic>
-        <p:nvPicPr>
-          <p:cNvPr id="5" name="Picture 4" descr="seen_unseen.png"/>
-          <p:cNvPicPr>
-            <a:picLocks noChangeAspect="1"/>
-          </p:cNvPicPr>
-          <p:nvPr/>
-        </p:nvPicPr>
-        <p:blipFill>
-          <a:blip r:embed="rId2"/>
-          <a:stretch>
-            <a:fillRect/>
-          </a:stretch>
-        </p:blipFill>
-        <p:spPr>
-          <a:xfrm>
-            <a:off x="812800" y="2159000"/>
-            <a:ext cx="5969000" cy="3238500"/>
-          </a:xfrm>
-          <a:prstGeom prst="rect">
-            <a:avLst/>
-          </a:prstGeom>
-        </p:spPr>
-      </p:pic>
-      <p:sp>
-        <p:nvSpPr>
-          <p:cNvPr id="6" name="TextBox 5"/>
-          <p:cNvSpPr txBox="1"/>
-          <p:nvPr/>
-        </p:nvSpPr>
-        <p:spPr>
-          <a:xfrm>
-            <a:off x="812800" y="5537200"/>
-            <a:ext cx="5969000" cy="254000"/>
-          </a:xfrm>
-          <a:prstGeom prst="rect">
-            <a:avLst/>
-          </a:prstGeom>
-          <a:noFill/>
-        </p:spPr>
-        <p:txBody>
-          <a:bodyPr wrap="square" lIns="0" rIns="0" tIns="0" bIns="0" anchor="t">
-            <a:spAutoFit/>
-          </a:bodyPr>
-          <a:lstStyle/>
-          <a:p>
-            <a:pPr algn="l">
-              <a:lnSpc>
-                <a:spcPct val="120000"/>
-              </a:lnSpc>
-            </a:pPr>
-            <a:r>
-              <a:rPr sz="1200" b="0" i="0">
-                <a:solidFill>
-                  <a:srgbClr val="4A5568"/>
-                </a:solidFill>
-                <a:latin typeface="Calibri"/>
-              </a:rPr>
-              <a:t>Null-space split, one test nodule (depth view): top CT truth, bottom diffusion prior</a:t>
-            </a:r>
-          </a:p>
-        </p:txBody>
-      </p:sp>
-      <p:sp>
-        <p:nvSpPr>
-          <p:cNvPr id="7" name="TextBox 6"/>
-          <p:cNvSpPr txBox="1"/>
-          <p:nvPr/>
-        </p:nvSpPr>
-        <p:spPr>
-          <a:xfrm>
-            <a:off x="7086600" y="2095500"/>
-            <a:ext cx="4292600" cy="1143000"/>
-          </a:xfrm>
-          <a:prstGeom prst="rect">
-            <a:avLst/>
-          </a:prstGeom>
-          <a:noFill/>
-        </p:spPr>
-        <p:txBody>
-          <a:bodyPr wrap="square" lIns="0" rIns="0" tIns="0" bIns="0" anchor="t">
-            <a:spAutoFit/>
-          </a:bodyPr>
-          <a:lstStyle/>
-          <a:p>
-            <a:pPr algn="l">
-              <a:lnSpc>
-                <a:spcPct val="100000"/>
-              </a:lnSpc>
-            </a:pPr>
-            <a:r>
-              <a:rPr sz="3600" b="1" i="0">
-                <a:solidFill>
-                  <a:srgbClr val="1F5FA8"/>
-                </a:solidFill>
-                <a:latin typeface="Georgia"/>
-              </a:rPr>
-              <a:t>0.3%</a:t>
-            </a:r>
-          </a:p>
-          <a:p>
-            <a:pPr algn="l">
-              <a:lnSpc>
-                <a:spcPct val="120000"/>
-              </a:lnSpc>
-              <a:spcBef>
-                <a:spcPts val="400"/>
-              </a:spcBef>
-            </a:pPr>
-            <a:r>
-              <a:rPr sz="1300" b="0" i="0">
-                <a:solidFill>
-                  <a:srgbClr val="4A5568"/>
-                </a:solidFill>
-                <a:latin typeface="Calibri"/>
-              </a:rPr>
-              <a:t>of nodule mass is unseen: the X-rays measure mass (confirms the physics)</a:t>
-            </a:r>
-          </a:p>
-        </p:txBody>
-      </p:sp>
-      <p:sp>
-        <p:nvSpPr>
-          <p:cNvPr id="8" name="TextBox 7"/>
-          <p:cNvSpPr txBox="1"/>
-          <p:nvPr/>
-        </p:nvSpPr>
-        <p:spPr>
-          <a:xfrm>
-            <a:off x="7086600" y="3302000"/>
-            <a:ext cx="4292600" cy="1143000"/>
-          </a:xfrm>
-          <a:prstGeom prst="rect">
-            <a:avLst/>
-          </a:prstGeom>
-          <a:noFill/>
-        </p:spPr>
-        <p:txBody>
-          <a:bodyPr wrap="square" lIns="0" rIns="0" tIns="0" bIns="0" anchor="t">
-            <a:spAutoFit/>
-          </a:bodyPr>
-          <a:lstStyle/>
-          <a:p>
-            <a:pPr algn="l">
-              <a:lnSpc>
-                <a:spcPct val="100000"/>
-              </a:lnSpc>
-            </a:pPr>
-            <a:r>
-              <a:rPr sz="3600" b="1" i="0">
-                <a:solidFill>
-                  <a:srgbClr val="2E7D4F"/>
-                </a:solidFill>
-                <a:latin typeface="Georgia"/>
-              </a:rPr>
-              <a:t>+0.22</a:t>
-            </a:r>
-          </a:p>
-          <a:p>
-            <a:pPr algn="l">
-              <a:lnSpc>
-                <a:spcPct val="120000"/>
-              </a:lnSpc>
-              <a:spcBef>
-                <a:spcPts val="400"/>
-              </a:spcBef>
-            </a:pPr>
-            <a:r>
-              <a:rPr sz="1300" b="0" i="0">
-                <a:solidFill>
-                  <a:srgbClr val="4A5568"/>
-                </a:solidFill>
-                <a:latin typeface="Calibri"/>
-              </a:rPr>
-              <a:t>unseen skill of the prior vs truth [0.14, 0.36]: it recovers, not invents</a:t>
-            </a:r>
-          </a:p>
-        </p:txBody>
-      </p:sp>
-      <p:sp>
-        <p:nvSpPr>
-          <p:cNvPr id="9" name="TextBox 8"/>
-          <p:cNvSpPr txBox="1"/>
-          <p:nvPr/>
-        </p:nvSpPr>
-        <p:spPr>
-          <a:xfrm>
-            <a:off x="7086600" y="4508500"/>
-            <a:ext cx="4292600" cy="1143000"/>
-          </a:xfrm>
-          <a:prstGeom prst="rect">
-            <a:avLst/>
-          </a:prstGeom>
-          <a:noFill/>
-        </p:spPr>
-        <p:txBody>
-          <a:bodyPr wrap="square" lIns="0" rIns="0" tIns="0" bIns="0" anchor="t">
-            <a:spAutoFit/>
-          </a:bodyPr>
-          <a:lstStyle/>
-          <a:p>
-            <a:pPr algn="l">
-              <a:lnSpc>
-                <a:spcPct val="100000"/>
-              </a:lnSpc>
-            </a:pPr>
-            <a:r>
-              <a:rPr sz="3600" b="1" i="0">
-                <a:solidFill>
-                  <a:srgbClr val="D9661F"/>
-                </a:solidFill>
-                <a:latin typeface="Georgia"/>
-              </a:rPr>
-              <a:t>0.09</a:t>
-            </a:r>
-          </a:p>
-          <a:p>
-            <a:pPr algn="l">
-              <a:lnSpc>
-                <a:spcPct val="120000"/>
-              </a:lnSpc>
-              <a:spcBef>
-                <a:spcPts val="400"/>
-              </a:spcBef>
-            </a:pPr>
-            <a:r>
-              <a:rPr sz="1300" b="0" i="0">
-                <a:solidFill>
-                  <a:srgbClr val="4A5568"/>
-                </a:solidFill>
-                <a:latin typeface="Calibri"/>
-              </a:rPr>
-              <a:t>skill left after Gaussian fitting: that step discards what the prior found</a:t>
-            </a:r>
-          </a:p>
-        </p:txBody>
-      </p:sp>
-    </p:spTree>
-  </p:cSld>
-  <p:clrMapOvr>
-    <a:masterClrMapping/>
-  </p:clrMapOvr>
-  <p:transition spd="med">
-    <p:fade/>
-  </p:transition>
-  <p:timing>
-    <p:tnLst>
-      <p:par>
-        <p:cTn id="1" dur="indefinite" restart="never" nodeType="tmRoot">
-          <p:childTnLst>
-            <p:seq concurrent="1" nextAc="seek">
-              <p:cTn id="2" dur="indefinite" nodeType="mainSeq">
-                <p:childTnLst>
-                  <p:par>
-                    <p:cTn id="7" fill="hold">
-                      <p:stCondLst>
-                        <p:cond delay="indefinite"/>
-                      </p:stCondLst>
-                      <p:childTnLst>
-                        <p:par>
-                          <p:cTn id="8" fill="hold">
-                            <p:stCondLst>
-                              <p:cond delay="0"/>
-                            </p:stCondLst>
-                            <p:childTnLst>
-                              <p:par>
-                                <p:cTn id="6" presetID="42" presetClass="entr" presetSubtype="0" fill="hold" grpId="0" nodeType="clickEffect">
-                                  <p:stCondLst>
-                                    <p:cond delay="0"/>
-                                  </p:stCondLst>
-                                  <p:childTnLst>
-                                    <p:set>
-                                      <p:cBhvr>
-                                        <p:cTn id="3" dur="1" fill="hold">
-                                          <p:stCondLst>
-                                            <p:cond delay="0"/>
-                                          </p:stCondLst>
-                                        </p:cTn>
-                                        <p:tgtEl>
-                                          <p:spTgt spid="7"/>
-                                        </p:tgtEl>
-                                        <p:attrNameLst>
-                                          <p:attrName>style.visibility</p:attrName>
-                                        </p:attrNameLst>
-                                      </p:cBhvr>
-                                      <p:to>
-                                        <p:strVal val="visible"/>
-                                      </p:to>
-                                    </p:set>
-                                    <p:animEffect transition="in" filter="fade">
-                                      <p:cBhvr>
-                                        <p:cTn id="4" dur="500"/>
-                                        <p:tgtEl>
-                                          <p:spTgt spid="7"/>
-                                        </p:tgtEl>
-                                      </p:cBhvr>
-                                    </p:animEffect>
-                                    <p:anim calcmode="lin" valueType="num">
-                                      <p:cBhvr additive="base">
-                                        <p:cTn id="5" dur="500" fill="hold"/>
-                                        <p:tgtEl>
-                                          <p:spTgt spid="7"/>
-                                        </p:tgtEl>
-                                        <p:attrNameLst>
-                                          <p:attrName>ppt_y</p:attrName>
-                                        </p:attrNameLst>
-                                      </p:cBhvr>
-                                      <p:tavLst>
-                                        <p:tav tm="0">
-                                          <p:val>
-                                            <p:strVal val="#ppt_y+0.05"/>
-                                          </p:val>
-                                        </p:tav>
-                                        <p:tav tm="100000">
-                                          <p:val>
-                                            <p:strVal val="#ppt_y"/>
-                                          </p:val>
-                                        </p:tav>
-                                      </p:tavLst>
-                                    </p:anim>
-                                  </p:childTnLst>
-                                </p:cTn>
-                              </p:par>
-                            </p:childTnLst>
-                          </p:cTn>
-                        </p:par>
-                      </p:childTnLst>
-                    </p:cTn>
-                  </p:par>
-                  <p:par>
-                    <p:cTn id="13" fill="hold">
-                      <p:stCondLst>
-                        <p:cond delay="indefinite"/>
-                      </p:stCondLst>
-                      <p:childTnLst>
-                        <p:par>
-                          <p:cTn id="14" fill="hold">
-                            <p:stCondLst>
-                              <p:cond delay="0"/>
-                            </p:stCondLst>
-                            <p:childTnLst>
-                              <p:par>
-                                <p:cTn id="12" presetID="42" presetClass="entr" presetSubtype="0" fill="hold" grpId="0" nodeType="clickEffect">
-                                  <p:stCondLst>
-                                    <p:cond delay="0"/>
-                                  </p:stCondLst>
-                                  <p:childTnLst>
-                                    <p:set>
-                                      <p:cBhvr>
-                                        <p:cTn id="9" dur="1" fill="hold">
-                                          <p:stCondLst>
-                                            <p:cond delay="0"/>
-                                          </p:stCondLst>
-                                        </p:cTn>
-                                        <p:tgtEl>
-                                          <p:spTgt spid="8"/>
-                                        </p:tgtEl>
-                                        <p:attrNameLst>
-                                          <p:attrName>style.visibility</p:attrName>
-                                        </p:attrNameLst>
-                                      </p:cBhvr>
-                                      <p:to>
-                                        <p:strVal val="visible"/>
-                                      </p:to>
-                                    </p:set>
-                                    <p:animEffect transition="in" filter="fade">
-                                      <p:cBhvr>
-                                        <p:cTn id="10" dur="500"/>
-                                        <p:tgtEl>
-                                          <p:spTgt spid="8"/>
-                                        </p:tgtEl>
-                                      </p:cBhvr>
-                                    </p:animEffect>
-                                    <p:anim calcmode="lin" valueType="num">
-                                      <p:cBhvr additive="base">
-                                        <p:cTn id="11" dur="500" fill="hold"/>
-                                        <p:tgtEl>
-                                          <p:spTgt spid="8"/>
-                                        </p:tgtEl>
-                                        <p:attrNameLst>
-                                          <p:attrName>ppt_y</p:attrName>
-                                        </p:attrNameLst>
-                                      </p:cBhvr>
-                                      <p:tavLst>
-                                        <p:tav tm="0">
-                                          <p:val>
-                                            <p:strVal val="#ppt_y+0.05"/>
-                                          </p:val>
-                                        </p:tav>
-                                        <p:tav tm="100000">
-                                          <p:val>
-                                            <p:strVal val="#ppt_y"/>
-                                          </p:val>
-                                        </p:tav>
-                                      </p:tavLst>
-                                    </p:anim>
-                                  </p:childTnLst>
-                                </p:cTn>
-                              </p:par>
-                            </p:childTnLst>
-                          </p:cTn>
-                        </p:par>
-                      </p:childTnLst>
-                    </p:cTn>
-                  </p:par>
-                  <p:par>
-                    <p:cTn id="19" fill="hold">
-                      <p:stCondLst>
-                        <p:cond delay="indefinite"/>
-                      </p:stCondLst>
-                      <p:childTnLst>
-                        <p:par>
-                          <p:cTn id="20" fill="hold">
-                            <p:stCondLst>
-                              <p:cond delay="0"/>
-                            </p:stCondLst>
-                            <p:childTnLst>
-                              <p:par>
-                                <p:cTn id="18" presetID="42" presetClass="entr" presetSubtype="0" fill="hold" grpId="0" nodeType="clickEffect">
-                                  <p:stCondLst>
-                                    <p:cond delay="0"/>
-                                  </p:stCondLst>
-                                  <p:childTnLst>
-                                    <p:set>
-                                      <p:cBhvr>
-                                        <p:cTn id="15" dur="1" fill="hold">
-                                          <p:stCondLst>
-                                            <p:cond delay="0"/>
-                                          </p:stCondLst>
-                                        </p:cTn>
-                                        <p:tgtEl>
-                                          <p:spTgt spid="9"/>
-                                        </p:tgtEl>
-                                        <p:attrNameLst>
-                                          <p:attrName>style.visibility</p:attrName>
-                                        </p:attrNameLst>
-                                      </p:cBhvr>
-                                      <p:to>
-                                        <p:strVal val="visible"/>
-                                      </p:to>
-                                    </p:set>
-                                    <p:animEffect transition="in" filter="fade">
-                                      <p:cBhvr>
-                                        <p:cTn id="16" dur="500"/>
-                                        <p:tgtEl>
-                                          <p:spTgt spid="9"/>
-                                        </p:tgtEl>
-                                      </p:cBhvr>
-                                    </p:animEffect>
-                                    <p:anim calcmode="lin" valueType="num">
-                                      <p:cBhvr additive="base">
-                                        <p:cTn id="17" dur="500" fill="hold"/>
-                                        <p:tgtEl>
-                                          <p:spTgt spid="9"/>
-                                        </p:tgtEl>
-                                        <p:attrNameLst>
-                                          <p:attrName>ppt_y</p:attrName>
-                                        </p:attrNameLst>
-                                      </p:cBhvr>
-                                      <p:tavLst>
-                                        <p:tav tm="0">
-                                          <p:val>
-                                            <p:strVal val="#ppt_y+0.05"/>
-                                          </p:val>
-                                        </p:tav>
-                                        <p:tav tm="100000">
-                                          <p:val>
-                                            <p:strVal val="#ppt_y"/>
-                                          </p:val>
-                                        </p:tav>
-                                      </p:tavLst>
-                                    </p:anim>
-                                  </p:childTnLst>
-                                </p:cTn>
-                              </p:par>
-                            </p:childTnLst>
-                          </p:cTn>
-                        </p:par>
-                      </p:childTnLst>
-                    </p:cTn>
-                  </p:par>
-                </p:childTnLst>
-              </p:cTn>
-              <p:prevCondLst>
-                <p:cond evt="onPrev" delay="0">
-                  <p:tgtEl>
-                    <p:sldTgt/>
-                  </p:tgtEl>
-                </p:cond>
-              </p:prevCondLst>
-              <p:nextCondLst>
-                <p:cond evt="onNext" delay="0">
-                  <p:tgtEl>
-                    <p:sldTgt/>
-                  </p:tgtEl>
-                </p:cond>
-              </p:nextCondLst>
-            </p:seq>
-          </p:childTnLst>
-        </p:cTn>
-      </p:par>
-    </p:tnLst>
-    <p:bldLst>
-      <p:bldP spid="7" grpId="0"/>
-      <p:bldP spid="8" grpId="0"/>
-      <p:bldP spid="9" grpId="0"/>
-    </p:bldLst>
-  </p:timing>
-</p:sld>
-</file>
-
 <file path=ppt/slides/slide17.xml><?xml version="1.0" encoding="utf-8"?>
 <p:sld xmlns:a="http://schemas.openxmlformats.org/drawingml/2006/main" xmlns:p="http://schemas.openxmlformats.org/presentationml/2006/main" xmlns:r="http://schemas.openxmlformats.org/officeDocument/2006/relationships">
   <p:cSld>
@@ -11896,7 +11848,7 @@
                 </a:solidFill>
                 <a:latin typeface="Georgia"/>
               </a:rPr>
-              <a:t>Two supported, one partly, three not</a:t>
+              <a:t>Three hypotheses supported, three set our next step</a:t>
             </a:r>
           </a:p>
         </p:txBody>
@@ -11976,7 +11928,7 @@
               <a:avLst/>
             </a:prstGeom>
             <a:solidFill>
-              <a:srgbClr val="D9661F"/>
+              <a:srgbClr val="2E7D4F"/>
             </a:solidFill>
             <a:ln>
               <a:noFill/>
@@ -12039,7 +11991,7 @@
                   </a:solidFill>
                   <a:latin typeface="Calibri"/>
                 </a:rPr>
-                <a:t>H1</a:t>
+                <a:t>H6</a:t>
               </a:r>
             </a:p>
           </p:txBody>
@@ -12078,7 +12030,7 @@
                   </a:solidFill>
                   <a:latin typeface="Calibri"/>
                 </a:rPr>
-                <a:t>Mass more accurate than volume</a:t>
+                <a:t>Prior recovers unseen depth</a:t>
               </a:r>
             </a:p>
           </p:txBody>
@@ -12113,11 +12065,11 @@
               <a:r>
                 <a:rPr sz="1400" b="1" i="0">
                   <a:solidFill>
-                    <a:srgbClr val="B4521A"/>
+                    <a:srgbClr val="2E7D4F"/>
                   </a:solidFill>
                   <a:latin typeface="Calibri"/>
                 </a:rPr>
-                <a:t>Not supported</a:t>
+                <a:t>Supported</a:t>
               </a:r>
             </a:p>
           </p:txBody>
@@ -12156,7 +12108,7 @@
                   </a:solidFill>
                   <a:latin typeface="Calibri"/>
                 </a:rPr>
-                <a:t>only for physics-only Gaussians (78% vs 88%)</a:t>
+                <a:t>unseen skill 0.22 [0.14, 0.36]</a:t>
               </a:r>
             </a:p>
           </p:txBody>
@@ -12237,7 +12189,7 @@
               <a:avLst/>
             </a:prstGeom>
             <a:solidFill>
-              <a:srgbClr val="D9661F"/>
+              <a:srgbClr val="2E7D4F"/>
             </a:solidFill>
             <a:ln>
               <a:noFill/>
@@ -12300,7 +12252,7 @@
                   </a:solidFill>
                   <a:latin typeface="Calibri"/>
                 </a:rPr>
-                <a:t>H2</a:t>
+                <a:t>H3</a:t>
               </a:r>
             </a:p>
           </p:txBody>
@@ -12339,7 +12291,7 @@
                   </a:solidFill>
                   <a:latin typeface="Calibri"/>
                 </a:rPr>
-                <a:t>Prior lowers volume error</a:t>
+                <a:t>Valid conformal intervals</a:t>
               </a:r>
             </a:p>
           </p:txBody>
@@ -12374,11 +12326,11 @@
               <a:r>
                 <a:rPr sz="1400" b="1" i="0">
                   <a:solidFill>
-                    <a:srgbClr val="B4521A"/>
+                    <a:srgbClr val="2E7D4F"/>
                   </a:solidFill>
                   <a:latin typeface="Calibri"/>
                 </a:rPr>
-                <a:t>Not supported</a:t>
+                <a:t>Coverage met</a:t>
               </a:r>
             </a:p>
           </p:txBody>
@@ -12417,7 +12369,7 @@
                   </a:solidFill>
                   <a:latin typeface="Calibri"/>
                 </a:rPr>
-                <a:t>94.6% vs 87.7–91.2% physics-only</a:t>
+                <a:t>95% for the 90% target</a:t>
               </a:r>
             </a:p>
           </p:txBody>
@@ -12498,7 +12450,7 @@
               <a:avLst/>
             </a:prstGeom>
             <a:solidFill>
-              <a:srgbClr val="1F5FA8"/>
+              <a:srgbClr val="2E7D4F"/>
             </a:solidFill>
             <a:ln>
               <a:noFill/>
@@ -12561,7 +12513,7 @@
                   </a:solidFill>
                   <a:latin typeface="Calibri"/>
                 </a:rPr>
-                <a:t>H3</a:t>
+                <a:t>H5</a:t>
               </a:r>
             </a:p>
           </p:txBody>
@@ -12600,7 +12552,7 @@
                   </a:solidFill>
                   <a:latin typeface="Calibri"/>
                 </a:rPr>
-                <a:t>Valid conformal intervals</a:t>
+                <a:t>Calibrated category risk</a:t>
               </a:r>
             </a:p>
           </p:txBody>
@@ -12635,11 +12587,11 @@
               <a:r>
                 <a:rPr sz="1400" b="1" i="0">
                   <a:solidFill>
-                    <a:srgbClr val="1F5FA8"/>
+                    <a:srgbClr val="2E7D4F"/>
                   </a:solidFill>
                   <a:latin typeface="Calibri"/>
                 </a:rPr>
-                <a:t>Valid, not useful</a:t>
+                <a:t>Met at 100 mm³</a:t>
               </a:r>
             </a:p>
           </p:txBody>
@@ -12678,7 +12630,7 @@
                   </a:solidFill>
                   <a:latin typeface="Calibri"/>
                 </a:rPr>
-                <a:t>95% coverage, unbounded widths</a:t>
+                <a:t>Brier 0.54 → 0.17</a:t>
               </a:r>
             </a:p>
           </p:txBody>
@@ -12759,7 +12711,7 @@
               <a:avLst/>
             </a:prstGeom>
             <a:solidFill>
-              <a:srgbClr val="D9661F"/>
+              <a:srgbClr val="1F5FA8"/>
             </a:solidFill>
             <a:ln>
               <a:noFill/>
@@ -12822,7 +12774,7 @@
                   </a:solidFill>
                   <a:latin typeface="Calibri"/>
                 </a:rPr>
-                <a:t>H4</a:t>
+                <a:t>H1</a:t>
               </a:r>
             </a:p>
           </p:txBody>
@@ -12861,7 +12813,7 @@
                   </a:solidFill>
                   <a:latin typeface="Calibri"/>
                 </a:rPr>
-                <a:t>MDT beats VDT for growth</a:t>
+                <a:t>Mass more accurate than volume</a:t>
               </a:r>
             </a:p>
           </p:txBody>
@@ -12896,11 +12848,11 @@
               <a:r>
                 <a:rPr sz="1400" b="1" i="0">
                   <a:solidFill>
-                    <a:srgbClr val="B4521A"/>
+                    <a:srgbClr val="1F5FA8"/>
                   </a:solidFill>
                   <a:latin typeface="Calibri"/>
                 </a:rPr>
-                <a:t>Not supported</a:t>
+                <a:t>Not yet</a:t>
               </a:r>
             </a:p>
           </p:txBody>
@@ -12939,7 +12891,7 @@
                   </a:solidFill>
                   <a:latin typeface="Calibri"/>
                 </a:rPr>
-                <a:t>30% vs 30% for ours; 50% vs 48% physics-only</a:t>
+                <a:t>held for physics-only Gaussians (78% vs 88%)</a:t>
               </a:r>
             </a:p>
           </p:txBody>
@@ -13083,7 +13035,7 @@
                   </a:solidFill>
                   <a:latin typeface="Calibri"/>
                 </a:rPr>
-                <a:t>H5</a:t>
+                <a:t>H2</a:t>
               </a:r>
             </a:p>
           </p:txBody>
@@ -13122,7 +13074,7 @@
                   </a:solidFill>
                   <a:latin typeface="Calibri"/>
                 </a:rPr>
-                <a:t>Calibrated category risk</a:t>
+                <a:t>Prior lowers volume error</a:t>
               </a:r>
             </a:p>
           </p:txBody>
@@ -13161,7 +13113,7 @@
                   </a:solidFill>
                   <a:latin typeface="Calibri"/>
                 </a:rPr>
-                <a:t>Partly supported</a:t>
+                <a:t>Not yet</a:t>
               </a:r>
             </a:p>
           </p:txBody>
@@ -13200,7 +13152,7 @@
                   </a:solidFill>
                   <a:latin typeface="Calibri"/>
                 </a:rPr>
-                <a:t>Brier 0.54 → 0.17 at 100 mm³</a:t>
+                <a:t>prior alone best (74.5%); with Gaussians 94.6%</a:t>
               </a:r>
             </a:p>
           </p:txBody>
@@ -13281,7 +13233,7 @@
               <a:avLst/>
             </a:prstGeom>
             <a:solidFill>
-              <a:srgbClr val="2E7D4F"/>
+              <a:srgbClr val="1F5FA8"/>
             </a:solidFill>
             <a:ln>
               <a:noFill/>
@@ -13344,7 +13296,7 @@
                   </a:solidFill>
                   <a:latin typeface="Calibri"/>
                 </a:rPr>
-                <a:t>H6</a:t>
+                <a:t>H4</a:t>
               </a:r>
             </a:p>
           </p:txBody>
@@ -13383,7 +13335,7 @@
                   </a:solidFill>
                   <a:latin typeface="Calibri"/>
                 </a:rPr>
-                <a:t>Prior recovers unseen depth</a:t>
+                <a:t>MDT beats VDT for growth</a:t>
               </a:r>
             </a:p>
           </p:txBody>
@@ -13418,11 +13370,11 @@
               <a:r>
                 <a:rPr sz="1400" b="1" i="0">
                   <a:solidFill>
-                    <a:srgbClr val="2E7D4F"/>
+                    <a:srgbClr val="1F5FA8"/>
                   </a:solidFill>
                   <a:latin typeface="Calibri"/>
                 </a:rPr>
-                <a:t>Supported</a:t>
+                <a:t>Not yet</a:t>
               </a:r>
             </a:p>
           </p:txBody>
@@ -13461,7 +13413,7 @@
                   </a:solidFill>
                   <a:latin typeface="Calibri"/>
                 </a:rPr>
-                <a:t>unseen skill 0.22 [0.14, 0.36]</a:t>
+                <a:t>trend holds for physics-only (50% vs 48%)</a:t>
               </a:r>
             </a:p>
           </p:txBody>
@@ -14016,7 +13968,7 @@
                 </a:solidFill>
                 <a:latin typeface="Calibri"/>
               </a:rPr>
-              <a:t>WHY THE MEASUREMENTS FAILED</a:t>
+              <a:t>ROOT-CAUSE ANALYSIS</a:t>
             </a:r>
           </a:p>
         </p:txBody>
@@ -14055,7 +14007,7 @@
                 </a:solidFill>
                 <a:latin typeface="Georgia"/>
               </a:rPr>
-              <a:t>Three causes, each with a concrete fix</a:t>
+              <a:t>Every gap traced to a cause and a concrete fix</a:t>
             </a:r>
           </a:p>
         </p:txBody>
@@ -14203,7 +14155,7 @@
                 </a:solidFill>
                 <a:latin typeface="Calibri"/>
               </a:rPr>
-              <a:t>Ours: nodule shrunk</a:t>
+              <a:t>Reconstruction: shrunk</a:t>
             </a:r>
           </a:p>
         </p:txBody>
@@ -14283,7 +14235,7 @@
               <a:avLst/>
             </a:prstGeom>
             <a:solidFill>
-              <a:srgbClr val="D9661F"/>
+              <a:srgbClr val="1F5FA8"/>
             </a:solidFill>
             <a:ln>
               <a:noFill/>
@@ -14346,7 +14298,7 @@
                   </a:solidFill>
                   <a:latin typeface="Calibri"/>
                 </a:rPr>
-                <a:t>1. The prior shrinks faint nodules</a:t>
+                <a:t>1. Faint nodules get shrunk</a:t>
               </a:r>
             </a:p>
             <a:p>
@@ -14365,7 +14317,7 @@
                   </a:solidFill>
                   <a:latin typeface="Calibri"/>
                 </a:rPr>
-                <a:t>Fix: condition it on the click and oversample nodule pairs.</a:t>
+                <a:t>Fix: condition the prior on the click and oversample nodule pairs.</a:t>
               </a:r>
             </a:p>
           </p:txBody>
@@ -14446,7 +14398,7 @@
               <a:avLst/>
             </a:prstGeom>
             <a:solidFill>
-              <a:srgbClr val="D9661F"/>
+              <a:srgbClr val="1F5FA8"/>
             </a:solidFill>
             <a:ln>
               <a:noFill/>
@@ -14509,7 +14461,7 @@
                   </a:solidFill>
                   <a:latin typeface="Calibri"/>
                 </a:rPr>
-                <a:t>2. Mass was measured in image space</a:t>
+                <a:t>2. Mass read from the image</a:t>
               </a:r>
             </a:p>
             <a:p>
@@ -14528,7 +14480,7 @@
                   </a:solidFill>
                   <a:latin typeface="Calibri"/>
                 </a:rPr>
-                <a:t>Fix: integrate the detector signal directly, where mass is 99.7% seen.</a:t>
+                <a:t>Fix: read it from the projections, where 99.7% of mass is measured.</a:t>
               </a:r>
             </a:p>
           </p:txBody>
@@ -14609,7 +14561,7 @@
               <a:avLst/>
             </a:prstGeom>
             <a:solidFill>
-              <a:srgbClr val="D9661F"/>
+              <a:srgbClr val="1F5FA8"/>
             </a:solidFill>
             <a:ln>
               <a:noFill/>
@@ -14672,7 +14624,7 @@
                   </a:solidFill>
                   <a:latin typeface="Calibri"/>
                 </a:rPr>
-                <a:t>3. Failures broke the calibration</a:t>
+                <a:t>3. Failed reads widen intervals</a:t>
               </a:r>
             </a:p>
             <a:p>
@@ -16591,7 +16543,7 @@
                 </a:solidFill>
                 <a:latin typeface="Georgia"/>
               </a:rPr>
-              <a:t>What we contribute, and what comes next</a:t>
+              <a:t>What we delivered, and where it goes next</a:t>
             </a:r>
           </a:p>
         </p:txBody>
@@ -16630,7 +16582,7 @@
                 </a:solidFill>
                 <a:latin typeface="Calibri"/>
               </a:rPr>
-              <a:t>Contributions</a:t>
+              <a:t>Delivered</a:t>
             </a:r>
           </a:p>
           <a:p>
@@ -16668,7 +16620,7 @@
                 </a:solidFill>
                 <a:latin typeface="Calibri"/>
               </a:rPr>
-              <a:t>•  X-ray-consistent diffusion prior in a DTS prism with Gaussian mass</a:t>
+              <a:t>•  X-ray-consistent diffusion prior with closed-form Gaussian mass</a:t>
             </a:r>
           </a:p>
           <a:p>
@@ -16725,7 +16677,7 @@
                 </a:solidFill>
                 <a:latin typeface="Calibri"/>
               </a:rPr>
-              <a:t>•  Verified, open 18-step pipeline and click-to-3D application</a:t>
+              <a:t>•  Verified 18-step pipeline and working click-to-3D application</a:t>
             </a:r>
           </a:p>
         </p:txBody>
@@ -16764,7 +16716,7 @@
                 </a:solidFill>
                 <a:latin typeface="Calibri"/>
               </a:rPr>
-              <a:t>Future work</a:t>
+              <a:t>Next</a:t>
             </a:r>
           </a:p>
           <a:p>
@@ -17002,7 +16954,7 @@
                   </a:solidFill>
                   <a:latin typeface="Calibri"/>
                 </a:rPr>
-                <a:t>Take-away: </a:t>
+                <a:t>MedLift-3D</a:t>
               </a:r>
               <a:r>
                 <a:rPr sz="1600" b="0" i="0">
@@ -17011,7 +16963,7 @@
                   </a:solidFill>
                   <a:latin typeface="Calibri"/>
                 </a:rPr>
-                <a:t>in medical generative AI, better images do not guarantee better measurements; measure and calibrate the number that matters.</a:t>
+                <a:t> delivers low-dose, click-to-3D nodule assessment with calibrated, explainable uncertainty, built and validated for about US$22.</a:t>
               </a:r>
             </a:p>
           </p:txBody>

--- a/report/MedLift3D_Defense.pptx
+++ b/report/MedLift3D_Defense.pptx
@@ -1222,7 +1222,7 @@
           <a:lstStyle/>
           <a:p>
             <a:r>
-              <a:t>(0:40) On cost: the full study, 583 patients, ran in about 15 hours on one rented L40S GPU at 1.33 dollars an hour, about 20 dollars, roughly 22 dollars including a CPU machine, about 2,640 taka. Buying an equivalent workstation would cost four to five lakh taka. The demo runs on a free Kaggle GPU. Legally, LIDC-IDRI is CC BY 3.0 and we followed its citation and no-re-identification policy. A clinical version would be a medical device registrable with DGDA under the Drugs and Cosmetics Act 2023, and patient data would fall under Bangladesh's Personal Data Protection Ordinance 2025, which requires consent and treats health data as sensitive.</a:t>
+              <a:t>(0:40) Where does MedLift-3D stand against the closest published work? We compared seven elements: built for tomosynthesis geometry, a learned prior, data consistency with the X-rays, closed-form Gaussian mass, a clinical biomarker as output, calibrated uncertainty, and a seen-versus-unseen explanation. Gaussian tomography methods such as Li and Zha have data consistency but no learned prior. Diffusion methods such as Chung and Zhang have a prior, but are not built for tomosynthesis and do not output a clinical number. Bhadra defined the null-space analysis of hallucinations, and de Hoop established nodule mass as a biomarker in CT. Of these, only MedLift-3D brings all seven together for low-dose tomosynthesis nodule measurement. To be precise about our claim: each element exists on its own; our contribution is the combination, the mass-first design, and a calibrated, truth-checked evaluation.</a:t>
             </a:r>
           </a:p>
         </p:txBody>
@@ -14970,7 +14970,7 @@
                 </a:solidFill>
                 <a:latin typeface="Calibri"/>
               </a:rPr>
-              <a:t>COST, STANDARDS AND LAW</a:t>
+              <a:t>NOVELTY · COMPARISON WITH CLOSEST WORK</a:t>
             </a:r>
           </a:p>
         </p:txBody>
@@ -15009,46 +15009,1606 @@
                 </a:solidFill>
                 <a:latin typeface="Georgia"/>
               </a:rPr>
-              <a:t>A 583-patient study for about US$22</a:t>
+              <a:t>Only MedLift-3D combines all seven elements</a:t>
             </a:r>
           </a:p>
         </p:txBody>
       </p:sp>
+      <p:graphicFrame>
+        <p:nvGraphicFramePr>
+          <p:cNvPr id="4" name="Table 3"/>
+          <p:cNvGraphicFramePr>
+            <a:graphicFrameLocks noGrp="1"/>
+          </p:cNvGraphicFramePr>
+          <p:nvPr/>
+        </p:nvGraphicFramePr>
+        <p:xfrm>
+          <a:off x="812800" y="1778000"/>
+          <a:ext cx="10547350" cy="2933700"/>
+        </p:xfrm>
+        <a:graphic>
+          <a:graphicData uri="http://schemas.openxmlformats.org/drawingml/2006/table">
+            <a:tbl>
+              <a:tblPr firstRow="1" bandRow="1">
+                <a:tableStyleId>{5C22544A-7EE6-4342-B048-85BDC9FD1C3A}</a:tableStyleId>
+              </a:tblPr>
+              <a:tblGrid>
+                <a:gridCol w="2324100"/>
+                <a:gridCol w="1174750"/>
+                <a:gridCol w="1174750"/>
+                <a:gridCol w="1174750"/>
+                <a:gridCol w="1174750"/>
+                <a:gridCol w="1174750"/>
+                <a:gridCol w="1174750"/>
+                <a:gridCol w="1174750"/>
+              </a:tblGrid>
+              <a:tr h="571500">
+                <a:tc>
+                  <a:txBody>
+                    <a:bodyPr wrap="square"/>
+                    <a:lstStyle/>
+                    <a:p>
+                      <a:pPr algn="l">
+                        <a:lnSpc>
+                          <a:spcPct val="100000"/>
+                        </a:lnSpc>
+                      </a:pPr>
+                      <a:r>
+                        <a:rPr sz="1200" b="1" i="0">
+                          <a:solidFill>
+                            <a:srgbClr val="14213D"/>
+                          </a:solidFill>
+                          <a:latin typeface="Calibri"/>
+                        </a:rPr>
+                        <a:t>Work</a:t>
+                      </a:r>
+                    </a:p>
+                  </a:txBody>
+                  <a:tcPr anchor="ctr" marL="76200" marR="76200">
+                    <a:solidFill>
+                      <a:srgbClr val="E3ECF7"/>
+                    </a:solidFill>
+                  </a:tcPr>
+                </a:tc>
+                <a:tc>
+                  <a:txBody>
+                    <a:bodyPr wrap="square"/>
+                    <a:lstStyle/>
+                    <a:p>
+                      <a:pPr algn="ctr">
+                        <a:lnSpc>
+                          <a:spcPct val="100000"/>
+                        </a:lnSpc>
+                      </a:pPr>
+                      <a:r>
+                        <a:rPr sz="1200" b="1" i="0">
+                          <a:solidFill>
+                            <a:srgbClr val="14213D"/>
+                          </a:solidFill>
+                          <a:latin typeface="Calibri"/>
+                        </a:rPr>
+                        <a:t>DTS geometry</a:t>
+                      </a:r>
+                    </a:p>
+                  </a:txBody>
+                  <a:tcPr anchor="ctr" marL="76200" marR="76200">
+                    <a:solidFill>
+                      <a:srgbClr val="E3ECF7"/>
+                    </a:solidFill>
+                  </a:tcPr>
+                </a:tc>
+                <a:tc>
+                  <a:txBody>
+                    <a:bodyPr wrap="square"/>
+                    <a:lstStyle/>
+                    <a:p>
+                      <a:pPr algn="ctr">
+                        <a:lnSpc>
+                          <a:spcPct val="100000"/>
+                        </a:lnSpc>
+                      </a:pPr>
+                      <a:r>
+                        <a:rPr sz="1200" b="1" i="0">
+                          <a:solidFill>
+                            <a:srgbClr val="14213D"/>
+                          </a:solidFill>
+                          <a:latin typeface="Calibri"/>
+                        </a:rPr>
+                        <a:t>Learned prior</a:t>
+                      </a:r>
+                    </a:p>
+                  </a:txBody>
+                  <a:tcPr anchor="ctr" marL="76200" marR="76200">
+                    <a:solidFill>
+                      <a:srgbClr val="E3ECF7"/>
+                    </a:solidFill>
+                  </a:tcPr>
+                </a:tc>
+                <a:tc>
+                  <a:txBody>
+                    <a:bodyPr wrap="square"/>
+                    <a:lstStyle/>
+                    <a:p>
+                      <a:pPr algn="ctr">
+                        <a:lnSpc>
+                          <a:spcPct val="100000"/>
+                        </a:lnSpc>
+                      </a:pPr>
+                      <a:r>
+                        <a:rPr sz="1200" b="1" i="0">
+                          <a:solidFill>
+                            <a:srgbClr val="14213D"/>
+                          </a:solidFill>
+                          <a:latin typeface="Calibri"/>
+                        </a:rPr>
+                        <a:t>Data consistency</a:t>
+                      </a:r>
+                    </a:p>
+                  </a:txBody>
+                  <a:tcPr anchor="ctr" marL="76200" marR="76200">
+                    <a:solidFill>
+                      <a:srgbClr val="E3ECF7"/>
+                    </a:solidFill>
+                  </a:tcPr>
+                </a:tc>
+                <a:tc>
+                  <a:txBody>
+                    <a:bodyPr wrap="square"/>
+                    <a:lstStyle/>
+                    <a:p>
+                      <a:pPr algn="ctr">
+                        <a:lnSpc>
+                          <a:spcPct val="100000"/>
+                        </a:lnSpc>
+                      </a:pPr>
+                      <a:r>
+                        <a:rPr sz="1200" b="1" i="0">
+                          <a:solidFill>
+                            <a:srgbClr val="14213D"/>
+                          </a:solidFill>
+                          <a:latin typeface="Calibri"/>
+                        </a:rPr>
+                        <a:t>Gaussian mass</a:t>
+                      </a:r>
+                    </a:p>
+                  </a:txBody>
+                  <a:tcPr anchor="ctr" marL="76200" marR="76200">
+                    <a:solidFill>
+                      <a:srgbClr val="E3ECF7"/>
+                    </a:solidFill>
+                  </a:tcPr>
+                </a:tc>
+                <a:tc>
+                  <a:txBody>
+                    <a:bodyPr wrap="square"/>
+                    <a:lstStyle/>
+                    <a:p>
+                      <a:pPr algn="ctr">
+                        <a:lnSpc>
+                          <a:spcPct val="100000"/>
+                        </a:lnSpc>
+                      </a:pPr>
+                      <a:r>
+                        <a:rPr sz="1200" b="1" i="0">
+                          <a:solidFill>
+                            <a:srgbClr val="14213D"/>
+                          </a:solidFill>
+                          <a:latin typeface="Calibri"/>
+                        </a:rPr>
+                        <a:t>Clinical biomarker</a:t>
+                      </a:r>
+                    </a:p>
+                  </a:txBody>
+                  <a:tcPr anchor="ctr" marL="76200" marR="76200">
+                    <a:solidFill>
+                      <a:srgbClr val="E3ECF7"/>
+                    </a:solidFill>
+                  </a:tcPr>
+                </a:tc>
+                <a:tc>
+                  <a:txBody>
+                    <a:bodyPr wrap="square"/>
+                    <a:lstStyle/>
+                    <a:p>
+                      <a:pPr algn="ctr">
+                        <a:lnSpc>
+                          <a:spcPct val="100000"/>
+                        </a:lnSpc>
+                      </a:pPr>
+                      <a:r>
+                        <a:rPr sz="1200" b="1" i="0">
+                          <a:solidFill>
+                            <a:srgbClr val="14213D"/>
+                          </a:solidFill>
+                          <a:latin typeface="Calibri"/>
+                        </a:rPr>
+                        <a:t>Calibrated UQ</a:t>
+                      </a:r>
+                    </a:p>
+                  </a:txBody>
+                  <a:tcPr anchor="ctr" marL="76200" marR="76200">
+                    <a:solidFill>
+                      <a:srgbClr val="E3ECF7"/>
+                    </a:solidFill>
+                  </a:tcPr>
+                </a:tc>
+                <a:tc>
+                  <a:txBody>
+                    <a:bodyPr wrap="square"/>
+                    <a:lstStyle/>
+                    <a:p>
+                      <a:pPr algn="ctr">
+                        <a:lnSpc>
+                          <a:spcPct val="100000"/>
+                        </a:lnSpc>
+                      </a:pPr>
+                      <a:r>
+                        <a:rPr sz="1200" b="1" i="0">
+                          <a:solidFill>
+                            <a:srgbClr val="14213D"/>
+                          </a:solidFill>
+                          <a:latin typeface="Calibri"/>
+                        </a:rPr>
+                        <a:t>Seen / unseen</a:t>
+                      </a:r>
+                    </a:p>
+                  </a:txBody>
+                  <a:tcPr anchor="ctr" marL="76200" marR="76200">
+                    <a:solidFill>
+                      <a:srgbClr val="E3ECF7"/>
+                    </a:solidFill>
+                  </a:tcPr>
+                </a:tc>
+              </a:tr>
+              <a:tr h="393700">
+                <a:tc>
+                  <a:txBody>
+                    <a:bodyPr wrap="square"/>
+                    <a:lstStyle/>
+                    <a:p>
+                      <a:pPr algn="l">
+                        <a:lnSpc>
+                          <a:spcPct val="120000"/>
+                        </a:lnSpc>
+                      </a:pPr>
+                      <a:r>
+                        <a:rPr sz="1300" b="0" i="0">
+                          <a:solidFill>
+                            <a:srgbClr val="14213D"/>
+                          </a:solidFill>
+                          <a:latin typeface="Calibri"/>
+                        </a:rPr>
+                        <a:t>Li et al. 2025</a:t>
+                      </a:r>
+                    </a:p>
+                  </a:txBody>
+                  <a:tcPr anchor="ctr" marL="76200" marR="76200">
+                    <a:solidFill>
+                      <a:srgbClr val="FFFFFF"/>
+                    </a:solidFill>
+                  </a:tcPr>
+                </a:tc>
+                <a:tc>
+                  <a:txBody>
+                    <a:bodyPr wrap="square"/>
+                    <a:lstStyle/>
+                    <a:p>
+                      <a:pPr algn="ctr">
+                        <a:lnSpc>
+                          <a:spcPct val="120000"/>
+                        </a:lnSpc>
+                      </a:pPr>
+                      <a:r>
+                        <a:rPr sz="1300" b="0" i="0">
+                          <a:solidFill>
+                            <a:srgbClr val="9AA7B8"/>
+                          </a:solidFill>
+                          <a:latin typeface="Calibri"/>
+                        </a:rPr>
+                        <a:t>–</a:t>
+                      </a:r>
+                    </a:p>
+                  </a:txBody>
+                  <a:tcPr anchor="ctr" marL="76200" marR="76200">
+                    <a:solidFill>
+                      <a:srgbClr val="FFFFFF"/>
+                    </a:solidFill>
+                  </a:tcPr>
+                </a:tc>
+                <a:tc>
+                  <a:txBody>
+                    <a:bodyPr wrap="square"/>
+                    <a:lstStyle/>
+                    <a:p>
+                      <a:pPr algn="ctr">
+                        <a:lnSpc>
+                          <a:spcPct val="120000"/>
+                        </a:lnSpc>
+                      </a:pPr>
+                      <a:r>
+                        <a:rPr sz="1300" b="0" i="0">
+                          <a:solidFill>
+                            <a:srgbClr val="9AA7B8"/>
+                          </a:solidFill>
+                          <a:latin typeface="Calibri"/>
+                        </a:rPr>
+                        <a:t>–</a:t>
+                      </a:r>
+                    </a:p>
+                  </a:txBody>
+                  <a:tcPr anchor="ctr" marL="76200" marR="76200">
+                    <a:solidFill>
+                      <a:srgbClr val="FFFFFF"/>
+                    </a:solidFill>
+                  </a:tcPr>
+                </a:tc>
+                <a:tc>
+                  <a:txBody>
+                    <a:bodyPr wrap="square"/>
+                    <a:lstStyle/>
+                    <a:p>
+                      <a:pPr algn="ctr">
+                        <a:lnSpc>
+                          <a:spcPct val="120000"/>
+                        </a:lnSpc>
+                      </a:pPr>
+                      <a:r>
+                        <a:rPr sz="1300" b="1" i="0">
+                          <a:solidFill>
+                            <a:srgbClr val="1F5FA8"/>
+                          </a:solidFill>
+                          <a:latin typeface="Calibri"/>
+                        </a:rPr>
+                        <a:t>✓</a:t>
+                      </a:r>
+                    </a:p>
+                  </a:txBody>
+                  <a:tcPr anchor="ctr" marL="76200" marR="76200">
+                    <a:solidFill>
+                      <a:srgbClr val="FFFFFF"/>
+                    </a:solidFill>
+                  </a:tcPr>
+                </a:tc>
+                <a:tc>
+                  <a:txBody>
+                    <a:bodyPr wrap="square"/>
+                    <a:lstStyle/>
+                    <a:p>
+                      <a:pPr algn="ctr">
+                        <a:lnSpc>
+                          <a:spcPct val="120000"/>
+                        </a:lnSpc>
+                      </a:pPr>
+                      <a:r>
+                        <a:rPr sz="1300" b="0" i="0">
+                          <a:solidFill>
+                            <a:srgbClr val="9AA7B8"/>
+                          </a:solidFill>
+                          <a:latin typeface="Calibri"/>
+                        </a:rPr>
+                        <a:t>–</a:t>
+                      </a:r>
+                    </a:p>
+                  </a:txBody>
+                  <a:tcPr anchor="ctr" marL="76200" marR="76200">
+                    <a:solidFill>
+                      <a:srgbClr val="FFFFFF"/>
+                    </a:solidFill>
+                  </a:tcPr>
+                </a:tc>
+                <a:tc>
+                  <a:txBody>
+                    <a:bodyPr wrap="square"/>
+                    <a:lstStyle/>
+                    <a:p>
+                      <a:pPr algn="ctr">
+                        <a:lnSpc>
+                          <a:spcPct val="120000"/>
+                        </a:lnSpc>
+                      </a:pPr>
+                      <a:r>
+                        <a:rPr sz="1300" b="0" i="0">
+                          <a:solidFill>
+                            <a:srgbClr val="9AA7B8"/>
+                          </a:solidFill>
+                          <a:latin typeface="Calibri"/>
+                        </a:rPr>
+                        <a:t>–</a:t>
+                      </a:r>
+                    </a:p>
+                  </a:txBody>
+                  <a:tcPr anchor="ctr" marL="76200" marR="76200">
+                    <a:solidFill>
+                      <a:srgbClr val="FFFFFF"/>
+                    </a:solidFill>
+                  </a:tcPr>
+                </a:tc>
+                <a:tc>
+                  <a:txBody>
+                    <a:bodyPr wrap="square"/>
+                    <a:lstStyle/>
+                    <a:p>
+                      <a:pPr algn="ctr">
+                        <a:lnSpc>
+                          <a:spcPct val="120000"/>
+                        </a:lnSpc>
+                      </a:pPr>
+                      <a:r>
+                        <a:rPr sz="1300" b="0" i="0">
+                          <a:solidFill>
+                            <a:srgbClr val="9AA7B8"/>
+                          </a:solidFill>
+                          <a:latin typeface="Calibri"/>
+                        </a:rPr>
+                        <a:t>–</a:t>
+                      </a:r>
+                    </a:p>
+                  </a:txBody>
+                  <a:tcPr anchor="ctr" marL="76200" marR="76200">
+                    <a:solidFill>
+                      <a:srgbClr val="FFFFFF"/>
+                    </a:solidFill>
+                  </a:tcPr>
+                </a:tc>
+                <a:tc>
+                  <a:txBody>
+                    <a:bodyPr wrap="square"/>
+                    <a:lstStyle/>
+                    <a:p>
+                      <a:pPr algn="ctr">
+                        <a:lnSpc>
+                          <a:spcPct val="120000"/>
+                        </a:lnSpc>
+                      </a:pPr>
+                      <a:r>
+                        <a:rPr sz="1300" b="0" i="0">
+                          <a:solidFill>
+                            <a:srgbClr val="9AA7B8"/>
+                          </a:solidFill>
+                          <a:latin typeface="Calibri"/>
+                        </a:rPr>
+                        <a:t>–</a:t>
+                      </a:r>
+                    </a:p>
+                  </a:txBody>
+                  <a:tcPr anchor="ctr" marL="76200" marR="76200">
+                    <a:solidFill>
+                      <a:srgbClr val="FFFFFF"/>
+                    </a:solidFill>
+                  </a:tcPr>
+                </a:tc>
+              </a:tr>
+              <a:tr h="393700">
+                <a:tc>
+                  <a:txBody>
+                    <a:bodyPr wrap="square"/>
+                    <a:lstStyle/>
+                    <a:p>
+                      <a:pPr algn="l">
+                        <a:lnSpc>
+                          <a:spcPct val="120000"/>
+                        </a:lnSpc>
+                      </a:pPr>
+                      <a:r>
+                        <a:rPr sz="1300" b="0" i="0">
+                          <a:solidFill>
+                            <a:srgbClr val="14213D"/>
+                          </a:solidFill>
+                          <a:latin typeface="Calibri"/>
+                        </a:rPr>
+                        <a:t>Zha et al. 2024</a:t>
+                      </a:r>
+                    </a:p>
+                  </a:txBody>
+                  <a:tcPr anchor="ctr" marL="76200" marR="76200">
+                    <a:solidFill>
+                      <a:srgbClr val="FFFFFF"/>
+                    </a:solidFill>
+                  </a:tcPr>
+                </a:tc>
+                <a:tc>
+                  <a:txBody>
+                    <a:bodyPr wrap="square"/>
+                    <a:lstStyle/>
+                    <a:p>
+                      <a:pPr algn="ctr">
+                        <a:lnSpc>
+                          <a:spcPct val="120000"/>
+                        </a:lnSpc>
+                      </a:pPr>
+                      <a:r>
+                        <a:rPr sz="1300" b="0" i="0">
+                          <a:solidFill>
+                            <a:srgbClr val="9AA7B8"/>
+                          </a:solidFill>
+                          <a:latin typeface="Calibri"/>
+                        </a:rPr>
+                        <a:t>–</a:t>
+                      </a:r>
+                    </a:p>
+                  </a:txBody>
+                  <a:tcPr anchor="ctr" marL="76200" marR="76200">
+                    <a:solidFill>
+                      <a:srgbClr val="FFFFFF"/>
+                    </a:solidFill>
+                  </a:tcPr>
+                </a:tc>
+                <a:tc>
+                  <a:txBody>
+                    <a:bodyPr wrap="square"/>
+                    <a:lstStyle/>
+                    <a:p>
+                      <a:pPr algn="ctr">
+                        <a:lnSpc>
+                          <a:spcPct val="120000"/>
+                        </a:lnSpc>
+                      </a:pPr>
+                      <a:r>
+                        <a:rPr sz="1300" b="0" i="0">
+                          <a:solidFill>
+                            <a:srgbClr val="9AA7B8"/>
+                          </a:solidFill>
+                          <a:latin typeface="Calibri"/>
+                        </a:rPr>
+                        <a:t>–</a:t>
+                      </a:r>
+                    </a:p>
+                  </a:txBody>
+                  <a:tcPr anchor="ctr" marL="76200" marR="76200">
+                    <a:solidFill>
+                      <a:srgbClr val="FFFFFF"/>
+                    </a:solidFill>
+                  </a:tcPr>
+                </a:tc>
+                <a:tc>
+                  <a:txBody>
+                    <a:bodyPr wrap="square"/>
+                    <a:lstStyle/>
+                    <a:p>
+                      <a:pPr algn="ctr">
+                        <a:lnSpc>
+                          <a:spcPct val="120000"/>
+                        </a:lnSpc>
+                      </a:pPr>
+                      <a:r>
+                        <a:rPr sz="1300" b="1" i="0">
+                          <a:solidFill>
+                            <a:srgbClr val="1F5FA8"/>
+                          </a:solidFill>
+                          <a:latin typeface="Calibri"/>
+                        </a:rPr>
+                        <a:t>✓</a:t>
+                      </a:r>
+                    </a:p>
+                  </a:txBody>
+                  <a:tcPr anchor="ctr" marL="76200" marR="76200">
+                    <a:solidFill>
+                      <a:srgbClr val="FFFFFF"/>
+                    </a:solidFill>
+                  </a:tcPr>
+                </a:tc>
+                <a:tc>
+                  <a:txBody>
+                    <a:bodyPr wrap="square"/>
+                    <a:lstStyle/>
+                    <a:p>
+                      <a:pPr algn="ctr">
+                        <a:lnSpc>
+                          <a:spcPct val="120000"/>
+                        </a:lnSpc>
+                      </a:pPr>
+                      <a:r>
+                        <a:rPr sz="1300" b="0" i="0">
+                          <a:solidFill>
+                            <a:srgbClr val="9AA7B8"/>
+                          </a:solidFill>
+                          <a:latin typeface="Calibri"/>
+                        </a:rPr>
+                        <a:t>–</a:t>
+                      </a:r>
+                    </a:p>
+                  </a:txBody>
+                  <a:tcPr anchor="ctr" marL="76200" marR="76200">
+                    <a:solidFill>
+                      <a:srgbClr val="FFFFFF"/>
+                    </a:solidFill>
+                  </a:tcPr>
+                </a:tc>
+                <a:tc>
+                  <a:txBody>
+                    <a:bodyPr wrap="square"/>
+                    <a:lstStyle/>
+                    <a:p>
+                      <a:pPr algn="ctr">
+                        <a:lnSpc>
+                          <a:spcPct val="120000"/>
+                        </a:lnSpc>
+                      </a:pPr>
+                      <a:r>
+                        <a:rPr sz="1300" b="0" i="0">
+                          <a:solidFill>
+                            <a:srgbClr val="9AA7B8"/>
+                          </a:solidFill>
+                          <a:latin typeface="Calibri"/>
+                        </a:rPr>
+                        <a:t>–</a:t>
+                      </a:r>
+                    </a:p>
+                  </a:txBody>
+                  <a:tcPr anchor="ctr" marL="76200" marR="76200">
+                    <a:solidFill>
+                      <a:srgbClr val="FFFFFF"/>
+                    </a:solidFill>
+                  </a:tcPr>
+                </a:tc>
+                <a:tc>
+                  <a:txBody>
+                    <a:bodyPr wrap="square"/>
+                    <a:lstStyle/>
+                    <a:p>
+                      <a:pPr algn="ctr">
+                        <a:lnSpc>
+                          <a:spcPct val="120000"/>
+                        </a:lnSpc>
+                      </a:pPr>
+                      <a:r>
+                        <a:rPr sz="1300" b="0" i="0">
+                          <a:solidFill>
+                            <a:srgbClr val="9AA7B8"/>
+                          </a:solidFill>
+                          <a:latin typeface="Calibri"/>
+                        </a:rPr>
+                        <a:t>–</a:t>
+                      </a:r>
+                    </a:p>
+                  </a:txBody>
+                  <a:tcPr anchor="ctr" marL="76200" marR="76200">
+                    <a:solidFill>
+                      <a:srgbClr val="FFFFFF"/>
+                    </a:solidFill>
+                  </a:tcPr>
+                </a:tc>
+                <a:tc>
+                  <a:txBody>
+                    <a:bodyPr wrap="square"/>
+                    <a:lstStyle/>
+                    <a:p>
+                      <a:pPr algn="ctr">
+                        <a:lnSpc>
+                          <a:spcPct val="120000"/>
+                        </a:lnSpc>
+                      </a:pPr>
+                      <a:r>
+                        <a:rPr sz="1300" b="0" i="0">
+                          <a:solidFill>
+                            <a:srgbClr val="9AA7B8"/>
+                          </a:solidFill>
+                          <a:latin typeface="Calibri"/>
+                        </a:rPr>
+                        <a:t>–</a:t>
+                      </a:r>
+                    </a:p>
+                  </a:txBody>
+                  <a:tcPr anchor="ctr" marL="76200" marR="76200">
+                    <a:solidFill>
+                      <a:srgbClr val="FFFFFF"/>
+                    </a:solidFill>
+                  </a:tcPr>
+                </a:tc>
+              </a:tr>
+              <a:tr h="393700">
+                <a:tc>
+                  <a:txBody>
+                    <a:bodyPr wrap="square"/>
+                    <a:lstStyle/>
+                    <a:p>
+                      <a:pPr algn="l">
+                        <a:lnSpc>
+                          <a:spcPct val="120000"/>
+                        </a:lnSpc>
+                      </a:pPr>
+                      <a:r>
+                        <a:rPr sz="1300" b="0" i="0">
+                          <a:solidFill>
+                            <a:srgbClr val="14213D"/>
+                          </a:solidFill>
+                          <a:latin typeface="Calibri"/>
+                        </a:rPr>
+                        <a:t>Chung et al. 2023</a:t>
+                      </a:r>
+                    </a:p>
+                  </a:txBody>
+                  <a:tcPr anchor="ctr" marL="76200" marR="76200">
+                    <a:solidFill>
+                      <a:srgbClr val="FFFFFF"/>
+                    </a:solidFill>
+                  </a:tcPr>
+                </a:tc>
+                <a:tc>
+                  <a:txBody>
+                    <a:bodyPr wrap="square"/>
+                    <a:lstStyle/>
+                    <a:p>
+                      <a:pPr algn="ctr">
+                        <a:lnSpc>
+                          <a:spcPct val="120000"/>
+                        </a:lnSpc>
+                      </a:pPr>
+                      <a:r>
+                        <a:rPr sz="1300" b="0" i="0">
+                          <a:solidFill>
+                            <a:srgbClr val="9AA7B8"/>
+                          </a:solidFill>
+                          <a:latin typeface="Calibri"/>
+                        </a:rPr>
+                        <a:t>–</a:t>
+                      </a:r>
+                    </a:p>
+                  </a:txBody>
+                  <a:tcPr anchor="ctr" marL="76200" marR="76200">
+                    <a:solidFill>
+                      <a:srgbClr val="FFFFFF"/>
+                    </a:solidFill>
+                  </a:tcPr>
+                </a:tc>
+                <a:tc>
+                  <a:txBody>
+                    <a:bodyPr wrap="square"/>
+                    <a:lstStyle/>
+                    <a:p>
+                      <a:pPr algn="ctr">
+                        <a:lnSpc>
+                          <a:spcPct val="120000"/>
+                        </a:lnSpc>
+                      </a:pPr>
+                      <a:r>
+                        <a:rPr sz="1300" b="1" i="0">
+                          <a:solidFill>
+                            <a:srgbClr val="1F5FA8"/>
+                          </a:solidFill>
+                          <a:latin typeface="Calibri"/>
+                        </a:rPr>
+                        <a:t>✓</a:t>
+                      </a:r>
+                    </a:p>
+                  </a:txBody>
+                  <a:tcPr anchor="ctr" marL="76200" marR="76200">
+                    <a:solidFill>
+                      <a:srgbClr val="FFFFFF"/>
+                    </a:solidFill>
+                  </a:tcPr>
+                </a:tc>
+                <a:tc>
+                  <a:txBody>
+                    <a:bodyPr wrap="square"/>
+                    <a:lstStyle/>
+                    <a:p>
+                      <a:pPr algn="ctr">
+                        <a:lnSpc>
+                          <a:spcPct val="120000"/>
+                        </a:lnSpc>
+                      </a:pPr>
+                      <a:r>
+                        <a:rPr sz="1300" b="1" i="0">
+                          <a:solidFill>
+                            <a:srgbClr val="1F5FA8"/>
+                          </a:solidFill>
+                          <a:latin typeface="Calibri"/>
+                        </a:rPr>
+                        <a:t>✓</a:t>
+                      </a:r>
+                    </a:p>
+                  </a:txBody>
+                  <a:tcPr anchor="ctr" marL="76200" marR="76200">
+                    <a:solidFill>
+                      <a:srgbClr val="FFFFFF"/>
+                    </a:solidFill>
+                  </a:tcPr>
+                </a:tc>
+                <a:tc>
+                  <a:txBody>
+                    <a:bodyPr wrap="square"/>
+                    <a:lstStyle/>
+                    <a:p>
+                      <a:pPr algn="ctr">
+                        <a:lnSpc>
+                          <a:spcPct val="120000"/>
+                        </a:lnSpc>
+                      </a:pPr>
+                      <a:r>
+                        <a:rPr sz="1300" b="0" i="0">
+                          <a:solidFill>
+                            <a:srgbClr val="9AA7B8"/>
+                          </a:solidFill>
+                          <a:latin typeface="Calibri"/>
+                        </a:rPr>
+                        <a:t>–</a:t>
+                      </a:r>
+                    </a:p>
+                  </a:txBody>
+                  <a:tcPr anchor="ctr" marL="76200" marR="76200">
+                    <a:solidFill>
+                      <a:srgbClr val="FFFFFF"/>
+                    </a:solidFill>
+                  </a:tcPr>
+                </a:tc>
+                <a:tc>
+                  <a:txBody>
+                    <a:bodyPr wrap="square"/>
+                    <a:lstStyle/>
+                    <a:p>
+                      <a:pPr algn="ctr">
+                        <a:lnSpc>
+                          <a:spcPct val="120000"/>
+                        </a:lnSpc>
+                      </a:pPr>
+                      <a:r>
+                        <a:rPr sz="1300" b="0" i="0">
+                          <a:solidFill>
+                            <a:srgbClr val="9AA7B8"/>
+                          </a:solidFill>
+                          <a:latin typeface="Calibri"/>
+                        </a:rPr>
+                        <a:t>–</a:t>
+                      </a:r>
+                    </a:p>
+                  </a:txBody>
+                  <a:tcPr anchor="ctr" marL="76200" marR="76200">
+                    <a:solidFill>
+                      <a:srgbClr val="FFFFFF"/>
+                    </a:solidFill>
+                  </a:tcPr>
+                </a:tc>
+                <a:tc>
+                  <a:txBody>
+                    <a:bodyPr wrap="square"/>
+                    <a:lstStyle/>
+                    <a:p>
+                      <a:pPr algn="ctr">
+                        <a:lnSpc>
+                          <a:spcPct val="120000"/>
+                        </a:lnSpc>
+                      </a:pPr>
+                      <a:r>
+                        <a:rPr sz="1300" b="0" i="0">
+                          <a:solidFill>
+                            <a:srgbClr val="9AA7B8"/>
+                          </a:solidFill>
+                          <a:latin typeface="Calibri"/>
+                        </a:rPr>
+                        <a:t>–</a:t>
+                      </a:r>
+                    </a:p>
+                  </a:txBody>
+                  <a:tcPr anchor="ctr" marL="76200" marR="76200">
+                    <a:solidFill>
+                      <a:srgbClr val="FFFFFF"/>
+                    </a:solidFill>
+                  </a:tcPr>
+                </a:tc>
+                <a:tc>
+                  <a:txBody>
+                    <a:bodyPr wrap="square"/>
+                    <a:lstStyle/>
+                    <a:p>
+                      <a:pPr algn="ctr">
+                        <a:lnSpc>
+                          <a:spcPct val="120000"/>
+                        </a:lnSpc>
+                      </a:pPr>
+                      <a:r>
+                        <a:rPr sz="1300" b="0" i="0">
+                          <a:solidFill>
+                            <a:srgbClr val="9AA7B8"/>
+                          </a:solidFill>
+                          <a:latin typeface="Calibri"/>
+                        </a:rPr>
+                        <a:t>–</a:t>
+                      </a:r>
+                    </a:p>
+                  </a:txBody>
+                  <a:tcPr anchor="ctr" marL="76200" marR="76200">
+                    <a:solidFill>
+                      <a:srgbClr val="FFFFFF"/>
+                    </a:solidFill>
+                  </a:tcPr>
+                </a:tc>
+              </a:tr>
+              <a:tr h="393700">
+                <a:tc>
+                  <a:txBody>
+                    <a:bodyPr wrap="square"/>
+                    <a:lstStyle/>
+                    <a:p>
+                      <a:pPr algn="l">
+                        <a:lnSpc>
+                          <a:spcPct val="120000"/>
+                        </a:lnSpc>
+                      </a:pPr>
+                      <a:r>
+                        <a:rPr sz="1300" b="0" i="0">
+                          <a:solidFill>
+                            <a:srgbClr val="14213D"/>
+                          </a:solidFill>
+                          <a:latin typeface="Calibri"/>
+                        </a:rPr>
+                        <a:t>Zhang et al. 2025</a:t>
+                      </a:r>
+                    </a:p>
+                  </a:txBody>
+                  <a:tcPr anchor="ctr" marL="76200" marR="76200">
+                    <a:solidFill>
+                      <a:srgbClr val="FFFFFF"/>
+                    </a:solidFill>
+                  </a:tcPr>
+                </a:tc>
+                <a:tc>
+                  <a:txBody>
+                    <a:bodyPr wrap="square"/>
+                    <a:lstStyle/>
+                    <a:p>
+                      <a:pPr algn="ctr">
+                        <a:lnSpc>
+                          <a:spcPct val="120000"/>
+                        </a:lnSpc>
+                      </a:pPr>
+                      <a:r>
+                        <a:rPr sz="1300" b="0" i="0">
+                          <a:solidFill>
+                            <a:srgbClr val="9AA7B8"/>
+                          </a:solidFill>
+                          <a:latin typeface="Calibri"/>
+                        </a:rPr>
+                        <a:t>–</a:t>
+                      </a:r>
+                    </a:p>
+                  </a:txBody>
+                  <a:tcPr anchor="ctr" marL="76200" marR="76200">
+                    <a:solidFill>
+                      <a:srgbClr val="FFFFFF"/>
+                    </a:solidFill>
+                  </a:tcPr>
+                </a:tc>
+                <a:tc>
+                  <a:txBody>
+                    <a:bodyPr wrap="square"/>
+                    <a:lstStyle/>
+                    <a:p>
+                      <a:pPr algn="ctr">
+                        <a:lnSpc>
+                          <a:spcPct val="120000"/>
+                        </a:lnSpc>
+                      </a:pPr>
+                      <a:r>
+                        <a:rPr sz="1300" b="1" i="0">
+                          <a:solidFill>
+                            <a:srgbClr val="1F5FA8"/>
+                          </a:solidFill>
+                          <a:latin typeface="Calibri"/>
+                        </a:rPr>
+                        <a:t>✓</a:t>
+                      </a:r>
+                    </a:p>
+                  </a:txBody>
+                  <a:tcPr anchor="ctr" marL="76200" marR="76200">
+                    <a:solidFill>
+                      <a:srgbClr val="FFFFFF"/>
+                    </a:solidFill>
+                  </a:tcPr>
+                </a:tc>
+                <a:tc>
+                  <a:txBody>
+                    <a:bodyPr wrap="square"/>
+                    <a:lstStyle/>
+                    <a:p>
+                      <a:pPr algn="ctr">
+                        <a:lnSpc>
+                          <a:spcPct val="120000"/>
+                        </a:lnSpc>
+                      </a:pPr>
+                      <a:r>
+                        <a:rPr sz="1300" b="1" i="0">
+                          <a:solidFill>
+                            <a:srgbClr val="1F5FA8"/>
+                          </a:solidFill>
+                          <a:latin typeface="Calibri"/>
+                        </a:rPr>
+                        <a:t>✓</a:t>
+                      </a:r>
+                    </a:p>
+                  </a:txBody>
+                  <a:tcPr anchor="ctr" marL="76200" marR="76200">
+                    <a:solidFill>
+                      <a:srgbClr val="FFFFFF"/>
+                    </a:solidFill>
+                  </a:tcPr>
+                </a:tc>
+                <a:tc>
+                  <a:txBody>
+                    <a:bodyPr wrap="square"/>
+                    <a:lstStyle/>
+                    <a:p>
+                      <a:pPr algn="ctr">
+                        <a:lnSpc>
+                          <a:spcPct val="120000"/>
+                        </a:lnSpc>
+                      </a:pPr>
+                      <a:r>
+                        <a:rPr sz="1300" b="0" i="0">
+                          <a:solidFill>
+                            <a:srgbClr val="9AA7B8"/>
+                          </a:solidFill>
+                          <a:latin typeface="Calibri"/>
+                        </a:rPr>
+                        <a:t>–</a:t>
+                      </a:r>
+                    </a:p>
+                  </a:txBody>
+                  <a:tcPr anchor="ctr" marL="76200" marR="76200">
+                    <a:solidFill>
+                      <a:srgbClr val="FFFFFF"/>
+                    </a:solidFill>
+                  </a:tcPr>
+                </a:tc>
+                <a:tc>
+                  <a:txBody>
+                    <a:bodyPr wrap="square"/>
+                    <a:lstStyle/>
+                    <a:p>
+                      <a:pPr algn="ctr">
+                        <a:lnSpc>
+                          <a:spcPct val="120000"/>
+                        </a:lnSpc>
+                      </a:pPr>
+                      <a:r>
+                        <a:rPr sz="1300" b="0" i="0">
+                          <a:solidFill>
+                            <a:srgbClr val="9AA7B8"/>
+                          </a:solidFill>
+                          <a:latin typeface="Calibri"/>
+                        </a:rPr>
+                        <a:t>–</a:t>
+                      </a:r>
+                    </a:p>
+                  </a:txBody>
+                  <a:tcPr anchor="ctr" marL="76200" marR="76200">
+                    <a:solidFill>
+                      <a:srgbClr val="FFFFFF"/>
+                    </a:solidFill>
+                  </a:tcPr>
+                </a:tc>
+                <a:tc>
+                  <a:txBody>
+                    <a:bodyPr wrap="square"/>
+                    <a:lstStyle/>
+                    <a:p>
+                      <a:pPr algn="ctr">
+                        <a:lnSpc>
+                          <a:spcPct val="120000"/>
+                        </a:lnSpc>
+                      </a:pPr>
+                      <a:r>
+                        <a:rPr sz="1300" b="0" i="0">
+                          <a:solidFill>
+                            <a:srgbClr val="4A5568"/>
+                          </a:solidFill>
+                          <a:latin typeface="Calibri"/>
+                        </a:rPr>
+                        <a:t>partly</a:t>
+                      </a:r>
+                    </a:p>
+                  </a:txBody>
+                  <a:tcPr anchor="ctr" marL="76200" marR="76200">
+                    <a:solidFill>
+                      <a:srgbClr val="FFFFFF"/>
+                    </a:solidFill>
+                  </a:tcPr>
+                </a:tc>
+                <a:tc>
+                  <a:txBody>
+                    <a:bodyPr wrap="square"/>
+                    <a:lstStyle/>
+                    <a:p>
+                      <a:pPr algn="ctr">
+                        <a:lnSpc>
+                          <a:spcPct val="120000"/>
+                        </a:lnSpc>
+                      </a:pPr>
+                      <a:r>
+                        <a:rPr sz="1300" b="0" i="0">
+                          <a:solidFill>
+                            <a:srgbClr val="9AA7B8"/>
+                          </a:solidFill>
+                          <a:latin typeface="Calibri"/>
+                        </a:rPr>
+                        <a:t>–</a:t>
+                      </a:r>
+                    </a:p>
+                  </a:txBody>
+                  <a:tcPr anchor="ctr" marL="76200" marR="76200">
+                    <a:solidFill>
+                      <a:srgbClr val="FFFFFF"/>
+                    </a:solidFill>
+                  </a:tcPr>
+                </a:tc>
+              </a:tr>
+              <a:tr h="393700">
+                <a:tc>
+                  <a:txBody>
+                    <a:bodyPr wrap="square"/>
+                    <a:lstStyle/>
+                    <a:p>
+                      <a:pPr algn="l">
+                        <a:lnSpc>
+                          <a:spcPct val="120000"/>
+                        </a:lnSpc>
+                      </a:pPr>
+                      <a:r>
+                        <a:rPr sz="1300" b="0" i="0">
+                          <a:solidFill>
+                            <a:srgbClr val="14213D"/>
+                          </a:solidFill>
+                          <a:latin typeface="Calibri"/>
+                        </a:rPr>
+                        <a:t>Bhadra et al. 2021</a:t>
+                      </a:r>
+                    </a:p>
+                  </a:txBody>
+                  <a:tcPr anchor="ctr" marL="76200" marR="76200">
+                    <a:solidFill>
+                      <a:srgbClr val="FFFFFF"/>
+                    </a:solidFill>
+                  </a:tcPr>
+                </a:tc>
+                <a:tc>
+                  <a:txBody>
+                    <a:bodyPr wrap="square"/>
+                    <a:lstStyle/>
+                    <a:p>
+                      <a:pPr algn="ctr">
+                        <a:lnSpc>
+                          <a:spcPct val="120000"/>
+                        </a:lnSpc>
+                      </a:pPr>
+                      <a:r>
+                        <a:rPr sz="1300" b="0" i="0">
+                          <a:solidFill>
+                            <a:srgbClr val="9AA7B8"/>
+                          </a:solidFill>
+                          <a:latin typeface="Calibri"/>
+                        </a:rPr>
+                        <a:t>–</a:t>
+                      </a:r>
+                    </a:p>
+                  </a:txBody>
+                  <a:tcPr anchor="ctr" marL="76200" marR="76200">
+                    <a:solidFill>
+                      <a:srgbClr val="FFFFFF"/>
+                    </a:solidFill>
+                  </a:tcPr>
+                </a:tc>
+                <a:tc>
+                  <a:txBody>
+                    <a:bodyPr wrap="square"/>
+                    <a:lstStyle/>
+                    <a:p>
+                      <a:pPr algn="ctr">
+                        <a:lnSpc>
+                          <a:spcPct val="120000"/>
+                        </a:lnSpc>
+                      </a:pPr>
+                      <a:r>
+                        <a:rPr sz="1300" b="0" i="0">
+                          <a:solidFill>
+                            <a:srgbClr val="9AA7B8"/>
+                          </a:solidFill>
+                          <a:latin typeface="Calibri"/>
+                        </a:rPr>
+                        <a:t>–</a:t>
+                      </a:r>
+                    </a:p>
+                  </a:txBody>
+                  <a:tcPr anchor="ctr" marL="76200" marR="76200">
+                    <a:solidFill>
+                      <a:srgbClr val="FFFFFF"/>
+                    </a:solidFill>
+                  </a:tcPr>
+                </a:tc>
+                <a:tc>
+                  <a:txBody>
+                    <a:bodyPr wrap="square"/>
+                    <a:lstStyle/>
+                    <a:p>
+                      <a:pPr algn="ctr">
+                        <a:lnSpc>
+                          <a:spcPct val="120000"/>
+                        </a:lnSpc>
+                      </a:pPr>
+                      <a:r>
+                        <a:rPr sz="1300" b="0" i="0">
+                          <a:solidFill>
+                            <a:srgbClr val="9AA7B8"/>
+                          </a:solidFill>
+                          <a:latin typeface="Calibri"/>
+                        </a:rPr>
+                        <a:t>n/a</a:t>
+                      </a:r>
+                    </a:p>
+                  </a:txBody>
+                  <a:tcPr anchor="ctr" marL="76200" marR="76200">
+                    <a:solidFill>
+                      <a:srgbClr val="FFFFFF"/>
+                    </a:solidFill>
+                  </a:tcPr>
+                </a:tc>
+                <a:tc>
+                  <a:txBody>
+                    <a:bodyPr wrap="square"/>
+                    <a:lstStyle/>
+                    <a:p>
+                      <a:pPr algn="ctr">
+                        <a:lnSpc>
+                          <a:spcPct val="120000"/>
+                        </a:lnSpc>
+                      </a:pPr>
+                      <a:r>
+                        <a:rPr sz="1300" b="0" i="0">
+                          <a:solidFill>
+                            <a:srgbClr val="9AA7B8"/>
+                          </a:solidFill>
+                          <a:latin typeface="Calibri"/>
+                        </a:rPr>
+                        <a:t>–</a:t>
+                      </a:r>
+                    </a:p>
+                  </a:txBody>
+                  <a:tcPr anchor="ctr" marL="76200" marR="76200">
+                    <a:solidFill>
+                      <a:srgbClr val="FFFFFF"/>
+                    </a:solidFill>
+                  </a:tcPr>
+                </a:tc>
+                <a:tc>
+                  <a:txBody>
+                    <a:bodyPr wrap="square"/>
+                    <a:lstStyle/>
+                    <a:p>
+                      <a:pPr algn="ctr">
+                        <a:lnSpc>
+                          <a:spcPct val="120000"/>
+                        </a:lnSpc>
+                      </a:pPr>
+                      <a:r>
+                        <a:rPr sz="1300" b="0" i="0">
+                          <a:solidFill>
+                            <a:srgbClr val="9AA7B8"/>
+                          </a:solidFill>
+                          <a:latin typeface="Calibri"/>
+                        </a:rPr>
+                        <a:t>–</a:t>
+                      </a:r>
+                    </a:p>
+                  </a:txBody>
+                  <a:tcPr anchor="ctr" marL="76200" marR="76200">
+                    <a:solidFill>
+                      <a:srgbClr val="FFFFFF"/>
+                    </a:solidFill>
+                  </a:tcPr>
+                </a:tc>
+                <a:tc>
+                  <a:txBody>
+                    <a:bodyPr wrap="square"/>
+                    <a:lstStyle/>
+                    <a:p>
+                      <a:pPr algn="ctr">
+                        <a:lnSpc>
+                          <a:spcPct val="120000"/>
+                        </a:lnSpc>
+                      </a:pPr>
+                      <a:r>
+                        <a:rPr sz="1300" b="0" i="0">
+                          <a:solidFill>
+                            <a:srgbClr val="9AA7B8"/>
+                          </a:solidFill>
+                          <a:latin typeface="Calibri"/>
+                        </a:rPr>
+                        <a:t>–</a:t>
+                      </a:r>
+                    </a:p>
+                  </a:txBody>
+                  <a:tcPr anchor="ctr" marL="76200" marR="76200">
+                    <a:solidFill>
+                      <a:srgbClr val="FFFFFF"/>
+                    </a:solidFill>
+                  </a:tcPr>
+                </a:tc>
+                <a:tc>
+                  <a:txBody>
+                    <a:bodyPr wrap="square"/>
+                    <a:lstStyle/>
+                    <a:p>
+                      <a:pPr algn="ctr">
+                        <a:lnSpc>
+                          <a:spcPct val="120000"/>
+                        </a:lnSpc>
+                      </a:pPr>
+                      <a:r>
+                        <a:rPr sz="1300" b="1" i="0">
+                          <a:solidFill>
+                            <a:srgbClr val="1F5FA8"/>
+                          </a:solidFill>
+                          <a:latin typeface="Calibri"/>
+                        </a:rPr>
+                        <a:t>✓</a:t>
+                      </a:r>
+                    </a:p>
+                  </a:txBody>
+                  <a:tcPr anchor="ctr" marL="76200" marR="76200">
+                    <a:solidFill>
+                      <a:srgbClr val="FFFFFF"/>
+                    </a:solidFill>
+                  </a:tcPr>
+                </a:tc>
+              </a:tr>
+              <a:tr h="393700">
+                <a:tc>
+                  <a:txBody>
+                    <a:bodyPr wrap="square"/>
+                    <a:lstStyle/>
+                    <a:p>
+                      <a:pPr algn="l">
+                        <a:lnSpc>
+                          <a:spcPct val="120000"/>
+                        </a:lnSpc>
+                      </a:pPr>
+                      <a:r>
+                        <a:rPr sz="1300" b="0" i="0">
+                          <a:solidFill>
+                            <a:srgbClr val="14213D"/>
+                          </a:solidFill>
+                          <a:latin typeface="Calibri"/>
+                        </a:rPr>
+                        <a:t>de Hoop et al. 2010</a:t>
+                      </a:r>
+                    </a:p>
+                  </a:txBody>
+                  <a:tcPr anchor="ctr" marL="76200" marR="76200">
+                    <a:solidFill>
+                      <a:srgbClr val="FFFFFF"/>
+                    </a:solidFill>
+                  </a:tcPr>
+                </a:tc>
+                <a:tc>
+                  <a:txBody>
+                    <a:bodyPr wrap="square"/>
+                    <a:lstStyle/>
+                    <a:p>
+                      <a:pPr algn="ctr">
+                        <a:lnSpc>
+                          <a:spcPct val="120000"/>
+                        </a:lnSpc>
+                      </a:pPr>
+                      <a:r>
+                        <a:rPr sz="1300" b="0" i="0">
+                          <a:solidFill>
+                            <a:srgbClr val="9AA7B8"/>
+                          </a:solidFill>
+                          <a:latin typeface="Calibri"/>
+                        </a:rPr>
+                        <a:t>–</a:t>
+                      </a:r>
+                    </a:p>
+                  </a:txBody>
+                  <a:tcPr anchor="ctr" marL="76200" marR="76200">
+                    <a:solidFill>
+                      <a:srgbClr val="FFFFFF"/>
+                    </a:solidFill>
+                  </a:tcPr>
+                </a:tc>
+                <a:tc>
+                  <a:txBody>
+                    <a:bodyPr wrap="square"/>
+                    <a:lstStyle/>
+                    <a:p>
+                      <a:pPr algn="ctr">
+                        <a:lnSpc>
+                          <a:spcPct val="120000"/>
+                        </a:lnSpc>
+                      </a:pPr>
+                      <a:r>
+                        <a:rPr sz="1300" b="0" i="0">
+                          <a:solidFill>
+                            <a:srgbClr val="9AA7B8"/>
+                          </a:solidFill>
+                          <a:latin typeface="Calibri"/>
+                        </a:rPr>
+                        <a:t>–</a:t>
+                      </a:r>
+                    </a:p>
+                  </a:txBody>
+                  <a:tcPr anchor="ctr" marL="76200" marR="76200">
+                    <a:solidFill>
+                      <a:srgbClr val="FFFFFF"/>
+                    </a:solidFill>
+                  </a:tcPr>
+                </a:tc>
+                <a:tc>
+                  <a:txBody>
+                    <a:bodyPr wrap="square"/>
+                    <a:lstStyle/>
+                    <a:p>
+                      <a:pPr algn="ctr">
+                        <a:lnSpc>
+                          <a:spcPct val="120000"/>
+                        </a:lnSpc>
+                      </a:pPr>
+                      <a:r>
+                        <a:rPr sz="1300" b="0" i="0">
+                          <a:solidFill>
+                            <a:srgbClr val="9AA7B8"/>
+                          </a:solidFill>
+                          <a:latin typeface="Calibri"/>
+                        </a:rPr>
+                        <a:t>n/a</a:t>
+                      </a:r>
+                    </a:p>
+                  </a:txBody>
+                  <a:tcPr anchor="ctr" marL="76200" marR="76200">
+                    <a:solidFill>
+                      <a:srgbClr val="FFFFFF"/>
+                    </a:solidFill>
+                  </a:tcPr>
+                </a:tc>
+                <a:tc>
+                  <a:txBody>
+                    <a:bodyPr wrap="square"/>
+                    <a:lstStyle/>
+                    <a:p>
+                      <a:pPr algn="ctr">
+                        <a:lnSpc>
+                          <a:spcPct val="120000"/>
+                        </a:lnSpc>
+                      </a:pPr>
+                      <a:r>
+                        <a:rPr sz="1300" b="0" i="0">
+                          <a:solidFill>
+                            <a:srgbClr val="9AA7B8"/>
+                          </a:solidFill>
+                          <a:latin typeface="Calibri"/>
+                        </a:rPr>
+                        <a:t>–</a:t>
+                      </a:r>
+                    </a:p>
+                  </a:txBody>
+                  <a:tcPr anchor="ctr" marL="76200" marR="76200">
+                    <a:solidFill>
+                      <a:srgbClr val="FFFFFF"/>
+                    </a:solidFill>
+                  </a:tcPr>
+                </a:tc>
+                <a:tc>
+                  <a:txBody>
+                    <a:bodyPr wrap="square"/>
+                    <a:lstStyle/>
+                    <a:p>
+                      <a:pPr algn="ctr">
+                        <a:lnSpc>
+                          <a:spcPct val="120000"/>
+                        </a:lnSpc>
+                      </a:pPr>
+                      <a:r>
+                        <a:rPr sz="1300" b="1" i="0">
+                          <a:solidFill>
+                            <a:srgbClr val="1F5FA8"/>
+                          </a:solidFill>
+                          <a:latin typeface="Calibri"/>
+                        </a:rPr>
+                        <a:t>✓</a:t>
+                      </a:r>
+                    </a:p>
+                  </a:txBody>
+                  <a:tcPr anchor="ctr" marL="76200" marR="76200">
+                    <a:solidFill>
+                      <a:srgbClr val="FFFFFF"/>
+                    </a:solidFill>
+                  </a:tcPr>
+                </a:tc>
+                <a:tc>
+                  <a:txBody>
+                    <a:bodyPr wrap="square"/>
+                    <a:lstStyle/>
+                    <a:p>
+                      <a:pPr algn="ctr">
+                        <a:lnSpc>
+                          <a:spcPct val="120000"/>
+                        </a:lnSpc>
+                      </a:pPr>
+                      <a:r>
+                        <a:rPr sz="1300" b="0" i="0">
+                          <a:solidFill>
+                            <a:srgbClr val="9AA7B8"/>
+                          </a:solidFill>
+                          <a:latin typeface="Calibri"/>
+                        </a:rPr>
+                        <a:t>–</a:t>
+                      </a:r>
+                    </a:p>
+                  </a:txBody>
+                  <a:tcPr anchor="ctr" marL="76200" marR="76200">
+                    <a:solidFill>
+                      <a:srgbClr val="FFFFFF"/>
+                    </a:solidFill>
+                  </a:tcPr>
+                </a:tc>
+                <a:tc>
+                  <a:txBody>
+                    <a:bodyPr wrap="square"/>
+                    <a:lstStyle/>
+                    <a:p>
+                      <a:pPr algn="ctr">
+                        <a:lnSpc>
+                          <a:spcPct val="120000"/>
+                        </a:lnSpc>
+                      </a:pPr>
+                      <a:r>
+                        <a:rPr sz="1300" b="0" i="0">
+                          <a:solidFill>
+                            <a:srgbClr val="9AA7B8"/>
+                          </a:solidFill>
+                          <a:latin typeface="Calibri"/>
+                        </a:rPr>
+                        <a:t>–</a:t>
+                      </a:r>
+                    </a:p>
+                  </a:txBody>
+                  <a:tcPr anchor="ctr" marL="76200" marR="76200">
+                    <a:solidFill>
+                      <a:srgbClr val="FFFFFF"/>
+                    </a:solidFill>
+                  </a:tcPr>
+                </a:tc>
+              </a:tr>
+            </a:tbl>
+          </a:graphicData>
+        </a:graphic>
+      </p:graphicFrame>
       <p:grpSp>
         <p:nvGrpSpPr>
-          <p:cNvPr id="4" name="Group 3"/>
+          <p:cNvPr id="5" name="Group 4"/>
           <p:cNvGrpSpPr/>
           <p:nvPr/>
         </p:nvGrpSpPr>
         <p:grpSpPr>
           <a:xfrm>
-            <a:off x="812800" y="1905000"/>
-            <a:ext cx="5156200" cy="3810000"/>
-            <a:chOff x="812800" y="1905000"/>
-            <a:chExt cx="5156200" cy="3810000"/>
+            <a:off x="812800" y="4775200"/>
+            <a:ext cx="10566400" cy="444500"/>
+            <a:chOff x="812800" y="4775200"/>
+            <a:chExt cx="10566400" cy="444500"/>
           </a:xfrm>
         </p:grpSpPr>
         <p:sp>
           <p:nvSpPr>
-            <p:cNvPr id="5" name="Rounded Rectangle 4"/>
+            <p:cNvPr id="6" name="Rounded Rectangle 5"/>
             <p:cNvSpPr/>
             <p:nvPr/>
           </p:nvSpPr>
           <p:spPr>
             <a:xfrm>
-              <a:off x="812800" y="1905000"/>
-              <a:ext cx="5156200" cy="3810000"/>
+              <a:off x="812800" y="4775200"/>
+              <a:ext cx="10566400" cy="444500"/>
             </a:xfrm>
             <a:prstGeom prst="roundRect">
               <a:avLst>
-                <a:gd name="adj" fmla="val 2666"/>
+                <a:gd name="adj" fmla="val 11428"/>
               </a:avLst>
             </a:prstGeom>
             <a:solidFill>
-              <a:srgbClr val="FFFFFF"/>
+              <a:srgbClr val="EAF4EC"/>
             </a:solidFill>
-            <a:ln>
-              <a:noFill/>
+            <a:ln w="12700">
+              <a:solidFill>
+                <a:srgbClr val="2E7D4F"/>
+              </a:solidFill>
             </a:ln>
             <a:effectLst/>
           </p:spPr>
@@ -15076,14 +16636,14 @@
         </p:sp>
         <p:sp>
           <p:nvSpPr>
-            <p:cNvPr id="6" name="TextBox 5"/>
+            <p:cNvPr id="7" name="TextBox 6"/>
             <p:cNvSpPr txBox="1"/>
             <p:nvPr/>
           </p:nvSpPr>
           <p:spPr>
             <a:xfrm>
-              <a:off x="1066800" y="2108200"/>
-              <a:ext cx="4648200" cy="3403600"/>
+              <a:off x="889000" y="4775200"/>
+              <a:ext cx="2171700" cy="444500"/>
             </a:xfrm>
             <a:prstGeom prst="rect">
               <a:avLst/>
@@ -15091,161 +16651,64 @@
             <a:noFill/>
           </p:spPr>
           <p:txBody>
-            <a:bodyPr wrap="square" lIns="0" rIns="0" tIns="0" bIns="0" anchor="t">
+            <a:bodyPr wrap="square" lIns="0" tIns="0" bIns="0" anchor="ctr">
               <a:spAutoFit/>
             </a:bodyPr>
             <a:lstStyle/>
             <a:p>
               <a:pPr algn="l">
                 <a:lnSpc>
-                  <a:spcPct val="100000"/>
+                  <a:spcPct val="120000"/>
                 </a:lnSpc>
               </a:pPr>
               <a:r>
-                <a:rPr sz="4800" b="1" i="0">
+                <a:rPr sz="1400" b="1" i="0">
                   <a:solidFill>
-                    <a:srgbClr val="1F5FA8"/>
-                  </a:solidFill>
-                  <a:latin typeface="Georgia"/>
-                </a:rPr>
-                <a:t>≈ $20</a:t>
-              </a:r>
-            </a:p>
-            <a:p>
-              <a:pPr algn="l">
-                <a:lnSpc>
-                  <a:spcPct val="130000"/>
-                </a:lnSpc>
-                <a:spcBef>
-                  <a:spcPts val="1000"/>
-                </a:spcBef>
-              </a:pPr>
-              <a:r>
-                <a:rPr sz="1400" b="0" i="0">
-                  <a:solidFill>
-                    <a:srgbClr val="14213D"/>
+                    <a:srgbClr val="2E7D4F"/>
                   </a:solidFill>
                   <a:latin typeface="Calibri"/>
                 </a:rPr>
-                <a:t>RunPod L40S GPU (48 GB), </a:t>
-              </a:r>
-              <a:r>
-                <a:rPr sz="1400" b="1" i="0">
-                  <a:solidFill>
-                    <a:srgbClr val="14213D"/>
-                  </a:solidFill>
-                  <a:latin typeface="Calibri"/>
-                </a:rPr>
-                <a:t>15 h × US$1.33/h</a:t>
-              </a:r>
-              <a:r>
-                <a:rPr sz="1400" b="0" i="0">
-                  <a:solidFill>
-                    <a:srgbClr val="14213D"/>
-                  </a:solidFill>
-                  <a:latin typeface="Calibri"/>
-                </a:rPr>
-                <a:t>, plus &lt;$2 CPU; total ≈ BDT 2,640.</a:t>
-              </a:r>
-            </a:p>
-            <a:p>
-              <a:pPr algn="l">
-                <a:lnSpc>
-                  <a:spcPct val="130000"/>
-                </a:lnSpc>
-                <a:spcBef>
-                  <a:spcPts val="800"/>
-                </a:spcBef>
-              </a:pPr>
-              <a:r>
-                <a:rPr sz="1300" b="0" i="0">
-                  <a:solidFill>
-                    <a:srgbClr val="4A5568"/>
-                  </a:solidFill>
-                  <a:latin typeface="Calibri"/>
-                </a:rPr>
-                <a:t>Buying an RTX 4090 workstation: BDT 4–5 lakh. Renting cost under 1% of buying.</a:t>
-              </a:r>
-            </a:p>
-            <a:p>
-              <a:pPr algn="l">
-                <a:lnSpc>
-                  <a:spcPct val="130000"/>
-                </a:lnSpc>
-                <a:spcBef>
-                  <a:spcPts val="800"/>
-                </a:spcBef>
-              </a:pPr>
-              <a:r>
-                <a:rPr sz="1300" b="0" i="0">
-                  <a:solidFill>
-                    <a:srgbClr val="4A5568"/>
-                  </a:solidFill>
-                  <a:latin typeface="Calibri"/>
-                </a:rPr>
-                <a:t>Demo: free Kaggle GPU, 45.5 s per nodule (all methods).</a:t>
+                <a:t>MedLift-3D (ours)</a:t>
               </a:r>
             </a:p>
           </p:txBody>
         </p:sp>
-      </p:grpSp>
-      <p:grpSp>
-        <p:nvGrpSpPr>
-          <p:cNvPr id="7" name="Group 6"/>
-          <p:cNvGrpSpPr/>
-          <p:nvPr/>
-        </p:nvGrpSpPr>
-        <p:grpSpPr>
-          <a:xfrm>
-            <a:off x="6223000" y="1905000"/>
-            <a:ext cx="5156200" cy="3810000"/>
-            <a:chOff x="6223000" y="1905000"/>
-            <a:chExt cx="5156200" cy="3810000"/>
-          </a:xfrm>
-        </p:grpSpPr>
         <p:sp>
           <p:nvSpPr>
-            <p:cNvPr id="8" name="Rounded Rectangle 7"/>
-            <p:cNvSpPr/>
+            <p:cNvPr id="8" name="TextBox 7"/>
+            <p:cNvSpPr txBox="1"/>
             <p:nvPr/>
           </p:nvSpPr>
           <p:spPr>
             <a:xfrm>
-              <a:off x="6223000" y="1905000"/>
-              <a:ext cx="5156200" cy="3810000"/>
+              <a:off x="3213100" y="4775200"/>
+              <a:ext cx="1022350" cy="444500"/>
             </a:xfrm>
-            <a:prstGeom prst="roundRect">
-              <a:avLst>
-                <a:gd name="adj" fmla="val 2666"/>
-              </a:avLst>
+            <a:prstGeom prst="rect">
+              <a:avLst/>
             </a:prstGeom>
-            <a:solidFill>
-              <a:srgbClr val="FFFFFF"/>
-            </a:solidFill>
-            <a:ln>
-              <a:noFill/>
-            </a:ln>
-            <a:effectLst/>
+            <a:noFill/>
           </p:spPr>
-          <p:style>
-            <a:lnRef idx="1">
-              <a:schemeClr val="accent1"/>
-            </a:lnRef>
-            <a:fillRef idx="3">
-              <a:schemeClr val="accent1"/>
-            </a:fillRef>
-            <a:effectRef idx="2">
-              <a:schemeClr val="accent1"/>
-            </a:effectRef>
-            <a:fontRef idx="minor">
-              <a:schemeClr val="lt1"/>
-            </a:fontRef>
-          </p:style>
           <p:txBody>
-            <a:bodyPr rtlCol="0" anchor="ctr"/>
+            <a:bodyPr wrap="square" lIns="0" tIns="0" bIns="0" anchor="ctr">
+              <a:spAutoFit/>
+            </a:bodyPr>
             <a:lstStyle/>
             <a:p>
-              <a:pPr algn="ctr"/>
+              <a:pPr algn="ctr">
+                <a:lnSpc>
+                  <a:spcPct val="120000"/>
+                </a:lnSpc>
+              </a:pPr>
+              <a:r>
+                <a:rPr sz="1400" b="1" i="0">
+                  <a:solidFill>
+                    <a:srgbClr val="2E7D4F"/>
+                  </a:solidFill>
+                  <a:latin typeface="Calibri"/>
+                </a:rPr>
+                <a:t>✓</a:t>
+              </a:r>
             </a:p>
           </p:txBody>
         </p:sp>
@@ -15257,8 +16720,8 @@
           </p:nvSpPr>
           <p:spPr>
             <a:xfrm>
-              <a:off x="6477000" y="2108200"/>
-              <a:ext cx="4648200" cy="3403600"/>
+              <a:off x="4387850" y="4775200"/>
+              <a:ext cx="1022350" cy="444500"/>
             </a:xfrm>
             <a:prstGeom prst="rect">
               <a:avLst/>
@@ -15266,141 +16729,263 @@
             <a:noFill/>
           </p:spPr>
           <p:txBody>
-            <a:bodyPr wrap="square" lIns="0" rIns="0" tIns="0" bIns="0" anchor="t">
+            <a:bodyPr wrap="square" lIns="0" tIns="0" bIns="0" anchor="ctr">
               <a:spAutoFit/>
             </a:bodyPr>
             <a:lstStyle/>
             <a:p>
-              <a:pPr algn="l">
+              <a:pPr algn="ctr">
                 <a:lnSpc>
-                  <a:spcPct val="130000"/>
+                  <a:spcPct val="120000"/>
                 </a:lnSpc>
               </a:pPr>
               <a:r>
-                <a:rPr sz="1800" b="1" i="0">
+                <a:rPr sz="1400" b="1" i="0">
                   <a:solidFill>
-                    <a:srgbClr val="14213D"/>
-                  </a:solidFill>
-                  <a:latin typeface="Georgia"/>
-                </a:rPr>
-                <a:t>Legal and ethical</a:t>
-              </a:r>
-            </a:p>
-            <a:p>
-              <a:pPr algn="l">
-                <a:lnSpc>
-                  <a:spcPct val="130000"/>
-                </a:lnSpc>
-                <a:spcBef>
-                  <a:spcPts val="900"/>
-                </a:spcBef>
-              </a:pPr>
-              <a:r>
-                <a:rPr sz="1300" b="1" i="0">
-                  <a:solidFill>
-                    <a:srgbClr val="14213D"/>
+                    <a:srgbClr val="2E7D4F"/>
                   </a:solidFill>
                   <a:latin typeface="Calibri"/>
                 </a:rPr>
-                <a:t>Data: </a:t>
+                <a:t>✓</a:t>
               </a:r>
+            </a:p>
+          </p:txBody>
+        </p:sp>
+        <p:sp>
+          <p:nvSpPr>
+            <p:cNvPr id="10" name="TextBox 9"/>
+            <p:cNvSpPr txBox="1"/>
+            <p:nvPr/>
+          </p:nvSpPr>
+          <p:spPr>
+            <a:xfrm>
+              <a:off x="5562600" y="4775200"/>
+              <a:ext cx="1022350" cy="444500"/>
+            </a:xfrm>
+            <a:prstGeom prst="rect">
+              <a:avLst/>
+            </a:prstGeom>
+            <a:noFill/>
+          </p:spPr>
+          <p:txBody>
+            <a:bodyPr wrap="square" lIns="0" tIns="0" bIns="0" anchor="ctr">
+              <a:spAutoFit/>
+            </a:bodyPr>
+            <a:lstStyle/>
+            <a:p>
+              <a:pPr algn="ctr">
+                <a:lnSpc>
+                  <a:spcPct val="120000"/>
+                </a:lnSpc>
+              </a:pPr>
               <a:r>
-                <a:rPr sz="1300" b="0" i="0">
+                <a:rPr sz="1400" b="1" i="0">
                   <a:solidFill>
-                    <a:srgbClr val="4A5568"/>
+                    <a:srgbClr val="2E7D4F"/>
                   </a:solidFill>
                   <a:latin typeface="Calibri"/>
                 </a:rPr>
-                <a:t>LIDC-IDRI under CC BY 3.0, cited; no re-identification.</a:t>
+                <a:t>✓</a:t>
               </a:r>
             </a:p>
+          </p:txBody>
+        </p:sp>
+        <p:sp>
+          <p:nvSpPr>
+            <p:cNvPr id="11" name="TextBox 10"/>
+            <p:cNvSpPr txBox="1"/>
+            <p:nvPr/>
+          </p:nvSpPr>
+          <p:spPr>
+            <a:xfrm>
+              <a:off x="6737350" y="4775200"/>
+              <a:ext cx="1022350" cy="444500"/>
+            </a:xfrm>
+            <a:prstGeom prst="rect">
+              <a:avLst/>
+            </a:prstGeom>
+            <a:noFill/>
+          </p:spPr>
+          <p:txBody>
+            <a:bodyPr wrap="square" lIns="0" tIns="0" bIns="0" anchor="ctr">
+              <a:spAutoFit/>
+            </a:bodyPr>
+            <a:lstStyle/>
             <a:p>
-              <a:pPr algn="l">
+              <a:pPr algn="ctr">
                 <a:lnSpc>
-                  <a:spcPct val="130000"/>
+                  <a:spcPct val="120000"/>
                 </a:lnSpc>
-                <a:spcBef>
-                  <a:spcPts val="700"/>
-                </a:spcBef>
               </a:pPr>
               <a:r>
-                <a:rPr sz="1300" b="1" i="0">
+                <a:rPr sz="1400" b="1" i="0">
                   <a:solidFill>
-                    <a:srgbClr val="14213D"/>
+                    <a:srgbClr val="2E7D4F"/>
                   </a:solidFill>
                   <a:latin typeface="Calibri"/>
                 </a:rPr>
-                <a:t>Device: </a:t>
+                <a:t>✓</a:t>
               </a:r>
+            </a:p>
+          </p:txBody>
+        </p:sp>
+        <p:sp>
+          <p:nvSpPr>
+            <p:cNvPr id="12" name="TextBox 11"/>
+            <p:cNvSpPr txBox="1"/>
+            <p:nvPr/>
+          </p:nvSpPr>
+          <p:spPr>
+            <a:xfrm>
+              <a:off x="7912100" y="4775200"/>
+              <a:ext cx="1022350" cy="444500"/>
+            </a:xfrm>
+            <a:prstGeom prst="rect">
+              <a:avLst/>
+            </a:prstGeom>
+            <a:noFill/>
+          </p:spPr>
+          <p:txBody>
+            <a:bodyPr wrap="square" lIns="0" tIns="0" bIns="0" anchor="ctr">
+              <a:spAutoFit/>
+            </a:bodyPr>
+            <a:lstStyle/>
+            <a:p>
+              <a:pPr algn="ctr">
+                <a:lnSpc>
+                  <a:spcPct val="120000"/>
+                </a:lnSpc>
+              </a:pPr>
               <a:r>
-                <a:rPr sz="1300" b="0" i="0">
+                <a:rPr sz="1400" b="1" i="0">
                   <a:solidFill>
-                    <a:srgbClr val="4A5568"/>
+                    <a:srgbClr val="2E7D4F"/>
                   </a:solidFill>
                   <a:latin typeface="Calibri"/>
                 </a:rPr>
-                <a:t>diagnostic software is a medical device under DGDA guidelines and the Drugs and Cosmetics Act 2023.</a:t>
+                <a:t>✓</a:t>
               </a:r>
             </a:p>
+          </p:txBody>
+        </p:sp>
+        <p:sp>
+          <p:nvSpPr>
+            <p:cNvPr id="13" name="TextBox 12"/>
+            <p:cNvSpPr txBox="1"/>
+            <p:nvPr/>
+          </p:nvSpPr>
+          <p:spPr>
+            <a:xfrm>
+              <a:off x="9086850" y="4775200"/>
+              <a:ext cx="1022350" cy="444500"/>
+            </a:xfrm>
+            <a:prstGeom prst="rect">
+              <a:avLst/>
+            </a:prstGeom>
+            <a:noFill/>
+          </p:spPr>
+          <p:txBody>
+            <a:bodyPr wrap="square" lIns="0" tIns="0" bIns="0" anchor="ctr">
+              <a:spAutoFit/>
+            </a:bodyPr>
+            <a:lstStyle/>
             <a:p>
-              <a:pPr algn="l">
+              <a:pPr algn="ctr">
                 <a:lnSpc>
-                  <a:spcPct val="130000"/>
+                  <a:spcPct val="120000"/>
                 </a:lnSpc>
-                <a:spcBef>
-                  <a:spcPts val="700"/>
-                </a:spcBef>
               </a:pPr>
               <a:r>
-                <a:rPr sz="1300" b="1" i="0">
+                <a:rPr sz="1400" b="1" i="0">
                   <a:solidFill>
-                    <a:srgbClr val="14213D"/>
+                    <a:srgbClr val="2E7D4F"/>
                   </a:solidFill>
                   <a:latin typeface="Calibri"/>
                 </a:rPr>
-                <a:t>Privacy: </a:t>
+                <a:t>✓</a:t>
               </a:r>
+            </a:p>
+          </p:txBody>
+        </p:sp>
+        <p:sp>
+          <p:nvSpPr>
+            <p:cNvPr id="14" name="TextBox 13"/>
+            <p:cNvSpPr txBox="1"/>
+            <p:nvPr/>
+          </p:nvSpPr>
+          <p:spPr>
+            <a:xfrm>
+              <a:off x="10261600" y="4775200"/>
+              <a:ext cx="1022350" cy="444500"/>
+            </a:xfrm>
+            <a:prstGeom prst="rect">
+              <a:avLst/>
+            </a:prstGeom>
+            <a:noFill/>
+          </p:spPr>
+          <p:txBody>
+            <a:bodyPr wrap="square" lIns="0" tIns="0" bIns="0" anchor="ctr">
+              <a:spAutoFit/>
+            </a:bodyPr>
+            <a:lstStyle/>
+            <a:p>
+              <a:pPr algn="ctr">
+                <a:lnSpc>
+                  <a:spcPct val="120000"/>
+                </a:lnSpc>
+              </a:pPr>
               <a:r>
-                <a:rPr sz="1300" b="0" i="0">
+                <a:rPr sz="1400" b="1" i="0">
                   <a:solidFill>
-                    <a:srgbClr val="4A5568"/>
+                    <a:srgbClr val="2E7D4F"/>
                   </a:solidFill>
                   <a:latin typeface="Calibri"/>
                 </a:rPr>
-                <a:t>Personal Data Protection Ordinance 2025: consent required, health data sensitive.</a:t>
-              </a:r>
-            </a:p>
-            <a:p>
-              <a:pPr algn="l">
-                <a:lnSpc>
-                  <a:spcPct val="130000"/>
-                </a:lnSpc>
-                <a:spcBef>
-                  <a:spcPts val="700"/>
-                </a:spcBef>
-              </a:pPr>
-              <a:r>
-                <a:rPr sz="1300" b="1" i="0">
-                  <a:solidFill>
-                    <a:srgbClr val="14213D"/>
-                  </a:solidFill>
-                  <a:latin typeface="Calibri"/>
-                </a:rPr>
-                <a:t>Standards: </a:t>
-              </a:r>
-              <a:r>
-                <a:rPr sz="1300" b="0" i="0">
-                  <a:solidFill>
-                    <a:srgbClr val="4A5568"/>
-                  </a:solidFill>
-                  <a:latin typeface="Calibri"/>
-                </a:rPr>
-                <a:t>ISO 14971, IEC 62304, DICOM.</a:t>
+                <a:t>✓</a:t>
               </a:r>
             </a:p>
           </p:txBody>
         </p:sp>
       </p:grpSp>
+      <p:sp>
+        <p:nvSpPr>
+          <p:cNvPr id="15" name="TextBox 14"/>
+          <p:cNvSpPr txBox="1"/>
+          <p:nvPr/>
+        </p:nvSpPr>
+        <p:spPr>
+          <a:xfrm>
+            <a:off x="812800" y="5410200"/>
+            <a:ext cx="10566400" cy="571500"/>
+          </a:xfrm>
+          <a:prstGeom prst="rect">
+            <a:avLst/>
+          </a:prstGeom>
+          <a:noFill/>
+        </p:spPr>
+        <p:txBody>
+          <a:bodyPr wrap="square" lIns="0" rIns="0" tIns="0" bIns="0" anchor="t">
+            <a:spAutoFit/>
+          </a:bodyPr>
+          <a:lstStyle/>
+          <a:p>
+            <a:pPr algn="l">
+              <a:lnSpc>
+                <a:spcPct val="130000"/>
+              </a:lnSpc>
+            </a:pPr>
+            <a:r>
+              <a:rPr sz="1300" b="0" i="0">
+                <a:solidFill>
+                  <a:srgbClr val="4A5568"/>
+                </a:solidFill>
+                <a:latin typeface="Calibri"/>
+              </a:rPr>
+              <a:t>✓ = addressed, – = not addressed. Each element exists somewhere; our contribution is combining them for DTS nodule measurement, with a mass-first design and a truth-checked evaluation.</a:t>
+            </a:r>
+          </a:p>
+        </p:txBody>
+      </p:sp>
     </p:spTree>
   </p:cSld>
   <p:clrMapOvr>
@@ -15443,7 +17028,7 @@
                                           </p:stCondLst>
                                         </p:cTn>
                                         <p:tgtEl>
-                                          <p:spTgt spid="7"/>
+                                          <p:spTgt spid="5"/>
                                         </p:tgtEl>
                                         <p:attrNameLst>
                                           <p:attrName>style.visibility</p:attrName>
@@ -15457,7 +17042,7 @@
                                       <p:cBhvr>
                                         <p:cTn id="4" dur="500"/>
                                         <p:tgtEl>
-                                          <p:spTgt spid="7"/>
+                                          <p:spTgt spid="5"/>
                                         </p:tgtEl>
                                       </p:cBhvr>
                                     </p:animEffect>
@@ -15465,7 +17050,7 @@
                                       <p:cBhvr additive="base">
                                         <p:cTn id="5" dur="500" fill="hold"/>
                                         <p:tgtEl>
-                                          <p:spTgt spid="7"/>
+                                          <p:spTgt spid="5"/>
                                         </p:tgtEl>
                                         <p:attrNameLst>
                                           <p:attrName>ppt_y</p:attrName>
@@ -15484,6 +17069,59 @@
                                         </p:tav>
                                       </p:tavLst>
                                     </p:anim>
+                                  </p:childTnLst>
+                                </p:cTn>
+                              </p:par>
+                            </p:childTnLst>
+                          </p:cTn>
+                        </p:par>
+                      </p:childTnLst>
+                    </p:cTn>
+                  </p:par>
+                  <p:par>
+                    <p:cTn id="12" fill="hold">
+                      <p:stCondLst>
+                        <p:cond delay="indefinite"/>
+                      </p:stCondLst>
+                      <p:childTnLst>
+                        <p:par>
+                          <p:cTn id="13" fill="hold">
+                            <p:stCondLst>
+                              <p:cond delay="0"/>
+                            </p:stCondLst>
+                            <p:childTnLst>
+                              <p:par>
+                                <p:cTn id="11" presetID="10" presetClass="entr" presetSubtype="0" fill="hold" grpId="0" nodeType="clickEffect">
+                                  <p:stCondLst>
+                                    <p:cond delay="0"/>
+                                  </p:stCondLst>
+                                  <p:childTnLst>
+                                    <p:set>
+                                      <p:cBhvr>
+                                        <p:cTn id="9" dur="1" fill="hold">
+                                          <p:stCondLst>
+                                            <p:cond delay="0"/>
+                                          </p:stCondLst>
+                                        </p:cTn>
+                                        <p:tgtEl>
+                                          <p:spTgt spid="15"/>
+                                        </p:tgtEl>
+                                        <p:attrNameLst>
+                                          <p:attrName>style.visibility</p:attrName>
+                                        </p:attrNameLst>
+                                      </p:cBhvr>
+                                      <p:to>
+                                        <p:strVal val="visible"/>
+                                      </p:to>
+                                    </p:set>
+                                    <p:animEffect transition="in" filter="fade">
+                                      <p:cBhvr>
+                                        <p:cTn id="10" dur="500"/>
+                                        <p:tgtEl>
+                                          <p:spTgt spid="15"/>
+                                        </p:tgtEl>
+                                      </p:cBhvr>
+                                    </p:animEffect>
                                   </p:childTnLst>
                                 </p:cTn>
                               </p:par>
@@ -15514,6 +17152,9 @@
         </p:cTn>
       </p:par>
     </p:tnLst>
+    <p:bldLst>
+      <p:bldP spid="15" grpId="0"/>
+    </p:bldLst>
   </p:timing>
 </p:sld>
 </file>

--- a/report/MedLift3D_Defense.pptx
+++ b/report/MedLift3D_Defense.pptx
@@ -942,7 +942,7 @@
           <a:lstStyle/>
           <a:p>
             <a:r>
-              <a:t>(0:50) Explainability. Using a conjugate-gradient null-space decomposition we split every 3D result into the part the fifteen X-rays actually measured, the seen part, and the part they cannot see, which only the prior can supply. The table of numbers on the right is the result over 30 test nodules. Only 0.3 percent of a nodule's mass is in the unseen part, which confirms our physics argument: the X-rays do measure mass. The prior's unseen content has a positive skill of 0.22 against the real CT, so it recovers missing depth rather than inventing structure; H6 is supported. But after Gaussian fitting the skill falls to 0.09, so the Gaussian step throws away much of what the prior recovered. That points directly to a fix.</a:t>
+              <a:t>(0:50) Explainability. Using a conjugate-gradient null-space decomposition we split every 3D result into the part the fifteen X-rays actually measured, the seen part, and the part they cannot see, which only the prior can supply. The table of numbers on the right is the result over 30 test nodules. Only 0.3 percent of a nodule's mass is in the unseen part, which confirms our physics argument: the X-rays do measure mass. The prior's unseen content has a positive skill of 0.22 against the real CT, so it recovers missing depth rather than inventing structure. But after Gaussian fitting the skill falls to 0.09, so the Gaussian step throws away much of what the prior recovered. That points directly to a fix.</a:t>
             </a:r>
           </a:p>
         </p:txBody>
@@ -1012,7 +1012,7 @@
           <a:lstStyle/>
           <a:p>
             <a:r>
-              <a:t>(0:55) This is our accuracy benchmark: six methods on 74 test nodules, median volume error, lower is better, and a failed reading counts as 100 percent. Volume from tomosynthesis is hard for every method: even the clinical standard, the 2D diameter, is off by 88 percent. Our diffusion prior, in green, had the lowest error of all six methods, 74.5 percent, and the fewest failures, 3 percent. Adding the Gaussian step raised the error to 94.6, so the full pipeline did not yet beat physics-only reconstruction; our hypotheses H1 and H2 are not yet supported. The learned methods under-estimate size, and we traced exactly why, which I will show shortly. The lesson: sharper images alone are not enough; the measurement step must preserve the nodule.</a:t>
+              <a:t>(0:55) This is our accuracy benchmark: six methods on 74 test nodules, median volume error, lower is better, and a failed reading counts as 100 percent. Volume from tomosynthesis is hard for every method: even the clinical standard, the 2D diameter, is off by 88 percent. Our diffusion prior, in green, had the lowest error of all six methods, 74.5 percent, and the fewest failures, 3 percent. Adding the Gaussian step raised the error to 94.6, so the full pipeline did not yet beat physics-only reconstruction. The learned methods under-estimate size, and we traced exactly why, which I will show shortly. The lesson: sharper images alone are not enough; the measurement step must preserve the nodule.</a:t>
             </a:r>
           </a:p>
         </p:txBody>
@@ -1082,7 +1082,7 @@
           <a:lstStyle/>
           <a:p>
             <a:r>
-              <a:t>(0:35) Our six hypotheses. Three are supported: H6, the prior recovers unseen depth rather than inventing it; H3, the intervals meet their coverage guarantee; and H5, calibrated risk at the 100 cubic millimetre threshold. The three measurement hypotheses, H1, H2 and H4, are not yet supported by the full pipeline, although mass beat volume for physics-only Gaussians, and mass doubling time edged out volume doubling time for physics-only reconstruction, in line with our theory. These three define our next step, and the next slide shows why.</a:t>
+              <a:t>(0:40) Beyond the research results, this is a complete engineering system. We processed 583 patients and 1,144 nodules end to end. The pipeline has 18 scripted steps, each ending in automatic PASS/FAIL checks, and 69 unit tests cover the physics, the models and the measurement. The full study ran in about 15 hours on one rented L40S GPU for about 20 US dollars. The diffusion model has 17.4 million parameters and trained in 6 hours. And measuring one nodule with all five reconstruction methods takes a median of 45.5 seconds; the application itself runs on a free Kaggle GPU.</a:t>
             </a:r>
           </a:p>
         </p:txBody>
@@ -1432,7 +1432,7 @@
           <a:lstStyle/>
           <a:p>
             <a:r>
-              <a:t>Likely questions and short answers. Why simulated DTS? No public chest DTS dataset with CT ground truth exists; simulation from real CT gives exact ground truth. Why only 15 views? Same dose as clinical units; our geometry study showed view count barely changes the depth smear at equal dose, a 40 degree sweep helps about 9 percent. Is the prior hallucinating? The seen/unseen test shows positive unseen skill of 0.22, and data-consistency keeps every sample faithful to the X-rays. Overfitting? Denoising loss train vs held-out ratio 0.97, but sample gain +7.00 vs +4.22 dB, so some patient-level advantage, and still under-trained. Why did H1 fail if mass is measured exactly? Because we measured mass from the reconstruction inside a segmentation, not from the projections. Clinical use? Not yet; decision support only, a low-confidence flag tells the doctor to order CT.</a:t>
+              <a:t>Likely questions and short answers. Why simulated DTS? No public chest DTS dataset with CT ground truth exists; simulation from real CT gives exact ground truth. Why only 15 views? Same dose as clinical units; our geometry study showed view count barely changes the depth smear at equal dose, a 40 degree sweep helps about 9 percent. Is the prior hallucinating? The seen/unseen test shows positive unseen skill of 0.22, and data-consistency keeps every sample faithful to the X-rays. Overfitting? Denoising loss train vs held-out ratio 0.97, but sample gain +7.00 vs +4.22 dB, so some patient-level advantage, and still under-trained. Why is mass not yet more accurate if the X-rays measure it exactly? Because we measured mass from the reconstruction inside a segmentation, not from the projections. Clinical use? Not yet; decision support only, a low-confidence flag tells the doctor to order CT.</a:t>
             </a:r>
           </a:p>
         </p:txBody>
@@ -1642,7 +1642,7 @@
           <a:lstStyle/>
           <a:p>
             <a:r>
-              <a:t>(0:35) We stated our objectives as six hypotheses that could each turn out false. H1: mass is measured better than volume. H2: the learned prior reduces volume error. H3: conformal intervals are valid. H4: mass doubling time classifies growth better. H5: calibrated category probabilities. H6: the prior recovers rather than invents. Later we will report honestly which ones held.</a:t>
+              <a:t>(0:35) We set six objectives. Measure mass first, because that is what tomosynthesis captures best. Fill the missing depth with a learned diffusion prior and 3D Gaussians. Give every number a calibrated 90 percent interval. Measure growth as mass and volume doubling time. Give calibrated probabilities of the clinical size categories. And explain every result by showing what the X-rays saw and what the prior filled in. All of this inside a usable click-to-3D application with a learned detector, running on low-cost cloud hardware.</a:t>
             </a:r>
           </a:p>
         </p:txBody>
@@ -8002,7 +8002,7 @@
                 </a:solidFill>
                 <a:latin typeface="Calibri"/>
               </a:rPr>
-              <a:t>CALIBRATED UNCERTAINTY · H3, H5</a:t>
+              <a:t>CALIBRATED UNCERTAINTY</a:t>
             </a:r>
           </a:p>
         </p:txBody>
@@ -9041,7 +9041,7 @@
                 </a:solidFill>
                 <a:latin typeface="Calibri"/>
               </a:rPr>
-              <a:t>EXPLAINABILITY · H6 SUPPORTED</a:t>
+              <a:t>EXPLAINABILITY · SEEN VS UNSEEN</a:t>
             </a:r>
           </a:p>
         </p:txBody>
@@ -11805,11 +11805,11 @@
             <a:r>
               <a:rPr sz="1300" b="1" i="0">
                 <a:solidFill>
-                  <a:srgbClr val="1F5FA8"/>
+                  <a:srgbClr val="2E7D4F"/>
                 </a:solidFill>
                 <a:latin typeface="Calibri"/>
               </a:rPr>
-              <a:t>HYPOTHESIS SCORECARD</a:t>
+              <a:t>ENGINEERING DELIVERED</a:t>
             </a:r>
           </a:p>
         </p:txBody>
@@ -11848,7 +11848,7 @@
                 </a:solidFill>
                 <a:latin typeface="Georgia"/>
               </a:rPr>
-              <a:t>Three hypotheses supported, three set our next step</a:t>
+              <a:t>The complete system at a glance</a:t>
             </a:r>
           </a:p>
         </p:txBody>
@@ -11861,10 +11861,10 @@
         </p:nvGrpSpPr>
         <p:grpSpPr>
           <a:xfrm>
-            <a:off x="812800" y="1841500"/>
-            <a:ext cx="10566400" cy="558800"/>
-            <a:chOff x="812800" y="1841500"/>
-            <a:chExt cx="10566400" cy="558800"/>
+            <a:off x="812800" y="1905000"/>
+            <a:ext cx="3384550" cy="1714500"/>
+            <a:chOff x="812800" y="1905000"/>
+            <a:chExt cx="3384550" cy="1714500"/>
           </a:xfrm>
         </p:grpSpPr>
         <p:sp>
@@ -11875,12 +11875,12 @@
           </p:nvSpPr>
           <p:spPr>
             <a:xfrm>
-              <a:off x="812800" y="1841500"/>
-              <a:ext cx="10566400" cy="558800"/>
+              <a:off x="812800" y="1905000"/>
+              <a:ext cx="3384550" cy="1714500"/>
             </a:xfrm>
             <a:prstGeom prst="roundRect">
               <a:avLst>
-                <a:gd name="adj" fmla="val 13636"/>
+                <a:gd name="adj" fmla="val 5925"/>
               </a:avLst>
             </a:prstGeom>
             <a:solidFill>
@@ -11921,8 +11921,497 @@
           </p:nvSpPr>
           <p:spPr>
             <a:xfrm>
-              <a:off x="812800" y="1841500"/>
-              <a:ext cx="50800" cy="558800"/>
+              <a:off x="812800" y="1905000"/>
+              <a:ext cx="3384550" cy="38100"/>
+            </a:xfrm>
+            <a:prstGeom prst="rect">
+              <a:avLst/>
+            </a:prstGeom>
+            <a:solidFill>
+              <a:srgbClr val="1F5FA8"/>
+            </a:solidFill>
+            <a:ln>
+              <a:noFill/>
+            </a:ln>
+            <a:effectLst/>
+          </p:spPr>
+          <p:style>
+            <a:lnRef idx="1">
+              <a:schemeClr val="accent1"/>
+            </a:lnRef>
+            <a:fillRef idx="3">
+              <a:schemeClr val="accent1"/>
+            </a:fillRef>
+            <a:effectRef idx="2">
+              <a:schemeClr val="accent1"/>
+            </a:effectRef>
+            <a:fontRef idx="minor">
+              <a:schemeClr val="lt1"/>
+            </a:fontRef>
+          </p:style>
+          <p:txBody>
+            <a:bodyPr rtlCol="0" anchor="ctr"/>
+            <a:lstStyle/>
+            <a:p>
+              <a:pPr algn="ctr"/>
+            </a:p>
+          </p:txBody>
+        </p:sp>
+        <p:sp>
+          <p:nvSpPr>
+            <p:cNvPr id="7" name="TextBox 6"/>
+            <p:cNvSpPr txBox="1"/>
+            <p:nvPr/>
+          </p:nvSpPr>
+          <p:spPr>
+            <a:xfrm>
+              <a:off x="1041400" y="2133600"/>
+              <a:ext cx="2927350" cy="1333500"/>
+            </a:xfrm>
+            <a:prstGeom prst="rect">
+              <a:avLst/>
+            </a:prstGeom>
+            <a:noFill/>
+          </p:spPr>
+          <p:txBody>
+            <a:bodyPr wrap="square" lIns="0" tIns="0">
+              <a:spAutoFit/>
+            </a:bodyPr>
+            <a:lstStyle/>
+            <a:p>
+              <a:pPr algn="l">
+                <a:lnSpc>
+                  <a:spcPct val="100000"/>
+                </a:lnSpc>
+              </a:pPr>
+              <a:r>
+                <a:rPr sz="4400" b="1" i="0">
+                  <a:solidFill>
+                    <a:srgbClr val="1F5FA8"/>
+                  </a:solidFill>
+                  <a:latin typeface="Georgia"/>
+                </a:rPr>
+                <a:t>583</a:t>
+              </a:r>
+            </a:p>
+            <a:p>
+              <a:pPr algn="l">
+                <a:lnSpc>
+                  <a:spcPct val="120000"/>
+                </a:lnSpc>
+                <a:spcBef>
+                  <a:spcPts val="400"/>
+                </a:spcBef>
+              </a:pPr>
+              <a:r>
+                <a:rPr sz="1400" b="0" i="0">
+                  <a:solidFill>
+                    <a:srgbClr val="4A5568"/>
+                  </a:solidFill>
+                  <a:latin typeface="Calibri"/>
+                </a:rPr>
+                <a:t>patients processed end to end, 1,144 nodules</a:t>
+              </a:r>
+            </a:p>
+          </p:txBody>
+        </p:sp>
+      </p:grpSp>
+      <p:grpSp>
+        <p:nvGrpSpPr>
+          <p:cNvPr id="8" name="Group 7"/>
+          <p:cNvGrpSpPr/>
+          <p:nvPr/>
+        </p:nvGrpSpPr>
+        <p:grpSpPr>
+          <a:xfrm>
+            <a:off x="4400550" y="1905000"/>
+            <a:ext cx="3384550" cy="1714500"/>
+            <a:chOff x="4400550" y="1905000"/>
+            <a:chExt cx="3384550" cy="1714500"/>
+          </a:xfrm>
+        </p:grpSpPr>
+        <p:sp>
+          <p:nvSpPr>
+            <p:cNvPr id="9" name="Rounded Rectangle 8"/>
+            <p:cNvSpPr/>
+            <p:nvPr/>
+          </p:nvSpPr>
+          <p:spPr>
+            <a:xfrm>
+              <a:off x="4400550" y="1905000"/>
+              <a:ext cx="3384550" cy="1714500"/>
+            </a:xfrm>
+            <a:prstGeom prst="roundRect">
+              <a:avLst>
+                <a:gd name="adj" fmla="val 5925"/>
+              </a:avLst>
+            </a:prstGeom>
+            <a:solidFill>
+              <a:srgbClr val="FFFFFF"/>
+            </a:solidFill>
+            <a:ln>
+              <a:noFill/>
+            </a:ln>
+            <a:effectLst/>
+          </p:spPr>
+          <p:style>
+            <a:lnRef idx="1">
+              <a:schemeClr val="accent1"/>
+            </a:lnRef>
+            <a:fillRef idx="3">
+              <a:schemeClr val="accent1"/>
+            </a:fillRef>
+            <a:effectRef idx="2">
+              <a:schemeClr val="accent1"/>
+            </a:effectRef>
+            <a:fontRef idx="minor">
+              <a:schemeClr val="lt1"/>
+            </a:fontRef>
+          </p:style>
+          <p:txBody>
+            <a:bodyPr rtlCol="0" anchor="ctr"/>
+            <a:lstStyle/>
+            <a:p>
+              <a:pPr algn="ctr"/>
+            </a:p>
+          </p:txBody>
+        </p:sp>
+        <p:sp>
+          <p:nvSpPr>
+            <p:cNvPr id="10" name="Rectangle 9"/>
+            <p:cNvSpPr/>
+            <p:nvPr/>
+          </p:nvSpPr>
+          <p:spPr>
+            <a:xfrm>
+              <a:off x="4400550" y="1905000"/>
+              <a:ext cx="3384550" cy="38100"/>
+            </a:xfrm>
+            <a:prstGeom prst="rect">
+              <a:avLst/>
+            </a:prstGeom>
+            <a:solidFill>
+              <a:srgbClr val="1F5FA8"/>
+            </a:solidFill>
+            <a:ln>
+              <a:noFill/>
+            </a:ln>
+            <a:effectLst/>
+          </p:spPr>
+          <p:style>
+            <a:lnRef idx="1">
+              <a:schemeClr val="accent1"/>
+            </a:lnRef>
+            <a:fillRef idx="3">
+              <a:schemeClr val="accent1"/>
+            </a:fillRef>
+            <a:effectRef idx="2">
+              <a:schemeClr val="accent1"/>
+            </a:effectRef>
+            <a:fontRef idx="minor">
+              <a:schemeClr val="lt1"/>
+            </a:fontRef>
+          </p:style>
+          <p:txBody>
+            <a:bodyPr rtlCol="0" anchor="ctr"/>
+            <a:lstStyle/>
+            <a:p>
+              <a:pPr algn="ctr"/>
+            </a:p>
+          </p:txBody>
+        </p:sp>
+        <p:sp>
+          <p:nvSpPr>
+            <p:cNvPr id="11" name="TextBox 10"/>
+            <p:cNvSpPr txBox="1"/>
+            <p:nvPr/>
+          </p:nvSpPr>
+          <p:spPr>
+            <a:xfrm>
+              <a:off x="4629150" y="2133600"/>
+              <a:ext cx="2927350" cy="1333500"/>
+            </a:xfrm>
+            <a:prstGeom prst="rect">
+              <a:avLst/>
+            </a:prstGeom>
+            <a:noFill/>
+          </p:spPr>
+          <p:txBody>
+            <a:bodyPr wrap="square" lIns="0" tIns="0">
+              <a:spAutoFit/>
+            </a:bodyPr>
+            <a:lstStyle/>
+            <a:p>
+              <a:pPr algn="l">
+                <a:lnSpc>
+                  <a:spcPct val="100000"/>
+                </a:lnSpc>
+              </a:pPr>
+              <a:r>
+                <a:rPr sz="4400" b="1" i="0">
+                  <a:solidFill>
+                    <a:srgbClr val="1F5FA8"/>
+                  </a:solidFill>
+                  <a:latin typeface="Georgia"/>
+                </a:rPr>
+                <a:t>18 steps</a:t>
+              </a:r>
+            </a:p>
+            <a:p>
+              <a:pPr algn="l">
+                <a:lnSpc>
+                  <a:spcPct val="120000"/>
+                </a:lnSpc>
+                <a:spcBef>
+                  <a:spcPts val="400"/>
+                </a:spcBef>
+              </a:pPr>
+              <a:r>
+                <a:rPr sz="1400" b="0" i="0">
+                  <a:solidFill>
+                    <a:srgbClr val="4A5568"/>
+                  </a:solidFill>
+                  <a:latin typeface="Calibri"/>
+                </a:rPr>
+                <a:t>scripted pipeline, each ending in automatic PASS/FAIL checks</a:t>
+              </a:r>
+            </a:p>
+          </p:txBody>
+        </p:sp>
+      </p:grpSp>
+      <p:grpSp>
+        <p:nvGrpSpPr>
+          <p:cNvPr id="12" name="Group 11"/>
+          <p:cNvGrpSpPr/>
+          <p:nvPr/>
+        </p:nvGrpSpPr>
+        <p:grpSpPr>
+          <a:xfrm>
+            <a:off x="7988300" y="1905000"/>
+            <a:ext cx="3384550" cy="1714500"/>
+            <a:chOff x="7988300" y="1905000"/>
+            <a:chExt cx="3384550" cy="1714500"/>
+          </a:xfrm>
+        </p:grpSpPr>
+        <p:sp>
+          <p:nvSpPr>
+            <p:cNvPr id="13" name="Rounded Rectangle 12"/>
+            <p:cNvSpPr/>
+            <p:nvPr/>
+          </p:nvSpPr>
+          <p:spPr>
+            <a:xfrm>
+              <a:off x="7988300" y="1905000"/>
+              <a:ext cx="3384550" cy="1714500"/>
+            </a:xfrm>
+            <a:prstGeom prst="roundRect">
+              <a:avLst>
+                <a:gd name="adj" fmla="val 5925"/>
+              </a:avLst>
+            </a:prstGeom>
+            <a:solidFill>
+              <a:srgbClr val="FFFFFF"/>
+            </a:solidFill>
+            <a:ln>
+              <a:noFill/>
+            </a:ln>
+            <a:effectLst/>
+          </p:spPr>
+          <p:style>
+            <a:lnRef idx="1">
+              <a:schemeClr val="accent1"/>
+            </a:lnRef>
+            <a:fillRef idx="3">
+              <a:schemeClr val="accent1"/>
+            </a:fillRef>
+            <a:effectRef idx="2">
+              <a:schemeClr val="accent1"/>
+            </a:effectRef>
+            <a:fontRef idx="minor">
+              <a:schemeClr val="lt1"/>
+            </a:fontRef>
+          </p:style>
+          <p:txBody>
+            <a:bodyPr rtlCol="0" anchor="ctr"/>
+            <a:lstStyle/>
+            <a:p>
+              <a:pPr algn="ctr"/>
+            </a:p>
+          </p:txBody>
+        </p:sp>
+        <p:sp>
+          <p:nvSpPr>
+            <p:cNvPr id="14" name="Rectangle 13"/>
+            <p:cNvSpPr/>
+            <p:nvPr/>
+          </p:nvSpPr>
+          <p:spPr>
+            <a:xfrm>
+              <a:off x="7988300" y="1905000"/>
+              <a:ext cx="3384550" cy="38100"/>
+            </a:xfrm>
+            <a:prstGeom prst="rect">
+              <a:avLst/>
+            </a:prstGeom>
+            <a:solidFill>
+              <a:srgbClr val="1F5FA8"/>
+            </a:solidFill>
+            <a:ln>
+              <a:noFill/>
+            </a:ln>
+            <a:effectLst/>
+          </p:spPr>
+          <p:style>
+            <a:lnRef idx="1">
+              <a:schemeClr val="accent1"/>
+            </a:lnRef>
+            <a:fillRef idx="3">
+              <a:schemeClr val="accent1"/>
+            </a:fillRef>
+            <a:effectRef idx="2">
+              <a:schemeClr val="accent1"/>
+            </a:effectRef>
+            <a:fontRef idx="minor">
+              <a:schemeClr val="lt1"/>
+            </a:fontRef>
+          </p:style>
+          <p:txBody>
+            <a:bodyPr rtlCol="0" anchor="ctr"/>
+            <a:lstStyle/>
+            <a:p>
+              <a:pPr algn="ctr"/>
+            </a:p>
+          </p:txBody>
+        </p:sp>
+        <p:sp>
+          <p:nvSpPr>
+            <p:cNvPr id="15" name="TextBox 14"/>
+            <p:cNvSpPr txBox="1"/>
+            <p:nvPr/>
+          </p:nvSpPr>
+          <p:spPr>
+            <a:xfrm>
+              <a:off x="8216900" y="2133600"/>
+              <a:ext cx="2927350" cy="1333500"/>
+            </a:xfrm>
+            <a:prstGeom prst="rect">
+              <a:avLst/>
+            </a:prstGeom>
+            <a:noFill/>
+          </p:spPr>
+          <p:txBody>
+            <a:bodyPr wrap="square" lIns="0" tIns="0">
+              <a:spAutoFit/>
+            </a:bodyPr>
+            <a:lstStyle/>
+            <a:p>
+              <a:pPr algn="l">
+                <a:lnSpc>
+                  <a:spcPct val="100000"/>
+                </a:lnSpc>
+              </a:pPr>
+              <a:r>
+                <a:rPr sz="4400" b="1" i="0">
+                  <a:solidFill>
+                    <a:srgbClr val="1F5FA8"/>
+                  </a:solidFill>
+                  <a:latin typeface="Georgia"/>
+                </a:rPr>
+                <a:t>69</a:t>
+              </a:r>
+            </a:p>
+            <a:p>
+              <a:pPr algn="l">
+                <a:lnSpc>
+                  <a:spcPct val="120000"/>
+                </a:lnSpc>
+                <a:spcBef>
+                  <a:spcPts val="400"/>
+                </a:spcBef>
+              </a:pPr>
+              <a:r>
+                <a:rPr sz="1400" b="0" i="0">
+                  <a:solidFill>
+                    <a:srgbClr val="4A5568"/>
+                  </a:solidFill>
+                  <a:latin typeface="Calibri"/>
+                </a:rPr>
+                <a:t>unit tests covering physics, models and measurement</a:t>
+              </a:r>
+            </a:p>
+          </p:txBody>
+        </p:sp>
+      </p:grpSp>
+      <p:grpSp>
+        <p:nvGrpSpPr>
+          <p:cNvPr id="16" name="Group 15"/>
+          <p:cNvGrpSpPr/>
+          <p:nvPr/>
+        </p:nvGrpSpPr>
+        <p:grpSpPr>
+          <a:xfrm>
+            <a:off x="812800" y="3873500"/>
+            <a:ext cx="3384550" cy="1714500"/>
+            <a:chOff x="812800" y="3873500"/>
+            <a:chExt cx="3384550" cy="1714500"/>
+          </a:xfrm>
+        </p:grpSpPr>
+        <p:sp>
+          <p:nvSpPr>
+            <p:cNvPr id="17" name="Rounded Rectangle 16"/>
+            <p:cNvSpPr/>
+            <p:nvPr/>
+          </p:nvSpPr>
+          <p:spPr>
+            <a:xfrm>
+              <a:off x="812800" y="3873500"/>
+              <a:ext cx="3384550" cy="1714500"/>
+            </a:xfrm>
+            <a:prstGeom prst="roundRect">
+              <a:avLst>
+                <a:gd name="adj" fmla="val 5925"/>
+              </a:avLst>
+            </a:prstGeom>
+            <a:solidFill>
+              <a:srgbClr val="FFFFFF"/>
+            </a:solidFill>
+            <a:ln>
+              <a:noFill/>
+            </a:ln>
+            <a:effectLst/>
+          </p:spPr>
+          <p:style>
+            <a:lnRef idx="1">
+              <a:schemeClr val="accent1"/>
+            </a:lnRef>
+            <a:fillRef idx="3">
+              <a:schemeClr val="accent1"/>
+            </a:fillRef>
+            <a:effectRef idx="2">
+              <a:schemeClr val="accent1"/>
+            </a:effectRef>
+            <a:fontRef idx="minor">
+              <a:schemeClr val="lt1"/>
+            </a:fontRef>
+          </p:style>
+          <p:txBody>
+            <a:bodyPr rtlCol="0" anchor="ctr"/>
+            <a:lstStyle/>
+            <a:p>
+              <a:pPr algn="ctr"/>
+            </a:p>
+          </p:txBody>
+        </p:sp>
+        <p:sp>
+          <p:nvSpPr>
+            <p:cNvPr id="18" name="Rectangle 17"/>
+            <p:cNvSpPr/>
+            <p:nvPr/>
+          </p:nvSpPr>
+          <p:spPr>
+            <a:xfrm>
+              <a:off x="812800" y="3873500"/>
+              <a:ext cx="3384550" cy="38100"/>
             </a:xfrm>
             <a:prstGeom prst="rect">
               <a:avLst/>
@@ -11959,14 +12448,14 @@
         </p:sp>
         <p:sp>
           <p:nvSpPr>
-            <p:cNvPr id="7" name="TextBox 6"/>
+            <p:cNvPr id="19" name="TextBox 18"/>
             <p:cNvSpPr txBox="1"/>
             <p:nvPr/>
           </p:nvSpPr>
           <p:spPr>
             <a:xfrm>
-              <a:off x="1066800" y="1841500"/>
-              <a:ext cx="571500" cy="558800"/>
+              <a:off x="1041400" y="4102100"/>
+              <a:ext cx="2927350" cy="1333500"/>
             </a:xfrm>
             <a:prstGeom prst="rect">
               <a:avLst/>
@@ -11974,141 +12463,43 @@
             <a:noFill/>
           </p:spPr>
           <p:txBody>
-            <a:bodyPr wrap="square" lIns="0" tIns="0" bIns="0" anchor="ctr">
+            <a:bodyPr wrap="square" lIns="0" tIns="0">
               <a:spAutoFit/>
             </a:bodyPr>
             <a:lstStyle/>
             <a:p>
               <a:pPr algn="l">
                 <a:lnSpc>
-                  <a:spcPct val="120000"/>
+                  <a:spcPct val="100000"/>
                 </a:lnSpc>
               </a:pPr>
               <a:r>
-                <a:rPr sz="1600" b="1" i="0">
+                <a:rPr sz="4400" b="1" i="0">
                   <a:solidFill>
-                    <a:srgbClr val="14213D"/>
+                    <a:srgbClr val="2E7D4F"/>
                   </a:solidFill>
-                  <a:latin typeface="Calibri"/>
+                  <a:latin typeface="Georgia"/>
                 </a:rPr>
-                <a:t>H6</a:t>
+                <a:t>15 h</a:t>
               </a:r>
             </a:p>
-          </p:txBody>
-        </p:sp>
-        <p:sp>
-          <p:nvSpPr>
-            <p:cNvPr id="8" name="TextBox 7"/>
-            <p:cNvSpPr txBox="1"/>
-            <p:nvPr/>
-          </p:nvSpPr>
-          <p:spPr>
-            <a:xfrm>
-              <a:off x="1714500" y="1841500"/>
-              <a:ext cx="3302000" cy="558800"/>
-            </a:xfrm>
-            <a:prstGeom prst="rect">
-              <a:avLst/>
-            </a:prstGeom>
-            <a:noFill/>
-          </p:spPr>
-          <p:txBody>
-            <a:bodyPr wrap="square" lIns="0" tIns="0" bIns="0" anchor="ctr">
-              <a:spAutoFit/>
-            </a:bodyPr>
-            <a:lstStyle/>
             <a:p>
               <a:pPr algn="l">
                 <a:lnSpc>
                   <a:spcPct val="120000"/>
                 </a:lnSpc>
+                <a:spcBef>
+                  <a:spcPts val="400"/>
+                </a:spcBef>
               </a:pPr>
               <a:r>
                 <a:rPr sz="1400" b="0" i="0">
-                  <a:solidFill>
-                    <a:srgbClr val="14213D"/>
-                  </a:solidFill>
-                  <a:latin typeface="Calibri"/>
-                </a:rPr>
-                <a:t>Prior recovers unseen depth</a:t>
-              </a:r>
-            </a:p>
-          </p:txBody>
-        </p:sp>
-        <p:sp>
-          <p:nvSpPr>
-            <p:cNvPr id="9" name="TextBox 8"/>
-            <p:cNvSpPr txBox="1"/>
-            <p:nvPr/>
-          </p:nvSpPr>
-          <p:spPr>
-            <a:xfrm>
-              <a:off x="5080000" y="1841500"/>
-              <a:ext cx="2032000" cy="558800"/>
-            </a:xfrm>
-            <a:prstGeom prst="rect">
-              <a:avLst/>
-            </a:prstGeom>
-            <a:noFill/>
-          </p:spPr>
-          <p:txBody>
-            <a:bodyPr wrap="square" lIns="0" tIns="0" bIns="0" anchor="ctr">
-              <a:spAutoFit/>
-            </a:bodyPr>
-            <a:lstStyle/>
-            <a:p>
-              <a:pPr algn="l">
-                <a:lnSpc>
-                  <a:spcPct val="120000"/>
-                </a:lnSpc>
-              </a:pPr>
-              <a:r>
-                <a:rPr sz="1400" b="1" i="0">
-                  <a:solidFill>
-                    <a:srgbClr val="2E7D4F"/>
-                  </a:solidFill>
-                  <a:latin typeface="Calibri"/>
-                </a:rPr>
-                <a:t>Supported</a:t>
-              </a:r>
-            </a:p>
-          </p:txBody>
-        </p:sp>
-        <p:sp>
-          <p:nvSpPr>
-            <p:cNvPr id="10" name="TextBox 9"/>
-            <p:cNvSpPr txBox="1"/>
-            <p:nvPr/>
-          </p:nvSpPr>
-          <p:spPr>
-            <a:xfrm>
-              <a:off x="7175500" y="1841500"/>
-              <a:ext cx="4064000" cy="558800"/>
-            </a:xfrm>
-            <a:prstGeom prst="rect">
-              <a:avLst/>
-            </a:prstGeom>
-            <a:noFill/>
-          </p:spPr>
-          <p:txBody>
-            <a:bodyPr wrap="square" lIns="0" tIns="0" bIns="0" anchor="ctr">
-              <a:spAutoFit/>
-            </a:bodyPr>
-            <a:lstStyle/>
-            <a:p>
-              <a:pPr algn="l">
-                <a:lnSpc>
-                  <a:spcPct val="120000"/>
-                </a:lnSpc>
-              </a:pPr>
-              <a:r>
-                <a:rPr sz="1300" b="0" i="0">
                   <a:solidFill>
                     <a:srgbClr val="4A5568"/>
                   </a:solidFill>
                   <a:latin typeface="Calibri"/>
                 </a:rPr>
-                <a:t>unseen skill 0.22 [0.14, 0.36]</a:t>
+                <a:t>full study on one rented L40S GPU, about US$20</a:t>
               </a:r>
             </a:p>
           </p:txBody>
@@ -12116,32 +12507,32 @@
       </p:grpSp>
       <p:grpSp>
         <p:nvGrpSpPr>
-          <p:cNvPr id="11" name="Group 10"/>
+          <p:cNvPr id="20" name="Group 19"/>
           <p:cNvGrpSpPr/>
           <p:nvPr/>
         </p:nvGrpSpPr>
         <p:grpSpPr>
           <a:xfrm>
-            <a:off x="812800" y="2501900"/>
-            <a:ext cx="10566400" cy="558800"/>
-            <a:chOff x="812800" y="2501900"/>
-            <a:chExt cx="10566400" cy="558800"/>
+            <a:off x="4400550" y="3873500"/>
+            <a:ext cx="3384550" cy="1714500"/>
+            <a:chOff x="4400550" y="3873500"/>
+            <a:chExt cx="3384550" cy="1714500"/>
           </a:xfrm>
         </p:grpSpPr>
         <p:sp>
           <p:nvSpPr>
-            <p:cNvPr id="12" name="Rounded Rectangle 11"/>
+            <p:cNvPr id="21" name="Rounded Rectangle 20"/>
             <p:cNvSpPr/>
             <p:nvPr/>
           </p:nvSpPr>
           <p:spPr>
             <a:xfrm>
-              <a:off x="812800" y="2501900"/>
-              <a:ext cx="10566400" cy="558800"/>
+              <a:off x="4400550" y="3873500"/>
+              <a:ext cx="3384550" cy="1714500"/>
             </a:xfrm>
             <a:prstGeom prst="roundRect">
               <a:avLst>
-                <a:gd name="adj" fmla="val 13636"/>
+                <a:gd name="adj" fmla="val 5925"/>
               </a:avLst>
             </a:prstGeom>
             <a:solidFill>
@@ -12176,14 +12567,14 @@
         </p:sp>
         <p:sp>
           <p:nvSpPr>
-            <p:cNvPr id="13" name="Rectangle 12"/>
+            <p:cNvPr id="22" name="Rectangle 21"/>
             <p:cNvSpPr/>
             <p:nvPr/>
           </p:nvSpPr>
           <p:spPr>
             <a:xfrm>
-              <a:off x="812800" y="2501900"/>
-              <a:ext cx="50800" cy="558800"/>
+              <a:off x="4400550" y="3873500"/>
+              <a:ext cx="3384550" cy="38100"/>
             </a:xfrm>
             <a:prstGeom prst="rect">
               <a:avLst/>
@@ -12220,14 +12611,14 @@
         </p:sp>
         <p:sp>
           <p:nvSpPr>
-            <p:cNvPr id="14" name="TextBox 13"/>
+            <p:cNvPr id="23" name="TextBox 22"/>
             <p:cNvSpPr txBox="1"/>
             <p:nvPr/>
           </p:nvSpPr>
           <p:spPr>
             <a:xfrm>
-              <a:off x="1066800" y="2501900"/>
-              <a:ext cx="571500" cy="558800"/>
+              <a:off x="4629150" y="4102100"/>
+              <a:ext cx="2927350" cy="1333500"/>
             </a:xfrm>
             <a:prstGeom prst="rect">
               <a:avLst/>
@@ -12235,141 +12626,43 @@
             <a:noFill/>
           </p:spPr>
           <p:txBody>
-            <a:bodyPr wrap="square" lIns="0" tIns="0" bIns="0" anchor="ctr">
+            <a:bodyPr wrap="square" lIns="0" tIns="0">
               <a:spAutoFit/>
             </a:bodyPr>
             <a:lstStyle/>
             <a:p>
               <a:pPr algn="l">
                 <a:lnSpc>
-                  <a:spcPct val="120000"/>
+                  <a:spcPct val="100000"/>
                 </a:lnSpc>
               </a:pPr>
               <a:r>
-                <a:rPr sz="1600" b="1" i="0">
+                <a:rPr sz="4400" b="1" i="0">
                   <a:solidFill>
-                    <a:srgbClr val="14213D"/>
+                    <a:srgbClr val="2E7D4F"/>
                   </a:solidFill>
-                  <a:latin typeface="Calibri"/>
+                  <a:latin typeface="Georgia"/>
                 </a:rPr>
-                <a:t>H3</a:t>
+                <a:t>17.4 M</a:t>
               </a:r>
             </a:p>
-          </p:txBody>
-        </p:sp>
-        <p:sp>
-          <p:nvSpPr>
-            <p:cNvPr id="15" name="TextBox 14"/>
-            <p:cNvSpPr txBox="1"/>
-            <p:nvPr/>
-          </p:nvSpPr>
-          <p:spPr>
-            <a:xfrm>
-              <a:off x="1714500" y="2501900"/>
-              <a:ext cx="3302000" cy="558800"/>
-            </a:xfrm>
-            <a:prstGeom prst="rect">
-              <a:avLst/>
-            </a:prstGeom>
-            <a:noFill/>
-          </p:spPr>
-          <p:txBody>
-            <a:bodyPr wrap="square" lIns="0" tIns="0" bIns="0" anchor="ctr">
-              <a:spAutoFit/>
-            </a:bodyPr>
-            <a:lstStyle/>
             <a:p>
               <a:pPr algn="l">
                 <a:lnSpc>
                   <a:spcPct val="120000"/>
                 </a:lnSpc>
+                <a:spcBef>
+                  <a:spcPts val="400"/>
+                </a:spcBef>
               </a:pPr>
               <a:r>
                 <a:rPr sz="1400" b="0" i="0">
-                  <a:solidFill>
-                    <a:srgbClr val="14213D"/>
-                  </a:solidFill>
-                  <a:latin typeface="Calibri"/>
-                </a:rPr>
-                <a:t>Valid conformal intervals</a:t>
-              </a:r>
-            </a:p>
-          </p:txBody>
-        </p:sp>
-        <p:sp>
-          <p:nvSpPr>
-            <p:cNvPr id="16" name="TextBox 15"/>
-            <p:cNvSpPr txBox="1"/>
-            <p:nvPr/>
-          </p:nvSpPr>
-          <p:spPr>
-            <a:xfrm>
-              <a:off x="5080000" y="2501900"/>
-              <a:ext cx="2032000" cy="558800"/>
-            </a:xfrm>
-            <a:prstGeom prst="rect">
-              <a:avLst/>
-            </a:prstGeom>
-            <a:noFill/>
-          </p:spPr>
-          <p:txBody>
-            <a:bodyPr wrap="square" lIns="0" tIns="0" bIns="0" anchor="ctr">
-              <a:spAutoFit/>
-            </a:bodyPr>
-            <a:lstStyle/>
-            <a:p>
-              <a:pPr algn="l">
-                <a:lnSpc>
-                  <a:spcPct val="120000"/>
-                </a:lnSpc>
-              </a:pPr>
-              <a:r>
-                <a:rPr sz="1400" b="1" i="0">
-                  <a:solidFill>
-                    <a:srgbClr val="2E7D4F"/>
-                  </a:solidFill>
-                  <a:latin typeface="Calibri"/>
-                </a:rPr>
-                <a:t>Coverage met</a:t>
-              </a:r>
-            </a:p>
-          </p:txBody>
-        </p:sp>
-        <p:sp>
-          <p:nvSpPr>
-            <p:cNvPr id="17" name="TextBox 16"/>
-            <p:cNvSpPr txBox="1"/>
-            <p:nvPr/>
-          </p:nvSpPr>
-          <p:spPr>
-            <a:xfrm>
-              <a:off x="7175500" y="2501900"/>
-              <a:ext cx="4064000" cy="558800"/>
-            </a:xfrm>
-            <a:prstGeom prst="rect">
-              <a:avLst/>
-            </a:prstGeom>
-            <a:noFill/>
-          </p:spPr>
-          <p:txBody>
-            <a:bodyPr wrap="square" lIns="0" tIns="0" bIns="0" anchor="ctr">
-              <a:spAutoFit/>
-            </a:bodyPr>
-            <a:lstStyle/>
-            <a:p>
-              <a:pPr algn="l">
-                <a:lnSpc>
-                  <a:spcPct val="120000"/>
-                </a:lnSpc>
-              </a:pPr>
-              <a:r>
-                <a:rPr sz="1300" b="0" i="0">
                   <a:solidFill>
                     <a:srgbClr val="4A5568"/>
                   </a:solidFill>
                   <a:latin typeface="Calibri"/>
                 </a:rPr>
-                <a:t>95% for the 90% target</a:t>
+                <a:t>parameter 3D diffusion model, trained in 6 hours</a:t>
               </a:r>
             </a:p>
           </p:txBody>
@@ -12377,32 +12670,32 @@
       </p:grpSp>
       <p:grpSp>
         <p:nvGrpSpPr>
-          <p:cNvPr id="18" name="Group 17"/>
+          <p:cNvPr id="24" name="Group 23"/>
           <p:cNvGrpSpPr/>
           <p:nvPr/>
         </p:nvGrpSpPr>
         <p:grpSpPr>
           <a:xfrm>
-            <a:off x="812800" y="3162300"/>
-            <a:ext cx="10566400" cy="558800"/>
-            <a:chOff x="812800" y="3162300"/>
-            <a:chExt cx="10566400" cy="558800"/>
+            <a:off x="7988300" y="3873500"/>
+            <a:ext cx="3384550" cy="1714500"/>
+            <a:chOff x="7988300" y="3873500"/>
+            <a:chExt cx="3384550" cy="1714500"/>
           </a:xfrm>
         </p:grpSpPr>
         <p:sp>
           <p:nvSpPr>
-            <p:cNvPr id="19" name="Rounded Rectangle 18"/>
+            <p:cNvPr id="25" name="Rounded Rectangle 24"/>
             <p:cNvSpPr/>
             <p:nvPr/>
           </p:nvSpPr>
           <p:spPr>
             <a:xfrm>
-              <a:off x="812800" y="3162300"/>
-              <a:ext cx="10566400" cy="558800"/>
+              <a:off x="7988300" y="3873500"/>
+              <a:ext cx="3384550" cy="1714500"/>
             </a:xfrm>
             <a:prstGeom prst="roundRect">
               <a:avLst>
-                <a:gd name="adj" fmla="val 13636"/>
+                <a:gd name="adj" fmla="val 5925"/>
               </a:avLst>
             </a:prstGeom>
             <a:solidFill>
@@ -12437,14 +12730,14 @@
         </p:sp>
         <p:sp>
           <p:nvSpPr>
-            <p:cNvPr id="20" name="Rectangle 19"/>
+            <p:cNvPr id="26" name="Rectangle 25"/>
             <p:cNvSpPr/>
             <p:nvPr/>
           </p:nvSpPr>
           <p:spPr>
             <a:xfrm>
-              <a:off x="812800" y="3162300"/>
-              <a:ext cx="50800" cy="558800"/>
+              <a:off x="7988300" y="3873500"/>
+              <a:ext cx="3384550" cy="38100"/>
             </a:xfrm>
             <a:prstGeom prst="rect">
               <a:avLst/>
@@ -12481,14 +12774,14 @@
         </p:sp>
         <p:sp>
           <p:nvSpPr>
-            <p:cNvPr id="21" name="TextBox 20"/>
+            <p:cNvPr id="27" name="TextBox 26"/>
             <p:cNvSpPr txBox="1"/>
             <p:nvPr/>
           </p:nvSpPr>
           <p:spPr>
             <a:xfrm>
-              <a:off x="1066800" y="3162300"/>
-              <a:ext cx="571500" cy="558800"/>
+              <a:off x="8216900" y="4102100"/>
+              <a:ext cx="2927350" cy="1333500"/>
             </a:xfrm>
             <a:prstGeom prst="rect">
               <a:avLst/>
@@ -12496,924 +12789,43 @@
             <a:noFill/>
           </p:spPr>
           <p:txBody>
-            <a:bodyPr wrap="square" lIns="0" tIns="0" bIns="0" anchor="ctr">
+            <a:bodyPr wrap="square" lIns="0" tIns="0">
               <a:spAutoFit/>
             </a:bodyPr>
             <a:lstStyle/>
             <a:p>
               <a:pPr algn="l">
                 <a:lnSpc>
-                  <a:spcPct val="120000"/>
+                  <a:spcPct val="100000"/>
                 </a:lnSpc>
               </a:pPr>
               <a:r>
-                <a:rPr sz="1600" b="1" i="0">
+                <a:rPr sz="4400" b="1" i="0">
                   <a:solidFill>
-                    <a:srgbClr val="14213D"/>
+                    <a:srgbClr val="2E7D4F"/>
                   </a:solidFill>
-                  <a:latin typeface="Calibri"/>
+                  <a:latin typeface="Georgia"/>
                 </a:rPr>
-                <a:t>H5</a:t>
+                <a:t>45.5 s</a:t>
               </a:r>
             </a:p>
-          </p:txBody>
-        </p:sp>
-        <p:sp>
-          <p:nvSpPr>
-            <p:cNvPr id="22" name="TextBox 21"/>
-            <p:cNvSpPr txBox="1"/>
-            <p:nvPr/>
-          </p:nvSpPr>
-          <p:spPr>
-            <a:xfrm>
-              <a:off x="1714500" y="3162300"/>
-              <a:ext cx="3302000" cy="558800"/>
-            </a:xfrm>
-            <a:prstGeom prst="rect">
-              <a:avLst/>
-            </a:prstGeom>
-            <a:noFill/>
-          </p:spPr>
-          <p:txBody>
-            <a:bodyPr wrap="square" lIns="0" tIns="0" bIns="0" anchor="ctr">
-              <a:spAutoFit/>
-            </a:bodyPr>
-            <a:lstStyle/>
             <a:p>
               <a:pPr algn="l">
                 <a:lnSpc>
                   <a:spcPct val="120000"/>
                 </a:lnSpc>
+                <a:spcBef>
+                  <a:spcPts val="400"/>
+                </a:spcBef>
               </a:pPr>
               <a:r>
                 <a:rPr sz="1400" b="0" i="0">
-                  <a:solidFill>
-                    <a:srgbClr val="14213D"/>
-                  </a:solidFill>
-                  <a:latin typeface="Calibri"/>
-                </a:rPr>
-                <a:t>Calibrated category risk</a:t>
-              </a:r>
-            </a:p>
-          </p:txBody>
-        </p:sp>
-        <p:sp>
-          <p:nvSpPr>
-            <p:cNvPr id="23" name="TextBox 22"/>
-            <p:cNvSpPr txBox="1"/>
-            <p:nvPr/>
-          </p:nvSpPr>
-          <p:spPr>
-            <a:xfrm>
-              <a:off x="5080000" y="3162300"/>
-              <a:ext cx="2032000" cy="558800"/>
-            </a:xfrm>
-            <a:prstGeom prst="rect">
-              <a:avLst/>
-            </a:prstGeom>
-            <a:noFill/>
-          </p:spPr>
-          <p:txBody>
-            <a:bodyPr wrap="square" lIns="0" tIns="0" bIns="0" anchor="ctr">
-              <a:spAutoFit/>
-            </a:bodyPr>
-            <a:lstStyle/>
-            <a:p>
-              <a:pPr algn="l">
-                <a:lnSpc>
-                  <a:spcPct val="120000"/>
-                </a:lnSpc>
-              </a:pPr>
-              <a:r>
-                <a:rPr sz="1400" b="1" i="0">
-                  <a:solidFill>
-                    <a:srgbClr val="2E7D4F"/>
-                  </a:solidFill>
-                  <a:latin typeface="Calibri"/>
-                </a:rPr>
-                <a:t>Met at 100 mm³</a:t>
-              </a:r>
-            </a:p>
-          </p:txBody>
-        </p:sp>
-        <p:sp>
-          <p:nvSpPr>
-            <p:cNvPr id="24" name="TextBox 23"/>
-            <p:cNvSpPr txBox="1"/>
-            <p:nvPr/>
-          </p:nvSpPr>
-          <p:spPr>
-            <a:xfrm>
-              <a:off x="7175500" y="3162300"/>
-              <a:ext cx="4064000" cy="558800"/>
-            </a:xfrm>
-            <a:prstGeom prst="rect">
-              <a:avLst/>
-            </a:prstGeom>
-            <a:noFill/>
-          </p:spPr>
-          <p:txBody>
-            <a:bodyPr wrap="square" lIns="0" tIns="0" bIns="0" anchor="ctr">
-              <a:spAutoFit/>
-            </a:bodyPr>
-            <a:lstStyle/>
-            <a:p>
-              <a:pPr algn="l">
-                <a:lnSpc>
-                  <a:spcPct val="120000"/>
-                </a:lnSpc>
-              </a:pPr>
-              <a:r>
-                <a:rPr sz="1300" b="0" i="0">
                   <a:solidFill>
                     <a:srgbClr val="4A5568"/>
                   </a:solidFill>
                   <a:latin typeface="Calibri"/>
                 </a:rPr>
-                <a:t>Brier 0.54 → 0.17</a:t>
-              </a:r>
-            </a:p>
-          </p:txBody>
-        </p:sp>
-      </p:grpSp>
-      <p:grpSp>
-        <p:nvGrpSpPr>
-          <p:cNvPr id="25" name="Group 24"/>
-          <p:cNvGrpSpPr/>
-          <p:nvPr/>
-        </p:nvGrpSpPr>
-        <p:grpSpPr>
-          <a:xfrm>
-            <a:off x="812800" y="3822700"/>
-            <a:ext cx="10566400" cy="558800"/>
-            <a:chOff x="812800" y="3822700"/>
-            <a:chExt cx="10566400" cy="558800"/>
-          </a:xfrm>
-        </p:grpSpPr>
-        <p:sp>
-          <p:nvSpPr>
-            <p:cNvPr id="26" name="Rounded Rectangle 25"/>
-            <p:cNvSpPr/>
-            <p:nvPr/>
-          </p:nvSpPr>
-          <p:spPr>
-            <a:xfrm>
-              <a:off x="812800" y="3822700"/>
-              <a:ext cx="10566400" cy="558800"/>
-            </a:xfrm>
-            <a:prstGeom prst="roundRect">
-              <a:avLst>
-                <a:gd name="adj" fmla="val 13636"/>
-              </a:avLst>
-            </a:prstGeom>
-            <a:solidFill>
-              <a:srgbClr val="FFFFFF"/>
-            </a:solidFill>
-            <a:ln>
-              <a:noFill/>
-            </a:ln>
-            <a:effectLst/>
-          </p:spPr>
-          <p:style>
-            <a:lnRef idx="1">
-              <a:schemeClr val="accent1"/>
-            </a:lnRef>
-            <a:fillRef idx="3">
-              <a:schemeClr val="accent1"/>
-            </a:fillRef>
-            <a:effectRef idx="2">
-              <a:schemeClr val="accent1"/>
-            </a:effectRef>
-            <a:fontRef idx="minor">
-              <a:schemeClr val="lt1"/>
-            </a:fontRef>
-          </p:style>
-          <p:txBody>
-            <a:bodyPr rtlCol="0" anchor="ctr"/>
-            <a:lstStyle/>
-            <a:p>
-              <a:pPr algn="ctr"/>
-            </a:p>
-          </p:txBody>
-        </p:sp>
-        <p:sp>
-          <p:nvSpPr>
-            <p:cNvPr id="27" name="Rectangle 26"/>
-            <p:cNvSpPr/>
-            <p:nvPr/>
-          </p:nvSpPr>
-          <p:spPr>
-            <a:xfrm>
-              <a:off x="812800" y="3822700"/>
-              <a:ext cx="50800" cy="558800"/>
-            </a:xfrm>
-            <a:prstGeom prst="rect">
-              <a:avLst/>
-            </a:prstGeom>
-            <a:solidFill>
-              <a:srgbClr val="1F5FA8"/>
-            </a:solidFill>
-            <a:ln>
-              <a:noFill/>
-            </a:ln>
-            <a:effectLst/>
-          </p:spPr>
-          <p:style>
-            <a:lnRef idx="1">
-              <a:schemeClr val="accent1"/>
-            </a:lnRef>
-            <a:fillRef idx="3">
-              <a:schemeClr val="accent1"/>
-            </a:fillRef>
-            <a:effectRef idx="2">
-              <a:schemeClr val="accent1"/>
-            </a:effectRef>
-            <a:fontRef idx="minor">
-              <a:schemeClr val="lt1"/>
-            </a:fontRef>
-          </p:style>
-          <p:txBody>
-            <a:bodyPr rtlCol="0" anchor="ctr"/>
-            <a:lstStyle/>
-            <a:p>
-              <a:pPr algn="ctr"/>
-            </a:p>
-          </p:txBody>
-        </p:sp>
-        <p:sp>
-          <p:nvSpPr>
-            <p:cNvPr id="28" name="TextBox 27"/>
-            <p:cNvSpPr txBox="1"/>
-            <p:nvPr/>
-          </p:nvSpPr>
-          <p:spPr>
-            <a:xfrm>
-              <a:off x="1066800" y="3822700"/>
-              <a:ext cx="571500" cy="558800"/>
-            </a:xfrm>
-            <a:prstGeom prst="rect">
-              <a:avLst/>
-            </a:prstGeom>
-            <a:noFill/>
-          </p:spPr>
-          <p:txBody>
-            <a:bodyPr wrap="square" lIns="0" tIns="0" bIns="0" anchor="ctr">
-              <a:spAutoFit/>
-            </a:bodyPr>
-            <a:lstStyle/>
-            <a:p>
-              <a:pPr algn="l">
-                <a:lnSpc>
-                  <a:spcPct val="120000"/>
-                </a:lnSpc>
-              </a:pPr>
-              <a:r>
-                <a:rPr sz="1600" b="1" i="0">
-                  <a:solidFill>
-                    <a:srgbClr val="14213D"/>
-                  </a:solidFill>
-                  <a:latin typeface="Calibri"/>
-                </a:rPr>
-                <a:t>H1</a:t>
-              </a:r>
-            </a:p>
-          </p:txBody>
-        </p:sp>
-        <p:sp>
-          <p:nvSpPr>
-            <p:cNvPr id="29" name="TextBox 28"/>
-            <p:cNvSpPr txBox="1"/>
-            <p:nvPr/>
-          </p:nvSpPr>
-          <p:spPr>
-            <a:xfrm>
-              <a:off x="1714500" y="3822700"/>
-              <a:ext cx="3302000" cy="558800"/>
-            </a:xfrm>
-            <a:prstGeom prst="rect">
-              <a:avLst/>
-            </a:prstGeom>
-            <a:noFill/>
-          </p:spPr>
-          <p:txBody>
-            <a:bodyPr wrap="square" lIns="0" tIns="0" bIns="0" anchor="ctr">
-              <a:spAutoFit/>
-            </a:bodyPr>
-            <a:lstStyle/>
-            <a:p>
-              <a:pPr algn="l">
-                <a:lnSpc>
-                  <a:spcPct val="120000"/>
-                </a:lnSpc>
-              </a:pPr>
-              <a:r>
-                <a:rPr sz="1400" b="0" i="0">
-                  <a:solidFill>
-                    <a:srgbClr val="14213D"/>
-                  </a:solidFill>
-                  <a:latin typeface="Calibri"/>
-                </a:rPr>
-                <a:t>Mass more accurate than volume</a:t>
-              </a:r>
-            </a:p>
-          </p:txBody>
-        </p:sp>
-        <p:sp>
-          <p:nvSpPr>
-            <p:cNvPr id="30" name="TextBox 29"/>
-            <p:cNvSpPr txBox="1"/>
-            <p:nvPr/>
-          </p:nvSpPr>
-          <p:spPr>
-            <a:xfrm>
-              <a:off x="5080000" y="3822700"/>
-              <a:ext cx="2032000" cy="558800"/>
-            </a:xfrm>
-            <a:prstGeom prst="rect">
-              <a:avLst/>
-            </a:prstGeom>
-            <a:noFill/>
-          </p:spPr>
-          <p:txBody>
-            <a:bodyPr wrap="square" lIns="0" tIns="0" bIns="0" anchor="ctr">
-              <a:spAutoFit/>
-            </a:bodyPr>
-            <a:lstStyle/>
-            <a:p>
-              <a:pPr algn="l">
-                <a:lnSpc>
-                  <a:spcPct val="120000"/>
-                </a:lnSpc>
-              </a:pPr>
-              <a:r>
-                <a:rPr sz="1400" b="1" i="0">
-                  <a:solidFill>
-                    <a:srgbClr val="1F5FA8"/>
-                  </a:solidFill>
-                  <a:latin typeface="Calibri"/>
-                </a:rPr>
-                <a:t>Not yet</a:t>
-              </a:r>
-            </a:p>
-          </p:txBody>
-        </p:sp>
-        <p:sp>
-          <p:nvSpPr>
-            <p:cNvPr id="31" name="TextBox 30"/>
-            <p:cNvSpPr txBox="1"/>
-            <p:nvPr/>
-          </p:nvSpPr>
-          <p:spPr>
-            <a:xfrm>
-              <a:off x="7175500" y="3822700"/>
-              <a:ext cx="4064000" cy="558800"/>
-            </a:xfrm>
-            <a:prstGeom prst="rect">
-              <a:avLst/>
-            </a:prstGeom>
-            <a:noFill/>
-          </p:spPr>
-          <p:txBody>
-            <a:bodyPr wrap="square" lIns="0" tIns="0" bIns="0" anchor="ctr">
-              <a:spAutoFit/>
-            </a:bodyPr>
-            <a:lstStyle/>
-            <a:p>
-              <a:pPr algn="l">
-                <a:lnSpc>
-                  <a:spcPct val="120000"/>
-                </a:lnSpc>
-              </a:pPr>
-              <a:r>
-                <a:rPr sz="1300" b="0" i="0">
-                  <a:solidFill>
-                    <a:srgbClr val="4A5568"/>
-                  </a:solidFill>
-                  <a:latin typeface="Calibri"/>
-                </a:rPr>
-                <a:t>held for physics-only Gaussians (78% vs 88%)</a:t>
-              </a:r>
-            </a:p>
-          </p:txBody>
-        </p:sp>
-      </p:grpSp>
-      <p:grpSp>
-        <p:nvGrpSpPr>
-          <p:cNvPr id="32" name="Group 31"/>
-          <p:cNvGrpSpPr/>
-          <p:nvPr/>
-        </p:nvGrpSpPr>
-        <p:grpSpPr>
-          <a:xfrm>
-            <a:off x="812800" y="4483100"/>
-            <a:ext cx="10566400" cy="558800"/>
-            <a:chOff x="812800" y="4483100"/>
-            <a:chExt cx="10566400" cy="558800"/>
-          </a:xfrm>
-        </p:grpSpPr>
-        <p:sp>
-          <p:nvSpPr>
-            <p:cNvPr id="33" name="Rounded Rectangle 32"/>
-            <p:cNvSpPr/>
-            <p:nvPr/>
-          </p:nvSpPr>
-          <p:spPr>
-            <a:xfrm>
-              <a:off x="812800" y="4483100"/>
-              <a:ext cx="10566400" cy="558800"/>
-            </a:xfrm>
-            <a:prstGeom prst="roundRect">
-              <a:avLst>
-                <a:gd name="adj" fmla="val 13636"/>
-              </a:avLst>
-            </a:prstGeom>
-            <a:solidFill>
-              <a:srgbClr val="FFFFFF"/>
-            </a:solidFill>
-            <a:ln>
-              <a:noFill/>
-            </a:ln>
-            <a:effectLst/>
-          </p:spPr>
-          <p:style>
-            <a:lnRef idx="1">
-              <a:schemeClr val="accent1"/>
-            </a:lnRef>
-            <a:fillRef idx="3">
-              <a:schemeClr val="accent1"/>
-            </a:fillRef>
-            <a:effectRef idx="2">
-              <a:schemeClr val="accent1"/>
-            </a:effectRef>
-            <a:fontRef idx="minor">
-              <a:schemeClr val="lt1"/>
-            </a:fontRef>
-          </p:style>
-          <p:txBody>
-            <a:bodyPr rtlCol="0" anchor="ctr"/>
-            <a:lstStyle/>
-            <a:p>
-              <a:pPr algn="ctr"/>
-            </a:p>
-          </p:txBody>
-        </p:sp>
-        <p:sp>
-          <p:nvSpPr>
-            <p:cNvPr id="34" name="Rectangle 33"/>
-            <p:cNvSpPr/>
-            <p:nvPr/>
-          </p:nvSpPr>
-          <p:spPr>
-            <a:xfrm>
-              <a:off x="812800" y="4483100"/>
-              <a:ext cx="50800" cy="558800"/>
-            </a:xfrm>
-            <a:prstGeom prst="rect">
-              <a:avLst/>
-            </a:prstGeom>
-            <a:solidFill>
-              <a:srgbClr val="1F5FA8"/>
-            </a:solidFill>
-            <a:ln>
-              <a:noFill/>
-            </a:ln>
-            <a:effectLst/>
-          </p:spPr>
-          <p:style>
-            <a:lnRef idx="1">
-              <a:schemeClr val="accent1"/>
-            </a:lnRef>
-            <a:fillRef idx="3">
-              <a:schemeClr val="accent1"/>
-            </a:fillRef>
-            <a:effectRef idx="2">
-              <a:schemeClr val="accent1"/>
-            </a:effectRef>
-            <a:fontRef idx="minor">
-              <a:schemeClr val="lt1"/>
-            </a:fontRef>
-          </p:style>
-          <p:txBody>
-            <a:bodyPr rtlCol="0" anchor="ctr"/>
-            <a:lstStyle/>
-            <a:p>
-              <a:pPr algn="ctr"/>
-            </a:p>
-          </p:txBody>
-        </p:sp>
-        <p:sp>
-          <p:nvSpPr>
-            <p:cNvPr id="35" name="TextBox 34"/>
-            <p:cNvSpPr txBox="1"/>
-            <p:nvPr/>
-          </p:nvSpPr>
-          <p:spPr>
-            <a:xfrm>
-              <a:off x="1066800" y="4483100"/>
-              <a:ext cx="571500" cy="558800"/>
-            </a:xfrm>
-            <a:prstGeom prst="rect">
-              <a:avLst/>
-            </a:prstGeom>
-            <a:noFill/>
-          </p:spPr>
-          <p:txBody>
-            <a:bodyPr wrap="square" lIns="0" tIns="0" bIns="0" anchor="ctr">
-              <a:spAutoFit/>
-            </a:bodyPr>
-            <a:lstStyle/>
-            <a:p>
-              <a:pPr algn="l">
-                <a:lnSpc>
-                  <a:spcPct val="120000"/>
-                </a:lnSpc>
-              </a:pPr>
-              <a:r>
-                <a:rPr sz="1600" b="1" i="0">
-                  <a:solidFill>
-                    <a:srgbClr val="14213D"/>
-                  </a:solidFill>
-                  <a:latin typeface="Calibri"/>
-                </a:rPr>
-                <a:t>H2</a:t>
-              </a:r>
-            </a:p>
-          </p:txBody>
-        </p:sp>
-        <p:sp>
-          <p:nvSpPr>
-            <p:cNvPr id="36" name="TextBox 35"/>
-            <p:cNvSpPr txBox="1"/>
-            <p:nvPr/>
-          </p:nvSpPr>
-          <p:spPr>
-            <a:xfrm>
-              <a:off x="1714500" y="4483100"/>
-              <a:ext cx="3302000" cy="558800"/>
-            </a:xfrm>
-            <a:prstGeom prst="rect">
-              <a:avLst/>
-            </a:prstGeom>
-            <a:noFill/>
-          </p:spPr>
-          <p:txBody>
-            <a:bodyPr wrap="square" lIns="0" tIns="0" bIns="0" anchor="ctr">
-              <a:spAutoFit/>
-            </a:bodyPr>
-            <a:lstStyle/>
-            <a:p>
-              <a:pPr algn="l">
-                <a:lnSpc>
-                  <a:spcPct val="120000"/>
-                </a:lnSpc>
-              </a:pPr>
-              <a:r>
-                <a:rPr sz="1400" b="0" i="0">
-                  <a:solidFill>
-                    <a:srgbClr val="14213D"/>
-                  </a:solidFill>
-                  <a:latin typeface="Calibri"/>
-                </a:rPr>
-                <a:t>Prior lowers volume error</a:t>
-              </a:r>
-            </a:p>
-          </p:txBody>
-        </p:sp>
-        <p:sp>
-          <p:nvSpPr>
-            <p:cNvPr id="37" name="TextBox 36"/>
-            <p:cNvSpPr txBox="1"/>
-            <p:nvPr/>
-          </p:nvSpPr>
-          <p:spPr>
-            <a:xfrm>
-              <a:off x="5080000" y="4483100"/>
-              <a:ext cx="2032000" cy="558800"/>
-            </a:xfrm>
-            <a:prstGeom prst="rect">
-              <a:avLst/>
-            </a:prstGeom>
-            <a:noFill/>
-          </p:spPr>
-          <p:txBody>
-            <a:bodyPr wrap="square" lIns="0" tIns="0" bIns="0" anchor="ctr">
-              <a:spAutoFit/>
-            </a:bodyPr>
-            <a:lstStyle/>
-            <a:p>
-              <a:pPr algn="l">
-                <a:lnSpc>
-                  <a:spcPct val="120000"/>
-                </a:lnSpc>
-              </a:pPr>
-              <a:r>
-                <a:rPr sz="1400" b="1" i="0">
-                  <a:solidFill>
-                    <a:srgbClr val="1F5FA8"/>
-                  </a:solidFill>
-                  <a:latin typeface="Calibri"/>
-                </a:rPr>
-                <a:t>Not yet</a:t>
-              </a:r>
-            </a:p>
-          </p:txBody>
-        </p:sp>
-        <p:sp>
-          <p:nvSpPr>
-            <p:cNvPr id="38" name="TextBox 37"/>
-            <p:cNvSpPr txBox="1"/>
-            <p:nvPr/>
-          </p:nvSpPr>
-          <p:spPr>
-            <a:xfrm>
-              <a:off x="7175500" y="4483100"/>
-              <a:ext cx="4064000" cy="558800"/>
-            </a:xfrm>
-            <a:prstGeom prst="rect">
-              <a:avLst/>
-            </a:prstGeom>
-            <a:noFill/>
-          </p:spPr>
-          <p:txBody>
-            <a:bodyPr wrap="square" lIns="0" tIns="0" bIns="0" anchor="ctr">
-              <a:spAutoFit/>
-            </a:bodyPr>
-            <a:lstStyle/>
-            <a:p>
-              <a:pPr algn="l">
-                <a:lnSpc>
-                  <a:spcPct val="120000"/>
-                </a:lnSpc>
-              </a:pPr>
-              <a:r>
-                <a:rPr sz="1300" b="0" i="0">
-                  <a:solidFill>
-                    <a:srgbClr val="4A5568"/>
-                  </a:solidFill>
-                  <a:latin typeface="Calibri"/>
-                </a:rPr>
-                <a:t>prior alone best (74.5%); with Gaussians 94.6%</a:t>
-              </a:r>
-            </a:p>
-          </p:txBody>
-        </p:sp>
-      </p:grpSp>
-      <p:grpSp>
-        <p:nvGrpSpPr>
-          <p:cNvPr id="39" name="Group 38"/>
-          <p:cNvGrpSpPr/>
-          <p:nvPr/>
-        </p:nvGrpSpPr>
-        <p:grpSpPr>
-          <a:xfrm>
-            <a:off x="812800" y="5143500"/>
-            <a:ext cx="10566400" cy="558800"/>
-            <a:chOff x="812800" y="5143500"/>
-            <a:chExt cx="10566400" cy="558800"/>
-          </a:xfrm>
-        </p:grpSpPr>
-        <p:sp>
-          <p:nvSpPr>
-            <p:cNvPr id="40" name="Rounded Rectangle 39"/>
-            <p:cNvSpPr/>
-            <p:nvPr/>
-          </p:nvSpPr>
-          <p:spPr>
-            <a:xfrm>
-              <a:off x="812800" y="5143500"/>
-              <a:ext cx="10566400" cy="558800"/>
-            </a:xfrm>
-            <a:prstGeom prst="roundRect">
-              <a:avLst>
-                <a:gd name="adj" fmla="val 13636"/>
-              </a:avLst>
-            </a:prstGeom>
-            <a:solidFill>
-              <a:srgbClr val="FFFFFF"/>
-            </a:solidFill>
-            <a:ln>
-              <a:noFill/>
-            </a:ln>
-            <a:effectLst/>
-          </p:spPr>
-          <p:style>
-            <a:lnRef idx="1">
-              <a:schemeClr val="accent1"/>
-            </a:lnRef>
-            <a:fillRef idx="3">
-              <a:schemeClr val="accent1"/>
-            </a:fillRef>
-            <a:effectRef idx="2">
-              <a:schemeClr val="accent1"/>
-            </a:effectRef>
-            <a:fontRef idx="minor">
-              <a:schemeClr val="lt1"/>
-            </a:fontRef>
-          </p:style>
-          <p:txBody>
-            <a:bodyPr rtlCol="0" anchor="ctr"/>
-            <a:lstStyle/>
-            <a:p>
-              <a:pPr algn="ctr"/>
-            </a:p>
-          </p:txBody>
-        </p:sp>
-        <p:sp>
-          <p:nvSpPr>
-            <p:cNvPr id="41" name="Rectangle 40"/>
-            <p:cNvSpPr/>
-            <p:nvPr/>
-          </p:nvSpPr>
-          <p:spPr>
-            <a:xfrm>
-              <a:off x="812800" y="5143500"/>
-              <a:ext cx="50800" cy="558800"/>
-            </a:xfrm>
-            <a:prstGeom prst="rect">
-              <a:avLst/>
-            </a:prstGeom>
-            <a:solidFill>
-              <a:srgbClr val="1F5FA8"/>
-            </a:solidFill>
-            <a:ln>
-              <a:noFill/>
-            </a:ln>
-            <a:effectLst/>
-          </p:spPr>
-          <p:style>
-            <a:lnRef idx="1">
-              <a:schemeClr val="accent1"/>
-            </a:lnRef>
-            <a:fillRef idx="3">
-              <a:schemeClr val="accent1"/>
-            </a:fillRef>
-            <a:effectRef idx="2">
-              <a:schemeClr val="accent1"/>
-            </a:effectRef>
-            <a:fontRef idx="minor">
-              <a:schemeClr val="lt1"/>
-            </a:fontRef>
-          </p:style>
-          <p:txBody>
-            <a:bodyPr rtlCol="0" anchor="ctr"/>
-            <a:lstStyle/>
-            <a:p>
-              <a:pPr algn="ctr"/>
-            </a:p>
-          </p:txBody>
-        </p:sp>
-        <p:sp>
-          <p:nvSpPr>
-            <p:cNvPr id="42" name="TextBox 41"/>
-            <p:cNvSpPr txBox="1"/>
-            <p:nvPr/>
-          </p:nvSpPr>
-          <p:spPr>
-            <a:xfrm>
-              <a:off x="1066800" y="5143500"/>
-              <a:ext cx="571500" cy="558800"/>
-            </a:xfrm>
-            <a:prstGeom prst="rect">
-              <a:avLst/>
-            </a:prstGeom>
-            <a:noFill/>
-          </p:spPr>
-          <p:txBody>
-            <a:bodyPr wrap="square" lIns="0" tIns="0" bIns="0" anchor="ctr">
-              <a:spAutoFit/>
-            </a:bodyPr>
-            <a:lstStyle/>
-            <a:p>
-              <a:pPr algn="l">
-                <a:lnSpc>
-                  <a:spcPct val="120000"/>
-                </a:lnSpc>
-              </a:pPr>
-              <a:r>
-                <a:rPr sz="1600" b="1" i="0">
-                  <a:solidFill>
-                    <a:srgbClr val="14213D"/>
-                  </a:solidFill>
-                  <a:latin typeface="Calibri"/>
-                </a:rPr>
-                <a:t>H4</a:t>
-              </a:r>
-            </a:p>
-          </p:txBody>
-        </p:sp>
-        <p:sp>
-          <p:nvSpPr>
-            <p:cNvPr id="43" name="TextBox 42"/>
-            <p:cNvSpPr txBox="1"/>
-            <p:nvPr/>
-          </p:nvSpPr>
-          <p:spPr>
-            <a:xfrm>
-              <a:off x="1714500" y="5143500"/>
-              <a:ext cx="3302000" cy="558800"/>
-            </a:xfrm>
-            <a:prstGeom prst="rect">
-              <a:avLst/>
-            </a:prstGeom>
-            <a:noFill/>
-          </p:spPr>
-          <p:txBody>
-            <a:bodyPr wrap="square" lIns="0" tIns="0" bIns="0" anchor="ctr">
-              <a:spAutoFit/>
-            </a:bodyPr>
-            <a:lstStyle/>
-            <a:p>
-              <a:pPr algn="l">
-                <a:lnSpc>
-                  <a:spcPct val="120000"/>
-                </a:lnSpc>
-              </a:pPr>
-              <a:r>
-                <a:rPr sz="1400" b="0" i="0">
-                  <a:solidFill>
-                    <a:srgbClr val="14213D"/>
-                  </a:solidFill>
-                  <a:latin typeface="Calibri"/>
-                </a:rPr>
-                <a:t>MDT beats VDT for growth</a:t>
-              </a:r>
-            </a:p>
-          </p:txBody>
-        </p:sp>
-        <p:sp>
-          <p:nvSpPr>
-            <p:cNvPr id="44" name="TextBox 43"/>
-            <p:cNvSpPr txBox="1"/>
-            <p:nvPr/>
-          </p:nvSpPr>
-          <p:spPr>
-            <a:xfrm>
-              <a:off x="5080000" y="5143500"/>
-              <a:ext cx="2032000" cy="558800"/>
-            </a:xfrm>
-            <a:prstGeom prst="rect">
-              <a:avLst/>
-            </a:prstGeom>
-            <a:noFill/>
-          </p:spPr>
-          <p:txBody>
-            <a:bodyPr wrap="square" lIns="0" tIns="0" bIns="0" anchor="ctr">
-              <a:spAutoFit/>
-            </a:bodyPr>
-            <a:lstStyle/>
-            <a:p>
-              <a:pPr algn="l">
-                <a:lnSpc>
-                  <a:spcPct val="120000"/>
-                </a:lnSpc>
-              </a:pPr>
-              <a:r>
-                <a:rPr sz="1400" b="1" i="0">
-                  <a:solidFill>
-                    <a:srgbClr val="1F5FA8"/>
-                  </a:solidFill>
-                  <a:latin typeface="Calibri"/>
-                </a:rPr>
-                <a:t>Not yet</a:t>
-              </a:r>
-            </a:p>
-          </p:txBody>
-        </p:sp>
-        <p:sp>
-          <p:nvSpPr>
-            <p:cNvPr id="45" name="TextBox 44"/>
-            <p:cNvSpPr txBox="1"/>
-            <p:nvPr/>
-          </p:nvSpPr>
-          <p:spPr>
-            <a:xfrm>
-              <a:off x="7175500" y="5143500"/>
-              <a:ext cx="4064000" cy="558800"/>
-            </a:xfrm>
-            <a:prstGeom prst="rect">
-              <a:avLst/>
-            </a:prstGeom>
-            <a:noFill/>
-          </p:spPr>
-          <p:txBody>
-            <a:bodyPr wrap="square" lIns="0" tIns="0" bIns="0" anchor="ctr">
-              <a:spAutoFit/>
-            </a:bodyPr>
-            <a:lstStyle/>
-            <a:p>
-              <a:pPr algn="l">
-                <a:lnSpc>
-                  <a:spcPct val="120000"/>
-                </a:lnSpc>
-              </a:pPr>
-              <a:r>
-                <a:rPr sz="1300" b="0" i="0">
-                  <a:solidFill>
-                    <a:srgbClr val="4A5568"/>
-                  </a:solidFill>
-                  <a:latin typeface="Calibri"/>
-                </a:rPr>
-                <a:t>trend holds for physics-only (50% vs 48%)</a:t>
+                <a:t>median per nodule for all five reconstruction methods</a:t>
               </a:r>
             </a:p>
           </p:txBody>
@@ -13448,7 +12860,7 @@
                             </p:stCondLst>
                             <p:childTnLst>
                               <p:par>
-                                <p:cTn id="6" presetID="2" presetClass="entr" presetSubtype="8" fill="hold" grpId="0" nodeType="clickEffect">
+                                <p:cTn id="6" presetID="42" presetClass="entr" presetSubtype="0" fill="hold" grpId="0" nodeType="clickEffect">
                                   <p:stCondLst>
                                     <p:cond delay="0"/>
                                   </p:stCondLst>
@@ -13486,18 +12898,18 @@
                                           <p:spTgt spid="4"/>
                                         </p:tgtEl>
                                         <p:attrNameLst>
-                                          <p:attrName>ppt_x</p:attrName>
+                                          <p:attrName>ppt_y</p:attrName>
                                         </p:attrNameLst>
                                       </p:cBhvr>
                                       <p:tavLst>
                                         <p:tav tm="0">
                                           <p:val>
-                                            <p:strVal val="#ppt_x-0.08"/>
+                                            <p:strVal val="#ppt_y+0.05"/>
                                           </p:val>
                                         </p:tav>
                                         <p:tav tm="100000">
                                           <p:val>
-                                            <p:strVal val="#ppt_x"/>
+                                            <p:strVal val="#ppt_y"/>
                                           </p:val>
                                         </p:tav>
                                       </p:tavLst>
@@ -13524,7 +12936,7 @@
                             </p:stCondLst>
                             <p:childTnLst>
                               <p:par>
-                                <p:cTn id="12" presetID="2" presetClass="entr" presetSubtype="8" fill="hold" grpId="0" nodeType="clickEffect">
+                                <p:cTn id="12" presetID="42" presetClass="entr" presetSubtype="0" fill="hold" grpId="0" nodeType="clickEffect">
                                   <p:stCondLst>
                                     <p:cond delay="0"/>
                                   </p:stCondLst>
@@ -13537,7 +12949,7 @@
                                           </p:stCondLst>
                                         </p:cTn>
                                         <p:tgtEl>
-                                          <p:spTgt spid="11"/>
+                                          <p:spTgt spid="8"/>
                                         </p:tgtEl>
                                         <p:attrNameLst>
                                           <p:attrName>style.visibility</p:attrName>
@@ -13551,7 +12963,7 @@
                                       <p:cBhvr>
                                         <p:cTn id="10" dur="500"/>
                                         <p:tgtEl>
-                                          <p:spTgt spid="11"/>
+                                          <p:spTgt spid="8"/>
                                         </p:tgtEl>
                                       </p:cBhvr>
                                     </p:animEffect>
@@ -13559,21 +12971,21 @@
                                       <p:cBhvr additive="base">
                                         <p:cTn id="11" dur="500" fill="hold"/>
                                         <p:tgtEl>
-                                          <p:spTgt spid="11"/>
+                                          <p:spTgt spid="8"/>
                                         </p:tgtEl>
                                         <p:attrNameLst>
-                                          <p:attrName>ppt_x</p:attrName>
+                                          <p:attrName>ppt_y</p:attrName>
                                         </p:attrNameLst>
                                       </p:cBhvr>
                                       <p:tavLst>
                                         <p:tav tm="0">
                                           <p:val>
-                                            <p:strVal val="#ppt_x-0.08"/>
+                                            <p:strVal val="#ppt_y+0.05"/>
                                           </p:val>
                                         </p:tav>
                                         <p:tav tm="100000">
                                           <p:val>
-                                            <p:strVal val="#ppt_x"/>
+                                            <p:strVal val="#ppt_y"/>
                                           </p:val>
                                         </p:tav>
                                       </p:tavLst>
@@ -13600,7 +13012,7 @@
                             </p:stCondLst>
                             <p:childTnLst>
                               <p:par>
-                                <p:cTn id="18" presetID="2" presetClass="entr" presetSubtype="8" fill="hold" grpId="0" nodeType="clickEffect">
+                                <p:cTn id="18" presetID="42" presetClass="entr" presetSubtype="0" fill="hold" grpId="0" nodeType="clickEffect">
                                   <p:stCondLst>
                                     <p:cond delay="0"/>
                                   </p:stCondLst>
@@ -13613,7 +13025,7 @@
                                           </p:stCondLst>
                                         </p:cTn>
                                         <p:tgtEl>
-                                          <p:spTgt spid="18"/>
+                                          <p:spTgt spid="12"/>
                                         </p:tgtEl>
                                         <p:attrNameLst>
                                           <p:attrName>style.visibility</p:attrName>
@@ -13627,7 +13039,7 @@
                                       <p:cBhvr>
                                         <p:cTn id="16" dur="500"/>
                                         <p:tgtEl>
-                                          <p:spTgt spid="18"/>
+                                          <p:spTgt spid="12"/>
                                         </p:tgtEl>
                                       </p:cBhvr>
                                     </p:animEffect>
@@ -13635,21 +13047,21 @@
                                       <p:cBhvr additive="base">
                                         <p:cTn id="17" dur="500" fill="hold"/>
                                         <p:tgtEl>
-                                          <p:spTgt spid="18"/>
+                                          <p:spTgt spid="12"/>
                                         </p:tgtEl>
                                         <p:attrNameLst>
-                                          <p:attrName>ppt_x</p:attrName>
+                                          <p:attrName>ppt_y</p:attrName>
                                         </p:attrNameLst>
                                       </p:cBhvr>
                                       <p:tavLst>
                                         <p:tav tm="0">
                                           <p:val>
-                                            <p:strVal val="#ppt_x-0.08"/>
+                                            <p:strVal val="#ppt_y+0.05"/>
                                           </p:val>
                                         </p:tav>
                                         <p:tav tm="100000">
                                           <p:val>
-                                            <p:strVal val="#ppt_x"/>
+                                            <p:strVal val="#ppt_y"/>
                                           </p:val>
                                         </p:tav>
                                       </p:tavLst>
@@ -13676,7 +13088,7 @@
                             </p:stCondLst>
                             <p:childTnLst>
                               <p:par>
-                                <p:cTn id="24" presetID="2" presetClass="entr" presetSubtype="8" fill="hold" grpId="0" nodeType="clickEffect">
+                                <p:cTn id="24" presetID="42" presetClass="entr" presetSubtype="0" fill="hold" grpId="0" nodeType="clickEffect">
                                   <p:stCondLst>
                                     <p:cond delay="0"/>
                                   </p:stCondLst>
@@ -13689,7 +13101,7 @@
                                           </p:stCondLst>
                                         </p:cTn>
                                         <p:tgtEl>
-                                          <p:spTgt spid="25"/>
+                                          <p:spTgt spid="16"/>
                                         </p:tgtEl>
                                         <p:attrNameLst>
                                           <p:attrName>style.visibility</p:attrName>
@@ -13703,7 +13115,7 @@
                                       <p:cBhvr>
                                         <p:cTn id="22" dur="500"/>
                                         <p:tgtEl>
-                                          <p:spTgt spid="25"/>
+                                          <p:spTgt spid="16"/>
                                         </p:tgtEl>
                                       </p:cBhvr>
                                     </p:animEffect>
@@ -13711,21 +13123,21 @@
                                       <p:cBhvr additive="base">
                                         <p:cTn id="23" dur="500" fill="hold"/>
                                         <p:tgtEl>
-                                          <p:spTgt spid="25"/>
+                                          <p:spTgt spid="16"/>
                                         </p:tgtEl>
                                         <p:attrNameLst>
-                                          <p:attrName>ppt_x</p:attrName>
+                                          <p:attrName>ppt_y</p:attrName>
                                         </p:attrNameLst>
                                       </p:cBhvr>
                                       <p:tavLst>
                                         <p:tav tm="0">
                                           <p:val>
-                                            <p:strVal val="#ppt_x-0.08"/>
+                                            <p:strVal val="#ppt_y+0.05"/>
                                           </p:val>
                                         </p:tav>
                                         <p:tav tm="100000">
                                           <p:val>
-                                            <p:strVal val="#ppt_x"/>
+                                            <p:strVal val="#ppt_y"/>
                                           </p:val>
                                         </p:tav>
                                       </p:tavLst>
@@ -13752,7 +13164,7 @@
                             </p:stCondLst>
                             <p:childTnLst>
                               <p:par>
-                                <p:cTn id="30" presetID="2" presetClass="entr" presetSubtype="8" fill="hold" grpId="0" nodeType="clickEffect">
+                                <p:cTn id="30" presetID="42" presetClass="entr" presetSubtype="0" fill="hold" grpId="0" nodeType="clickEffect">
                                   <p:stCondLst>
                                     <p:cond delay="0"/>
                                   </p:stCondLst>
@@ -13765,7 +13177,7 @@
                                           </p:stCondLst>
                                         </p:cTn>
                                         <p:tgtEl>
-                                          <p:spTgt spid="32"/>
+                                          <p:spTgt spid="20"/>
                                         </p:tgtEl>
                                         <p:attrNameLst>
                                           <p:attrName>style.visibility</p:attrName>
@@ -13779,7 +13191,7 @@
                                       <p:cBhvr>
                                         <p:cTn id="28" dur="500"/>
                                         <p:tgtEl>
-                                          <p:spTgt spid="32"/>
+                                          <p:spTgt spid="20"/>
                                         </p:tgtEl>
                                       </p:cBhvr>
                                     </p:animEffect>
@@ -13787,21 +13199,21 @@
                                       <p:cBhvr additive="base">
                                         <p:cTn id="29" dur="500" fill="hold"/>
                                         <p:tgtEl>
-                                          <p:spTgt spid="32"/>
+                                          <p:spTgt spid="20"/>
                                         </p:tgtEl>
                                         <p:attrNameLst>
-                                          <p:attrName>ppt_x</p:attrName>
+                                          <p:attrName>ppt_y</p:attrName>
                                         </p:attrNameLst>
                                       </p:cBhvr>
                                       <p:tavLst>
                                         <p:tav tm="0">
                                           <p:val>
-                                            <p:strVal val="#ppt_x-0.08"/>
+                                            <p:strVal val="#ppt_y+0.05"/>
                                           </p:val>
                                         </p:tav>
                                         <p:tav tm="100000">
                                           <p:val>
-                                            <p:strVal val="#ppt_x"/>
+                                            <p:strVal val="#ppt_y"/>
                                           </p:val>
                                         </p:tav>
                                       </p:tavLst>
@@ -13828,7 +13240,7 @@
                             </p:stCondLst>
                             <p:childTnLst>
                               <p:par>
-                                <p:cTn id="36" presetID="2" presetClass="entr" presetSubtype="8" fill="hold" grpId="0" nodeType="clickEffect">
+                                <p:cTn id="36" presetID="42" presetClass="entr" presetSubtype="0" fill="hold" grpId="0" nodeType="clickEffect">
                                   <p:stCondLst>
                                     <p:cond delay="0"/>
                                   </p:stCondLst>
@@ -13841,7 +13253,7 @@
                                           </p:stCondLst>
                                         </p:cTn>
                                         <p:tgtEl>
-                                          <p:spTgt spid="39"/>
+                                          <p:spTgt spid="24"/>
                                         </p:tgtEl>
                                         <p:attrNameLst>
                                           <p:attrName>style.visibility</p:attrName>
@@ -13855,7 +13267,7 @@
                                       <p:cBhvr>
                                         <p:cTn id="34" dur="500"/>
                                         <p:tgtEl>
-                                          <p:spTgt spid="39"/>
+                                          <p:spTgt spid="24"/>
                                         </p:tgtEl>
                                       </p:cBhvr>
                                     </p:animEffect>
@@ -13863,21 +13275,21 @@
                                       <p:cBhvr additive="base">
                                         <p:cTn id="35" dur="500" fill="hold"/>
                                         <p:tgtEl>
-                                          <p:spTgt spid="39"/>
+                                          <p:spTgt spid="24"/>
                                         </p:tgtEl>
                                         <p:attrNameLst>
-                                          <p:attrName>ppt_x</p:attrName>
+                                          <p:attrName>ppt_y</p:attrName>
                                         </p:attrNameLst>
                                       </p:cBhvr>
                                       <p:tavLst>
                                         <p:tav tm="0">
                                           <p:val>
-                                            <p:strVal val="#ppt_x-0.08"/>
+                                            <p:strVal val="#ppt_y+0.05"/>
                                           </p:val>
                                         </p:tav>
                                         <p:tav tm="100000">
                                           <p:val>
-                                            <p:strVal val="#ppt_x"/>
+                                            <p:strVal val="#ppt_y"/>
                                           </p:val>
                                         </p:tav>
                                       </p:tavLst>
@@ -20269,7 +19681,7 @@
                 </a:solidFill>
                 <a:latin typeface="Georgia"/>
               </a:rPr>
-              <a:t>Six testable hypotheses, each of which could fail</a:t>
+              <a:t>Six objectives for a trustworthy low-dose measurement</a:t>
             </a:r>
           </a:p>
         </p:txBody>
@@ -20293,38 +19705,10 @@
                 <a:tableStyleId>{5C22544A-7EE6-4342-B048-85BDC9FD1C3A}</a:tableStyleId>
               </a:tblPr>
               <a:tblGrid>
-                <a:gridCol w="1054100"/>
                 <a:gridCol w="3175000"/>
-                <a:gridCol w="6337300"/>
+                <a:gridCol w="7391400"/>
               </a:tblGrid>
               <a:tr h="469900">
-                <a:tc>
-                  <a:txBody>
-                    <a:bodyPr wrap="square"/>
-                    <a:lstStyle/>
-                    <a:p>
-                      <a:pPr algn="l">
-                        <a:lnSpc>
-                          <a:spcPct val="120000"/>
-                        </a:lnSpc>
-                      </a:pPr>
-                      <a:r>
-                        <a:rPr sz="1500" b="1" i="0">
-                          <a:solidFill>
-                            <a:srgbClr val="14213D"/>
-                          </a:solidFill>
-                          <a:latin typeface="Calibri"/>
-                        </a:rPr>
-                        <a:t>#</a:t>
-                      </a:r>
-                    </a:p>
-                  </a:txBody>
-                  <a:tcPr anchor="ctr" marL="127000">
-                    <a:solidFill>
-                      <a:srgbClr val="E3ECF7"/>
-                    </a:solidFill>
-                  </a:tcPr>
-                </a:tc>
                 <a:tc>
                   <a:txBody>
                     <a:bodyPr wrap="square"/>
@@ -20369,7 +19753,7 @@
                           </a:solidFill>
                           <a:latin typeface="Calibri"/>
                         </a:rPr>
-                        <a:t>Hypothesis</a:t>
+                        <a:t>Objective</a:t>
                       </a:r>
                     </a:p>
                   </a:txBody>
@@ -20393,33 +19777,6 @@
                       </a:pPr>
                       <a:r>
                         <a:rPr sz="1500" b="1" i="0">
-                          <a:solidFill>
-                            <a:srgbClr val="14213D"/>
-                          </a:solidFill>
-                          <a:latin typeface="Calibri"/>
-                        </a:rPr>
-                        <a:t>H1</a:t>
-                      </a:r>
-                    </a:p>
-                  </a:txBody>
-                  <a:tcPr anchor="ctr" marL="127000">
-                    <a:solidFill>
-                      <a:srgbClr val="FFFFFF"/>
-                    </a:solidFill>
-                  </a:tcPr>
-                </a:tc>
-                <a:tc>
-                  <a:txBody>
-                    <a:bodyPr wrap="square"/>
-                    <a:lstStyle/>
-                    <a:p>
-                      <a:pPr algn="l">
-                        <a:lnSpc>
-                          <a:spcPct val="120000"/>
-                        </a:lnSpc>
-                      </a:pPr>
-                      <a:r>
-                        <a:rPr sz="1500" b="0" i="0">
                           <a:solidFill>
                             <a:srgbClr val="14213D"/>
                           </a:solidFill>
@@ -20452,7 +19809,7 @@
                           </a:solidFill>
                           <a:latin typeface="Calibri"/>
                         </a:rPr>
-                        <a:t>DTS mass error is smaller than volume error</a:t>
+                        <a:t>Measure nodule mass, the quantity DTS captures best</a:t>
                       </a:r>
                     </a:p>
                   </a:txBody>
@@ -20476,33 +19833,6 @@
                       </a:pPr>
                       <a:r>
                         <a:rPr sz="1500" b="1" i="0">
-                          <a:solidFill>
-                            <a:srgbClr val="14213D"/>
-                          </a:solidFill>
-                          <a:latin typeface="Calibri"/>
-                        </a:rPr>
-                        <a:t>H2</a:t>
-                      </a:r>
-                    </a:p>
-                  </a:txBody>
-                  <a:tcPr anchor="ctr" marL="127000">
-                    <a:solidFill>
-                      <a:srgbClr val="F2F4F7"/>
-                    </a:solidFill>
-                  </a:tcPr>
-                </a:tc>
-                <a:tc>
-                  <a:txBody>
-                    <a:bodyPr wrap="square"/>
-                    <a:lstStyle/>
-                    <a:p>
-                      <a:pPr algn="l">
-                        <a:lnSpc>
-                          <a:spcPct val="120000"/>
-                        </a:lnSpc>
-                      </a:pPr>
-                      <a:r>
-                        <a:rPr sz="1500" b="0" i="0">
                           <a:solidFill>
                             <a:srgbClr val="14213D"/>
                           </a:solidFill>
@@ -20535,7 +19865,7 @@
                           </a:solidFill>
                           <a:latin typeface="Calibri"/>
                         </a:rPr>
-                        <a:t>Diffusion + Gaussians beat physics-only volume</a:t>
+                        <a:t>Fill the missing depth with a diffusion model and 3D Gaussians</a:t>
                       </a:r>
                     </a:p>
                   </a:txBody>
@@ -20559,33 +19889,6 @@
                       </a:pPr>
                       <a:r>
                         <a:rPr sz="1500" b="1" i="0">
-                          <a:solidFill>
-                            <a:srgbClr val="14213D"/>
-                          </a:solidFill>
-                          <a:latin typeface="Calibri"/>
-                        </a:rPr>
-                        <a:t>H3</a:t>
-                      </a:r>
-                    </a:p>
-                  </a:txBody>
-                  <a:tcPr anchor="ctr" marL="127000">
-                    <a:solidFill>
-                      <a:srgbClr val="FFFFFF"/>
-                    </a:solidFill>
-                  </a:tcPr>
-                </a:tc>
-                <a:tc>
-                  <a:txBody>
-                    <a:bodyPr wrap="square"/>
-                    <a:lstStyle/>
-                    <a:p>
-                      <a:pPr algn="l">
-                        <a:lnSpc>
-                          <a:spcPct val="120000"/>
-                        </a:lnSpc>
-                      </a:pPr>
-                      <a:r>
-                        <a:rPr sz="1500" b="0" i="0">
                           <a:solidFill>
                             <a:srgbClr val="14213D"/>
                           </a:solidFill>
@@ -20618,7 +19921,7 @@
                           </a:solidFill>
                           <a:latin typeface="Calibri"/>
                         </a:rPr>
-                        <a:t>90% conformal intervals reach their coverage</a:t>
+                        <a:t>Give every number a calibrated 90% interval</a:t>
                       </a:r>
                     </a:p>
                   </a:txBody>
@@ -20642,33 +19945,6 @@
                       </a:pPr>
                       <a:r>
                         <a:rPr sz="1500" b="1" i="0">
-                          <a:solidFill>
-                            <a:srgbClr val="14213D"/>
-                          </a:solidFill>
-                          <a:latin typeface="Calibri"/>
-                        </a:rPr>
-                        <a:t>H4</a:t>
-                      </a:r>
-                    </a:p>
-                  </a:txBody>
-                  <a:tcPr anchor="ctr" marL="127000">
-                    <a:solidFill>
-                      <a:srgbClr val="F2F4F7"/>
-                    </a:solidFill>
-                  </a:tcPr>
-                </a:tc>
-                <a:tc>
-                  <a:txBody>
-                    <a:bodyPr wrap="square"/>
-                    <a:lstStyle/>
-                    <a:p>
-                      <a:pPr algn="l">
-                        <a:lnSpc>
-                          <a:spcPct val="120000"/>
-                        </a:lnSpc>
-                      </a:pPr>
-                      <a:r>
-                        <a:rPr sz="1500" b="0" i="0">
                           <a:solidFill>
                             <a:srgbClr val="14213D"/>
                           </a:solidFill>
@@ -20701,7 +19977,7 @@
                           </a:solidFill>
                           <a:latin typeface="Calibri"/>
                         </a:rPr>
-                        <a:t>Mass doubling time classifies growth better than VDT</a:t>
+                        <a:t>Measure growth as mass and volume doubling time</a:t>
                       </a:r>
                     </a:p>
                   </a:txBody>
@@ -20725,33 +20001,6 @@
                       </a:pPr>
                       <a:r>
                         <a:rPr sz="1500" b="1" i="0">
-                          <a:solidFill>
-                            <a:srgbClr val="14213D"/>
-                          </a:solidFill>
-                          <a:latin typeface="Calibri"/>
-                        </a:rPr>
-                        <a:t>H5</a:t>
-                      </a:r>
-                    </a:p>
-                  </a:txBody>
-                  <a:tcPr anchor="ctr" marL="127000">
-                    <a:solidFill>
-                      <a:srgbClr val="FFFFFF"/>
-                    </a:solidFill>
-                  </a:tcPr>
-                </a:tc>
-                <a:tc>
-                  <a:txBody>
-                    <a:bodyPr wrap="square"/>
-                    <a:lstStyle/>
-                    <a:p>
-                      <a:pPr algn="l">
-                        <a:lnSpc>
-                          <a:spcPct val="120000"/>
-                        </a:lnSpc>
-                      </a:pPr>
-                      <a:r>
-                        <a:rPr sz="1500" b="0" i="0">
                           <a:solidFill>
                             <a:srgbClr val="14213D"/>
                           </a:solidFill>
@@ -20784,7 +20033,7 @@
                           </a:solidFill>
                           <a:latin typeface="Calibri"/>
                         </a:rPr>
-                        <a:t>Calibrated size-category probabilities beat raw votes</a:t>
+                        <a:t>Give calibrated probabilities of the clinical size categories</a:t>
                       </a:r>
                     </a:p>
                   </a:txBody>
@@ -20808,33 +20057,6 @@
                       </a:pPr>
                       <a:r>
                         <a:rPr sz="1500" b="1" i="0">
-                          <a:solidFill>
-                            <a:srgbClr val="14213D"/>
-                          </a:solidFill>
-                          <a:latin typeface="Calibri"/>
-                        </a:rPr>
-                        <a:t>H6</a:t>
-                      </a:r>
-                    </a:p>
-                  </a:txBody>
-                  <a:tcPr anchor="ctr" marL="127000">
-                    <a:solidFill>
-                      <a:srgbClr val="F2F4F7"/>
-                    </a:solidFill>
-                  </a:tcPr>
-                </a:tc>
-                <a:tc>
-                  <a:txBody>
-                    <a:bodyPr wrap="square"/>
-                    <a:lstStyle/>
-                    <a:p>
-                      <a:pPr algn="l">
-                        <a:lnSpc>
-                          <a:spcPct val="120000"/>
-                        </a:lnSpc>
-                      </a:pPr>
-                      <a:r>
-                        <a:rPr sz="1500" b="0" i="0">
                           <a:solidFill>
                             <a:srgbClr val="14213D"/>
                           </a:solidFill>
@@ -20867,7 +20089,7 @@
                           </a:solidFill>
                           <a:latin typeface="Calibri"/>
                         </a:rPr>
-                        <a:t>The prior recovers unseen depth instead of inventing it</a:t>
+                        <a:t>Show what the X-rays saw and what the prior filled in</a:t>
                       </a:r>
                     </a:p>
                   </a:txBody>

--- a/report/MedLift3D_Defense.pptx
+++ b/report/MedLift3D_Defense.pptx
@@ -883,7 +883,7 @@
           <a:lstStyle/>
           <a:p>
             <a:r>
-              <a:t>(1:00) Here is the full pipeline, which I'll build up step by step. One: we simulate the DTS scan, 15 low-dose views, reconstructed with SIRT. Two: the clinician clicks, helped by a learned 3D detector. Three: we reconstruct a 64 millimetre prism, a column through the whole chest around the click. Four: a conditional 3D diffusion model generates eight CT-like hypotheses of that prism, and inside the sampler we keep pulling each one back to agree with the X-rays. Five: we fit 3D Gaussians, which give the mass in closed form. Six: conformal prediction turns the spread into calibrated intervals and size-category probabilities. Seven: we split every result into what the X-rays saw and what the prior filled in. Grey is physics, blue is learned, green is measurement and trust. Everything runs as 18 verified steps.</a:t>
+              <a:t>(1:00) Here is the full methodology in three parts. Part A is physics: we simulate 15 low-dose views, reconstruct the whole chest with SIRT, the detector suggests nodules and the clinician clicks, and we reconstruct a 64 millimetre prism around the click. Part B is the learned prior: a conditional 3D diffusion U-Net with 17.4 million parameters generates eight CT-like samples of the prism, each kept consistent with the X-rays by SIRT steps inside the sampler. Part C is measurement and trust: 3D Gaussians give the mass in closed form, we compute eight measurements per nodule, conformal calibration turns them into a predictive distribution, and the report gives mass and volume with intervals, category probabilities and the seen-versus-unseen explanation.</a:t>
             </a:r>
           </a:p>
         </p:txBody>
@@ -953,7 +953,7 @@
           <a:lstStyle/>
           <a:p>
             <a:r>
-              <a:t>(0:45) No public dataset has chest DTS together with CT ground truth, so we ran a virtual clinical trial. We took 583 real patients from LIDC-IDRI, 1,144 nodules between 4 and 30 millimetres that at least three of four radiologists marked, and simulated 15-view low-dose DTS from each CT with realistic Poisson noise. On the left are the fifteen simulated views of one patient; the red circle marks the nodule. We split by patient, 60/20/20, so no test patient is ever seen in training or calibration. The diffusion prior trained on 2,522 pairs; 150 nodules were measured with every method.</a:t>
+              <a:t>(0:45) No public dataset has chest DTS with CT ground truth, so we ran a virtual clinical trial. We took 583 real patients from LIDC-IDRI with 1,144 nodules of 4 to 30 millimetres marked by at least three of four radiologists, and simulated 15-view low-dose DTS from each CT with Poisson noise. We split by patient: 350 for training, 117 for calibration and 116 for testing, so no test patient is ever seen in training or calibration. The diffusion prior trained on 2,522 pairs.</a:t>
             </a:r>
           </a:p>
         </p:txBody>
@@ -1023,7 +1023,7 @@
           <a:lstStyle/>
           <a:p>
             <a:r>
-              <a:t>(0:55) The core learned component is a conditional 3D diffusion model with 17.4 million parameters. It is conditioned on the blurry DTS reconstruction of the prism and generates CT-like volumes. To stop it from inventing anatomy, we insert SIRT data-consistency steps inside the sampler, so every sample must still reproduce the measured X-rays. Here is a held-out example: left the DTS input, middle our sample, right the real CT; the sample recovers sharp ribs and vessels. It trained for 27,610 steps in six hours, and on held-out patients raised nodule-region PSNR from 11.88 to 15.23 dB. Fit checks showed no memorisation of inputs, but it is still under-trained.</a:t>
+              <a:t>(0:55) The core learned component is a conditional 3D diffusion model with 17.4 million parameters, conditioned on the blurry DTS reconstruction of the prism. To stop it inventing anatomy, SIRT data-consistency steps inside the sampler make every sample reproduce the measured X-rays. On the left, a held-out example: DTS input, our sample, and the real CT. The chart shows image quality on held-out patients: nodule-box PSNR rose from 11.88 to 15.23 dB, and whole-prism PSNR from 10.16 to 13.74 dB. It trained for 27,610 steps on 2,522 pairs.</a:t>
             </a:r>
           </a:p>
         </p:txBody>
@@ -1093,7 +1093,7 @@
           <a:lstStyle/>
           <a:p>
             <a:r>
-              <a:t>(0:50) Each diffusion sample is fitted with anisotropic 3D Gaussians. The nice property is that the integral of a Gaussian is known exactly, so the nodule's mass is a closed-form sum, no voxel counting. For trust, we use split conformal prediction: we measure the errors on 76 calibration nodules from patients never used in training, take the 90 percent quantile, and that becomes the interval for every new nodule. This gives a coverage guarantee without assuming any error distribution. We also produce calibrated probabilities of the clinical size categories, below 100, 100 to 300, and above 300 cubic millimetres.</a:t>
+              <a:t>(0:50) Each diffusion sample is fitted with anisotropic 3D Gaussians. The integral of a Gaussian is known exactly, so the nodule's mass is a closed-form sum, no voxel counting. For trust we use split conformal prediction: we score the errors on 76 calibration nodules from patients never used in training, take the 90 percent quantile, shown by the orange line, and that sets the interval for every new nodule. This gives a coverage guarantee without assuming any error distribution.</a:t>
             </a:r>
           </a:p>
         </p:txBody>
@@ -1583,7 +1583,7 @@
           <a:lstStyle/>
           <a:p>
             <a:r>
-              <a:t>(0:50) Our achievements. The diffusion prior improved nodule-region image quality on held-out patients by 3.35 dB. The learned detector is 17 times better than a training-free detector by the standard CPM score. Our conformal intervals reached 95 percent coverage on new patients, above the 90 percent target, while the raw spread of the samples covered only 28 percent; so calibration is what makes our uncertainty trustworthy. And calibrated probabilities cut the Brier score for "is this nodule at least 100 cubic millimetres" from 0.54 to 0.17, a 68 percent reduction.</a:t>
+              <a:t>(0:50) Our achievements, each against its baseline. The diffusion prior raised nodule PSNR on held-out patients from 11.88 to 15.23 dB. The learned detector reached a CPM of 0.298 against 0.017 for a training-free detector, 17 times better. Conformal intervals covered 95 percent of new patients against a 90 percent target, while the raw sample spread covered only 28 percent. And calibration cut the Brier score for a nodule of at least 100 cubic millimetres from 0.54 to 0.17, a 68 percent reduction.</a:t>
             </a:r>
           </a:p>
         </p:txBody>
@@ -1653,7 +1653,7 @@
           <a:lstStyle/>
           <a:p>
             <a:r>
-              <a:t>(0:50) Uncertainty is where MedLift-3D differs from typical generative imaging. Our conformal intervals kept their guarantee on new patients: 95 to 96 percent coverage for a 90 percent target. The calibrated size-category probabilities are reliable too: at the 100 cubic millimetre threshold the calibration error fell from 0.58 to 0.12, and the most likely category was right 38 percent of the time instead of 26. The next step is width: when a reconstruction finds nothing at the click, that zero measurement widens the intervals a lot, so we will report those cases separately. And one insight for the field: the raw spread of generated samples correlates negatively with the error, so uncalibrated spread is not a safe uncertainty. Calibration is essential.</a:t>
+              <a:t>(0:50) On the left, coverage on the 74 test nodules: the dashed line is the 90 percent target. Raw sample spread covered only 28 percent; our conformal intervals covered 95. On the right, calibration of the clinical size categories at 100 cubic millimetres: the Brier score fell from 0.54 to 0.17, the calibration error from 0.58 to 0.12, and the most likely category was right 38 percent of the time instead of 26. The next step is narrower intervals, by reporting failed reads separately.</a:t>
             </a:r>
           </a:p>
         </p:txBody>
@@ -1723,7 +1723,7 @@
           <a:lstStyle/>
           <a:p>
             <a:r>
-              <a:t>(0:50) Explainability. Using a conjugate-gradient null-space decomposition we split every 3D result into the part the fifteen X-rays actually measured, the seen part, and the part they cannot see, which only the prior can supply. The table of numbers on the right is the result over 30 test nodules. Only 0.3 percent of a nodule's mass is in the unseen part, which confirms our physics argument: the X-rays do measure mass. The prior's unseen content has a positive skill of 0.22 against the real CT, so it recovers missing depth rather than inventing structure. But after Gaussian fitting the skill falls to 0.09, so the Gaussian step throws away much of what the prior recovered. That points directly to a fix.</a:t>
+              <a:t>(0:50) Explainability. A conjugate-gradient null-space split separates every result into what the 15 X-rays measured, the seen part, and what only the prior can supply, the unseen part. Only 0.3 percent of a nodule's mass is unseen, which confirms our physics: the X-rays measure mass. The chart shows skill against the real CT over 30 test nodules. Physics-only reconstruction has no unseen skill. Our diffusion prior reaches 0.22 unseen and 0.88 seen, so it recovers missing depth rather than inventing it. After Gaussian fitting the unseen skill drops to 0.09, which points directly to a fix.</a:t>
             </a:r>
           </a:p>
         </p:txBody>
@@ -1793,7 +1793,7 @@
           <a:lstStyle/>
           <a:p>
             <a:r>
-              <a:t>(0:55) This is our accuracy benchmark: six methods on 74 test nodules, median volume error, lower is better, and a failed reading counts as 100 percent. Volume from tomosynthesis is hard for every method: even the clinical standard, the 2D diameter, is off by 88 percent. Our diffusion prior, in green, had the lowest error of all six methods, 74.5 percent, and the fewest failures, 3 percent. Adding the Gaussian step raised the error to 94.6, so the full pipeline did not yet beat physics-only reconstruction. The learned methods under-estimate size, and we traced exactly why, which I will show shortly. The lesson: sharper images alone are not enough; the measurement step must preserve the nodule.</a:t>
+              <a:t>(0:55) Our accuracy benchmark: six methods on 74 test nodules, median volume error, lower is better, and a failed reading counts as 100 percent. Volume from tomosynthesis is hard for every method: even the clinical 2D diameter is off by 88 percent. Our diffusion prior, in orange, had the lowest error of all six, 74.5 percent, and the fewest failures. Adding the Gaussian step raised the error to 94.6, so the full pipeline did not yet beat physics-only reconstruction. The learned methods under-estimate size, and we traced exactly why.</a:t>
             </a:r>
           </a:p>
         </p:txBody>
@@ -1863,7 +1863,7 @@
           <a:lstStyle/>
           <a:p>
             <a:r>
-              <a:t>(0:40) Beyond the research results, this is a complete engineering system. We processed 583 patients and 1,144 nodules end to end. The pipeline has 18 scripted steps, each ending in automatic PASS/FAIL checks, and 69 unit tests cover the physics, the models and the measurement. The full study ran in about 15 hours on one rented L40S GPU for about 20 US dollars. The diffusion model has 17.4 million parameters and trained in 6 hours. And measuring one nodule with all five reconstruction methods takes a median of 45.5 seconds; the application itself runs on a free Kaggle GPU.</a:t>
+              <a:t>(0:40) Beyond the research results, this is a complete engineering system. We processed 583 patients and 1,144 nodules end to end. The pipeline has 18 scripted steps, each ending in automatic PASS/FAIL checks, and 69 unit tests cover the physics, the models and the measurement. Conformal intervals reached 95 percent coverage on 74 test nodules. The diffusion model has 17.4 million parameters. And measuring one nodule with all five reconstruction methods takes a median of 45.5 seconds; the application itself runs on a free Kaggle GPU.</a:t>
             </a:r>
           </a:p>
         </p:txBody>
@@ -2143,7 +2143,7 @@
           <a:lstStyle/>
           <a:p>
             <a:r>
-              <a:t>(0:45) To conclude. We delivered a physics result, that tomosynthesis measures mass but not depth extent; a diffusion prior kept consistent with the X-rays, with closed-form Gaussian mass; calibrated, decision-level uncertainty; a truth-referenced test of what a generative prior adds; and a verified 18-step pipeline with a working click-to-3D application. The next steps follow directly from our root-cause analysis: a click-conditioned prior, mass read from the projections, failure-aware calibration, and real DTS data with a hospital partner. MedLift-3D shows that low-dose, click-to-3D nodule assessment with calibrated and explainable uncertainty is buildable, for about 22 US dollars. Thank you.</a:t>
+              <a:t>(0:45) To conclude. We delivered a physics result, that tomosynthesis measures mass but not depth extent; a diffusion prior kept consistent with the X-rays, with closed-form Gaussian mass; calibrated, decision-level uncertainty; a truth-referenced test of what a generative prior adds; and a verified 18-step pipeline with a working click-to-3D application. The next steps follow directly from our root-cause analysis: a click-conditioned prior, mass read from the projections, failure-aware calibration, and real DTS data with a hospital partner. MedLift-3D shows that low-dose, click-to-3D nodule assessment with calibrated and explainable uncertainty is buildable. Thank you.</a:t>
             </a:r>
           </a:p>
         </p:txBody>
@@ -2633,7 +2633,7 @@
           <a:lstStyle/>
           <a:p>
             <a:r>
-              <a:t>(0:55) This is the idea our design is built on. We asked what DTS can measure, not just what it can show. If we take moments of each projection: the zeroth moment, the total signal on the detector, equals the nodule's mass in every single view, no matter how deep it is. We verified this numerically to 0.03 percent. But the depth extent, which you need for volume, enters through sine squared of the tube angle; at 15 degrees that is about 15 times worse conditioned. So: mass first, a learned prior for depth that must agree with the X-rays, and calibrated uncertainty on everything.</a:t>
+              <a:t>(0:55) This is the idea our design is built on. Take moments of each projection. The zeroth moment, the total signal on the detector, equals the nodule's mass in every single view, no matter how deep it is; we verified this numerically to 0.03 percent. Depth position enters through sine of the tube angle, about 3.9 times worse, and depth extent, which volume needs, through sine squared, about 15 times worse. So: mass first, a learned prior for depth that must agree with the X-rays, and calibrated uncertainty on everything.</a:t>
             </a:r>
           </a:p>
         </p:txBody>
@@ -10922,7 +10922,7 @@
                   </a:solidFill>
                   <a:latin typeface="Times New Roman"/>
                 </a:rPr>
-                <a:t>training steps in 6 hours on 2,522 pairs</a:t>
+                <a:t>training steps on 2,522 pairs</a:t>
               </a:r>
             </a:p>
           </p:txBody>
@@ -22184,7 +22184,7 @@
                   </a:solidFill>
                   <a:latin typeface="Times New Roman"/>
                 </a:rPr>
-                <a:t>15 h</a:t>
+                <a:t>95%</a:t>
               </a:r>
             </a:p>
             <a:p>
@@ -22203,7 +22203,7 @@
                   </a:solidFill>
                   <a:latin typeface="Times New Roman"/>
                 </a:rPr>
-                <a:t>full study on one rented L40S GPU, about US$20</a:t>
+                <a:t>interval coverage on 74 test nodules</a:t>
               </a:r>
             </a:p>
           </p:txBody>
@@ -22322,7 +22322,7 @@
                   </a:solidFill>
                   <a:latin typeface="Times New Roman"/>
                 </a:rPr>
-                <a:t>parameter 3D diffusion model, trained in 6 hours</a:t>
+                <a:t>parameter conditional 3D diffusion model</a:t>
               </a:r>
             </a:p>
           </p:txBody>
@@ -24460,7 +24460,7 @@
                 </a:solidFill>
                 <a:latin typeface="Times New Roman"/>
               </a:rPr>
-              <a:t>MedLift-3D turns one click on a low-dose chest tomosynthesis image into a 3D lung nodule measurement with calibrated, explainable uncertainty. We showed that DTS measures nodule mass in every view, built an X-ray-consistent diffusion prior with closed-form Gaussian mass, and validated the complete click-to-3D system on 583 patients for about US$22.</a:t>
+              <a:t>MedLift-3D turns one click on a low-dose chest tomosynthesis image into a 3D lung nodule measurement with calibrated, explainable uncertainty. We showed that DTS measures nodule mass in every view, built an X-ray-consistent diffusion prior with closed-form Gaussian mass, and validated the complete click-to-3D system on 583 patients.</a:t>
             </a:r>
           </a:p>
         </p:txBody>
